--- a/public/downloads/praesentation/M17.pptx
+++ b/public/downloads/praesentation/M17.pptx
@@ -18,6 +18,10 @@
     <p:sldId id="266" r:id="rId17"/>
     <p:sldId id="267" r:id="rId18"/>
     <p:sldId id="268" r:id="rId19"/>
+    <p:sldId id="269" r:id="rId20"/>
+    <p:sldId id="270" r:id="rId21"/>
+    <p:sldId id="271" r:id="rId22"/>
+    <p:sldId id="272" r:id="rId23"/>
   </p:sldIdLst>
   <p:sldSz cx="12188952" cy="6858000" type="screen4x3"/>
   <p:notesSz cx="6858000" cy="9144000"/>
@@ -3159,8 +3163,8 @@
         </p:nvSpPr>
         <p:spPr>
           <a:xfrm>
-            <a:off x="365760" y="365760"/>
-            <a:ext cx="11430000" cy="457200"/>
+            <a:off x="365760" y="320040"/>
+            <a:ext cx="11430000" cy="411480"/>
           </a:xfrm>
           <a:prstGeom prst="rect">
             <a:avLst/>
@@ -3175,13 +3179,13 @@
           <a:p>
             <a:pPr algn="l"/>
             <a:r>
-              <a:rPr sz="1100" b="0">
+              <a:rPr sz="1100" b="0" i="0">
                 <a:solidFill>
-                  <a:srgbClr val="FFFFFF"/>
+                  <a:srgbClr val="BBCCEE"/>
                 </a:solidFill>
                 <a:latin typeface="Arial"/>
               </a:rPr>
-              <a:t>M17  ·  K-05 Digital &amp; Technologie  ·  Berater  ·  90 Min.</a:t>
+              <a:t>M17  ·  K-05 Digital &amp; Technologie  ·  Zielstufe: Berater  ·  90 Min.</a:t>
             </a:r>
           </a:p>
         </p:txBody>
@@ -3194,14 +3198,14 @@
         </p:nvSpPr>
         <p:spPr>
           <a:xfrm>
-            <a:off x="365760" y="868680"/>
-            <a:ext cx="7315200" cy="27432"/>
+            <a:off x="365760" y="804672"/>
+            <a:ext cx="8229600" cy="22860"/>
           </a:xfrm>
           <a:prstGeom prst="rect">
             <a:avLst/>
           </a:prstGeom>
           <a:solidFill>
-            <a:srgbClr val="FFFFFF"/>
+            <a:srgbClr val="335CC0"/>
           </a:solidFill>
           <a:ln>
             <a:noFill/>
@@ -3237,8 +3241,8 @@
         </p:nvSpPr>
         <p:spPr>
           <a:xfrm>
-            <a:off x="365760" y="1097280"/>
-            <a:ext cx="11430000" cy="2286000"/>
+            <a:off x="365760" y="1005840"/>
+            <a:ext cx="11430000" cy="2560320"/>
           </a:xfrm>
           <a:prstGeom prst="rect">
             <a:avLst/>
@@ -3253,7 +3257,7 @@
           <a:p>
             <a:pPr algn="l"/>
             <a:r>
-              <a:rPr sz="4000" b="1">
+              <a:rPr sz="4200" b="1" i="0">
                 <a:solidFill>
                   <a:srgbClr val="FFFFFF"/>
                 </a:solidFill>
@@ -3272,8 +3276,8 @@
         </p:nvSpPr>
         <p:spPr>
           <a:xfrm>
-            <a:off x="365760" y="3200400"/>
-            <a:ext cx="9144000" cy="914400"/>
+            <a:off x="365760" y="3383280"/>
+            <a:ext cx="10058400" cy="822960"/>
           </a:xfrm>
           <a:prstGeom prst="rect">
             <a:avLst/>
@@ -3288,7 +3292,7 @@
           <a:p>
             <a:pPr algn="l"/>
             <a:r>
-              <a:rPr sz="2000" b="0">
+              <a:rPr sz="2000" b="0" i="1">
                 <a:solidFill>
                   <a:srgbClr val="CCD6F0"/>
                 </a:solidFill>
@@ -3307,8 +3311,8 @@
         </p:nvSpPr>
         <p:spPr>
           <a:xfrm>
-            <a:off x="365760" y="6217920"/>
-            <a:ext cx="11430000" cy="457200"/>
+            <a:off x="365760" y="6309360"/>
+            <a:ext cx="11430000" cy="365760"/>
           </a:xfrm>
           <a:prstGeom prst="rect">
             <a:avLst/>
@@ -3323,9 +3327,9 @@
           <a:p>
             <a:pPr algn="l"/>
             <a:r>
-              <a:rPr sz="1000" b="0">
+              <a:rPr sz="900" b="0" i="0">
                 <a:solidFill>
-                  <a:srgbClr val="99AACC"/>
+                  <a:srgbClr val="889ACC"/>
                 </a:solidFill>
                 <a:latin typeface="Arial"/>
               </a:rPr>
@@ -3343,6 +3347,623 @@
 </file>
 
 <file path=ppt/slides/slide10.xml><?xml version="1.0" encoding="utf-8"?>
+<p:sld xmlns:a="http://schemas.openxmlformats.org/drawingml/2006/main" xmlns:p="http://schemas.openxmlformats.org/presentationml/2006/main" xmlns:r="http://schemas.openxmlformats.org/officeDocument/2006/relationships">
+  <p:cSld>
+    <p:bg>
+      <p:bgPr>
+        <a:solidFill>
+          <a:srgbClr val="FFFFFF"/>
+        </a:solidFill>
+        <a:effectLst/>
+      </p:bgPr>
+    </p:bg>
+    <p:spTree>
+      <p:nvGrpSpPr>
+        <p:cNvPr id="1" name=""/>
+        <p:cNvGrpSpPr/>
+        <p:nvPr/>
+      </p:nvGrpSpPr>
+      <p:grpSpPr/>
+      <p:sp>
+        <p:nvSpPr>
+          <p:cNvPr id="2" name="Rectangle 1"/>
+          <p:cNvSpPr/>
+          <p:nvPr/>
+        </p:nvSpPr>
+        <p:spPr>
+          <a:xfrm>
+            <a:off x="0" y="0"/>
+            <a:ext cx="73152" cy="6858000"/>
+          </a:xfrm>
+          <a:prstGeom prst="rect">
+            <a:avLst/>
+          </a:prstGeom>
+          <a:solidFill>
+            <a:srgbClr val="003DA5"/>
+          </a:solidFill>
+          <a:ln>
+            <a:noFill/>
+          </a:ln>
+        </p:spPr>
+        <p:style>
+          <a:lnRef idx="1">
+            <a:schemeClr val="accent1"/>
+          </a:lnRef>
+          <a:fillRef idx="3">
+            <a:schemeClr val="accent1"/>
+          </a:fillRef>
+          <a:effectRef idx="2">
+            <a:schemeClr val="accent1"/>
+          </a:effectRef>
+          <a:fontRef idx="minor">
+            <a:schemeClr val="lt1"/>
+          </a:fontRef>
+        </p:style>
+        <p:txBody>
+          <a:bodyPr rtlCol="0" anchor="ctr"/>
+          <a:lstStyle/>
+          <a:p>
+            <a:pPr algn="ctr"/>
+          </a:p>
+        </p:txBody>
+      </p:sp>
+      <p:sp>
+        <p:nvSpPr>
+          <p:cNvPr id="3" name="TextBox 2"/>
+          <p:cNvSpPr txBox="1"/>
+          <p:nvPr/>
+        </p:nvSpPr>
+        <p:spPr>
+          <a:xfrm>
+            <a:off x="228600" y="182880"/>
+            <a:ext cx="11430000" cy="320040"/>
+          </a:xfrm>
+          <a:prstGeom prst="rect">
+            <a:avLst/>
+          </a:prstGeom>
+          <a:noFill/>
+        </p:spPr>
+        <p:txBody>
+          <a:bodyPr wrap="square">
+            <a:spAutoFit/>
+          </a:bodyPr>
+          <a:lstStyle/>
+          <a:p>
+            <a:pPr algn="l"/>
+            <a:r>
+              <a:rPr sz="900" b="0" i="0">
+                <a:solidFill>
+                  <a:srgbClr val="556575"/>
+                </a:solidFill>
+                <a:latin typeface="Arial"/>
+              </a:rPr>
+              <a:t>M17 · 4.2 Effizienter Gesprächsworkflow: Vor – Während – Nach</a:t>
+            </a:r>
+          </a:p>
+        </p:txBody>
+      </p:sp>
+      <p:sp>
+        <p:nvSpPr>
+          <p:cNvPr id="4" name="TextBox 3"/>
+          <p:cNvSpPr txBox="1"/>
+          <p:nvPr/>
+        </p:nvSpPr>
+        <p:spPr>
+          <a:xfrm>
+            <a:off x="365760" y="274320"/>
+            <a:ext cx="11430000" cy="777240"/>
+          </a:xfrm>
+          <a:prstGeom prst="rect">
+            <a:avLst/>
+          </a:prstGeom>
+          <a:noFill/>
+        </p:spPr>
+        <p:txBody>
+          <a:bodyPr wrap="square">
+            <a:spAutoFit/>
+          </a:bodyPr>
+          <a:lstStyle/>
+          <a:p>
+            <a:pPr algn="l"/>
+            <a:r>
+              <a:rPr sz="2200" b="1" i="0">
+                <a:solidFill>
+                  <a:srgbClr val="003DA5"/>
+                </a:solidFill>
+                <a:latin typeface="Arial"/>
+              </a:rPr>
+              <a:t>Phase 3: Nachbereitung (10 Minuten statt 30 Minuten)</a:t>
+            </a:r>
+          </a:p>
+        </p:txBody>
+      </p:sp>
+      <p:sp>
+        <p:nvSpPr>
+          <p:cNvPr id="5" name="Rectangle 4"/>
+          <p:cNvSpPr/>
+          <p:nvPr/>
+        </p:nvSpPr>
+        <p:spPr>
+          <a:xfrm>
+            <a:off x="365760" y="1005840"/>
+            <a:ext cx="11430000" cy="27432"/>
+          </a:xfrm>
+          <a:prstGeom prst="rect">
+            <a:avLst/>
+          </a:prstGeom>
+          <a:solidFill>
+            <a:srgbClr val="D1D5DB"/>
+          </a:solidFill>
+          <a:ln>
+            <a:noFill/>
+          </a:ln>
+        </p:spPr>
+        <p:style>
+          <a:lnRef idx="1">
+            <a:schemeClr val="accent1"/>
+          </a:lnRef>
+          <a:fillRef idx="3">
+            <a:schemeClr val="accent1"/>
+          </a:fillRef>
+          <a:effectRef idx="2">
+            <a:schemeClr val="accent1"/>
+          </a:effectRef>
+          <a:fontRef idx="minor">
+            <a:schemeClr val="lt1"/>
+          </a:fontRef>
+        </p:style>
+        <p:txBody>
+          <a:bodyPr rtlCol="0" anchor="ctr"/>
+          <a:lstStyle/>
+          <a:p>
+            <a:pPr algn="ctr"/>
+          </a:p>
+        </p:txBody>
+      </p:sp>
+      <p:graphicFrame>
+        <p:nvGraphicFramePr>
+          <p:cNvPr id="6" name="Table 5"/>
+          <p:cNvGraphicFramePr>
+            <a:graphicFrameLocks noGrp="1"/>
+          </p:cNvGraphicFramePr>
+          <p:nvPr/>
+        </p:nvGraphicFramePr>
+        <p:xfrm>
+          <a:off x="365760" y="1143000"/>
+          <a:ext cx="11430000" cy="2852928"/>
+        </p:xfrm>
+        <a:graphic>
+          <a:graphicData uri="http://schemas.openxmlformats.org/drawingml/2006/table">
+            <a:tbl>
+              <a:tblPr firstRow="1" bandRow="1">
+                <a:tableStyleId>{5C22544A-7EE6-4342-B048-85BDC9FD1C3A}</a:tableStyleId>
+              </a:tblPr>
+              <a:tblGrid>
+                <a:gridCol w="3810000"/>
+                <a:gridCol w="3810000"/>
+                <a:gridCol w="3810000"/>
+              </a:tblGrid>
+              <a:tr h="475488">
+                <a:tc>
+                  <a:txBody>
+                    <a:bodyPr wrap="square"/>
+                    <a:lstStyle/>
+                    <a:p>
+                      <a:r>
+                        <a:rPr sz="1100" b="1">
+                          <a:solidFill>
+                            <a:srgbClr val="FFFFFF"/>
+                          </a:solidFill>
+                          <a:latin typeface="Arial"/>
+                        </a:rPr>
+                        <a:t>Schritt</a:t>
+                      </a:r>
+                    </a:p>
+                  </a:txBody>
+                  <a:tcPr>
+                    <a:solidFill>
+                      <a:srgbClr val="003DA5"/>
+                    </a:solidFill>
+                  </a:tcPr>
+                </a:tc>
+                <a:tc>
+                  <a:txBody>
+                    <a:bodyPr wrap="square"/>
+                    <a:lstStyle/>
+                    <a:p>
+                      <a:r>
+                        <a:rPr sz="1100" b="1">
+                          <a:solidFill>
+                            <a:srgbClr val="FFFFFF"/>
+                          </a:solidFill>
+                          <a:latin typeface="Arial"/>
+                        </a:rPr>
+                        <a:t>agree-Funktion</a:t>
+                      </a:r>
+                    </a:p>
+                  </a:txBody>
+                  <a:tcPr>
+                    <a:solidFill>
+                      <a:srgbClr val="003DA5"/>
+                    </a:solidFill>
+                  </a:tcPr>
+                </a:tc>
+                <a:tc>
+                  <a:txBody>
+                    <a:bodyPr wrap="square"/>
+                    <a:lstStyle/>
+                    <a:p>
+                      <a:r>
+                        <a:rPr sz="1100" b="1">
+                          <a:solidFill>
+                            <a:srgbClr val="FFFFFF"/>
+                          </a:solidFill>
+                          <a:latin typeface="Arial"/>
+                        </a:rPr>
+                        <a:t>Zeitbedarf</a:t>
+                      </a:r>
+                    </a:p>
+                  </a:txBody>
+                  <a:tcPr>
+                    <a:solidFill>
+                      <a:srgbClr val="003DA5"/>
+                    </a:solidFill>
+                  </a:tcPr>
+                </a:tc>
+              </a:tr>
+              <a:tr h="475488">
+                <a:tc>
+                  <a:txBody>
+                    <a:bodyPr wrap="square"/>
+                    <a:lstStyle/>
+                    <a:p>
+                      <a:r>
+                        <a:rPr sz="1100" b="0">
+                          <a:solidFill>
+                            <a:srgbClr val="1A1A1A"/>
+                          </a:solidFill>
+                          <a:latin typeface="Arial"/>
+                        </a:rPr>
+                        <a:t>Protokoll abschließen und freigeben</a:t>
+                      </a:r>
+                    </a:p>
+                  </a:txBody>
+                  <a:tcPr>
+                    <a:solidFill>
+                      <a:srgbClr val="FFFFFF"/>
+                    </a:solidFill>
+                  </a:tcPr>
+                </a:tc>
+                <a:tc>
+                  <a:txBody>
+                    <a:bodyPr wrap="square"/>
+                    <a:lstStyle/>
+                    <a:p>
+                      <a:r>
+                        <a:rPr sz="1100" b="0">
+                          <a:solidFill>
+                            <a:srgbClr val="1A1A1A"/>
+                          </a:solidFill>
+                          <a:latin typeface="Arial"/>
+                        </a:rPr>
+                        <a:t>UnternehmerDialog → Protokoll finalisieren</a:t>
+                      </a:r>
+                    </a:p>
+                  </a:txBody>
+                  <a:tcPr>
+                    <a:solidFill>
+                      <a:srgbClr val="FFFFFF"/>
+                    </a:solidFill>
+                  </a:tcPr>
+                </a:tc>
+                <a:tc>
+                  <a:txBody>
+                    <a:bodyPr wrap="square"/>
+                    <a:lstStyle/>
+                    <a:p>
+                      <a:r>
+                        <a:rPr sz="1100" b="0">
+                          <a:solidFill>
+                            <a:srgbClr val="1A1A1A"/>
+                          </a:solidFill>
+                          <a:latin typeface="Arial"/>
+                        </a:rPr>
+                        <a:t>3 Min.</a:t>
+                      </a:r>
+                    </a:p>
+                  </a:txBody>
+                  <a:tcPr>
+                    <a:solidFill>
+                      <a:srgbClr val="FFFFFF"/>
+                    </a:solidFill>
+                  </a:tcPr>
+                </a:tc>
+              </a:tr>
+              <a:tr h="475488">
+                <a:tc>
+                  <a:txBody>
+                    <a:bodyPr wrap="square"/>
+                    <a:lstStyle/>
+                    <a:p>
+                      <a:r>
+                        <a:rPr sz="1100" b="0">
+                          <a:solidFill>
+                            <a:srgbClr val="1A1A1A"/>
+                          </a:solidFill>
+                          <a:latin typeface="Arial"/>
+                        </a:rPr>
+                        <a:t>Offene Aktivitäten und Termine bestätigen</a:t>
+                      </a:r>
+                    </a:p>
+                  </a:txBody>
+                  <a:tcPr>
+                    <a:solidFill>
+                      <a:srgbClr val="F4F6FA"/>
+                    </a:solidFill>
+                  </a:tcPr>
+                </a:tc>
+                <a:tc>
+                  <a:txBody>
+                    <a:bodyPr wrap="square"/>
+                    <a:lstStyle/>
+                    <a:p>
+                      <a:r>
+                        <a:rPr sz="1100" b="0">
+                          <a:solidFill>
+                            <a:srgbClr val="1A1A1A"/>
+                          </a:solidFill>
+                          <a:latin typeface="Arial"/>
+                        </a:rPr>
+                        <a:t>CRM → Aufgabenverwaltung</a:t>
+                      </a:r>
+                    </a:p>
+                  </a:txBody>
+                  <a:tcPr>
+                    <a:solidFill>
+                      <a:srgbClr val="F4F6FA"/>
+                    </a:solidFill>
+                  </a:tcPr>
+                </a:tc>
+                <a:tc>
+                  <a:txBody>
+                    <a:bodyPr wrap="square"/>
+                    <a:lstStyle/>
+                    <a:p>
+                      <a:r>
+                        <a:rPr sz="1100" b="0">
+                          <a:solidFill>
+                            <a:srgbClr val="1A1A1A"/>
+                          </a:solidFill>
+                          <a:latin typeface="Arial"/>
+                        </a:rPr>
+                        <a:t>2 Min.</a:t>
+                      </a:r>
+                    </a:p>
+                  </a:txBody>
+                  <a:tcPr>
+                    <a:solidFill>
+                      <a:srgbClr val="F4F6FA"/>
+                    </a:solidFill>
+                  </a:tcPr>
+                </a:tc>
+              </a:tr>
+              <a:tr h="475488">
+                <a:tc>
+                  <a:txBody>
+                    <a:bodyPr wrap="square"/>
+                    <a:lstStyle/>
+                    <a:p>
+                      <a:r>
+                        <a:rPr sz="1100" b="0">
+                          <a:solidFill>
+                            <a:srgbClr val="1A1A1A"/>
+                          </a:solidFill>
+                          <a:latin typeface="Arial"/>
+                        </a:rPr>
+                        <a:t>Verbundpartner-Übergaben anlegen (falls relevant)</a:t>
+                      </a:r>
+                    </a:p>
+                  </a:txBody>
+                  <a:tcPr>
+                    <a:solidFill>
+                      <a:srgbClr val="FFFFFF"/>
+                    </a:solidFill>
+                  </a:tcPr>
+                </a:tc>
+                <a:tc>
+                  <a:txBody>
+                    <a:bodyPr wrap="square"/>
+                    <a:lstStyle/>
+                    <a:p>
+                      <a:r>
+                        <a:rPr sz="1100" b="0">
+                          <a:solidFill>
+                            <a:srgbClr val="1A1A1A"/>
+                          </a:solidFill>
+                          <a:latin typeface="Arial"/>
+                        </a:rPr>
+                        <a:t>Verbund → Übergabeauftrag (oder bankspezifischer Prozess – s. Hinweis unten)</a:t>
+                      </a:r>
+                    </a:p>
+                  </a:txBody>
+                  <a:tcPr>
+                    <a:solidFill>
+                      <a:srgbClr val="FFFFFF"/>
+                    </a:solidFill>
+                  </a:tcPr>
+                </a:tc>
+                <a:tc>
+                  <a:txBody>
+                    <a:bodyPr wrap="square"/>
+                    <a:lstStyle/>
+                    <a:p>
+                      <a:r>
+                        <a:rPr sz="1100" b="0">
+                          <a:solidFill>
+                            <a:srgbClr val="1A1A1A"/>
+                          </a:solidFill>
+                          <a:latin typeface="Arial"/>
+                        </a:rPr>
+                        <a:t>3 Min.</a:t>
+                      </a:r>
+                    </a:p>
+                  </a:txBody>
+                  <a:tcPr>
+                    <a:solidFill>
+                      <a:srgbClr val="FFFFFF"/>
+                    </a:solidFill>
+                  </a:tcPr>
+                </a:tc>
+              </a:tr>
+              <a:tr h="475488">
+                <a:tc>
+                  <a:txBody>
+                    <a:bodyPr wrap="square"/>
+                    <a:lstStyle/>
+                    <a:p>
+                      <a:r>
+                        <a:rPr sz="1100" b="0">
+                          <a:solidFill>
+                            <a:srgbClr val="1A1A1A"/>
+                          </a:solidFill>
+                          <a:latin typeface="Arial"/>
+                        </a:rPr>
+                        <a:t>Frühwarnstatus prüfen (Hinweise aus Gespräch)</a:t>
+                      </a:r>
+                    </a:p>
+                  </a:txBody>
+                  <a:tcPr>
+                    <a:solidFill>
+                      <a:srgbClr val="F4F6FA"/>
+                    </a:solidFill>
+                  </a:tcPr>
+                </a:tc>
+                <a:tc>
+                  <a:txBody>
+                    <a:bodyPr wrap="square"/>
+                    <a:lstStyle/>
+                    <a:p>
+                      <a:r>
+                        <a:rPr sz="1100" b="0">
+                          <a:solidFill>
+                            <a:srgbClr val="1A1A1A"/>
+                          </a:solidFill>
+                          <a:latin typeface="Arial"/>
+                        </a:rPr>
+                        <a:t>Frühwarnung → Bewertung aktualisieren</a:t>
+                      </a:r>
+                    </a:p>
+                  </a:txBody>
+                  <a:tcPr>
+                    <a:solidFill>
+                      <a:srgbClr val="F4F6FA"/>
+                    </a:solidFill>
+                  </a:tcPr>
+                </a:tc>
+                <a:tc>
+                  <a:txBody>
+                    <a:bodyPr wrap="square"/>
+                    <a:lstStyle/>
+                    <a:p>
+                      <a:r>
+                        <a:rPr sz="1100" b="0">
+                          <a:solidFill>
+                            <a:srgbClr val="1A1A1A"/>
+                          </a:solidFill>
+                          <a:latin typeface="Arial"/>
+                        </a:rPr>
+                        <a:t>2 Min.</a:t>
+                      </a:r>
+                    </a:p>
+                  </a:txBody>
+                  <a:tcPr>
+                    <a:solidFill>
+                      <a:srgbClr val="F4F6FA"/>
+                    </a:solidFill>
+                  </a:tcPr>
+                </a:tc>
+              </a:tr>
+              <a:tr h="475488">
+                <a:tc>
+                  <a:txBody>
+                    <a:bodyPr wrap="square"/>
+                    <a:lstStyle/>
+                    <a:p>
+                      <a:r>
+                        <a:rPr sz="1100" b="0">
+                          <a:solidFill>
+                            <a:srgbClr val="1A1A1A"/>
+                          </a:solidFill>
+                          <a:latin typeface="Arial"/>
+                        </a:rPr>
+                        <a:t>Gesamt</a:t>
+                      </a:r>
+                    </a:p>
+                  </a:txBody>
+                  <a:tcPr>
+                    <a:solidFill>
+                      <a:srgbClr val="FFFFFF"/>
+                    </a:solidFill>
+                  </a:tcPr>
+                </a:tc>
+                <a:tc>
+                  <a:txBody>
+                    <a:bodyPr wrap="square"/>
+                    <a:lstStyle/>
+                    <a:p>
+                      <a:r>
+                        <a:rPr sz="1100" b="0">
+                          <a:solidFill>
+                            <a:srgbClr val="1A1A1A"/>
+                          </a:solidFill>
+                          <a:latin typeface="Arial"/>
+                        </a:rPr>
+                        <a:t/>
+                      </a:r>
+                    </a:p>
+                  </a:txBody>
+                  <a:tcPr>
+                    <a:solidFill>
+                      <a:srgbClr val="FFFFFF"/>
+                    </a:solidFill>
+                  </a:tcPr>
+                </a:tc>
+                <a:tc>
+                  <a:txBody>
+                    <a:bodyPr wrap="square"/>
+                    <a:lstStyle/>
+                    <a:p>
+                      <a:r>
+                        <a:rPr sz="1100" b="0">
+                          <a:solidFill>
+                            <a:srgbClr val="1A1A1A"/>
+                          </a:solidFill>
+                          <a:latin typeface="Arial"/>
+                        </a:rPr>
+                        <a:t>~10 Min.</a:t>
+                      </a:r>
+                    </a:p>
+                  </a:txBody>
+                  <a:tcPr>
+                    <a:solidFill>
+                      <a:srgbClr val="FFFFFF"/>
+                    </a:solidFill>
+                  </a:tcPr>
+                </a:tc>
+              </a:tr>
+            </a:tbl>
+          </a:graphicData>
+        </a:graphic>
+      </p:graphicFrame>
+    </p:spTree>
+  </p:cSld>
+  <p:clrMapOvr>
+    <a:masterClrMapping/>
+  </p:clrMapOvr>
+</p:sld>
+</file>
+
+<file path=ppt/slides/slide11.xml><?xml version="1.0" encoding="utf-8"?>
 <p:sld xmlns:a="http://schemas.openxmlformats.org/drawingml/2006/main" xmlns:p="http://schemas.openxmlformats.org/presentationml/2006/main" xmlns:r="http://schemas.openxmlformats.org/officeDocument/2006/relationships">
   <p:cSld>
     <p:bg>
@@ -3411,8 +4032,8 @@
         </p:nvSpPr>
         <p:spPr>
           <a:xfrm>
-            <a:off x="365760" y="2286000"/>
-            <a:ext cx="11430000" cy="1828800"/>
+            <a:off x="365760" y="2011680"/>
+            <a:ext cx="11430000" cy="2011680"/>
           </a:xfrm>
           <a:prstGeom prst="rect">
             <a:avLst/>
@@ -3427,13 +4048,13 @@
           <a:p>
             <a:pPr algn="l"/>
             <a:r>
-              <a:rPr sz="3600" b="1">
+              <a:rPr sz="3600" b="1" i="0">
                 <a:solidFill>
                   <a:srgbClr val="FFFFFF"/>
                 </a:solidFill>
                 <a:latin typeface="Arial"/>
               </a:rPr>
-              <a:t>Arbeitsblatt B: Workflow-Optimierungsplan</a:t>
+              <a:t>Die Bedarfsdimensionen im UnternehmerDialog</a:t>
             </a:r>
           </a:p>
         </p:txBody>
@@ -3446,7 +4067,760 @@
 </p:sld>
 </file>
 
-<file path=ppt/slides/slide11.xml><?xml version="1.0" encoding="utf-8"?>
+<file path=ppt/slides/slide12.xml><?xml version="1.0" encoding="utf-8"?>
+<p:sld xmlns:a="http://schemas.openxmlformats.org/drawingml/2006/main" xmlns:p="http://schemas.openxmlformats.org/presentationml/2006/main" xmlns:r="http://schemas.openxmlformats.org/officeDocument/2006/relationships">
+  <p:cSld>
+    <p:bg>
+      <p:bgPr>
+        <a:solidFill>
+          <a:srgbClr val="FFFFFF"/>
+        </a:solidFill>
+        <a:effectLst/>
+      </p:bgPr>
+    </p:bg>
+    <p:spTree>
+      <p:nvGrpSpPr>
+        <p:cNvPr id="1" name=""/>
+        <p:cNvGrpSpPr/>
+        <p:nvPr/>
+      </p:nvGrpSpPr>
+      <p:grpSpPr/>
+      <p:sp>
+        <p:nvSpPr>
+          <p:cNvPr id="2" name="Rectangle 1"/>
+          <p:cNvSpPr/>
+          <p:nvPr/>
+        </p:nvSpPr>
+        <p:spPr>
+          <a:xfrm>
+            <a:off x="0" y="0"/>
+            <a:ext cx="73152" cy="6858000"/>
+          </a:xfrm>
+          <a:prstGeom prst="rect">
+            <a:avLst/>
+          </a:prstGeom>
+          <a:solidFill>
+            <a:srgbClr val="003DA5"/>
+          </a:solidFill>
+          <a:ln>
+            <a:noFill/>
+          </a:ln>
+        </p:spPr>
+        <p:style>
+          <a:lnRef idx="1">
+            <a:schemeClr val="accent1"/>
+          </a:lnRef>
+          <a:fillRef idx="3">
+            <a:schemeClr val="accent1"/>
+          </a:fillRef>
+          <a:effectRef idx="2">
+            <a:schemeClr val="accent1"/>
+          </a:effectRef>
+          <a:fontRef idx="minor">
+            <a:schemeClr val="lt1"/>
+          </a:fontRef>
+        </p:style>
+        <p:txBody>
+          <a:bodyPr rtlCol="0" anchor="ctr"/>
+          <a:lstStyle/>
+          <a:p>
+            <a:pPr algn="ctr"/>
+          </a:p>
+        </p:txBody>
+      </p:sp>
+      <p:sp>
+        <p:nvSpPr>
+          <p:cNvPr id="3" name="TextBox 2"/>
+          <p:cNvSpPr txBox="1"/>
+          <p:nvPr/>
+        </p:nvSpPr>
+        <p:spPr>
+          <a:xfrm>
+            <a:off x="228600" y="182880"/>
+            <a:ext cx="11430000" cy="320040"/>
+          </a:xfrm>
+          <a:prstGeom prst="rect">
+            <a:avLst/>
+          </a:prstGeom>
+          <a:noFill/>
+        </p:spPr>
+        <p:txBody>
+          <a:bodyPr wrap="square">
+            <a:spAutoFit/>
+          </a:bodyPr>
+          <a:lstStyle/>
+          <a:p>
+            <a:pPr algn="l"/>
+            <a:r>
+              <a:rPr sz="900" b="0" i="0">
+                <a:solidFill>
+                  <a:srgbClr val="556575"/>
+                </a:solidFill>
+                <a:latin typeface="Arial"/>
+              </a:rPr>
+              <a:t>M17 · 4.3 UnternehmerDialog: Mehr als ein Formular</a:t>
+            </a:r>
+          </a:p>
+        </p:txBody>
+      </p:sp>
+      <p:sp>
+        <p:nvSpPr>
+          <p:cNvPr id="4" name="TextBox 3"/>
+          <p:cNvSpPr txBox="1"/>
+          <p:nvPr/>
+        </p:nvSpPr>
+        <p:spPr>
+          <a:xfrm>
+            <a:off x="365760" y="274320"/>
+            <a:ext cx="11430000" cy="777240"/>
+          </a:xfrm>
+          <a:prstGeom prst="rect">
+            <a:avLst/>
+          </a:prstGeom>
+          <a:noFill/>
+        </p:spPr>
+        <p:txBody>
+          <a:bodyPr wrap="square">
+            <a:spAutoFit/>
+          </a:bodyPr>
+          <a:lstStyle/>
+          <a:p>
+            <a:pPr algn="l"/>
+            <a:r>
+              <a:rPr sz="2200" b="1" i="0">
+                <a:solidFill>
+                  <a:srgbClr val="003DA5"/>
+                </a:solidFill>
+                <a:latin typeface="Arial"/>
+              </a:rPr>
+              <a:t>Die Bedarfsdimensionen im UnternehmerDialog</a:t>
+            </a:r>
+          </a:p>
+        </p:txBody>
+      </p:sp>
+      <p:sp>
+        <p:nvSpPr>
+          <p:cNvPr id="5" name="Rectangle 4"/>
+          <p:cNvSpPr/>
+          <p:nvPr/>
+        </p:nvSpPr>
+        <p:spPr>
+          <a:xfrm>
+            <a:off x="365760" y="1005840"/>
+            <a:ext cx="11430000" cy="27432"/>
+          </a:xfrm>
+          <a:prstGeom prst="rect">
+            <a:avLst/>
+          </a:prstGeom>
+          <a:solidFill>
+            <a:srgbClr val="D1D5DB"/>
+          </a:solidFill>
+          <a:ln>
+            <a:noFill/>
+          </a:ln>
+        </p:spPr>
+        <p:style>
+          <a:lnRef idx="1">
+            <a:schemeClr val="accent1"/>
+          </a:lnRef>
+          <a:fillRef idx="3">
+            <a:schemeClr val="accent1"/>
+          </a:fillRef>
+          <a:effectRef idx="2">
+            <a:schemeClr val="accent1"/>
+          </a:effectRef>
+          <a:fontRef idx="minor">
+            <a:schemeClr val="lt1"/>
+          </a:fontRef>
+        </p:style>
+        <p:txBody>
+          <a:bodyPr rtlCol="0" anchor="ctr"/>
+          <a:lstStyle/>
+          <a:p>
+            <a:pPr algn="ctr"/>
+          </a:p>
+        </p:txBody>
+      </p:sp>
+      <p:graphicFrame>
+        <p:nvGraphicFramePr>
+          <p:cNvPr id="6" name="Table 5"/>
+          <p:cNvGraphicFramePr>
+            <a:graphicFrameLocks noGrp="1"/>
+          </p:cNvGraphicFramePr>
+          <p:nvPr/>
+        </p:nvGraphicFramePr>
+        <p:xfrm>
+          <a:off x="365760" y="1143000"/>
+          <a:ext cx="11430000" cy="3803904"/>
+        </p:xfrm>
+        <a:graphic>
+          <a:graphicData uri="http://schemas.openxmlformats.org/drawingml/2006/table">
+            <a:tbl>
+              <a:tblPr firstRow="1" bandRow="1">
+                <a:tableStyleId>{5C22544A-7EE6-4342-B048-85BDC9FD1C3A}</a:tableStyleId>
+              </a:tblPr>
+              <a:tblGrid>
+                <a:gridCol w="3810000"/>
+                <a:gridCol w="3810000"/>
+                <a:gridCol w="3810000"/>
+              </a:tblGrid>
+              <a:tr h="475488">
+                <a:tc>
+                  <a:txBody>
+                    <a:bodyPr wrap="square"/>
+                    <a:lstStyle/>
+                    <a:p>
+                      <a:r>
+                        <a:rPr sz="1100" b="1">
+                          <a:solidFill>
+                            <a:srgbClr val="FFFFFF"/>
+                          </a:solidFill>
+                          <a:latin typeface="Arial"/>
+                        </a:rPr>
+                        <a:t>Dimension</a:t>
+                      </a:r>
+                    </a:p>
+                  </a:txBody>
+                  <a:tcPr>
+                    <a:solidFill>
+                      <a:srgbClr val="003DA5"/>
+                    </a:solidFill>
+                  </a:tcPr>
+                </a:tc>
+                <a:tc>
+                  <a:txBody>
+                    <a:bodyPr wrap="square"/>
+                    <a:lstStyle/>
+                    <a:p>
+                      <a:r>
+                        <a:rPr sz="1100" b="1">
+                          <a:solidFill>
+                            <a:srgbClr val="FFFFFF"/>
+                          </a:solidFill>
+                          <a:latin typeface="Arial"/>
+                        </a:rPr>
+                        <a:t>Typische Fragefelder</a:t>
+                      </a:r>
+                    </a:p>
+                  </a:txBody>
+                  <a:tcPr>
+                    <a:solidFill>
+                      <a:srgbClr val="003DA5"/>
+                    </a:solidFill>
+                  </a:tcPr>
+                </a:tc>
+                <a:tc>
+                  <a:txBody>
+                    <a:bodyPr wrap="square"/>
+                    <a:lstStyle/>
+                    <a:p>
+                      <a:r>
+                        <a:rPr sz="1100" b="1">
+                          <a:solidFill>
+                            <a:srgbClr val="FFFFFF"/>
+                          </a:solidFill>
+                          <a:latin typeface="Arial"/>
+                        </a:rPr>
+                        <a:t>Verbundrelevanz</a:t>
+                      </a:r>
+                    </a:p>
+                  </a:txBody>
+                  <a:tcPr>
+                    <a:solidFill>
+                      <a:srgbClr val="003DA5"/>
+                    </a:solidFill>
+                  </a:tcPr>
+                </a:tc>
+              </a:tr>
+              <a:tr h="475488">
+                <a:tc>
+                  <a:txBody>
+                    <a:bodyPr wrap="square"/>
+                    <a:lstStyle/>
+                    <a:p>
+                      <a:r>
+                        <a:rPr sz="1100" b="0">
+                          <a:solidFill>
+                            <a:srgbClr val="1A1A1A"/>
+                          </a:solidFill>
+                          <a:latin typeface="Arial"/>
+                        </a:rPr>
+                        <a:t>Liquidität &amp; Finanzierung</a:t>
+                      </a:r>
+                    </a:p>
+                  </a:txBody>
+                  <a:tcPr>
+                    <a:solidFill>
+                      <a:srgbClr val="FFFFFF"/>
+                    </a:solidFill>
+                  </a:tcPr>
+                </a:tc>
+                <a:tc>
+                  <a:txBody>
+                    <a:bodyPr wrap="square"/>
+                    <a:lstStyle/>
+                    <a:p>
+                      <a:r>
+                        <a:rPr sz="1100" b="0">
+                          <a:solidFill>
+                            <a:srgbClr val="1A1A1A"/>
+                          </a:solidFill>
+                          <a:latin typeface="Arial"/>
+                        </a:rPr>
+                        <a:t>Investitionsplanung, Fördermittel, Liquiditätsreserve</a:t>
+                      </a:r>
+                    </a:p>
+                  </a:txBody>
+                  <a:tcPr>
+                    <a:solidFill>
+                      <a:srgbClr val="FFFFFF"/>
+                    </a:solidFill>
+                  </a:tcPr>
+                </a:tc>
+                <a:tc>
+                  <a:txBody>
+                    <a:bodyPr wrap="square"/>
+                    <a:lstStyle/>
+                    <a:p>
+                      <a:r>
+                        <a:rPr sz="1100" b="0">
+                          <a:solidFill>
+                            <a:srgbClr val="1A1A1A"/>
+                          </a:solidFill>
+                          <a:latin typeface="Arial"/>
+                        </a:rPr>
+                        <a:t>Langfristfinanzierung, KfW</a:t>
+                      </a:r>
+                    </a:p>
+                  </a:txBody>
+                  <a:tcPr>
+                    <a:solidFill>
+                      <a:srgbClr val="FFFFFF"/>
+                    </a:solidFill>
+                  </a:tcPr>
+                </a:tc>
+              </a:tr>
+              <a:tr h="475488">
+                <a:tc>
+                  <a:txBody>
+                    <a:bodyPr wrap="square"/>
+                    <a:lstStyle/>
+                    <a:p>
+                      <a:r>
+                        <a:rPr sz="1100" b="0">
+                          <a:solidFill>
+                            <a:srgbClr val="1A1A1A"/>
+                          </a:solidFill>
+                          <a:latin typeface="Arial"/>
+                        </a:rPr>
+                        <a:t>Unternehmen absichern</a:t>
+                      </a:r>
+                    </a:p>
+                  </a:txBody>
+                  <a:tcPr>
+                    <a:solidFill>
+                      <a:srgbClr val="F4F6FA"/>
+                    </a:solidFill>
+                  </a:tcPr>
+                </a:tc>
+                <a:tc>
+                  <a:txBody>
+                    <a:bodyPr wrap="square"/>
+                    <a:lstStyle/>
+                    <a:p>
+                      <a:r>
+                        <a:rPr sz="1100" b="0">
+                          <a:solidFill>
+                            <a:srgbClr val="1A1A1A"/>
+                          </a:solidFill>
+                          <a:latin typeface="Arial"/>
+                        </a:rPr>
+                        <a:t>Betriebsunterbrechung, Schlüsselperson, D&amp;O</a:t>
+                      </a:r>
+                    </a:p>
+                  </a:txBody>
+                  <a:tcPr>
+                    <a:solidFill>
+                      <a:srgbClr val="F4F6FA"/>
+                    </a:solidFill>
+                  </a:tcPr>
+                </a:tc>
+                <a:tc>
+                  <a:txBody>
+                    <a:bodyPr wrap="square"/>
+                    <a:lstStyle/>
+                    <a:p>
+                      <a:r>
+                        <a:rPr sz="1100" b="0">
+                          <a:solidFill>
+                            <a:srgbClr val="1A1A1A"/>
+                          </a:solidFill>
+                          <a:latin typeface="Arial"/>
+                        </a:rPr>
+                        <a:t>R+V Versicherung</a:t>
+                      </a:r>
+                    </a:p>
+                  </a:txBody>
+                  <a:tcPr>
+                    <a:solidFill>
+                      <a:srgbClr val="F4F6FA"/>
+                    </a:solidFill>
+                  </a:tcPr>
+                </a:tc>
+              </a:tr>
+              <a:tr h="475488">
+                <a:tc>
+                  <a:txBody>
+                    <a:bodyPr wrap="square"/>
+                    <a:lstStyle/>
+                    <a:p>
+                      <a:r>
+                        <a:rPr sz="1100" b="0">
+                          <a:solidFill>
+                            <a:srgbClr val="1A1A1A"/>
+                          </a:solidFill>
+                          <a:latin typeface="Arial"/>
+                        </a:rPr>
+                        <a:t>Kapitalanlage</a:t>
+                      </a:r>
+                    </a:p>
+                  </a:txBody>
+                  <a:tcPr>
+                    <a:solidFill>
+                      <a:srgbClr val="FFFFFF"/>
+                    </a:solidFill>
+                  </a:tcPr>
+                </a:tc>
+                <a:tc>
+                  <a:txBody>
+                    <a:bodyPr wrap="square"/>
+                    <a:lstStyle/>
+                    <a:p>
+                      <a:r>
+                        <a:rPr sz="1100" b="0">
+                          <a:solidFill>
+                            <a:srgbClr val="1A1A1A"/>
+                          </a:solidFill>
+                          <a:latin typeface="Arial"/>
+                        </a:rPr>
+                        <a:t>Betriebliche Rücklagen, Altersvorsorge Gesellschafter</a:t>
+                      </a:r>
+                    </a:p>
+                  </a:txBody>
+                  <a:tcPr>
+                    <a:solidFill>
+                      <a:srgbClr val="FFFFFF"/>
+                    </a:solidFill>
+                  </a:tcPr>
+                </a:tc>
+                <a:tc>
+                  <a:txBody>
+                    <a:bodyPr wrap="square"/>
+                    <a:lstStyle/>
+                    <a:p>
+                      <a:r>
+                        <a:rPr sz="1100" b="0">
+                          <a:solidFill>
+                            <a:srgbClr val="1A1A1A"/>
+                          </a:solidFill>
+                          <a:latin typeface="Arial"/>
+                        </a:rPr>
+                        <a:t>Union Investment</a:t>
+                      </a:r>
+                    </a:p>
+                  </a:txBody>
+                  <a:tcPr>
+                    <a:solidFill>
+                      <a:srgbClr val="FFFFFF"/>
+                    </a:solidFill>
+                  </a:tcPr>
+                </a:tc>
+              </a:tr>
+              <a:tr h="475488">
+                <a:tc>
+                  <a:txBody>
+                    <a:bodyPr wrap="square"/>
+                    <a:lstStyle/>
+                    <a:p>
+                      <a:r>
+                        <a:rPr sz="1100" b="0">
+                          <a:solidFill>
+                            <a:srgbClr val="1A1A1A"/>
+                          </a:solidFill>
+                          <a:latin typeface="Arial"/>
+                        </a:rPr>
+                        <a:t>Zahlungsverkehr</a:t>
+                      </a:r>
+                    </a:p>
+                  </a:txBody>
+                  <a:tcPr>
+                    <a:solidFill>
+                      <a:srgbClr val="F4F6FA"/>
+                    </a:solidFill>
+                  </a:tcPr>
+                </a:tc>
+                <a:tc>
+                  <a:txBody>
+                    <a:bodyPr wrap="square"/>
+                    <a:lstStyle/>
+                    <a:p>
+                      <a:r>
+                        <a:rPr sz="1100" b="0">
+                          <a:solidFill>
+                            <a:srgbClr val="1A1A1A"/>
+                          </a:solidFill>
+                          <a:latin typeface="Arial"/>
+                        </a:rPr>
+                        <a:t>Inlands-ZV, Auslands-ZV, Kartenzahlung</a:t>
+                      </a:r>
+                    </a:p>
+                  </a:txBody>
+                  <a:tcPr>
+                    <a:solidFill>
+                      <a:srgbClr val="F4F6FA"/>
+                    </a:solidFill>
+                  </a:tcPr>
+                </a:tc>
+                <a:tc>
+                  <a:txBody>
+                    <a:bodyPr wrap="square"/>
+                    <a:lstStyle/>
+                    <a:p>
+                      <a:r>
+                        <a:rPr sz="1100" b="0">
+                          <a:solidFill>
+                            <a:srgbClr val="1A1A1A"/>
+                          </a:solidFill>
+                          <a:latin typeface="Arial"/>
+                        </a:rPr>
+                        <a:t>DZ BANK, VR-NetWorld</a:t>
+                      </a:r>
+                    </a:p>
+                  </a:txBody>
+                  <a:tcPr>
+                    <a:solidFill>
+                      <a:srgbClr val="F4F6FA"/>
+                    </a:solidFill>
+                  </a:tcPr>
+                </a:tc>
+              </a:tr>
+              <a:tr h="475488">
+                <a:tc>
+                  <a:txBody>
+                    <a:bodyPr wrap="square"/>
+                    <a:lstStyle/>
+                    <a:p>
+                      <a:r>
+                        <a:rPr sz="1100" b="0">
+                          <a:solidFill>
+                            <a:srgbClr val="1A1A1A"/>
+                          </a:solidFill>
+                          <a:latin typeface="Arial"/>
+                        </a:rPr>
+                        <a:t>Nachfolge &amp; Unternehmertum</a:t>
+                      </a:r>
+                    </a:p>
+                  </a:txBody>
+                  <a:tcPr>
+                    <a:solidFill>
+                      <a:srgbClr val="FFFFFF"/>
+                    </a:solidFill>
+                  </a:tcPr>
+                </a:tc>
+                <a:tc>
+                  <a:txBody>
+                    <a:bodyPr wrap="square"/>
+                    <a:lstStyle/>
+                    <a:p>
+                      <a:r>
+                        <a:rPr sz="1100" b="0">
+                          <a:solidFill>
+                            <a:srgbClr val="1A1A1A"/>
+                          </a:solidFill>
+                          <a:latin typeface="Arial"/>
+                        </a:rPr>
+                        <a:t>Nachfolgeplanung, Testamentsvollstreckung</a:t>
+                      </a:r>
+                    </a:p>
+                  </a:txBody>
+                  <a:tcPr>
+                    <a:solidFill>
+                      <a:srgbClr val="FFFFFF"/>
+                    </a:solidFill>
+                  </a:tcPr>
+                </a:tc>
+                <a:tc>
+                  <a:txBody>
+                    <a:bodyPr wrap="square"/>
+                    <a:lstStyle/>
+                    <a:p>
+                      <a:r>
+                        <a:rPr sz="1100" b="0">
+                          <a:solidFill>
+                            <a:srgbClr val="1A1A1A"/>
+                          </a:solidFill>
+                          <a:latin typeface="Arial"/>
+                        </a:rPr>
+                        <a:t>Schwäbisch Hall, Notare</a:t>
+                      </a:r>
+                    </a:p>
+                  </a:txBody>
+                  <a:tcPr>
+                    <a:solidFill>
+                      <a:srgbClr val="FFFFFF"/>
+                    </a:solidFill>
+                  </a:tcPr>
+                </a:tc>
+              </a:tr>
+              <a:tr h="475488">
+                <a:tc>
+                  <a:txBody>
+                    <a:bodyPr wrap="square"/>
+                    <a:lstStyle/>
+                    <a:p>
+                      <a:r>
+                        <a:rPr sz="1100" b="0">
+                          <a:solidFill>
+                            <a:srgbClr val="1A1A1A"/>
+                          </a:solidFill>
+                          <a:latin typeface="Arial"/>
+                        </a:rPr>
+                        <a:t>Mitarbeiter &amp; Personalwesen</a:t>
+                      </a:r>
+                    </a:p>
+                  </a:txBody>
+                  <a:tcPr>
+                    <a:solidFill>
+                      <a:srgbClr val="F4F6FA"/>
+                    </a:solidFill>
+                  </a:tcPr>
+                </a:tc>
+                <a:tc>
+                  <a:txBody>
+                    <a:bodyPr wrap="square"/>
+                    <a:lstStyle/>
+                    <a:p>
+                      <a:r>
+                        <a:rPr sz="1100" b="0">
+                          <a:solidFill>
+                            <a:srgbClr val="1A1A1A"/>
+                          </a:solidFill>
+                          <a:latin typeface="Arial"/>
+                        </a:rPr>
+                        <a:t>bAV (Direktversicherung, Pensionszusage), Gruppenunfallversicherung</a:t>
+                      </a:r>
+                    </a:p>
+                  </a:txBody>
+                  <a:tcPr>
+                    <a:solidFill>
+                      <a:srgbClr val="F4F6FA"/>
+                    </a:solidFill>
+                  </a:tcPr>
+                </a:tc>
+                <a:tc>
+                  <a:txBody>
+                    <a:bodyPr wrap="square"/>
+                    <a:lstStyle/>
+                    <a:p>
+                      <a:r>
+                        <a:rPr sz="1100" b="0">
+                          <a:solidFill>
+                            <a:srgbClr val="1A1A1A"/>
+                          </a:solidFill>
+                          <a:latin typeface="Arial"/>
+                        </a:rPr>
+                        <a:t>R+V (versicherungsgebunden), Union Investment (fondsgebunden)</a:t>
+                      </a:r>
+                    </a:p>
+                  </a:txBody>
+                  <a:tcPr>
+                    <a:solidFill>
+                      <a:srgbClr val="F4F6FA"/>
+                    </a:solidFill>
+                  </a:tcPr>
+                </a:tc>
+              </a:tr>
+              <a:tr h="475488">
+                <a:tc>
+                  <a:txBody>
+                    <a:bodyPr wrap="square"/>
+                    <a:lstStyle/>
+                    <a:p>
+                      <a:r>
+                        <a:rPr sz="1100" b="0">
+                          <a:solidFill>
+                            <a:srgbClr val="1A1A1A"/>
+                          </a:solidFill>
+                          <a:latin typeface="Arial"/>
+                        </a:rPr>
+                        <a:t>Privat &amp; Familie</a:t>
+                      </a:r>
+                    </a:p>
+                  </a:txBody>
+                  <a:tcPr>
+                    <a:solidFill>
+                      <a:srgbClr val="FFFFFF"/>
+                    </a:solidFill>
+                  </a:tcPr>
+                </a:tc>
+                <a:tc>
+                  <a:txBody>
+                    <a:bodyPr wrap="square"/>
+                    <a:lstStyle/>
+                    <a:p>
+                      <a:r>
+                        <a:rPr sz="1100" b="0">
+                          <a:solidFill>
+                            <a:srgbClr val="1A1A1A"/>
+                          </a:solidFill>
+                          <a:latin typeface="Arial"/>
+                        </a:rPr>
+                        <a:t>Eigenheim Gesellschafter, private Altersvorsorge</a:t>
+                      </a:r>
+                    </a:p>
+                  </a:txBody>
+                  <a:tcPr>
+                    <a:solidFill>
+                      <a:srgbClr val="FFFFFF"/>
+                    </a:solidFill>
+                  </a:tcPr>
+                </a:tc>
+                <a:tc>
+                  <a:txBody>
+                    <a:bodyPr wrap="square"/>
+                    <a:lstStyle/>
+                    <a:p>
+                      <a:r>
+                        <a:rPr sz="1100" b="0">
+                          <a:solidFill>
+                            <a:srgbClr val="1A1A1A"/>
+                          </a:solidFill>
+                          <a:latin typeface="Arial"/>
+                        </a:rPr>
+                        <a:t>Schwäbisch Hall, R+V</a:t>
+                      </a:r>
+                    </a:p>
+                  </a:txBody>
+                  <a:tcPr>
+                    <a:solidFill>
+                      <a:srgbClr val="FFFFFF"/>
+                    </a:solidFill>
+                  </a:tcPr>
+                </a:tc>
+              </a:tr>
+            </a:tbl>
+          </a:graphicData>
+        </a:graphic>
+      </p:graphicFrame>
+    </p:spTree>
+  </p:cSld>
+  <p:clrMapOvr>
+    <a:masterClrMapping/>
+  </p:clrMapOvr>
+</p:sld>
+</file>
+
+<file path=ppt/slides/slide13.xml><?xml version="1.0" encoding="utf-8"?>
 <p:sld xmlns:a="http://schemas.openxmlformats.org/drawingml/2006/main" xmlns:p="http://schemas.openxmlformats.org/presentationml/2006/main" xmlns:r="http://schemas.openxmlformats.org/officeDocument/2006/relationships">
   <p:cSld>
     <p:bg>
@@ -3515,8 +4889,8 @@
         </p:nvSpPr>
         <p:spPr>
           <a:xfrm>
-            <a:off x="365760" y="2286000"/>
-            <a:ext cx="11430000" cy="1828800"/>
+            <a:off x="365760" y="2011680"/>
+            <a:ext cx="11430000" cy="2011680"/>
           </a:xfrm>
           <a:prstGeom prst="rect">
             <a:avLst/>
@@ -3531,13 +4905,13 @@
           <a:p>
             <a:pPr algn="l"/>
             <a:r>
-              <a:rPr sz="3600" b="1">
+              <a:rPr sz="3600" b="1" i="0">
                 <a:solidFill>
                   <a:srgbClr val="FFFFFF"/>
                 </a:solidFill>
                 <a:latin typeface="Arial"/>
               </a:rPr>
-              <a:t>Praxismaterialien (Pflicht)</a:t>
+              <a:t>Dokumentationsstandards</a:t>
             </a:r>
           </a:p>
         </p:txBody>
@@ -3550,7 +4924,237 @@
 </p:sld>
 </file>
 
-<file path=ppt/slides/slide12.xml><?xml version="1.0" encoding="utf-8"?>
+<file path=ppt/slides/slide14.xml><?xml version="1.0" encoding="utf-8"?>
+<p:sld xmlns:a="http://schemas.openxmlformats.org/drawingml/2006/main" xmlns:p="http://schemas.openxmlformats.org/presentationml/2006/main" xmlns:r="http://schemas.openxmlformats.org/officeDocument/2006/relationships">
+  <p:cSld>
+    <p:bg>
+      <p:bgPr>
+        <a:solidFill>
+          <a:srgbClr val="FFFFFF"/>
+        </a:solidFill>
+        <a:effectLst/>
+      </p:bgPr>
+    </p:bg>
+    <p:spTree>
+      <p:nvGrpSpPr>
+        <p:cNvPr id="1" name=""/>
+        <p:cNvGrpSpPr/>
+        <p:nvPr/>
+      </p:nvGrpSpPr>
+      <p:grpSpPr/>
+      <p:sp>
+        <p:nvSpPr>
+          <p:cNvPr id="2" name="Rectangle 1"/>
+          <p:cNvSpPr/>
+          <p:nvPr/>
+        </p:nvSpPr>
+        <p:spPr>
+          <a:xfrm>
+            <a:off x="0" y="0"/>
+            <a:ext cx="73152" cy="6858000"/>
+          </a:xfrm>
+          <a:prstGeom prst="rect">
+            <a:avLst/>
+          </a:prstGeom>
+          <a:solidFill>
+            <a:srgbClr val="003DA5"/>
+          </a:solidFill>
+          <a:ln>
+            <a:noFill/>
+          </a:ln>
+        </p:spPr>
+        <p:style>
+          <a:lnRef idx="1">
+            <a:schemeClr val="accent1"/>
+          </a:lnRef>
+          <a:fillRef idx="3">
+            <a:schemeClr val="accent1"/>
+          </a:fillRef>
+          <a:effectRef idx="2">
+            <a:schemeClr val="accent1"/>
+          </a:effectRef>
+          <a:fontRef idx="minor">
+            <a:schemeClr val="lt1"/>
+          </a:fontRef>
+        </p:style>
+        <p:txBody>
+          <a:bodyPr rtlCol="0" anchor="ctr"/>
+          <a:lstStyle/>
+          <a:p>
+            <a:pPr algn="ctr"/>
+          </a:p>
+        </p:txBody>
+      </p:sp>
+      <p:sp>
+        <p:nvSpPr>
+          <p:cNvPr id="3" name="TextBox 2"/>
+          <p:cNvSpPr txBox="1"/>
+          <p:nvPr/>
+        </p:nvSpPr>
+        <p:spPr>
+          <a:xfrm>
+            <a:off x="228600" y="182880"/>
+            <a:ext cx="11430000" cy="320040"/>
+          </a:xfrm>
+          <a:prstGeom prst="rect">
+            <a:avLst/>
+          </a:prstGeom>
+          <a:noFill/>
+        </p:spPr>
+        <p:txBody>
+          <a:bodyPr wrap="square">
+            <a:spAutoFit/>
+          </a:bodyPr>
+          <a:lstStyle/>
+          <a:p>
+            <a:pPr algn="l"/>
+            <a:r>
+              <a:rPr sz="900" b="0" i="0">
+                <a:solidFill>
+                  <a:srgbClr val="556575"/>
+                </a:solidFill>
+                <a:latin typeface="Arial"/>
+              </a:rPr>
+              <a:t>M17 · 4.3 UnternehmerDialog: Mehr als ein Formular</a:t>
+            </a:r>
+          </a:p>
+        </p:txBody>
+      </p:sp>
+      <p:sp>
+        <p:nvSpPr>
+          <p:cNvPr id="4" name="TextBox 3"/>
+          <p:cNvSpPr txBox="1"/>
+          <p:nvPr/>
+        </p:nvSpPr>
+        <p:spPr>
+          <a:xfrm>
+            <a:off x="365760" y="274320"/>
+            <a:ext cx="11430000" cy="777240"/>
+          </a:xfrm>
+          <a:prstGeom prst="rect">
+            <a:avLst/>
+          </a:prstGeom>
+          <a:noFill/>
+        </p:spPr>
+        <p:txBody>
+          <a:bodyPr wrap="square">
+            <a:spAutoFit/>
+          </a:bodyPr>
+          <a:lstStyle/>
+          <a:p>
+            <a:pPr algn="l"/>
+            <a:r>
+              <a:rPr sz="2200" b="1" i="0">
+                <a:solidFill>
+                  <a:srgbClr val="003DA5"/>
+                </a:solidFill>
+                <a:latin typeface="Arial"/>
+              </a:rPr>
+              <a:t>Dokumentationsstandards</a:t>
+            </a:r>
+          </a:p>
+        </p:txBody>
+      </p:sp>
+      <p:sp>
+        <p:nvSpPr>
+          <p:cNvPr id="5" name="Rectangle 4"/>
+          <p:cNvSpPr/>
+          <p:nvPr/>
+        </p:nvSpPr>
+        <p:spPr>
+          <a:xfrm>
+            <a:off x="365760" y="1005840"/>
+            <a:ext cx="11430000" cy="27432"/>
+          </a:xfrm>
+          <a:prstGeom prst="rect">
+            <a:avLst/>
+          </a:prstGeom>
+          <a:solidFill>
+            <a:srgbClr val="D1D5DB"/>
+          </a:solidFill>
+          <a:ln>
+            <a:noFill/>
+          </a:ln>
+        </p:spPr>
+        <p:style>
+          <a:lnRef idx="1">
+            <a:schemeClr val="accent1"/>
+          </a:lnRef>
+          <a:fillRef idx="3">
+            <a:schemeClr val="accent1"/>
+          </a:fillRef>
+          <a:effectRef idx="2">
+            <a:schemeClr val="accent1"/>
+          </a:effectRef>
+          <a:fontRef idx="minor">
+            <a:schemeClr val="lt1"/>
+          </a:fontRef>
+        </p:style>
+        <p:txBody>
+          <a:bodyPr rtlCol="0" anchor="ctr"/>
+          <a:lstStyle/>
+          <a:p>
+            <a:pPr algn="ctr"/>
+          </a:p>
+        </p:txBody>
+      </p:sp>
+      <p:sp>
+        <p:nvSpPr>
+          <p:cNvPr id="6" name="TextBox 5"/>
+          <p:cNvSpPr txBox="1"/>
+          <p:nvPr/>
+        </p:nvSpPr>
+        <p:spPr>
+          <a:xfrm>
+            <a:off x="365760" y="1143000"/>
+            <a:ext cx="11430000" cy="5212080"/>
+          </a:xfrm>
+          <a:prstGeom prst="rect">
+            <a:avLst/>
+          </a:prstGeom>
+          <a:noFill/>
+        </p:spPr>
+        <p:txBody>
+          <a:bodyPr wrap="square">
+            <a:spAutoFit/>
+          </a:bodyPr>
+          <a:lstStyle/>
+          <a:p>
+            <a:pPr>
+              <a:spcBef>
+                <a:spcPts val="500"/>
+              </a:spcBef>
+            </a:pPr>
+            <a:r>
+              <a:rPr sz="1500">
+                <a:solidFill>
+                  <a:srgbClr val="003DA5"/>
+                </a:solidFill>
+                <a:latin typeface="Arial"/>
+              </a:rPr>
+              <a:t>▪  </a:t>
+            </a:r>
+            <a:r>
+              <a:rPr sz="1700">
+                <a:solidFill>
+                  <a:srgbClr val="1A1A1A"/>
+                </a:solidFill>
+                <a:latin typeface="Arial"/>
+              </a:rPr>
+              <a:t>Dokumentation im UnternehmerDialog gilt als bankinternes Beratungsprotokoll im Rahmen der Dokumentationsanforderungen nach MaRisk BTO 1.2 (BaFin, 2023) und als…</a:t>
+            </a:r>
+          </a:p>
+        </p:txBody>
+      </p:sp>
+    </p:spTree>
+  </p:cSld>
+  <p:clrMapOvr>
+    <a:masterClrMapping/>
+  </p:clrMapOvr>
+</p:sld>
+</file>
+
+<file path=ppt/slides/slide15.xml><?xml version="1.0" encoding="utf-8"?>
 <p:sld xmlns:a="http://schemas.openxmlformats.org/drawingml/2006/main" xmlns:p="http://schemas.openxmlformats.org/presentationml/2006/main" xmlns:r="http://schemas.openxmlformats.org/officeDocument/2006/relationships">
   <p:cSld>
     <p:bg>
@@ -3619,8 +5223,8 @@
         </p:nvSpPr>
         <p:spPr>
           <a:xfrm>
-            <a:off x="365760" y="2286000"/>
-            <a:ext cx="11430000" cy="1828800"/>
+            <a:off x="365760" y="2011680"/>
+            <a:ext cx="11430000" cy="2011680"/>
           </a:xfrm>
           <a:prstGeom prst="rect">
             <a:avLst/>
@@ -3635,13 +5239,13 @@
           <a:p>
             <a:pPr algn="l"/>
             <a:r>
-              <a:rPr sz="3600" b="1">
+              <a:rPr sz="3600" b="1" i="0">
                 <a:solidFill>
                   <a:srgbClr val="FFFFFF"/>
                 </a:solidFill>
                 <a:latin typeface="Arial"/>
               </a:rPr>
-              <a:t>Fachlicher Kontext</a:t>
+              <a:t>Arbeitsblatt B: Workflow-Optimierungsplan</a:t>
             </a:r>
           </a:p>
         </p:txBody>
@@ -3654,7 +5258,577 @@
 </p:sld>
 </file>
 
-<file path=ppt/slides/slide13.xml><?xml version="1.0" encoding="utf-8"?>
+<file path=ppt/slides/slide16.xml><?xml version="1.0" encoding="utf-8"?>
+<p:sld xmlns:a="http://schemas.openxmlformats.org/drawingml/2006/main" xmlns:p="http://schemas.openxmlformats.org/presentationml/2006/main" xmlns:r="http://schemas.openxmlformats.org/officeDocument/2006/relationships">
+  <p:cSld>
+    <p:bg>
+      <p:bgPr>
+        <a:solidFill>
+          <a:srgbClr val="FFFFFF"/>
+        </a:solidFill>
+        <a:effectLst/>
+      </p:bgPr>
+    </p:bg>
+    <p:spTree>
+      <p:nvGrpSpPr>
+        <p:cNvPr id="1" name=""/>
+        <p:cNvGrpSpPr/>
+        <p:nvPr/>
+      </p:nvGrpSpPr>
+      <p:grpSpPr/>
+      <p:sp>
+        <p:nvSpPr>
+          <p:cNvPr id="2" name="Rectangle 1"/>
+          <p:cNvSpPr/>
+          <p:nvPr/>
+        </p:nvSpPr>
+        <p:spPr>
+          <a:xfrm>
+            <a:off x="0" y="0"/>
+            <a:ext cx="73152" cy="6858000"/>
+          </a:xfrm>
+          <a:prstGeom prst="rect">
+            <a:avLst/>
+          </a:prstGeom>
+          <a:solidFill>
+            <a:srgbClr val="003DA5"/>
+          </a:solidFill>
+          <a:ln>
+            <a:noFill/>
+          </a:ln>
+        </p:spPr>
+        <p:style>
+          <a:lnRef idx="1">
+            <a:schemeClr val="accent1"/>
+          </a:lnRef>
+          <a:fillRef idx="3">
+            <a:schemeClr val="accent1"/>
+          </a:fillRef>
+          <a:effectRef idx="2">
+            <a:schemeClr val="accent1"/>
+          </a:effectRef>
+          <a:fontRef idx="minor">
+            <a:schemeClr val="lt1"/>
+          </a:fontRef>
+        </p:style>
+        <p:txBody>
+          <a:bodyPr rtlCol="0" anchor="ctr"/>
+          <a:lstStyle/>
+          <a:p>
+            <a:pPr algn="ctr"/>
+          </a:p>
+        </p:txBody>
+      </p:sp>
+      <p:sp>
+        <p:nvSpPr>
+          <p:cNvPr id="3" name="TextBox 2"/>
+          <p:cNvSpPr txBox="1"/>
+          <p:nvPr/>
+        </p:nvSpPr>
+        <p:spPr>
+          <a:xfrm>
+            <a:off x="228600" y="182880"/>
+            <a:ext cx="11430000" cy="320040"/>
+          </a:xfrm>
+          <a:prstGeom prst="rect">
+            <a:avLst/>
+          </a:prstGeom>
+          <a:noFill/>
+        </p:spPr>
+        <p:txBody>
+          <a:bodyPr wrap="square">
+            <a:spAutoFit/>
+          </a:bodyPr>
+          <a:lstStyle/>
+          <a:p>
+            <a:pPr algn="l"/>
+            <a:r>
+              <a:rPr sz="900" b="0" i="0">
+                <a:solidFill>
+                  <a:srgbClr val="556575"/>
+                </a:solidFill>
+                <a:latin typeface="Arial"/>
+              </a:rPr>
+              <a:t>M17 · 4.7 Arbeitsblätter</a:t>
+            </a:r>
+          </a:p>
+        </p:txBody>
+      </p:sp>
+      <p:sp>
+        <p:nvSpPr>
+          <p:cNvPr id="4" name="TextBox 3"/>
+          <p:cNvSpPr txBox="1"/>
+          <p:nvPr/>
+        </p:nvSpPr>
+        <p:spPr>
+          <a:xfrm>
+            <a:off x="365760" y="274320"/>
+            <a:ext cx="11430000" cy="777240"/>
+          </a:xfrm>
+          <a:prstGeom prst="rect">
+            <a:avLst/>
+          </a:prstGeom>
+          <a:noFill/>
+        </p:spPr>
+        <p:txBody>
+          <a:bodyPr wrap="square">
+            <a:spAutoFit/>
+          </a:bodyPr>
+          <a:lstStyle/>
+          <a:p>
+            <a:pPr algn="l"/>
+            <a:r>
+              <a:rPr sz="2200" b="1" i="0">
+                <a:solidFill>
+                  <a:srgbClr val="003DA5"/>
+                </a:solidFill>
+                <a:latin typeface="Arial"/>
+              </a:rPr>
+              <a:t>Arbeitsblatt B: Workflow-Optimierungsplan</a:t>
+            </a:r>
+          </a:p>
+        </p:txBody>
+      </p:sp>
+      <p:sp>
+        <p:nvSpPr>
+          <p:cNvPr id="5" name="Rectangle 4"/>
+          <p:cNvSpPr/>
+          <p:nvPr/>
+        </p:nvSpPr>
+        <p:spPr>
+          <a:xfrm>
+            <a:off x="365760" y="1005840"/>
+            <a:ext cx="11430000" cy="27432"/>
+          </a:xfrm>
+          <a:prstGeom prst="rect">
+            <a:avLst/>
+          </a:prstGeom>
+          <a:solidFill>
+            <a:srgbClr val="D1D5DB"/>
+          </a:solidFill>
+          <a:ln>
+            <a:noFill/>
+          </a:ln>
+        </p:spPr>
+        <p:style>
+          <a:lnRef idx="1">
+            <a:schemeClr val="accent1"/>
+          </a:lnRef>
+          <a:fillRef idx="3">
+            <a:schemeClr val="accent1"/>
+          </a:fillRef>
+          <a:effectRef idx="2">
+            <a:schemeClr val="accent1"/>
+          </a:effectRef>
+          <a:fontRef idx="minor">
+            <a:schemeClr val="lt1"/>
+          </a:fontRef>
+        </p:style>
+        <p:txBody>
+          <a:bodyPr rtlCol="0" anchor="ctr"/>
+          <a:lstStyle/>
+          <a:p>
+            <a:pPr algn="ctr"/>
+          </a:p>
+        </p:txBody>
+      </p:sp>
+      <p:graphicFrame>
+        <p:nvGraphicFramePr>
+          <p:cNvPr id="6" name="Table 5"/>
+          <p:cNvGraphicFramePr>
+            <a:graphicFrameLocks noGrp="1"/>
+          </p:cNvGraphicFramePr>
+          <p:nvPr/>
+        </p:nvGraphicFramePr>
+        <p:xfrm>
+          <a:off x="365760" y="1143000"/>
+          <a:ext cx="11430000" cy="1901952"/>
+        </p:xfrm>
+        <a:graphic>
+          <a:graphicData uri="http://schemas.openxmlformats.org/drawingml/2006/table">
+            <a:tbl>
+              <a:tblPr firstRow="1" bandRow="1">
+                <a:tableStyleId>{5C22544A-7EE6-4342-B048-85BDC9FD1C3A}</a:tableStyleId>
+              </a:tblPr>
+              <a:tblGrid>
+                <a:gridCol w="2857500"/>
+                <a:gridCol w="2857500"/>
+                <a:gridCol w="2857500"/>
+                <a:gridCol w="2857500"/>
+              </a:tblGrid>
+              <a:tr h="475488">
+                <a:tc>
+                  <a:txBody>
+                    <a:bodyPr wrap="square"/>
+                    <a:lstStyle/>
+                    <a:p>
+                      <a:r>
+                        <a:rPr sz="1100" b="1">
+                          <a:solidFill>
+                            <a:srgbClr val="FFFFFF"/>
+                          </a:solidFill>
+                          <a:latin typeface="Arial"/>
+                        </a:rPr>
+                        <a:t>Phase</a:t>
+                      </a:r>
+                    </a:p>
+                  </a:txBody>
+                  <a:tcPr>
+                    <a:solidFill>
+                      <a:srgbClr val="003DA5"/>
+                    </a:solidFill>
+                  </a:tcPr>
+                </a:tc>
+                <a:tc>
+                  <a:txBody>
+                    <a:bodyPr wrap="square"/>
+                    <a:lstStyle/>
+                    <a:p>
+                      <a:r>
+                        <a:rPr sz="1100" b="1">
+                          <a:solidFill>
+                            <a:srgbClr val="FFFFFF"/>
+                          </a:solidFill>
+                          <a:latin typeface="Arial"/>
+                        </a:rPr>
+                        <a:t>Aktuell</a:t>
+                      </a:r>
+                    </a:p>
+                  </a:txBody>
+                  <a:tcPr>
+                    <a:solidFill>
+                      <a:srgbClr val="003DA5"/>
+                    </a:solidFill>
+                  </a:tcPr>
+                </a:tc>
+                <a:tc>
+                  <a:txBody>
+                    <a:bodyPr wrap="square"/>
+                    <a:lstStyle/>
+                    <a:p>
+                      <a:r>
+                        <a:rPr sz="1100" b="1">
+                          <a:solidFill>
+                            <a:srgbClr val="FFFFFF"/>
+                          </a:solidFill>
+                          <a:latin typeface="Arial"/>
+                        </a:rPr>
+                        <a:t>Ziel nach Optimierung</a:t>
+                      </a:r>
+                    </a:p>
+                  </a:txBody>
+                  <a:tcPr>
+                    <a:solidFill>
+                      <a:srgbClr val="003DA5"/>
+                    </a:solidFill>
+                  </a:tcPr>
+                </a:tc>
+                <a:tc>
+                  <a:txBody>
+                    <a:bodyPr wrap="square"/>
+                    <a:lstStyle/>
+                    <a:p>
+                      <a:r>
+                        <a:rPr sz="1100" b="1">
+                          <a:solidFill>
+                            <a:srgbClr val="FFFFFF"/>
+                          </a:solidFill>
+                          <a:latin typeface="Arial"/>
+                        </a:rPr>
+                        <a:t>Maßnahme</a:t>
+                      </a:r>
+                    </a:p>
+                  </a:txBody>
+                  <a:tcPr>
+                    <a:solidFill>
+                      <a:srgbClr val="003DA5"/>
+                    </a:solidFill>
+                  </a:tcPr>
+                </a:tc>
+              </a:tr>
+              <a:tr h="475488">
+                <a:tc>
+                  <a:txBody>
+                    <a:bodyPr wrap="square"/>
+                    <a:lstStyle/>
+                    <a:p>
+                      <a:r>
+                        <a:rPr sz="1100" b="0">
+                          <a:solidFill>
+                            <a:srgbClr val="1A1A1A"/>
+                          </a:solidFill>
+                          <a:latin typeface="Arial"/>
+                        </a:rPr>
+                        <a:t>Vorbereitung</a:t>
+                      </a:r>
+                    </a:p>
+                  </a:txBody>
+                  <a:tcPr>
+                    <a:solidFill>
+                      <a:srgbClr val="FFFFFF"/>
+                    </a:solidFill>
+                  </a:tcPr>
+                </a:tc>
+                <a:tc>
+                  <a:txBody>
+                    <a:bodyPr wrap="square"/>
+                    <a:lstStyle/>
+                    <a:p>
+                      <a:r>
+                        <a:rPr sz="1100" b="0">
+                          <a:solidFill>
+                            <a:srgbClr val="1A1A1A"/>
+                          </a:solidFill>
+                          <a:latin typeface="Arial"/>
+                        </a:rPr>
+                        <a:t/>
+                      </a:r>
+                    </a:p>
+                  </a:txBody>
+                  <a:tcPr>
+                    <a:solidFill>
+                      <a:srgbClr val="FFFFFF"/>
+                    </a:solidFill>
+                  </a:tcPr>
+                </a:tc>
+                <a:tc>
+                  <a:txBody>
+                    <a:bodyPr wrap="square"/>
+                    <a:lstStyle/>
+                    <a:p>
+                      <a:r>
+                        <a:rPr sz="1100" b="0">
+                          <a:solidFill>
+                            <a:srgbClr val="1A1A1A"/>
+                          </a:solidFill>
+                          <a:latin typeface="Arial"/>
+                        </a:rPr>
+                        <a:t/>
+                      </a:r>
+                    </a:p>
+                  </a:txBody>
+                  <a:tcPr>
+                    <a:solidFill>
+                      <a:srgbClr val="FFFFFF"/>
+                    </a:solidFill>
+                  </a:tcPr>
+                </a:tc>
+                <a:tc>
+                  <a:txBody>
+                    <a:bodyPr wrap="square"/>
+                    <a:lstStyle/>
+                    <a:p>
+                      <a:r>
+                        <a:rPr sz="1100" b="0">
+                          <a:solidFill>
+                            <a:srgbClr val="1A1A1A"/>
+                          </a:solidFill>
+                          <a:latin typeface="Arial"/>
+                        </a:rPr>
+                        <a:t/>
+                      </a:r>
+                    </a:p>
+                  </a:txBody>
+                  <a:tcPr>
+                    <a:solidFill>
+                      <a:srgbClr val="FFFFFF"/>
+                    </a:solidFill>
+                  </a:tcPr>
+                </a:tc>
+              </a:tr>
+              <a:tr h="475488">
+                <a:tc>
+                  <a:txBody>
+                    <a:bodyPr wrap="square"/>
+                    <a:lstStyle/>
+                    <a:p>
+                      <a:r>
+                        <a:rPr sz="1100" b="0">
+                          <a:solidFill>
+                            <a:srgbClr val="1A1A1A"/>
+                          </a:solidFill>
+                          <a:latin typeface="Arial"/>
+                        </a:rPr>
+                        <a:t>Nachbereitung</a:t>
+                      </a:r>
+                    </a:p>
+                  </a:txBody>
+                  <a:tcPr>
+                    <a:solidFill>
+                      <a:srgbClr val="F4F6FA"/>
+                    </a:solidFill>
+                  </a:tcPr>
+                </a:tc>
+                <a:tc>
+                  <a:txBody>
+                    <a:bodyPr wrap="square"/>
+                    <a:lstStyle/>
+                    <a:p>
+                      <a:r>
+                        <a:rPr sz="1100" b="0">
+                          <a:solidFill>
+                            <a:srgbClr val="1A1A1A"/>
+                          </a:solidFill>
+                          <a:latin typeface="Arial"/>
+                        </a:rPr>
+                        <a:t/>
+                      </a:r>
+                    </a:p>
+                  </a:txBody>
+                  <a:tcPr>
+                    <a:solidFill>
+                      <a:srgbClr val="F4F6FA"/>
+                    </a:solidFill>
+                  </a:tcPr>
+                </a:tc>
+                <a:tc>
+                  <a:txBody>
+                    <a:bodyPr wrap="square"/>
+                    <a:lstStyle/>
+                    <a:p>
+                      <a:r>
+                        <a:rPr sz="1100" b="0">
+                          <a:solidFill>
+                            <a:srgbClr val="1A1A1A"/>
+                          </a:solidFill>
+                          <a:latin typeface="Arial"/>
+                        </a:rPr>
+                        <a:t/>
+                      </a:r>
+                    </a:p>
+                  </a:txBody>
+                  <a:tcPr>
+                    <a:solidFill>
+                      <a:srgbClr val="F4F6FA"/>
+                    </a:solidFill>
+                  </a:tcPr>
+                </a:tc>
+                <a:tc>
+                  <a:txBody>
+                    <a:bodyPr wrap="square"/>
+                    <a:lstStyle/>
+                    <a:p>
+                      <a:r>
+                        <a:rPr sz="1100" b="0">
+                          <a:solidFill>
+                            <a:srgbClr val="1A1A1A"/>
+                          </a:solidFill>
+                          <a:latin typeface="Arial"/>
+                        </a:rPr>
+                        <a:t/>
+                      </a:r>
+                    </a:p>
+                  </a:txBody>
+                  <a:tcPr>
+                    <a:solidFill>
+                      <a:srgbClr val="F4F6FA"/>
+                    </a:solidFill>
+                  </a:tcPr>
+                </a:tc>
+              </a:tr>
+              <a:tr h="475488">
+                <a:tc>
+                  <a:txBody>
+                    <a:bodyPr wrap="square"/>
+                    <a:lstStyle/>
+                    <a:p>
+                      <a:r>
+                        <a:rPr sz="1100" b="0">
+                          <a:solidFill>
+                            <a:srgbClr val="1A1A1A"/>
+                          </a:solidFill>
+                          <a:latin typeface="Arial"/>
+                        </a:rPr>
+                        <a:t>Reporting-Routine</a:t>
+                      </a:r>
+                    </a:p>
+                  </a:txBody>
+                  <a:tcPr>
+                    <a:solidFill>
+                      <a:srgbClr val="FFFFFF"/>
+                    </a:solidFill>
+                  </a:tcPr>
+                </a:tc>
+                <a:tc>
+                  <a:txBody>
+                    <a:bodyPr wrap="square"/>
+                    <a:lstStyle/>
+                    <a:p>
+                      <a:r>
+                        <a:rPr sz="1100" b="0">
+                          <a:solidFill>
+                            <a:srgbClr val="1A1A1A"/>
+                          </a:solidFill>
+                          <a:latin typeface="Arial"/>
+                        </a:rPr>
+                        <a:t/>
+                      </a:r>
+                    </a:p>
+                  </a:txBody>
+                  <a:tcPr>
+                    <a:solidFill>
+                      <a:srgbClr val="FFFFFF"/>
+                    </a:solidFill>
+                  </a:tcPr>
+                </a:tc>
+                <a:tc>
+                  <a:txBody>
+                    <a:bodyPr wrap="square"/>
+                    <a:lstStyle/>
+                    <a:p>
+                      <a:r>
+                        <a:rPr sz="1100" b="0">
+                          <a:solidFill>
+                            <a:srgbClr val="1A1A1A"/>
+                          </a:solidFill>
+                          <a:latin typeface="Arial"/>
+                        </a:rPr>
+                        <a:t/>
+                      </a:r>
+                    </a:p>
+                  </a:txBody>
+                  <a:tcPr>
+                    <a:solidFill>
+                      <a:srgbClr val="FFFFFF"/>
+                    </a:solidFill>
+                  </a:tcPr>
+                </a:tc>
+                <a:tc>
+                  <a:txBody>
+                    <a:bodyPr wrap="square"/>
+                    <a:lstStyle/>
+                    <a:p>
+                      <a:r>
+                        <a:rPr sz="1100" b="0">
+                          <a:solidFill>
+                            <a:srgbClr val="1A1A1A"/>
+                          </a:solidFill>
+                          <a:latin typeface="Arial"/>
+                        </a:rPr>
+                        <a:t/>
+                      </a:r>
+                    </a:p>
+                  </a:txBody>
+                  <a:tcPr>
+                    <a:solidFill>
+                      <a:srgbClr val="FFFFFF"/>
+                    </a:solidFill>
+                  </a:tcPr>
+                </a:tc>
+              </a:tr>
+            </a:tbl>
+          </a:graphicData>
+        </a:graphic>
+      </p:graphicFrame>
+    </p:spTree>
+  </p:cSld>
+  <p:clrMapOvr>
+    <a:masterClrMapping/>
+  </p:clrMapOvr>
+</p:sld>
+</file>
+
+<file path=ppt/slides/slide17.xml><?xml version="1.0" encoding="utf-8"?>
 <p:sld xmlns:a="http://schemas.openxmlformats.org/drawingml/2006/main" xmlns:p="http://schemas.openxmlformats.org/presentationml/2006/main" xmlns:r="http://schemas.openxmlformats.org/officeDocument/2006/relationships">
   <p:cSld>
     <p:bg>
@@ -3723,8 +5897,8 @@
         </p:nvSpPr>
         <p:spPr>
           <a:xfrm>
-            <a:off x="365760" y="365760"/>
-            <a:ext cx="5486400" cy="365760"/>
+            <a:off x="365760" y="347472"/>
+            <a:ext cx="7315200" cy="384048"/>
           </a:xfrm>
           <a:prstGeom prst="rect">
             <a:avLst/>
@@ -3739,62 +5913,27 @@
           <a:p>
             <a:pPr algn="l"/>
             <a:r>
-              <a:rPr sz="1000" b="1">
+              <a:rPr sz="900" b="1" i="0">
                 <a:solidFill>
                   <a:srgbClr val="CCD6F0"/>
                 </a:solidFill>
                 <a:latin typeface="Arial"/>
               </a:rPr>
-              <a:t>PRAXISTRANSFER</a:t>
-            </a:r>
-          </a:p>
-        </p:txBody>
-      </p:sp>
-      <p:sp>
-        <p:nvSpPr>
-          <p:cNvPr id="4" name="TextBox 3"/>
-          <p:cNvSpPr txBox="1"/>
+              <a:t>PRAXISTRANSFER &amp; NÄCHSTE SCHRITTE</a:t>
+            </a:r>
+          </a:p>
+        </p:txBody>
+      </p:sp>
+      <p:sp>
+        <p:nvSpPr>
+          <p:cNvPr id="4" name="Rectangle 3"/>
+          <p:cNvSpPr/>
           <p:nvPr/>
         </p:nvSpPr>
         <p:spPr>
           <a:xfrm>
-            <a:off x="365760" y="640080"/>
-            <a:ext cx="9144000" cy="914400"/>
-          </a:xfrm>
-          <a:prstGeom prst="rect">
-            <a:avLst/>
-          </a:prstGeom>
-          <a:noFill/>
-        </p:spPr>
-        <p:txBody>
-          <a:bodyPr wrap="square">
-            <a:spAutoFit/>
-          </a:bodyPr>
-          <a:lstStyle/>
-          <a:p>
-            <a:pPr algn="l"/>
-            <a:r>
-              <a:rPr sz="2800" b="1">
-                <a:solidFill>
-                  <a:srgbClr val="FFFFFF"/>
-                </a:solidFill>
-                <a:latin typeface="Arial"/>
-              </a:rPr>
-              <a:t>Was nehmen Sie mit?</a:t>
-            </a:r>
-          </a:p>
-        </p:txBody>
-      </p:sp>
-      <p:sp>
-        <p:nvSpPr>
-          <p:cNvPr id="5" name="Rectangle 4"/>
-          <p:cNvSpPr/>
-          <p:nvPr/>
-        </p:nvSpPr>
-        <p:spPr>
-          <a:xfrm>
-            <a:off x="365760" y="1463040"/>
-            <a:ext cx="7315200" cy="27432"/>
+            <a:off x="365760" y="804672"/>
+            <a:ext cx="8229600" cy="22860"/>
           </a:xfrm>
           <a:prstGeom prst="rect">
             <a:avLst/>
@@ -3830,13 +5969,48 @@
       </p:sp>
       <p:sp>
         <p:nvSpPr>
+          <p:cNvPr id="5" name="TextBox 4"/>
+          <p:cNvSpPr txBox="1"/>
+          <p:nvPr/>
+        </p:nvSpPr>
+        <p:spPr>
+          <a:xfrm>
+            <a:off x="365760" y="960120"/>
+            <a:ext cx="9144000" cy="914400"/>
+          </a:xfrm>
+          <a:prstGeom prst="rect">
+            <a:avLst/>
+          </a:prstGeom>
+          <a:noFill/>
+        </p:spPr>
+        <p:txBody>
+          <a:bodyPr wrap="square">
+            <a:spAutoFit/>
+          </a:bodyPr>
+          <a:lstStyle/>
+          <a:p>
+            <a:pPr algn="l"/>
+            <a:r>
+              <a:rPr sz="3000" b="1" i="0">
+                <a:solidFill>
+                  <a:srgbClr val="FFFFFF"/>
+                </a:solidFill>
+                <a:latin typeface="Arial"/>
+              </a:rPr>
+              <a:t>Was nehmen Sie mit?</a:t>
+            </a:r>
+          </a:p>
+        </p:txBody>
+      </p:sp>
+      <p:sp>
+        <p:nvSpPr>
           <p:cNvPr id="6" name="TextBox 5"/>
           <p:cNvSpPr txBox="1"/>
           <p:nvPr/>
         </p:nvSpPr>
         <p:spPr>
           <a:xfrm>
-            <a:off x="365760" y="1645920"/>
+            <a:off x="365760" y="2103120"/>
             <a:ext cx="11430000" cy="4114800"/>
           </a:xfrm>
           <a:prstGeom prst="rect">
@@ -3852,7 +6026,7 @@
           <a:p>
             <a:pPr>
               <a:spcBef>
-                <a:spcPts val="400"/>
+                <a:spcPts val="500"/>
               </a:spcBef>
             </a:pPr>
             <a:r>
@@ -3877,7 +6051,7 @@
           <a:p>
             <a:pPr>
               <a:spcBef>
-                <a:spcPts val="400"/>
+                <a:spcPts val="500"/>
               </a:spcBef>
             </a:pPr>
             <a:r>
@@ -3896,7 +6070,32 @@
                 </a:solidFill>
                 <a:latin typeface="Arial"/>
               </a:rPr>
-              <a:t>Selbstcheck nach 4 Wochen: Was hat sich verändert?</a:t>
+              <a:t>Selbstcheck nach 4 Wochen: Bewerten Sie Ihre Fortschritte ehrlich.</a:t>
+            </a:r>
+          </a:p>
+          <a:p>
+            <a:pPr>
+              <a:spcBef>
+                <a:spcPts val="500"/>
+              </a:spcBef>
+            </a:pPr>
+            <a:r>
+              <a:rPr sz="1600">
+                <a:solidFill>
+                  <a:srgbClr val="E05B00"/>
+                </a:solidFill>
+                <a:latin typeface="Arial"/>
+              </a:rPr>
+              <a:t>▪  </a:t>
+            </a:r>
+            <a:r>
+              <a:rPr sz="1800">
+                <a:solidFill>
+                  <a:srgbClr val="FFFFFF"/>
+                </a:solidFill>
+                <a:latin typeface="Arial"/>
+              </a:rPr>
+              <a:t>Nächste Module: M18</a:t>
             </a:r>
           </a:p>
         </p:txBody>
@@ -3925,9 +6124,9 @@
           <a:p>
             <a:pPr algn="l"/>
             <a:r>
-              <a:rPr sz="900" b="0">
+              <a:rPr sz="900" b="0" i="0">
                 <a:solidFill>
-                  <a:srgbClr val="99AACC"/>
+                  <a:srgbClr val="889ACC"/>
                 </a:solidFill>
                 <a:latin typeface="Arial"/>
               </a:rPr>
@@ -3950,7 +6149,7 @@
     <p:bg>
       <p:bgPr>
         <a:solidFill>
-          <a:srgbClr val="F5F7FA"/>
+          <a:srgbClr val="F4F6FA"/>
         </a:solidFill>
         <a:effectLst/>
       </p:bgPr>
@@ -4013,14 +6212,14 @@
         </p:nvSpPr>
         <p:spPr>
           <a:xfrm>
-            <a:off x="365760" y="868680"/>
-            <a:ext cx="7315200" cy="27432"/>
+            <a:off x="228600" y="804672"/>
+            <a:ext cx="11612880" cy="22860"/>
           </a:xfrm>
           <a:prstGeom prst="rect">
             <a:avLst/>
           </a:prstGeom>
           <a:solidFill>
-            <a:srgbClr val="E5E7EB"/>
+            <a:srgbClr val="D1D5DB"/>
           </a:solidFill>
           <a:ln>
             <a:noFill/>
@@ -4057,7 +6256,7 @@
         <p:spPr>
           <a:xfrm>
             <a:off x="365760" y="320040"/>
-            <a:ext cx="3657600" cy="365760"/>
+            <a:ext cx="4572000" cy="347472"/>
           </a:xfrm>
           <a:prstGeom prst="rect">
             <a:avLst/>
@@ -4072,7 +6271,7 @@
           <a:p>
             <a:pPr algn="l"/>
             <a:r>
-              <a:rPr sz="1000" b="1">
+              <a:rPr sz="900" b="1" i="0">
                 <a:solidFill>
                   <a:srgbClr val="003DA5"/>
                 </a:solidFill>
@@ -4092,7 +6291,7 @@
         <p:spPr>
           <a:xfrm>
             <a:off x="365760" y="502920"/>
-            <a:ext cx="9144000" cy="548640"/>
+            <a:ext cx="10058400" cy="640080"/>
           </a:xfrm>
           <a:prstGeom prst="rect">
             <a:avLst/>
@@ -4107,7 +6306,7 @@
           <a:p>
             <a:pPr algn="l"/>
             <a:r>
-              <a:rPr sz="2200" b="1">
+              <a:rPr sz="2400" b="1" i="0">
                 <a:solidFill>
                   <a:srgbClr val="1A1A1A"/>
                 </a:solidFill>
@@ -4126,7 +6325,7 @@
         </p:nvSpPr>
         <p:spPr>
           <a:xfrm>
-            <a:off x="365760" y="1188720"/>
+            <a:off x="365760" y="1234440"/>
             <a:ext cx="11430000" cy="5303520"/>
           </a:xfrm>
           <a:prstGeom prst="rect">
@@ -4142,11 +6341,11 @@
           <a:p>
             <a:pPr>
               <a:spcBef>
-                <a:spcPts val="400"/>
+                <a:spcPts val="500"/>
               </a:spcBef>
             </a:pPr>
             <a:r>
-              <a:rPr sz="1400">
+              <a:rPr sz="1500">
                 <a:solidFill>
                   <a:srgbClr val="003DA5"/>
                 </a:solidFill>
@@ -4155,7 +6354,7 @@
               <a:t>▪  </a:t>
             </a:r>
             <a:r>
-              <a:rPr sz="1600">
+              <a:rPr sz="1700">
                 <a:solidFill>
                   <a:srgbClr val="1A1A1A"/>
                 </a:solidFill>
@@ -4167,11 +6366,11 @@
           <a:p>
             <a:pPr>
               <a:spcBef>
-                <a:spcPts val="400"/>
+                <a:spcPts val="500"/>
               </a:spcBef>
             </a:pPr>
             <a:r>
-              <a:rPr sz="1400">
+              <a:rPr sz="1500">
                 <a:solidFill>
                   <a:srgbClr val="003DA5"/>
                 </a:solidFill>
@@ -4180,7 +6379,7 @@
               <a:t>▪  </a:t>
             </a:r>
             <a:r>
-              <a:rPr sz="1600">
+              <a:rPr sz="1700">
                 <a:solidFill>
                   <a:srgbClr val="1A1A1A"/>
                 </a:solidFill>
@@ -4192,11 +6391,11 @@
           <a:p>
             <a:pPr>
               <a:spcBef>
-                <a:spcPts val="400"/>
+                <a:spcPts val="500"/>
               </a:spcBef>
             </a:pPr>
             <a:r>
-              <a:rPr sz="1400">
+              <a:rPr sz="1500">
                 <a:solidFill>
                   <a:srgbClr val="003DA5"/>
                 </a:solidFill>
@@ -4205,7 +6404,7 @@
               <a:t>▪  </a:t>
             </a:r>
             <a:r>
-              <a:rPr sz="1600">
+              <a:rPr sz="1700">
                 <a:solidFill>
                   <a:srgbClr val="1A1A1A"/>
                 </a:solidFill>
@@ -4217,11 +6416,11 @@
           <a:p>
             <a:pPr>
               <a:spcBef>
-                <a:spcPts val="400"/>
+                <a:spcPts val="500"/>
               </a:spcBef>
             </a:pPr>
             <a:r>
-              <a:rPr sz="1400">
+              <a:rPr sz="1500">
                 <a:solidFill>
                   <a:srgbClr val="003DA5"/>
                 </a:solidFill>
@@ -4230,7 +6429,7 @@
               <a:t>▪  </a:t>
             </a:r>
             <a:r>
-              <a:rPr sz="1600">
+              <a:rPr sz="1700">
                 <a:solidFill>
                   <a:srgbClr val="1A1A1A"/>
                 </a:solidFill>
@@ -4242,11 +6441,11 @@
           <a:p>
             <a:pPr>
               <a:spcBef>
-                <a:spcPts val="400"/>
+                <a:spcPts val="500"/>
               </a:spcBef>
             </a:pPr>
             <a:r>
-              <a:rPr sz="1400">
+              <a:rPr sz="1500">
                 <a:solidFill>
                   <a:srgbClr val="003DA5"/>
                 </a:solidFill>
@@ -4255,7 +6454,7 @@
               <a:t>▪  </a:t>
             </a:r>
             <a:r>
-              <a:rPr sz="1600">
+              <a:rPr sz="1700">
                 <a:solidFill>
                   <a:srgbClr val="1A1A1A"/>
                 </a:solidFill>
@@ -4343,8 +6542,8 @@
         </p:nvSpPr>
         <p:spPr>
           <a:xfrm>
-            <a:off x="365760" y="2286000"/>
-            <a:ext cx="11430000" cy="1828800"/>
+            <a:off x="365760" y="2011680"/>
+            <a:ext cx="11430000" cy="2011680"/>
           </a:xfrm>
           <a:prstGeom prst="rect">
             <a:avLst/>
@@ -4359,7 +6558,7 @@
           <a:p>
             <a:pPr algn="l"/>
             <a:r>
-              <a:rPr sz="3600" b="1">
+              <a:rPr sz="3600" b="1" i="0">
                 <a:solidFill>
                   <a:srgbClr val="FFFFFF"/>
                 </a:solidFill>
@@ -4379,6 +6578,623 @@
 </file>
 
 <file path=ppt/slides/slide4.xml><?xml version="1.0" encoding="utf-8"?>
+<p:sld xmlns:a="http://schemas.openxmlformats.org/drawingml/2006/main" xmlns:p="http://schemas.openxmlformats.org/presentationml/2006/main" xmlns:r="http://schemas.openxmlformats.org/officeDocument/2006/relationships">
+  <p:cSld>
+    <p:bg>
+      <p:bgPr>
+        <a:solidFill>
+          <a:srgbClr val="FFFFFF"/>
+        </a:solidFill>
+        <a:effectLst/>
+      </p:bgPr>
+    </p:bg>
+    <p:spTree>
+      <p:nvGrpSpPr>
+        <p:cNvPr id="1" name=""/>
+        <p:cNvGrpSpPr/>
+        <p:nvPr/>
+      </p:nvGrpSpPr>
+      <p:grpSpPr/>
+      <p:sp>
+        <p:nvSpPr>
+          <p:cNvPr id="2" name="Rectangle 1"/>
+          <p:cNvSpPr/>
+          <p:nvPr/>
+        </p:nvSpPr>
+        <p:spPr>
+          <a:xfrm>
+            <a:off x="0" y="0"/>
+            <a:ext cx="73152" cy="6858000"/>
+          </a:xfrm>
+          <a:prstGeom prst="rect">
+            <a:avLst/>
+          </a:prstGeom>
+          <a:solidFill>
+            <a:srgbClr val="003DA5"/>
+          </a:solidFill>
+          <a:ln>
+            <a:noFill/>
+          </a:ln>
+        </p:spPr>
+        <p:style>
+          <a:lnRef idx="1">
+            <a:schemeClr val="accent1"/>
+          </a:lnRef>
+          <a:fillRef idx="3">
+            <a:schemeClr val="accent1"/>
+          </a:fillRef>
+          <a:effectRef idx="2">
+            <a:schemeClr val="accent1"/>
+          </a:effectRef>
+          <a:fontRef idx="minor">
+            <a:schemeClr val="lt1"/>
+          </a:fontRef>
+        </p:style>
+        <p:txBody>
+          <a:bodyPr rtlCol="0" anchor="ctr"/>
+          <a:lstStyle/>
+          <a:p>
+            <a:pPr algn="ctr"/>
+          </a:p>
+        </p:txBody>
+      </p:sp>
+      <p:sp>
+        <p:nvSpPr>
+          <p:cNvPr id="3" name="TextBox 2"/>
+          <p:cNvSpPr txBox="1"/>
+          <p:nvPr/>
+        </p:nvSpPr>
+        <p:spPr>
+          <a:xfrm>
+            <a:off x="228600" y="182880"/>
+            <a:ext cx="11430000" cy="320040"/>
+          </a:xfrm>
+          <a:prstGeom prst="rect">
+            <a:avLst/>
+          </a:prstGeom>
+          <a:noFill/>
+        </p:spPr>
+        <p:txBody>
+          <a:bodyPr wrap="square">
+            <a:spAutoFit/>
+          </a:bodyPr>
+          <a:lstStyle/>
+          <a:p>
+            <a:pPr algn="l"/>
+            <a:r>
+              <a:rPr sz="900" b="0" i="0">
+                <a:solidFill>
+                  <a:srgbClr val="556575"/>
+                </a:solidFill>
+                <a:latin typeface="Arial"/>
+              </a:rPr>
+              <a:t>M17 · Modulinhalte</a:t>
+            </a:r>
+          </a:p>
+        </p:txBody>
+      </p:sp>
+      <p:sp>
+        <p:nvSpPr>
+          <p:cNvPr id="4" name="TextBox 3"/>
+          <p:cNvSpPr txBox="1"/>
+          <p:nvPr/>
+        </p:nvSpPr>
+        <p:spPr>
+          <a:xfrm>
+            <a:off x="365760" y="274320"/>
+            <a:ext cx="11430000" cy="777240"/>
+          </a:xfrm>
+          <a:prstGeom prst="rect">
+            <a:avLst/>
+          </a:prstGeom>
+          <a:noFill/>
+        </p:spPr>
+        <p:txBody>
+          <a:bodyPr wrap="square">
+            <a:spAutoFit/>
+          </a:bodyPr>
+          <a:lstStyle/>
+          <a:p>
+            <a:pPr algn="l"/>
+            <a:r>
+              <a:rPr sz="2200" b="1" i="0">
+                <a:solidFill>
+                  <a:srgbClr val="003DA5"/>
+                </a:solidFill>
+                <a:latin typeface="Arial"/>
+              </a:rPr>
+              <a:t>Die häufigsten agree-Fehler im Firmenkundenalltag</a:t>
+            </a:r>
+          </a:p>
+        </p:txBody>
+      </p:sp>
+      <p:sp>
+        <p:nvSpPr>
+          <p:cNvPr id="5" name="Rectangle 4"/>
+          <p:cNvSpPr/>
+          <p:nvPr/>
+        </p:nvSpPr>
+        <p:spPr>
+          <a:xfrm>
+            <a:off x="365760" y="1005840"/>
+            <a:ext cx="11430000" cy="27432"/>
+          </a:xfrm>
+          <a:prstGeom prst="rect">
+            <a:avLst/>
+          </a:prstGeom>
+          <a:solidFill>
+            <a:srgbClr val="D1D5DB"/>
+          </a:solidFill>
+          <a:ln>
+            <a:noFill/>
+          </a:ln>
+        </p:spPr>
+        <p:style>
+          <a:lnRef idx="1">
+            <a:schemeClr val="accent1"/>
+          </a:lnRef>
+          <a:fillRef idx="3">
+            <a:schemeClr val="accent1"/>
+          </a:fillRef>
+          <a:effectRef idx="2">
+            <a:schemeClr val="accent1"/>
+          </a:effectRef>
+          <a:fontRef idx="minor">
+            <a:schemeClr val="lt1"/>
+          </a:fontRef>
+        </p:style>
+        <p:txBody>
+          <a:bodyPr rtlCol="0" anchor="ctr"/>
+          <a:lstStyle/>
+          <a:p>
+            <a:pPr algn="ctr"/>
+          </a:p>
+        </p:txBody>
+      </p:sp>
+      <p:graphicFrame>
+        <p:nvGraphicFramePr>
+          <p:cNvPr id="6" name="Table 5"/>
+          <p:cNvGraphicFramePr>
+            <a:graphicFrameLocks noGrp="1"/>
+          </p:cNvGraphicFramePr>
+          <p:nvPr/>
+        </p:nvGraphicFramePr>
+        <p:xfrm>
+          <a:off x="365760" y="1143000"/>
+          <a:ext cx="11430000" cy="2852928"/>
+        </p:xfrm>
+        <a:graphic>
+          <a:graphicData uri="http://schemas.openxmlformats.org/drawingml/2006/table">
+            <a:tbl>
+              <a:tblPr firstRow="1" bandRow="1">
+                <a:tableStyleId>{5C22544A-7EE6-4342-B048-85BDC9FD1C3A}</a:tableStyleId>
+              </a:tblPr>
+              <a:tblGrid>
+                <a:gridCol w="3810000"/>
+                <a:gridCol w="3810000"/>
+                <a:gridCol w="3810000"/>
+              </a:tblGrid>
+              <a:tr h="475488">
+                <a:tc>
+                  <a:txBody>
+                    <a:bodyPr wrap="square"/>
+                    <a:lstStyle/>
+                    <a:p>
+                      <a:r>
+                        <a:rPr sz="1100" b="1">
+                          <a:solidFill>
+                            <a:srgbClr val="FFFFFF"/>
+                          </a:solidFill>
+                          <a:latin typeface="Arial"/>
+                        </a:rPr>
+                        <a:t>Fehler</a:t>
+                      </a:r>
+                    </a:p>
+                  </a:txBody>
+                  <a:tcPr>
+                    <a:solidFill>
+                      <a:srgbClr val="003DA5"/>
+                    </a:solidFill>
+                  </a:tcPr>
+                </a:tc>
+                <a:tc>
+                  <a:txBody>
+                    <a:bodyPr wrap="square"/>
+                    <a:lstStyle/>
+                    <a:p>
+                      <a:r>
+                        <a:rPr sz="1100" b="1">
+                          <a:solidFill>
+                            <a:srgbClr val="FFFFFF"/>
+                          </a:solidFill>
+                          <a:latin typeface="Arial"/>
+                        </a:rPr>
+                        <a:t>Folge</a:t>
+                      </a:r>
+                    </a:p>
+                  </a:txBody>
+                  <a:tcPr>
+                    <a:solidFill>
+                      <a:srgbClr val="003DA5"/>
+                    </a:solidFill>
+                  </a:tcPr>
+                </a:tc>
+                <a:tc>
+                  <a:txBody>
+                    <a:bodyPr wrap="square"/>
+                    <a:lstStyle/>
+                    <a:p>
+                      <a:r>
+                        <a:rPr sz="1100" b="1">
+                          <a:solidFill>
+                            <a:srgbClr val="FFFFFF"/>
+                          </a:solidFill>
+                          <a:latin typeface="Arial"/>
+                        </a:rPr>
+                        <a:t>Lösung</a:t>
+                      </a:r>
+                    </a:p>
+                  </a:txBody>
+                  <a:tcPr>
+                    <a:solidFill>
+                      <a:srgbClr val="003DA5"/>
+                    </a:solidFill>
+                  </a:tcPr>
+                </a:tc>
+              </a:tr>
+              <a:tr h="475488">
+                <a:tc>
+                  <a:txBody>
+                    <a:bodyPr wrap="square"/>
+                    <a:lstStyle/>
+                    <a:p>
+                      <a:r>
+                        <a:rPr sz="1100" b="0">
+                          <a:solidFill>
+                            <a:srgbClr val="1A1A1A"/>
+                          </a:solidFill>
+                          <a:latin typeface="Arial"/>
+                        </a:rPr>
+                        <a:t>Gesprächsergebnisse in E-Mail statt agree dokumentieren</a:t>
+                      </a:r>
+                    </a:p>
+                  </a:txBody>
+                  <a:tcPr>
+                    <a:solidFill>
+                      <a:srgbClr val="FFFFFF"/>
+                    </a:solidFill>
+                  </a:tcPr>
+                </a:tc>
+                <a:tc>
+                  <a:txBody>
+                    <a:bodyPr wrap="square"/>
+                    <a:lstStyle/>
+                    <a:p>
+                      <a:r>
+                        <a:rPr sz="1100" b="0">
+                          <a:solidFill>
+                            <a:srgbClr val="1A1A1A"/>
+                          </a:solidFill>
+                          <a:latin typeface="Arial"/>
+                        </a:rPr>
+                        <a:t>Kollege/Nachfolger hat keinen Zugriff; keine Revisionshistorie</a:t>
+                      </a:r>
+                    </a:p>
+                  </a:txBody>
+                  <a:tcPr>
+                    <a:solidFill>
+                      <a:srgbClr val="FFFFFF"/>
+                    </a:solidFill>
+                  </a:tcPr>
+                </a:tc>
+                <a:tc>
+                  <a:txBody>
+                    <a:bodyPr wrap="square"/>
+                    <a:lstStyle/>
+                    <a:p>
+                      <a:r>
+                        <a:rPr sz="1100" b="0">
+                          <a:solidFill>
+                            <a:srgbClr val="1A1A1A"/>
+                          </a:solidFill>
+                          <a:latin typeface="Arial"/>
+                        </a:rPr>
+                        <a:t>UnternehmerDialog-Protokoll direkt im System</a:t>
+                      </a:r>
+                    </a:p>
+                  </a:txBody>
+                  <a:tcPr>
+                    <a:solidFill>
+                      <a:srgbClr val="FFFFFF"/>
+                    </a:solidFill>
+                  </a:tcPr>
+                </a:tc>
+              </a:tr>
+              <a:tr h="475488">
+                <a:tc>
+                  <a:txBody>
+                    <a:bodyPr wrap="square"/>
+                    <a:lstStyle/>
+                    <a:p>
+                      <a:r>
+                        <a:rPr sz="1100" b="0">
+                          <a:solidFill>
+                            <a:srgbClr val="1A1A1A"/>
+                          </a:solidFill>
+                          <a:latin typeface="Arial"/>
+                        </a:rPr>
+                        <a:t>Kreditfälligkeiten manuell in Outlook tracken</a:t>
+                      </a:r>
+                    </a:p>
+                  </a:txBody>
+                  <a:tcPr>
+                    <a:solidFill>
+                      <a:srgbClr val="F4F6FA"/>
+                    </a:solidFill>
+                  </a:tcPr>
+                </a:tc>
+                <a:tc>
+                  <a:txBody>
+                    <a:bodyPr wrap="square"/>
+                    <a:lstStyle/>
+                    <a:p>
+                      <a:r>
+                        <a:rPr sz="1100" b="0">
+                          <a:solidFill>
+                            <a:srgbClr val="1A1A1A"/>
+                          </a:solidFill>
+                          <a:latin typeface="Arial"/>
+                        </a:rPr>
+                        <a:t>Fristversäumnisse, Doppelarbeit</a:t>
+                      </a:r>
+                    </a:p>
+                  </a:txBody>
+                  <a:tcPr>
+                    <a:solidFill>
+                      <a:srgbClr val="F4F6FA"/>
+                    </a:solidFill>
+                  </a:tcPr>
+                </a:tc>
+                <a:tc>
+                  <a:txBody>
+                    <a:bodyPr wrap="square"/>
+                    <a:lstStyle/>
+                    <a:p>
+                      <a:r>
+                        <a:rPr sz="1100" b="0">
+                          <a:solidFill>
+                            <a:srgbClr val="1A1A1A"/>
+                          </a:solidFill>
+                          <a:latin typeface="Arial"/>
+                        </a:rPr>
+                        <a:t>agree Prolongationsübersicht + Aufgabenmanagement</a:t>
+                      </a:r>
+                    </a:p>
+                  </a:txBody>
+                  <a:tcPr>
+                    <a:solidFill>
+                      <a:srgbClr val="F4F6FA"/>
+                    </a:solidFill>
+                  </a:tcPr>
+                </a:tc>
+              </a:tr>
+              <a:tr h="475488">
+                <a:tc>
+                  <a:txBody>
+                    <a:bodyPr wrap="square"/>
+                    <a:lstStyle/>
+                    <a:p>
+                      <a:r>
+                        <a:rPr sz="1100" b="0">
+                          <a:solidFill>
+                            <a:srgbClr val="1A1A1A"/>
+                          </a:solidFill>
+                          <a:latin typeface="Arial"/>
+                        </a:rPr>
+                        <a:t>NMZ nicht regelmäßig abrufen</a:t>
+                      </a:r>
+                    </a:p>
+                  </a:txBody>
+                  <a:tcPr>
+                    <a:solidFill>
+                      <a:srgbClr val="FFFFFF"/>
+                    </a:solidFill>
+                  </a:tcPr>
+                </a:tc>
+                <a:tc>
+                  <a:txBody>
+                    <a:bodyPr wrap="square"/>
+                    <a:lstStyle/>
+                    <a:p>
+                      <a:r>
+                        <a:rPr sz="1100" b="0">
+                          <a:solidFill>
+                            <a:srgbClr val="1A1A1A"/>
+                          </a:solidFill>
+                          <a:latin typeface="Arial"/>
+                        </a:rPr>
+                        <a:t>Schwache Kunden werden spät erkannt</a:t>
+                      </a:r>
+                    </a:p>
+                  </a:txBody>
+                  <a:tcPr>
+                    <a:solidFill>
+                      <a:srgbClr val="FFFFFF"/>
+                    </a:solidFill>
+                  </a:tcPr>
+                </a:tc>
+                <a:tc>
+                  <a:txBody>
+                    <a:bodyPr wrap="square"/>
+                    <a:lstStyle/>
+                    <a:p>
+                      <a:r>
+                        <a:rPr sz="1100" b="0">
+                          <a:solidFill>
+                            <a:srgbClr val="1A1A1A"/>
+                          </a:solidFill>
+                          <a:latin typeface="Arial"/>
+                        </a:rPr>
+                        <a:t>Monatliche NMZ-Routine (→ M16)</a:t>
+                      </a:r>
+                    </a:p>
+                  </a:txBody>
+                  <a:tcPr>
+                    <a:solidFill>
+                      <a:srgbClr val="FFFFFF"/>
+                    </a:solidFill>
+                  </a:tcPr>
+                </a:tc>
+              </a:tr>
+              <a:tr h="475488">
+                <a:tc>
+                  <a:txBody>
+                    <a:bodyPr wrap="square"/>
+                    <a:lstStyle/>
+                    <a:p>
+                      <a:r>
+                        <a:rPr sz="1100" b="0">
+                          <a:solidFill>
+                            <a:srgbClr val="1A1A1A"/>
+                          </a:solidFill>
+                          <a:latin typeface="Arial"/>
+                        </a:rPr>
+                        <a:t>Verbundpartner-Status nicht regelmäßig lesen</a:t>
+                      </a:r>
+                    </a:p>
+                  </a:txBody>
+                  <a:tcPr>
+                    <a:solidFill>
+                      <a:srgbClr val="F4F6FA"/>
+                    </a:solidFill>
+                  </a:tcPr>
+                </a:tc>
+                <a:tc>
+                  <a:txBody>
+                    <a:bodyPr wrap="square"/>
+                    <a:lstStyle/>
+                    <a:p>
+                      <a:r>
+                        <a:rPr sz="1100" b="0">
+                          <a:solidFill>
+                            <a:srgbClr val="1A1A1A"/>
+                          </a:solidFill>
+                          <a:latin typeface="Arial"/>
+                        </a:rPr>
+                        <a:t>Cross-Selling-Potenziale werden übersehen</a:t>
+                      </a:r>
+                    </a:p>
+                  </a:txBody>
+                  <a:tcPr>
+                    <a:solidFill>
+                      <a:srgbClr val="F4F6FA"/>
+                    </a:solidFill>
+                  </a:tcPr>
+                </a:tc>
+                <a:tc>
+                  <a:txBody>
+                    <a:bodyPr wrap="square"/>
+                    <a:lstStyle/>
+                    <a:p>
+                      <a:r>
+                        <a:rPr sz="1100" b="0">
+                          <a:solidFill>
+                            <a:srgbClr val="1A1A1A"/>
+                          </a:solidFill>
+                          <a:latin typeface="Arial"/>
+                        </a:rPr>
+                        <a:t>Verbundpartner-Cockpit wöchentlich lesen (nicht: selbst befüllen – das macht der Verbundpartner nach Abschluss)</a:t>
+                      </a:r>
+                    </a:p>
+                  </a:txBody>
+                  <a:tcPr>
+                    <a:solidFill>
+                      <a:srgbClr val="F4F6FA"/>
+                    </a:solidFill>
+                  </a:tcPr>
+                </a:tc>
+              </a:tr>
+              <a:tr h="475488">
+                <a:tc>
+                  <a:txBody>
+                    <a:bodyPr wrap="square"/>
+                    <a:lstStyle/>
+                    <a:p>
+                      <a:r>
+                        <a:rPr sz="1100" b="0">
+                          <a:solidFill>
+                            <a:srgbClr val="1A1A1A"/>
+                          </a:solidFill>
+                          <a:latin typeface="Arial"/>
+                        </a:rPr>
+                        <a:t>Eigene Excel-Kundenliste parallel zu agree führen (Kundenstamm)</a:t>
+                      </a:r>
+                    </a:p>
+                  </a:txBody>
+                  <a:tcPr>
+                    <a:solidFill>
+                      <a:srgbClr val="FFFFFF"/>
+                    </a:solidFill>
+                  </a:tcPr>
+                </a:tc>
+                <a:tc>
+                  <a:txBody>
+                    <a:bodyPr wrap="square"/>
+                    <a:lstStyle/>
+                    <a:p>
+                      <a:r>
+                        <a:rPr sz="1100" b="0">
+                          <a:solidFill>
+                            <a:srgbClr val="1A1A1A"/>
+                          </a:solidFill>
+                          <a:latin typeface="Arial"/>
+                        </a:rPr>
+                        <a:t>Doppelpflege, Fehlerquelle, DSGVO-Risiko</a:t>
+                      </a:r>
+                    </a:p>
+                  </a:txBody>
+                  <a:tcPr>
+                    <a:solidFill>
+                      <a:srgbClr val="FFFFFF"/>
+                    </a:solidFill>
+                  </a:tcPr>
+                </a:tc>
+                <a:tc>
+                  <a:txBody>
+                    <a:bodyPr wrap="square"/>
+                    <a:lstStyle/>
+                    <a:p>
+                      <a:r>
+                        <a:rPr sz="1100" b="0">
+                          <a:solidFill>
+                            <a:srgbClr val="1A1A1A"/>
+                          </a:solidFill>
+                          <a:latin typeface="Arial"/>
+                        </a:rPr>
+                        <a:t>agree als Single Source of Truth für Kundendaten; Excel für eigene Auswertungen ist ok, wenn agree keine flexible Filterung bietet – dann agree-Admin ansprechen (Zusatzmodule: agree-Analytics, Power BI-Schnittstelle)</a:t>
+                      </a:r>
+                    </a:p>
+                  </a:txBody>
+                  <a:tcPr>
+                    <a:solidFill>
+                      <a:srgbClr val="FFFFFF"/>
+                    </a:solidFill>
+                  </a:tcPr>
+                </a:tc>
+              </a:tr>
+            </a:tbl>
+          </a:graphicData>
+        </a:graphic>
+      </p:graphicFrame>
+    </p:spTree>
+  </p:cSld>
+  <p:clrMapOvr>
+    <a:masterClrMapping/>
+  </p:clrMapOvr>
+</p:sld>
+</file>
+
+<file path=ppt/slides/slide5.xml><?xml version="1.0" encoding="utf-8"?>
 <p:sld xmlns:a="http://schemas.openxmlformats.org/drawingml/2006/main" xmlns:p="http://schemas.openxmlformats.org/presentationml/2006/main" xmlns:r="http://schemas.openxmlformats.org/officeDocument/2006/relationships">
   <p:cSld>
     <p:bg>
@@ -4447,8 +7263,8 @@
         </p:nvSpPr>
         <p:spPr>
           <a:xfrm>
-            <a:off x="365760" y="2286000"/>
-            <a:ext cx="11430000" cy="1828800"/>
+            <a:off x="365760" y="2011680"/>
+            <a:ext cx="11430000" cy="2011680"/>
           </a:xfrm>
           <a:prstGeom prst="rect">
             <a:avLst/>
@@ -4463,7 +7279,7 @@
           <a:p>
             <a:pPr algn="l"/>
             <a:r>
-              <a:rPr sz="3600" b="1">
+              <a:rPr sz="3600" b="1" i="0">
                 <a:solidFill>
                   <a:srgbClr val="FFFFFF"/>
                 </a:solidFill>
@@ -4482,7 +7298,760 @@
 </p:sld>
 </file>
 
-<file path=ppt/slides/slide5.xml><?xml version="1.0" encoding="utf-8"?>
+<file path=ppt/slides/slide6.xml><?xml version="1.0" encoding="utf-8"?>
+<p:sld xmlns:a="http://schemas.openxmlformats.org/drawingml/2006/main" xmlns:p="http://schemas.openxmlformats.org/presentationml/2006/main" xmlns:r="http://schemas.openxmlformats.org/officeDocument/2006/relationships">
+  <p:cSld>
+    <p:bg>
+      <p:bgPr>
+        <a:solidFill>
+          <a:srgbClr val="FFFFFF"/>
+        </a:solidFill>
+        <a:effectLst/>
+      </p:bgPr>
+    </p:bg>
+    <p:spTree>
+      <p:nvGrpSpPr>
+        <p:cNvPr id="1" name=""/>
+        <p:cNvGrpSpPr/>
+        <p:nvPr/>
+      </p:nvGrpSpPr>
+      <p:grpSpPr/>
+      <p:sp>
+        <p:nvSpPr>
+          <p:cNvPr id="2" name="Rectangle 1"/>
+          <p:cNvSpPr/>
+          <p:nvPr/>
+        </p:nvSpPr>
+        <p:spPr>
+          <a:xfrm>
+            <a:off x="0" y="0"/>
+            <a:ext cx="73152" cy="6858000"/>
+          </a:xfrm>
+          <a:prstGeom prst="rect">
+            <a:avLst/>
+          </a:prstGeom>
+          <a:solidFill>
+            <a:srgbClr val="003DA5"/>
+          </a:solidFill>
+          <a:ln>
+            <a:noFill/>
+          </a:ln>
+        </p:spPr>
+        <p:style>
+          <a:lnRef idx="1">
+            <a:schemeClr val="accent1"/>
+          </a:lnRef>
+          <a:fillRef idx="3">
+            <a:schemeClr val="accent1"/>
+          </a:fillRef>
+          <a:effectRef idx="2">
+            <a:schemeClr val="accent1"/>
+          </a:effectRef>
+          <a:fontRef idx="minor">
+            <a:schemeClr val="lt1"/>
+          </a:fontRef>
+        </p:style>
+        <p:txBody>
+          <a:bodyPr rtlCol="0" anchor="ctr"/>
+          <a:lstStyle/>
+          <a:p>
+            <a:pPr algn="ctr"/>
+          </a:p>
+        </p:txBody>
+      </p:sp>
+      <p:sp>
+        <p:nvSpPr>
+          <p:cNvPr id="3" name="TextBox 2"/>
+          <p:cNvSpPr txBox="1"/>
+          <p:nvPr/>
+        </p:nvSpPr>
+        <p:spPr>
+          <a:xfrm>
+            <a:off x="228600" y="182880"/>
+            <a:ext cx="11430000" cy="320040"/>
+          </a:xfrm>
+          <a:prstGeom prst="rect">
+            <a:avLst/>
+          </a:prstGeom>
+          <a:noFill/>
+        </p:spPr>
+        <p:txBody>
+          <a:bodyPr wrap="square">
+            <a:spAutoFit/>
+          </a:bodyPr>
+          <a:lstStyle/>
+          <a:p>
+            <a:pPr algn="l"/>
+            <a:r>
+              <a:rPr sz="900" b="0" i="0">
+                <a:solidFill>
+                  <a:srgbClr val="556575"/>
+                </a:solidFill>
+                <a:latin typeface="Arial"/>
+              </a:rPr>
+              <a:t>M17 · 4.2 Effizienter Gesprächsworkflow: Vor – Während – Nach</a:t>
+            </a:r>
+          </a:p>
+        </p:txBody>
+      </p:sp>
+      <p:sp>
+        <p:nvSpPr>
+          <p:cNvPr id="4" name="TextBox 3"/>
+          <p:cNvSpPr txBox="1"/>
+          <p:nvPr/>
+        </p:nvSpPr>
+        <p:spPr>
+          <a:xfrm>
+            <a:off x="365760" y="274320"/>
+            <a:ext cx="11430000" cy="777240"/>
+          </a:xfrm>
+          <a:prstGeom prst="rect">
+            <a:avLst/>
+          </a:prstGeom>
+          <a:noFill/>
+        </p:spPr>
+        <p:txBody>
+          <a:bodyPr wrap="square">
+            <a:spAutoFit/>
+          </a:bodyPr>
+          <a:lstStyle/>
+          <a:p>
+            <a:pPr algn="l"/>
+            <a:r>
+              <a:rPr sz="2200" b="1" i="0">
+                <a:solidFill>
+                  <a:srgbClr val="003DA5"/>
+                </a:solidFill>
+                <a:latin typeface="Arial"/>
+              </a:rPr>
+              <a:t>Phase 1: Vorbereitung (15–20 Minuten statt 45–60 Minuten)</a:t>
+            </a:r>
+          </a:p>
+        </p:txBody>
+      </p:sp>
+      <p:sp>
+        <p:nvSpPr>
+          <p:cNvPr id="5" name="Rectangle 4"/>
+          <p:cNvSpPr/>
+          <p:nvPr/>
+        </p:nvSpPr>
+        <p:spPr>
+          <a:xfrm>
+            <a:off x="365760" y="1005840"/>
+            <a:ext cx="11430000" cy="27432"/>
+          </a:xfrm>
+          <a:prstGeom prst="rect">
+            <a:avLst/>
+          </a:prstGeom>
+          <a:solidFill>
+            <a:srgbClr val="D1D5DB"/>
+          </a:solidFill>
+          <a:ln>
+            <a:noFill/>
+          </a:ln>
+        </p:spPr>
+        <p:style>
+          <a:lnRef idx="1">
+            <a:schemeClr val="accent1"/>
+          </a:lnRef>
+          <a:fillRef idx="3">
+            <a:schemeClr val="accent1"/>
+          </a:fillRef>
+          <a:effectRef idx="2">
+            <a:schemeClr val="accent1"/>
+          </a:effectRef>
+          <a:fontRef idx="minor">
+            <a:schemeClr val="lt1"/>
+          </a:fontRef>
+        </p:style>
+        <p:txBody>
+          <a:bodyPr rtlCol="0" anchor="ctr"/>
+          <a:lstStyle/>
+          <a:p>
+            <a:pPr algn="ctr"/>
+          </a:p>
+        </p:txBody>
+      </p:sp>
+      <p:graphicFrame>
+        <p:nvGraphicFramePr>
+          <p:cNvPr id="6" name="Table 5"/>
+          <p:cNvGraphicFramePr>
+            <a:graphicFrameLocks noGrp="1"/>
+          </p:cNvGraphicFramePr>
+          <p:nvPr/>
+        </p:nvGraphicFramePr>
+        <p:xfrm>
+          <a:off x="365760" y="1143000"/>
+          <a:ext cx="11430000" cy="3803904"/>
+        </p:xfrm>
+        <a:graphic>
+          <a:graphicData uri="http://schemas.openxmlformats.org/drawingml/2006/table">
+            <a:tbl>
+              <a:tblPr firstRow="1" bandRow="1">
+                <a:tableStyleId>{5C22544A-7EE6-4342-B048-85BDC9FD1C3A}</a:tableStyleId>
+              </a:tblPr>
+              <a:tblGrid>
+                <a:gridCol w="3810000"/>
+                <a:gridCol w="3810000"/>
+                <a:gridCol w="3810000"/>
+              </a:tblGrid>
+              <a:tr h="475488">
+                <a:tc>
+                  <a:txBody>
+                    <a:bodyPr wrap="square"/>
+                    <a:lstStyle/>
+                    <a:p>
+                      <a:r>
+                        <a:rPr sz="1100" b="1">
+                          <a:solidFill>
+                            <a:srgbClr val="FFFFFF"/>
+                          </a:solidFill>
+                          <a:latin typeface="Arial"/>
+                        </a:rPr>
+                        <a:t>Schritt</a:t>
+                      </a:r>
+                    </a:p>
+                  </a:txBody>
+                  <a:tcPr>
+                    <a:solidFill>
+                      <a:srgbClr val="003DA5"/>
+                    </a:solidFill>
+                  </a:tcPr>
+                </a:tc>
+                <a:tc>
+                  <a:txBody>
+                    <a:bodyPr wrap="square"/>
+                    <a:lstStyle/>
+                    <a:p>
+                      <a:r>
+                        <a:rPr sz="1100" b="1">
+                          <a:solidFill>
+                            <a:srgbClr val="FFFFFF"/>
+                          </a:solidFill>
+                          <a:latin typeface="Arial"/>
+                        </a:rPr>
+                        <a:t>Wo in agree</a:t>
+                      </a:r>
+                    </a:p>
+                  </a:txBody>
+                  <a:tcPr>
+                    <a:solidFill>
+                      <a:srgbClr val="003DA5"/>
+                    </a:solidFill>
+                  </a:tcPr>
+                </a:tc>
+                <a:tc>
+                  <a:txBody>
+                    <a:bodyPr wrap="square"/>
+                    <a:lstStyle/>
+                    <a:p>
+                      <a:r>
+                        <a:rPr sz="1100" b="1">
+                          <a:solidFill>
+                            <a:srgbClr val="FFFFFF"/>
+                          </a:solidFill>
+                          <a:latin typeface="Arial"/>
+                        </a:rPr>
+                        <a:t>Zeitbedarf</a:t>
+                      </a:r>
+                    </a:p>
+                  </a:txBody>
+                  <a:tcPr>
+                    <a:solidFill>
+                      <a:srgbClr val="003DA5"/>
+                    </a:solidFill>
+                  </a:tcPr>
+                </a:tc>
+              </a:tr>
+              <a:tr h="475488">
+                <a:tc>
+                  <a:txBody>
+                    <a:bodyPr wrap="square"/>
+                    <a:lstStyle/>
+                    <a:p>
+                      <a:r>
+                        <a:rPr sz="1100" b="0">
+                          <a:solidFill>
+                            <a:srgbClr val="1A1A1A"/>
+                          </a:solidFill>
+                          <a:latin typeface="Arial"/>
+                        </a:rPr>
+                        <a:t>Kundenprofil öffnen – letzte Notizen/Protokolle lesen</a:t>
+                      </a:r>
+                    </a:p>
+                  </a:txBody>
+                  <a:tcPr>
+                    <a:solidFill>
+                      <a:srgbClr val="FFFFFF"/>
+                    </a:solidFill>
+                  </a:tcPr>
+                </a:tc>
+                <a:tc>
+                  <a:txBody>
+                    <a:bodyPr wrap="square"/>
+                    <a:lstStyle/>
+                    <a:p>
+                      <a:r>
+                        <a:rPr sz="1100" b="0">
+                          <a:solidFill>
+                            <a:srgbClr val="1A1A1A"/>
+                          </a:solidFill>
+                          <a:latin typeface="Arial"/>
+                        </a:rPr>
+                        <a:t>CRM → Kundenprofil → Aktivitäten</a:t>
+                      </a:r>
+                    </a:p>
+                  </a:txBody>
+                  <a:tcPr>
+                    <a:solidFill>
+                      <a:srgbClr val="FFFFFF"/>
+                    </a:solidFill>
+                  </a:tcPr>
+                </a:tc>
+                <a:tc>
+                  <a:txBody>
+                    <a:bodyPr wrap="square"/>
+                    <a:lstStyle/>
+                    <a:p>
+                      <a:r>
+                        <a:rPr sz="1100" b="0">
+                          <a:solidFill>
+                            <a:srgbClr val="1A1A1A"/>
+                          </a:solidFill>
+                          <a:latin typeface="Arial"/>
+                        </a:rPr>
+                        <a:t>3 Min.</a:t>
+                      </a:r>
+                    </a:p>
+                  </a:txBody>
+                  <a:tcPr>
+                    <a:solidFill>
+                      <a:srgbClr val="FFFFFF"/>
+                    </a:solidFill>
+                  </a:tcPr>
+                </a:tc>
+              </a:tr>
+              <a:tr h="475488">
+                <a:tc>
+                  <a:txBody>
+                    <a:bodyPr wrap="square"/>
+                    <a:lstStyle/>
+                    <a:p>
+                      <a:r>
+                        <a:rPr sz="1100" b="0">
+                          <a:solidFill>
+                            <a:srgbClr val="1A1A1A"/>
+                          </a:solidFill>
+                          <a:latin typeface="Arial"/>
+                        </a:rPr>
+                        <a:t>Kreditengagements: Volumen, Fälligkeiten, Auslastung</a:t>
+                      </a:r>
+                    </a:p>
+                  </a:txBody>
+                  <a:tcPr>
+                    <a:solidFill>
+                      <a:srgbClr val="F4F6FA"/>
+                    </a:solidFill>
+                  </a:tcPr>
+                </a:tc>
+                <a:tc>
+                  <a:txBody>
+                    <a:bodyPr wrap="square"/>
+                    <a:lstStyle/>
+                    <a:p>
+                      <a:r>
+                        <a:rPr sz="1100" b="0">
+                          <a:solidFill>
+                            <a:srgbClr val="1A1A1A"/>
+                          </a:solidFill>
+                          <a:latin typeface="Arial"/>
+                        </a:rPr>
+                        <a:t>Kreditbearbeitung → Engagementübersicht</a:t>
+                      </a:r>
+                    </a:p>
+                  </a:txBody>
+                  <a:tcPr>
+                    <a:solidFill>
+                      <a:srgbClr val="F4F6FA"/>
+                    </a:solidFill>
+                  </a:tcPr>
+                </a:tc>
+                <a:tc>
+                  <a:txBody>
+                    <a:bodyPr wrap="square"/>
+                    <a:lstStyle/>
+                    <a:p>
+                      <a:r>
+                        <a:rPr sz="1100" b="0">
+                          <a:solidFill>
+                            <a:srgbClr val="1A1A1A"/>
+                          </a:solidFill>
+                          <a:latin typeface="Arial"/>
+                        </a:rPr>
+                        <a:t>3 Min.</a:t>
+                      </a:r>
+                    </a:p>
+                  </a:txBody>
+                  <a:tcPr>
+                    <a:solidFill>
+                      <a:srgbClr val="F4F6FA"/>
+                    </a:solidFill>
+                  </a:tcPr>
+                </a:tc>
+              </a:tr>
+              <a:tr h="475488">
+                <a:tc>
+                  <a:txBody>
+                    <a:bodyPr wrap="square"/>
+                    <a:lstStyle/>
+                    <a:p>
+                      <a:r>
+                        <a:rPr sz="1100" b="0">
+                          <a:solidFill>
+                            <a:srgbClr val="1A1A1A"/>
+                          </a:solidFill>
+                          <a:latin typeface="Arial"/>
+                        </a:rPr>
+                        <a:t>NMZ und DB-Komponenten prüfen</a:t>
+                      </a:r>
+                    </a:p>
+                  </a:txBody>
+                  <a:tcPr>
+                    <a:solidFill>
+                      <a:srgbClr val="FFFFFF"/>
+                    </a:solidFill>
+                  </a:tcPr>
+                </a:tc>
+                <a:tc>
+                  <a:txBody>
+                    <a:bodyPr wrap="square"/>
+                    <a:lstStyle/>
+                    <a:p>
+                      <a:r>
+                        <a:rPr sz="1100" b="0">
+                          <a:solidFill>
+                            <a:srgbClr val="1A1A1A"/>
+                          </a:solidFill>
+                          <a:latin typeface="Arial"/>
+                        </a:rPr>
+                        <a:t>Controlling → Kundenprofitabilität</a:t>
+                      </a:r>
+                    </a:p>
+                  </a:txBody>
+                  <a:tcPr>
+                    <a:solidFill>
+                      <a:srgbClr val="FFFFFF"/>
+                    </a:solidFill>
+                  </a:tcPr>
+                </a:tc>
+                <a:tc>
+                  <a:txBody>
+                    <a:bodyPr wrap="square"/>
+                    <a:lstStyle/>
+                    <a:p>
+                      <a:r>
+                        <a:rPr sz="1100" b="0">
+                          <a:solidFill>
+                            <a:srgbClr val="1A1A1A"/>
+                          </a:solidFill>
+                          <a:latin typeface="Arial"/>
+                        </a:rPr>
+                        <a:t>2 Min.</a:t>
+                      </a:r>
+                    </a:p>
+                  </a:txBody>
+                  <a:tcPr>
+                    <a:solidFill>
+                      <a:srgbClr val="FFFFFF"/>
+                    </a:solidFill>
+                  </a:tcPr>
+                </a:tc>
+              </a:tr>
+              <a:tr h="475488">
+                <a:tc>
+                  <a:txBody>
+                    <a:bodyPr wrap="square"/>
+                    <a:lstStyle/>
+                    <a:p>
+                      <a:r>
+                        <a:rPr sz="1100" b="0">
+                          <a:solidFill>
+                            <a:srgbClr val="1A1A1A"/>
+                          </a:solidFill>
+                          <a:latin typeface="Arial"/>
+                        </a:rPr>
+                        <a:t>Verbundpartner-Cockpit: Welche Verbundprodukte? Was fehlt?</a:t>
+                      </a:r>
+                    </a:p>
+                  </a:txBody>
+                  <a:tcPr>
+                    <a:solidFill>
+                      <a:srgbClr val="F4F6FA"/>
+                    </a:solidFill>
+                  </a:tcPr>
+                </a:tc>
+                <a:tc>
+                  <a:txBody>
+                    <a:bodyPr wrap="square"/>
+                    <a:lstStyle/>
+                    <a:p>
+                      <a:r>
+                        <a:rPr sz="1100" b="0">
+                          <a:solidFill>
+                            <a:srgbClr val="1A1A1A"/>
+                          </a:solidFill>
+                          <a:latin typeface="Arial"/>
+                        </a:rPr>
+                        <a:t>Firmenkunden → Verbund → Cockpit</a:t>
+                      </a:r>
+                    </a:p>
+                  </a:txBody>
+                  <a:tcPr>
+                    <a:solidFill>
+                      <a:srgbClr val="F4F6FA"/>
+                    </a:solidFill>
+                  </a:tcPr>
+                </a:tc>
+                <a:tc>
+                  <a:txBody>
+                    <a:bodyPr wrap="square"/>
+                    <a:lstStyle/>
+                    <a:p>
+                      <a:r>
+                        <a:rPr sz="1100" b="0">
+                          <a:solidFill>
+                            <a:srgbClr val="1A1A1A"/>
+                          </a:solidFill>
+                          <a:latin typeface="Arial"/>
+                        </a:rPr>
+                        <a:t>3 Min.</a:t>
+                      </a:r>
+                    </a:p>
+                  </a:txBody>
+                  <a:tcPr>
+                    <a:solidFill>
+                      <a:srgbClr val="F4F6FA"/>
+                    </a:solidFill>
+                  </a:tcPr>
+                </a:tc>
+              </a:tr>
+              <a:tr h="475488">
+                <a:tc>
+                  <a:txBody>
+                    <a:bodyPr wrap="square"/>
+                    <a:lstStyle/>
+                    <a:p>
+                      <a:r>
+                        <a:rPr sz="1100" b="0">
+                          <a:solidFill>
+                            <a:srgbClr val="1A1A1A"/>
+                          </a:solidFill>
+                          <a:latin typeface="Arial"/>
+                        </a:rPr>
+                        <a:t>ZV-Analyse: Vollständig? Auslands-ZV?</a:t>
+                      </a:r>
+                    </a:p>
+                  </a:txBody>
+                  <a:tcPr>
+                    <a:solidFill>
+                      <a:srgbClr val="FFFFFF"/>
+                    </a:solidFill>
+                  </a:tcPr>
+                </a:tc>
+                <a:tc>
+                  <a:txBody>
+                    <a:bodyPr wrap="square"/>
+                    <a:lstStyle/>
+                    <a:p>
+                      <a:r>
+                        <a:rPr sz="1100" b="0">
+                          <a:solidFill>
+                            <a:srgbClr val="1A1A1A"/>
+                          </a:solidFill>
+                          <a:latin typeface="Arial"/>
+                        </a:rPr>
+                        <a:t>Zahlungsverkehr → Umsatzstruktur</a:t>
+                      </a:r>
+                    </a:p>
+                  </a:txBody>
+                  <a:tcPr>
+                    <a:solidFill>
+                      <a:srgbClr val="FFFFFF"/>
+                    </a:solidFill>
+                  </a:tcPr>
+                </a:tc>
+                <a:tc>
+                  <a:txBody>
+                    <a:bodyPr wrap="square"/>
+                    <a:lstStyle/>
+                    <a:p>
+                      <a:r>
+                        <a:rPr sz="1100" b="0">
+                          <a:solidFill>
+                            <a:srgbClr val="1A1A1A"/>
+                          </a:solidFill>
+                          <a:latin typeface="Arial"/>
+                        </a:rPr>
+                        <a:t>2 Min.</a:t>
+                      </a:r>
+                    </a:p>
+                  </a:txBody>
+                  <a:tcPr>
+                    <a:solidFill>
+                      <a:srgbClr val="FFFFFF"/>
+                    </a:solidFill>
+                  </a:tcPr>
+                </a:tc>
+              </a:tr>
+              <a:tr h="475488">
+                <a:tc>
+                  <a:txBody>
+                    <a:bodyPr wrap="square"/>
+                    <a:lstStyle/>
+                    <a:p>
+                      <a:r>
+                        <a:rPr sz="1100" b="0">
+                          <a:solidFill>
+                            <a:srgbClr val="1A1A1A"/>
+                          </a:solidFill>
+                          <a:latin typeface="Arial"/>
+                        </a:rPr>
+                        <a:t>UnternehmerDialog öffnen und Cross-Selling-Hypothesen notieren</a:t>
+                      </a:r>
+                    </a:p>
+                  </a:txBody>
+                  <a:tcPr>
+                    <a:solidFill>
+                      <a:srgbClr val="F4F6FA"/>
+                    </a:solidFill>
+                  </a:tcPr>
+                </a:tc>
+                <a:tc>
+                  <a:txBody>
+                    <a:bodyPr wrap="square"/>
+                    <a:lstStyle/>
+                    <a:p>
+                      <a:r>
+                        <a:rPr sz="1100" b="0">
+                          <a:solidFill>
+                            <a:srgbClr val="1A1A1A"/>
+                          </a:solidFill>
+                          <a:latin typeface="Arial"/>
+                        </a:rPr>
+                        <a:t>UnternehmerDialog → Vorbereitung</a:t>
+                      </a:r>
+                    </a:p>
+                  </a:txBody>
+                  <a:tcPr>
+                    <a:solidFill>
+                      <a:srgbClr val="F4F6FA"/>
+                    </a:solidFill>
+                  </a:tcPr>
+                </a:tc>
+                <a:tc>
+                  <a:txBody>
+                    <a:bodyPr wrap="square"/>
+                    <a:lstStyle/>
+                    <a:p>
+                      <a:r>
+                        <a:rPr sz="1100" b="0">
+                          <a:solidFill>
+                            <a:srgbClr val="1A1A1A"/>
+                          </a:solidFill>
+                          <a:latin typeface="Arial"/>
+                        </a:rPr>
+                        <a:t>5 Min.</a:t>
+                      </a:r>
+                    </a:p>
+                  </a:txBody>
+                  <a:tcPr>
+                    <a:solidFill>
+                      <a:srgbClr val="F4F6FA"/>
+                    </a:solidFill>
+                  </a:tcPr>
+                </a:tc>
+              </a:tr>
+              <a:tr h="475488">
+                <a:tc>
+                  <a:txBody>
+                    <a:bodyPr wrap="square"/>
+                    <a:lstStyle/>
+                    <a:p>
+                      <a:r>
+                        <a:rPr sz="1100" b="0">
+                          <a:solidFill>
+                            <a:srgbClr val="1A1A1A"/>
+                          </a:solidFill>
+                          <a:latin typeface="Arial"/>
+                        </a:rPr>
+                        <a:t>Gesamt</a:t>
+                      </a:r>
+                    </a:p>
+                  </a:txBody>
+                  <a:tcPr>
+                    <a:solidFill>
+                      <a:srgbClr val="FFFFFF"/>
+                    </a:solidFill>
+                  </a:tcPr>
+                </a:tc>
+                <a:tc>
+                  <a:txBody>
+                    <a:bodyPr wrap="square"/>
+                    <a:lstStyle/>
+                    <a:p>
+                      <a:r>
+                        <a:rPr sz="1100" b="0">
+                          <a:solidFill>
+                            <a:srgbClr val="1A1A1A"/>
+                          </a:solidFill>
+                          <a:latin typeface="Arial"/>
+                        </a:rPr>
+                        <a:t/>
+                      </a:r>
+                    </a:p>
+                  </a:txBody>
+                  <a:tcPr>
+                    <a:solidFill>
+                      <a:srgbClr val="FFFFFF"/>
+                    </a:solidFill>
+                  </a:tcPr>
+                </a:tc>
+                <a:tc>
+                  <a:txBody>
+                    <a:bodyPr wrap="square"/>
+                    <a:lstStyle/>
+                    <a:p>
+                      <a:r>
+                        <a:rPr sz="1100" b="0">
+                          <a:solidFill>
+                            <a:srgbClr val="1A1A1A"/>
+                          </a:solidFill>
+                          <a:latin typeface="Arial"/>
+                        </a:rPr>
+                        <a:t>~18 Min.</a:t>
+                      </a:r>
+                    </a:p>
+                  </a:txBody>
+                  <a:tcPr>
+                    <a:solidFill>
+                      <a:srgbClr val="FFFFFF"/>
+                    </a:solidFill>
+                  </a:tcPr>
+                </a:tc>
+              </a:tr>
+            </a:tbl>
+          </a:graphicData>
+        </a:graphic>
+      </p:graphicFrame>
+    </p:spTree>
+  </p:cSld>
+  <p:clrMapOvr>
+    <a:masterClrMapping/>
+  </p:clrMapOvr>
+</p:sld>
+</file>
+
+<file path=ppt/slides/slide7.xml><?xml version="1.0" encoding="utf-8"?>
 <p:sld xmlns:a="http://schemas.openxmlformats.org/drawingml/2006/main" xmlns:p="http://schemas.openxmlformats.org/presentationml/2006/main" xmlns:r="http://schemas.openxmlformats.org/officeDocument/2006/relationships">
   <p:cSld>
     <p:bg>
@@ -4551,8 +8120,8 @@
         </p:nvSpPr>
         <p:spPr>
           <a:xfrm>
-            <a:off x="365760" y="2286000"/>
-            <a:ext cx="11430000" cy="1828800"/>
+            <a:off x="365760" y="2011680"/>
+            <a:ext cx="11430000" cy="2011680"/>
           </a:xfrm>
           <a:prstGeom prst="rect">
             <a:avLst/>
@@ -4567,7 +8136,7 @@
           <a:p>
             <a:pPr algn="l"/>
             <a:r>
-              <a:rPr sz="3600" b="1">
+              <a:rPr sz="3600" b="1" i="0">
                 <a:solidFill>
                   <a:srgbClr val="FFFFFF"/>
                 </a:solidFill>
@@ -4586,7 +8155,262 @@
 </p:sld>
 </file>
 
-<file path=ppt/slides/slide6.xml><?xml version="1.0" encoding="utf-8"?>
+<file path=ppt/slides/slide8.xml><?xml version="1.0" encoding="utf-8"?>
+<p:sld xmlns:a="http://schemas.openxmlformats.org/drawingml/2006/main" xmlns:p="http://schemas.openxmlformats.org/presentationml/2006/main" xmlns:r="http://schemas.openxmlformats.org/officeDocument/2006/relationships">
+  <p:cSld>
+    <p:bg>
+      <p:bgPr>
+        <a:solidFill>
+          <a:srgbClr val="FFFFFF"/>
+        </a:solidFill>
+        <a:effectLst/>
+      </p:bgPr>
+    </p:bg>
+    <p:spTree>
+      <p:nvGrpSpPr>
+        <p:cNvPr id="1" name=""/>
+        <p:cNvGrpSpPr/>
+        <p:nvPr/>
+      </p:nvGrpSpPr>
+      <p:grpSpPr/>
+      <p:sp>
+        <p:nvSpPr>
+          <p:cNvPr id="2" name="Rectangle 1"/>
+          <p:cNvSpPr/>
+          <p:nvPr/>
+        </p:nvSpPr>
+        <p:spPr>
+          <a:xfrm>
+            <a:off x="0" y="0"/>
+            <a:ext cx="73152" cy="6858000"/>
+          </a:xfrm>
+          <a:prstGeom prst="rect">
+            <a:avLst/>
+          </a:prstGeom>
+          <a:solidFill>
+            <a:srgbClr val="003DA5"/>
+          </a:solidFill>
+          <a:ln>
+            <a:noFill/>
+          </a:ln>
+        </p:spPr>
+        <p:style>
+          <a:lnRef idx="1">
+            <a:schemeClr val="accent1"/>
+          </a:lnRef>
+          <a:fillRef idx="3">
+            <a:schemeClr val="accent1"/>
+          </a:fillRef>
+          <a:effectRef idx="2">
+            <a:schemeClr val="accent1"/>
+          </a:effectRef>
+          <a:fontRef idx="minor">
+            <a:schemeClr val="lt1"/>
+          </a:fontRef>
+        </p:style>
+        <p:txBody>
+          <a:bodyPr rtlCol="0" anchor="ctr"/>
+          <a:lstStyle/>
+          <a:p>
+            <a:pPr algn="ctr"/>
+          </a:p>
+        </p:txBody>
+      </p:sp>
+      <p:sp>
+        <p:nvSpPr>
+          <p:cNvPr id="3" name="TextBox 2"/>
+          <p:cNvSpPr txBox="1"/>
+          <p:nvPr/>
+        </p:nvSpPr>
+        <p:spPr>
+          <a:xfrm>
+            <a:off x="228600" y="182880"/>
+            <a:ext cx="11430000" cy="320040"/>
+          </a:xfrm>
+          <a:prstGeom prst="rect">
+            <a:avLst/>
+          </a:prstGeom>
+          <a:noFill/>
+        </p:spPr>
+        <p:txBody>
+          <a:bodyPr wrap="square">
+            <a:spAutoFit/>
+          </a:bodyPr>
+          <a:lstStyle/>
+          <a:p>
+            <a:pPr algn="l"/>
+            <a:r>
+              <a:rPr sz="900" b="0" i="0">
+                <a:solidFill>
+                  <a:srgbClr val="556575"/>
+                </a:solidFill>
+                <a:latin typeface="Arial"/>
+              </a:rPr>
+              <a:t>M17 · 4.2 Effizienter Gesprächsworkflow: Vor – Während – Nach</a:t>
+            </a:r>
+          </a:p>
+        </p:txBody>
+      </p:sp>
+      <p:sp>
+        <p:nvSpPr>
+          <p:cNvPr id="4" name="TextBox 3"/>
+          <p:cNvSpPr txBox="1"/>
+          <p:nvPr/>
+        </p:nvSpPr>
+        <p:spPr>
+          <a:xfrm>
+            <a:off x="365760" y="274320"/>
+            <a:ext cx="11430000" cy="777240"/>
+          </a:xfrm>
+          <a:prstGeom prst="rect">
+            <a:avLst/>
+          </a:prstGeom>
+          <a:noFill/>
+        </p:spPr>
+        <p:txBody>
+          <a:bodyPr wrap="square">
+            <a:spAutoFit/>
+          </a:bodyPr>
+          <a:lstStyle/>
+          <a:p>
+            <a:pPr algn="l"/>
+            <a:r>
+              <a:rPr sz="2200" b="1" i="0">
+                <a:solidFill>
+                  <a:srgbClr val="003DA5"/>
+                </a:solidFill>
+                <a:latin typeface="Arial"/>
+              </a:rPr>
+              <a:t>Phase 2: Während des Gesprächs</a:t>
+            </a:r>
+          </a:p>
+        </p:txBody>
+      </p:sp>
+      <p:sp>
+        <p:nvSpPr>
+          <p:cNvPr id="5" name="Rectangle 4"/>
+          <p:cNvSpPr/>
+          <p:nvPr/>
+        </p:nvSpPr>
+        <p:spPr>
+          <a:xfrm>
+            <a:off x="365760" y="1005840"/>
+            <a:ext cx="11430000" cy="27432"/>
+          </a:xfrm>
+          <a:prstGeom prst="rect">
+            <a:avLst/>
+          </a:prstGeom>
+          <a:solidFill>
+            <a:srgbClr val="D1D5DB"/>
+          </a:solidFill>
+          <a:ln>
+            <a:noFill/>
+          </a:ln>
+        </p:spPr>
+        <p:style>
+          <a:lnRef idx="1">
+            <a:schemeClr val="accent1"/>
+          </a:lnRef>
+          <a:fillRef idx="3">
+            <a:schemeClr val="accent1"/>
+          </a:fillRef>
+          <a:effectRef idx="2">
+            <a:schemeClr val="accent1"/>
+          </a:effectRef>
+          <a:fontRef idx="minor">
+            <a:schemeClr val="lt1"/>
+          </a:fontRef>
+        </p:style>
+        <p:txBody>
+          <a:bodyPr rtlCol="0" anchor="ctr"/>
+          <a:lstStyle/>
+          <a:p>
+            <a:pPr algn="ctr"/>
+          </a:p>
+        </p:txBody>
+      </p:sp>
+      <p:sp>
+        <p:nvSpPr>
+          <p:cNvPr id="6" name="TextBox 5"/>
+          <p:cNvSpPr txBox="1"/>
+          <p:nvPr/>
+        </p:nvSpPr>
+        <p:spPr>
+          <a:xfrm>
+            <a:off x="365760" y="1143000"/>
+            <a:ext cx="11430000" cy="5212080"/>
+          </a:xfrm>
+          <a:prstGeom prst="rect">
+            <a:avLst/>
+          </a:prstGeom>
+          <a:noFill/>
+        </p:spPr>
+        <p:txBody>
+          <a:bodyPr wrap="square">
+            <a:spAutoFit/>
+          </a:bodyPr>
+          <a:lstStyle/>
+          <a:p>
+            <a:pPr>
+              <a:spcBef>
+                <a:spcPts val="500"/>
+              </a:spcBef>
+            </a:pPr>
+            <a:r>
+              <a:rPr sz="1500">
+                <a:solidFill>
+                  <a:srgbClr val="003DA5"/>
+                </a:solidFill>
+                <a:latin typeface="Arial"/>
+              </a:rPr>
+              <a:t>▪  </a:t>
+            </a:r>
+            <a:r>
+              <a:rPr sz="1700">
+                <a:solidFill>
+                  <a:srgbClr val="1A1A1A"/>
+                </a:solidFill>
+                <a:latin typeface="Arial"/>
+              </a:rPr>
+              <a:t>Den UnternehmerDialog am Windows-PC oder Laptop offen haben und live befüllen. Der UnternehmerDialog läuft primär am Windows-PC. Wer mit Tablet im…</a:t>
+            </a:r>
+          </a:p>
+          <a:p>
+            <a:pPr>
+              <a:spcBef>
+                <a:spcPts val="500"/>
+              </a:spcBef>
+            </a:pPr>
+            <a:r>
+              <a:rPr sz="1500">
+                <a:solidFill>
+                  <a:srgbClr val="003DA5"/>
+                </a:solidFill>
+                <a:latin typeface="Arial"/>
+              </a:rPr>
+              <a:t>▪  </a:t>
+            </a:r>
+            <a:r>
+              <a:rPr sz="1700">
+                <a:solidFill>
+                  <a:srgbClr val="1A1A1A"/>
+                </a:solidFill>
+                <a:latin typeface="Arial"/>
+              </a:rPr>
+              <a:t>&gt; Einwand häufig: „Das wirkt unpersönlich." Gegenteil ist wahr: Wenn Sie tippen, zeigen Sie, dass Sie die Aussage des Kunden ernst nehmen. Transparent…</a:t>
+            </a:r>
+          </a:p>
+        </p:txBody>
+      </p:sp>
+    </p:spTree>
+  </p:cSld>
+  <p:clrMapOvr>
+    <a:masterClrMapping/>
+  </p:clrMapOvr>
+</p:sld>
+</file>
+
+<file path=ppt/slides/slide9.xml><?xml version="1.0" encoding="utf-8"?>
 <p:sld xmlns:a="http://schemas.openxmlformats.org/drawingml/2006/main" xmlns:p="http://schemas.openxmlformats.org/presentationml/2006/main" xmlns:r="http://schemas.openxmlformats.org/officeDocument/2006/relationships">
   <p:cSld>
     <p:bg>
@@ -4655,8 +8479,8 @@
         </p:nvSpPr>
         <p:spPr>
           <a:xfrm>
-            <a:off x="365760" y="2286000"/>
-            <a:ext cx="11430000" cy="1828800"/>
+            <a:off x="365760" y="2011680"/>
+            <a:ext cx="11430000" cy="2011680"/>
           </a:xfrm>
           <a:prstGeom prst="rect">
             <a:avLst/>
@@ -4671,325 +8495,13 @@
           <a:p>
             <a:pPr algn="l"/>
             <a:r>
-              <a:rPr sz="3600" b="1">
+              <a:rPr sz="3600" b="1" i="0">
                 <a:solidFill>
                   <a:srgbClr val="FFFFFF"/>
                 </a:solidFill>
                 <a:latin typeface="Arial"/>
               </a:rPr>
               <a:t>Phase 3: Nachbereitung (10 Minuten statt 30 Minuten)</a:t>
-            </a:r>
-          </a:p>
-        </p:txBody>
-      </p:sp>
-    </p:spTree>
-  </p:cSld>
-  <p:clrMapOvr>
-    <a:masterClrMapping/>
-  </p:clrMapOvr>
-</p:sld>
-</file>
-
-<file path=ppt/slides/slide7.xml><?xml version="1.0" encoding="utf-8"?>
-<p:sld xmlns:a="http://schemas.openxmlformats.org/drawingml/2006/main" xmlns:p="http://schemas.openxmlformats.org/presentationml/2006/main" xmlns:r="http://schemas.openxmlformats.org/officeDocument/2006/relationships">
-  <p:cSld>
-    <p:bg>
-      <p:bgPr>
-        <a:solidFill>
-          <a:srgbClr val="1A1A1A"/>
-        </a:solidFill>
-        <a:effectLst/>
-      </p:bgPr>
-    </p:bg>
-    <p:spTree>
-      <p:nvGrpSpPr>
-        <p:cNvPr id="1" name=""/>
-        <p:cNvGrpSpPr/>
-        <p:nvPr/>
-      </p:nvGrpSpPr>
-      <p:grpSpPr/>
-      <p:sp>
-        <p:nvSpPr>
-          <p:cNvPr id="2" name="Rectangle 1"/>
-          <p:cNvSpPr/>
-          <p:nvPr/>
-        </p:nvSpPr>
-        <p:spPr>
-          <a:xfrm>
-            <a:off x="0" y="0"/>
-            <a:ext cx="73152" cy="6858000"/>
-          </a:xfrm>
-          <a:prstGeom prst="rect">
-            <a:avLst/>
-          </a:prstGeom>
-          <a:solidFill>
-            <a:srgbClr val="E05B00"/>
-          </a:solidFill>
-          <a:ln>
-            <a:noFill/>
-          </a:ln>
-        </p:spPr>
-        <p:style>
-          <a:lnRef idx="1">
-            <a:schemeClr val="accent1"/>
-          </a:lnRef>
-          <a:fillRef idx="3">
-            <a:schemeClr val="accent1"/>
-          </a:fillRef>
-          <a:effectRef idx="2">
-            <a:schemeClr val="accent1"/>
-          </a:effectRef>
-          <a:fontRef idx="minor">
-            <a:schemeClr val="lt1"/>
-          </a:fontRef>
-        </p:style>
-        <p:txBody>
-          <a:bodyPr rtlCol="0" anchor="ctr"/>
-          <a:lstStyle/>
-          <a:p>
-            <a:pPr algn="ctr"/>
-          </a:p>
-        </p:txBody>
-      </p:sp>
-      <p:sp>
-        <p:nvSpPr>
-          <p:cNvPr id="3" name="TextBox 2"/>
-          <p:cNvSpPr txBox="1"/>
-          <p:nvPr/>
-        </p:nvSpPr>
-        <p:spPr>
-          <a:xfrm>
-            <a:off x="365760" y="2286000"/>
-            <a:ext cx="11430000" cy="1828800"/>
-          </a:xfrm>
-          <a:prstGeom prst="rect">
-            <a:avLst/>
-          </a:prstGeom>
-          <a:noFill/>
-        </p:spPr>
-        <p:txBody>
-          <a:bodyPr wrap="square">
-            <a:spAutoFit/>
-          </a:bodyPr>
-          <a:lstStyle/>
-          <a:p>
-            <a:pPr algn="l"/>
-            <a:r>
-              <a:rPr sz="3600" b="1">
-                <a:solidFill>
-                  <a:srgbClr val="FFFFFF"/>
-                </a:solidFill>
-                <a:latin typeface="Arial"/>
-              </a:rPr>
-              <a:t>Die Bedarfsdimensionen im UnternehmerDialog</a:t>
-            </a:r>
-          </a:p>
-        </p:txBody>
-      </p:sp>
-    </p:spTree>
-  </p:cSld>
-  <p:clrMapOvr>
-    <a:masterClrMapping/>
-  </p:clrMapOvr>
-</p:sld>
-</file>
-
-<file path=ppt/slides/slide8.xml><?xml version="1.0" encoding="utf-8"?>
-<p:sld xmlns:a="http://schemas.openxmlformats.org/drawingml/2006/main" xmlns:p="http://schemas.openxmlformats.org/presentationml/2006/main" xmlns:r="http://schemas.openxmlformats.org/officeDocument/2006/relationships">
-  <p:cSld>
-    <p:bg>
-      <p:bgPr>
-        <a:solidFill>
-          <a:srgbClr val="1A1A1A"/>
-        </a:solidFill>
-        <a:effectLst/>
-      </p:bgPr>
-    </p:bg>
-    <p:spTree>
-      <p:nvGrpSpPr>
-        <p:cNvPr id="1" name=""/>
-        <p:cNvGrpSpPr/>
-        <p:nvPr/>
-      </p:nvGrpSpPr>
-      <p:grpSpPr/>
-      <p:sp>
-        <p:nvSpPr>
-          <p:cNvPr id="2" name="Rectangle 1"/>
-          <p:cNvSpPr/>
-          <p:nvPr/>
-        </p:nvSpPr>
-        <p:spPr>
-          <a:xfrm>
-            <a:off x="0" y="0"/>
-            <a:ext cx="73152" cy="6858000"/>
-          </a:xfrm>
-          <a:prstGeom prst="rect">
-            <a:avLst/>
-          </a:prstGeom>
-          <a:solidFill>
-            <a:srgbClr val="E05B00"/>
-          </a:solidFill>
-          <a:ln>
-            <a:noFill/>
-          </a:ln>
-        </p:spPr>
-        <p:style>
-          <a:lnRef idx="1">
-            <a:schemeClr val="accent1"/>
-          </a:lnRef>
-          <a:fillRef idx="3">
-            <a:schemeClr val="accent1"/>
-          </a:fillRef>
-          <a:effectRef idx="2">
-            <a:schemeClr val="accent1"/>
-          </a:effectRef>
-          <a:fontRef idx="minor">
-            <a:schemeClr val="lt1"/>
-          </a:fontRef>
-        </p:style>
-        <p:txBody>
-          <a:bodyPr rtlCol="0" anchor="ctr"/>
-          <a:lstStyle/>
-          <a:p>
-            <a:pPr algn="ctr"/>
-          </a:p>
-        </p:txBody>
-      </p:sp>
-      <p:sp>
-        <p:nvSpPr>
-          <p:cNvPr id="3" name="TextBox 2"/>
-          <p:cNvSpPr txBox="1"/>
-          <p:nvPr/>
-        </p:nvSpPr>
-        <p:spPr>
-          <a:xfrm>
-            <a:off x="365760" y="2286000"/>
-            <a:ext cx="11430000" cy="1828800"/>
-          </a:xfrm>
-          <a:prstGeom prst="rect">
-            <a:avLst/>
-          </a:prstGeom>
-          <a:noFill/>
-        </p:spPr>
-        <p:txBody>
-          <a:bodyPr wrap="square">
-            <a:spAutoFit/>
-          </a:bodyPr>
-          <a:lstStyle/>
-          <a:p>
-            <a:pPr algn="l"/>
-            <a:r>
-              <a:rPr sz="3600" b="1">
-                <a:solidFill>
-                  <a:srgbClr val="FFFFFF"/>
-                </a:solidFill>
-                <a:latin typeface="Arial"/>
-              </a:rPr>
-              <a:t>Dokumentationsstandards</a:t>
-            </a:r>
-          </a:p>
-        </p:txBody>
-      </p:sp>
-    </p:spTree>
-  </p:cSld>
-  <p:clrMapOvr>
-    <a:masterClrMapping/>
-  </p:clrMapOvr>
-</p:sld>
-</file>
-
-<file path=ppt/slides/slide9.xml><?xml version="1.0" encoding="utf-8"?>
-<p:sld xmlns:a="http://schemas.openxmlformats.org/drawingml/2006/main" xmlns:p="http://schemas.openxmlformats.org/presentationml/2006/main" xmlns:r="http://schemas.openxmlformats.org/officeDocument/2006/relationships">
-  <p:cSld>
-    <p:bg>
-      <p:bgPr>
-        <a:solidFill>
-          <a:srgbClr val="1A1A1A"/>
-        </a:solidFill>
-        <a:effectLst/>
-      </p:bgPr>
-    </p:bg>
-    <p:spTree>
-      <p:nvGrpSpPr>
-        <p:cNvPr id="1" name=""/>
-        <p:cNvGrpSpPr/>
-        <p:nvPr/>
-      </p:nvGrpSpPr>
-      <p:grpSpPr/>
-      <p:sp>
-        <p:nvSpPr>
-          <p:cNvPr id="2" name="Rectangle 1"/>
-          <p:cNvSpPr/>
-          <p:nvPr/>
-        </p:nvSpPr>
-        <p:spPr>
-          <a:xfrm>
-            <a:off x="0" y="0"/>
-            <a:ext cx="73152" cy="6858000"/>
-          </a:xfrm>
-          <a:prstGeom prst="rect">
-            <a:avLst/>
-          </a:prstGeom>
-          <a:solidFill>
-            <a:srgbClr val="E05B00"/>
-          </a:solidFill>
-          <a:ln>
-            <a:noFill/>
-          </a:ln>
-        </p:spPr>
-        <p:style>
-          <a:lnRef idx="1">
-            <a:schemeClr val="accent1"/>
-          </a:lnRef>
-          <a:fillRef idx="3">
-            <a:schemeClr val="accent1"/>
-          </a:fillRef>
-          <a:effectRef idx="2">
-            <a:schemeClr val="accent1"/>
-          </a:effectRef>
-          <a:fontRef idx="minor">
-            <a:schemeClr val="lt1"/>
-          </a:fontRef>
-        </p:style>
-        <p:txBody>
-          <a:bodyPr rtlCol="0" anchor="ctr"/>
-          <a:lstStyle/>
-          <a:p>
-            <a:pPr algn="ctr"/>
-          </a:p>
-        </p:txBody>
-      </p:sp>
-      <p:sp>
-        <p:nvSpPr>
-          <p:cNvPr id="3" name="TextBox 2"/>
-          <p:cNvSpPr txBox="1"/>
-          <p:nvPr/>
-        </p:nvSpPr>
-        <p:spPr>
-          <a:xfrm>
-            <a:off x="365760" y="2286000"/>
-            <a:ext cx="11430000" cy="1828800"/>
-          </a:xfrm>
-          <a:prstGeom prst="rect">
-            <a:avLst/>
-          </a:prstGeom>
-          <a:noFill/>
-        </p:spPr>
-        <p:txBody>
-          <a:bodyPr wrap="square">
-            <a:spAutoFit/>
-          </a:bodyPr>
-          <a:lstStyle/>
-          <a:p>
-            <a:pPr algn="l"/>
-            <a:r>
-              <a:rPr sz="3600" b="1">
-                <a:solidFill>
-                  <a:srgbClr val="FFFFFF"/>
-                </a:solidFill>
-                <a:latin typeface="Arial"/>
-              </a:rPr>
-              <a:t>Arbeitsblatt A: Mein agree-Selbstcheck</a:t>
             </a:r>
           </a:p>
         </p:txBody>

--- a/public/downloads/praesentation/M17.pptx
+++ b/public/downloads/praesentation/M17.pptx
@@ -3731,7 +3731,7 @@
                   </a:txBody>
                   <a:tcPr>
                     <a:solidFill>
-                      <a:srgbClr val="191D2E"/>
+                      <a:srgbClr val="1F2B56"/>
                     </a:solidFill>
                   </a:tcPr>
                 </a:tc>
@@ -3753,7 +3753,7 @@
                   </a:txBody>
                   <a:tcPr>
                     <a:solidFill>
-                      <a:srgbClr val="191D2E"/>
+                      <a:srgbClr val="1F2B56"/>
                     </a:solidFill>
                   </a:tcPr>
                 </a:tc>
@@ -3775,7 +3775,7 @@
                   </a:txBody>
                   <a:tcPr>
                     <a:solidFill>
-                      <a:srgbClr val="191D2E"/>
+                      <a:srgbClr val="1F2B56"/>
                     </a:solidFill>
                   </a:tcPr>
                 </a:tc>
@@ -4978,7 +4978,7 @@
     <p:bg>
       <p:bgPr>
         <a:solidFill>
-          <a:srgbClr val="191D2E"/>
+          <a:srgbClr val="1F2B56"/>
         </a:solidFill>
         <a:effectLst/>
       </p:bgPr>
@@ -5179,7 +5179,7 @@
     <p:bg>
       <p:bgPr>
         <a:solidFill>
-          <a:srgbClr val="191D2E"/>
+          <a:srgbClr val="1F2B56"/>
         </a:solidFill>
         <a:effectLst/>
       </p:bgPr>
@@ -5380,7 +5380,7 @@
     <p:bg>
       <p:bgPr>
         <a:solidFill>
-          <a:srgbClr val="191D2E"/>
+          <a:srgbClr val="1F2B56"/>
         </a:solidFill>
         <a:effectLst/>
       </p:bgPr>
@@ -5581,7 +5581,7 @@
     <p:bg>
       <p:bgPr>
         <a:solidFill>
-          <a:srgbClr val="191D2E"/>
+          <a:srgbClr val="1F2B56"/>
         </a:solidFill>
         <a:effectLst/>
       </p:bgPr>
@@ -5986,7 +5986,7 @@
         <p:spPr>
           <a:xfrm>
             <a:off x="609600" y="920750"/>
-            <a:ext cx="10972800" cy="1778000"/>
+            <a:ext cx="4826000" cy="1778000"/>
           </a:xfrm>
           <a:prstGeom prst="rect">
             <a:avLst/>
@@ -6014,57 +6014,14 @@
       </p:sp>
       <p:sp>
         <p:nvSpPr>
-          <p:cNvPr id="7" name="Rectangle 6"/>
-          <p:cNvSpPr/>
-          <p:nvPr/>
-        </p:nvSpPr>
-        <p:spPr>
-          <a:xfrm>
-            <a:off x="609600" y="2762250"/>
-            <a:ext cx="10972800" cy="6350"/>
-          </a:xfrm>
-          <a:prstGeom prst="rect">
-            <a:avLst/>
-          </a:prstGeom>
-          <a:solidFill>
-            <a:srgbClr val="E0E0E8"/>
-          </a:solidFill>
-          <a:ln>
-            <a:noFill/>
-          </a:ln>
-        </p:spPr>
-        <p:style>
-          <a:lnRef idx="1">
-            <a:schemeClr val="accent1"/>
-          </a:lnRef>
-          <a:fillRef idx="3">
-            <a:schemeClr val="accent1"/>
-          </a:fillRef>
-          <a:effectRef idx="2">
-            <a:schemeClr val="accent1"/>
-          </a:effectRef>
-          <a:fontRef idx="minor">
-            <a:schemeClr val="lt1"/>
-          </a:fontRef>
-        </p:style>
-        <p:txBody>
-          <a:bodyPr rtlCol="0" anchor="ctr"/>
-          <a:lstStyle/>
-          <a:p>
-            <a:pPr algn="ctr"/>
-          </a:p>
-        </p:txBody>
-      </p:sp>
-      <p:sp>
-        <p:nvSpPr>
-          <p:cNvPr id="8" name="TextBox 7"/>
-          <p:cNvSpPr txBox="1"/>
-          <p:nvPr/>
-        </p:nvSpPr>
-        <p:spPr>
-          <a:xfrm>
-            <a:off x="609600" y="2876550"/>
-            <a:ext cx="254000" cy="355600"/>
+          <p:cNvPr id="7" name="TextBox 6"/>
+          <p:cNvSpPr txBox="1"/>
+          <p:nvPr/>
+        </p:nvSpPr>
+        <p:spPr>
+          <a:xfrm>
+            <a:off x="609600" y="2825750"/>
+            <a:ext cx="4826000" cy="1016000"/>
           </a:xfrm>
           <a:prstGeom prst="rect">
             <a:avLst/>
@@ -6079,208 +6036,588 @@
           <a:p>
             <a:pPr algn="l"/>
             <a:r>
-              <a:rPr sz="2200" b="0" i="0">
-                <a:solidFill>
-                  <a:srgbClr val="1F2B56"/>
+              <a:rPr sz="1400" b="0" i="0">
+                <a:solidFill>
+                  <a:srgbClr val="4D5270"/>
                 </a:solidFill>
                 <a:latin typeface="Georgia"/>
               </a:rPr>
-              <a:t>–</a:t>
-            </a:r>
-          </a:p>
-        </p:txBody>
-      </p:sp>
-      <p:sp>
-        <p:nvSpPr>
-          <p:cNvPr id="9" name="TextBox 8"/>
-          <p:cNvSpPr txBox="1"/>
-          <p:nvPr/>
-        </p:nvSpPr>
-        <p:spPr>
-          <a:xfrm>
-            <a:off x="939799" y="2851150"/>
-            <a:ext cx="10642600" cy="508000"/>
-          </a:xfrm>
-          <a:prstGeom prst="rect">
-            <a:avLst/>
-          </a:prstGeom>
-          <a:noFill/>
-        </p:spPr>
-        <p:txBody>
-          <a:bodyPr wrap="square">
-            <a:normAutofit/>
-          </a:bodyPr>
-          <a:lstStyle/>
-          <a:p>
-            <a:pPr algn="l"/>
-            <a:r>
-              <a:rPr sz="1400" b="0" i="0">
-                <a:solidFill>
-                  <a:srgbClr val="191D2E"/>
-                </a:solidFill>
-                <a:latin typeface="Georgia"/>
-              </a:rPr>
-              <a:t>___________________________________________________________________________</a:t>
-            </a:r>
-          </a:p>
-        </p:txBody>
-      </p:sp>
-      <p:sp>
-        <p:nvSpPr>
-          <p:cNvPr id="10" name="Rectangle 9"/>
-          <p:cNvSpPr/>
-          <p:nvPr/>
-        </p:nvSpPr>
-        <p:spPr>
-          <a:xfrm>
-            <a:off x="939799" y="3333750"/>
-            <a:ext cx="10642600" cy="6350"/>
-          </a:xfrm>
-          <a:prstGeom prst="rect">
-            <a:avLst/>
-          </a:prstGeom>
-          <a:solidFill>
-            <a:srgbClr val="E0E0E8"/>
-          </a:solidFill>
-          <a:ln>
-            <a:noFill/>
-          </a:ln>
-        </p:spPr>
-        <p:style>
-          <a:lnRef idx="1">
-            <a:schemeClr val="accent1"/>
-          </a:lnRef>
-          <a:fillRef idx="3">
-            <a:schemeClr val="accent1"/>
-          </a:fillRef>
-          <a:effectRef idx="2">
-            <a:schemeClr val="accent1"/>
-          </a:effectRef>
-          <a:fontRef idx="minor">
-            <a:schemeClr val="lt1"/>
-          </a:fontRef>
-        </p:style>
-        <p:txBody>
-          <a:bodyPr rtlCol="0" anchor="ctr"/>
-          <a:lstStyle/>
-          <a:p>
-            <a:pPr algn="ctr"/>
-          </a:p>
-        </p:txBody>
-      </p:sp>
-      <p:sp>
-        <p:nvSpPr>
-          <p:cNvPr id="11" name="TextBox 10"/>
-          <p:cNvSpPr txBox="1"/>
-          <p:nvPr/>
-        </p:nvSpPr>
-        <p:spPr>
-          <a:xfrm>
-            <a:off x="609600" y="3409950"/>
-            <a:ext cx="254000" cy="355600"/>
-          </a:xfrm>
-          <a:prstGeom prst="rect">
-            <a:avLst/>
-          </a:prstGeom>
-          <a:noFill/>
-        </p:spPr>
-        <p:txBody>
-          <a:bodyPr wrap="square">
-            <a:normAutofit/>
-          </a:bodyPr>
-          <a:lstStyle/>
-          <a:p>
-            <a:pPr algn="l"/>
-            <a:r>
-              <a:rPr sz="2200" b="0" i="0">
-                <a:solidFill>
-                  <a:srgbClr val="1F2B56"/>
-                </a:solidFill>
-                <a:latin typeface="Georgia"/>
-              </a:rPr>
-              <a:t>–</a:t>
-            </a:r>
-          </a:p>
-        </p:txBody>
-      </p:sp>
-      <p:sp>
-        <p:nvSpPr>
-          <p:cNvPr id="12" name="TextBox 11"/>
-          <p:cNvSpPr txBox="1"/>
-          <p:nvPr/>
-        </p:nvSpPr>
-        <p:spPr>
-          <a:xfrm>
-            <a:off x="939799" y="3384550"/>
-            <a:ext cx="10642600" cy="508000"/>
-          </a:xfrm>
-          <a:prstGeom prst="rect">
-            <a:avLst/>
-          </a:prstGeom>
-          <a:noFill/>
-        </p:spPr>
-        <p:txBody>
-          <a:bodyPr wrap="square">
-            <a:normAutofit/>
-          </a:bodyPr>
-          <a:lstStyle/>
-          <a:p>
-            <a:pPr algn="l"/>
-            <a:r>
-              <a:rPr sz="1400" b="0" i="0">
-                <a:solidFill>
-                  <a:srgbClr val="191D2E"/>
-                </a:solidFill>
-                <a:latin typeface="Georgia"/>
-              </a:rPr>
-              <a:t>___________________________________________________________________________</a:t>
-            </a:r>
-          </a:p>
-        </p:txBody>
-      </p:sp>
-      <p:sp>
-        <p:nvSpPr>
-          <p:cNvPr id="13" name="Rectangle 12"/>
-          <p:cNvSpPr/>
-          <p:nvPr/>
-        </p:nvSpPr>
-        <p:spPr>
-          <a:xfrm>
-            <a:off x="939799" y="3867150"/>
-            <a:ext cx="10642600" cy="6350"/>
-          </a:xfrm>
-          <a:prstGeom prst="rect">
-            <a:avLst/>
-          </a:prstGeom>
-          <a:solidFill>
-            <a:srgbClr val="E0E0E8"/>
-          </a:solidFill>
-          <a:ln>
-            <a:noFill/>
-          </a:ln>
-        </p:spPr>
-        <p:style>
-          <a:lnRef idx="1">
-            <a:schemeClr val="accent1"/>
-          </a:lnRef>
-          <a:fillRef idx="3">
-            <a:schemeClr val="accent1"/>
-          </a:fillRef>
-          <a:effectRef idx="2">
-            <a:schemeClr val="accent1"/>
-          </a:effectRef>
-          <a:fontRef idx="minor">
-            <a:schemeClr val="lt1"/>
-          </a:fontRef>
-        </p:style>
-        <p:txBody>
-          <a:bodyPr rtlCol="0" anchor="ctr"/>
-          <a:lstStyle/>
-          <a:p>
-            <a:pPr algn="ctr"/>
-          </a:p>
-        </p:txBody>
-      </p:sp>
+              <a:t>Bewerten Sie Ihren aktuellen Umgang mit agree ehrlich (1 = nutze ich kaum / 5 = nutze ich routiniert):</a:t>
+            </a:r>
+          </a:p>
+        </p:txBody>
+      </p:sp>
+      <p:graphicFrame>
+        <p:nvGraphicFramePr>
+          <p:cNvPr id="8" name="Table 7"/>
+          <p:cNvGraphicFramePr>
+            <a:graphicFrameLocks noGrp="1"/>
+          </p:cNvGraphicFramePr>
+          <p:nvPr/>
+        </p:nvGraphicFramePr>
+        <p:xfrm>
+          <a:off x="5715000" y="920750"/>
+          <a:ext cx="5867400" cy="3048000"/>
+        </p:xfrm>
+        <a:graphic>
+          <a:graphicData uri="http://schemas.openxmlformats.org/drawingml/2006/table">
+            <a:tbl>
+              <a:tblPr firstRow="1" bandRow="1">
+                <a:tableStyleId>{5C22544A-7EE6-4342-B048-85BDC9FD1C3A}</a:tableStyleId>
+              </a:tblPr>
+              <a:tblGrid>
+                <a:gridCol w="1955800"/>
+                <a:gridCol w="1955800"/>
+                <a:gridCol w="1955800"/>
+              </a:tblGrid>
+              <a:tr h="381000">
+                <a:tc>
+                  <a:txBody>
+                    <a:bodyPr wrap="square"/>
+                    <a:lstStyle/>
+                    <a:p>
+                      <a:r>
+                        <a:rPr sz="1000" b="1">
+                          <a:solidFill>
+                            <a:srgbClr val="F8F8FA"/>
+                          </a:solidFill>
+                          <a:latin typeface="Courier New"/>
+                        </a:rPr>
+                        <a:t>agree-Bereich</a:t>
+                      </a:r>
+                    </a:p>
+                  </a:txBody>
+                  <a:tcPr>
+                    <a:solidFill>
+                      <a:srgbClr val="1F2B56"/>
+                    </a:solidFill>
+                  </a:tcPr>
+                </a:tc>
+                <a:tc>
+                  <a:txBody>
+                    <a:bodyPr wrap="square"/>
+                    <a:lstStyle/>
+                    <a:p>
+                      <a:r>
+                        <a:rPr sz="1000" b="1">
+                          <a:solidFill>
+                            <a:srgbClr val="F8F8FA"/>
+                          </a:solidFill>
+                          <a:latin typeface="Courier New"/>
+                        </a:rPr>
+                        <a:t>Meine Nutzung (1–5)</a:t>
+                      </a:r>
+                    </a:p>
+                  </a:txBody>
+                  <a:tcPr>
+                    <a:solidFill>
+                      <a:srgbClr val="1F2B56"/>
+                    </a:solidFill>
+                  </a:tcPr>
+                </a:tc>
+                <a:tc>
+                  <a:txBody>
+                    <a:bodyPr wrap="square"/>
+                    <a:lstStyle/>
+                    <a:p>
+                      <a:r>
+                        <a:rPr sz="1000" b="1">
+                          <a:solidFill>
+                            <a:srgbClr val="F8F8FA"/>
+                          </a:solidFill>
+                          <a:latin typeface="Courier New"/>
+                        </a:rPr>
+                        <a:t>Wichtigste Verbesserung</a:t>
+                      </a:r>
+                    </a:p>
+                  </a:txBody>
+                  <a:tcPr>
+                    <a:solidFill>
+                      <a:srgbClr val="1F2B56"/>
+                    </a:solidFill>
+                  </a:tcPr>
+                </a:tc>
+              </a:tr>
+              <a:tr h="381000">
+                <a:tc>
+                  <a:txBody>
+                    <a:bodyPr wrap="square"/>
+                    <a:lstStyle/>
+                    <a:p>
+                      <a:r>
+                        <a:rPr sz="1000" b="0">
+                          <a:solidFill>
+                            <a:srgbClr val="191D2E"/>
+                          </a:solidFill>
+                          <a:latin typeface="Courier New"/>
+                        </a:rPr>
+                        <a:t>CRM / Kundenprofil</a:t>
+                      </a:r>
+                    </a:p>
+                  </a:txBody>
+                  <a:tcPr>
+                    <a:solidFill>
+                      <a:srgbClr val="F8F8FA"/>
+                    </a:solidFill>
+                  </a:tcPr>
+                </a:tc>
+                <a:tc>
+                  <a:txBody>
+                    <a:bodyPr wrap="square"/>
+                    <a:lstStyle/>
+                    <a:p>
+                      <a:r>
+                        <a:rPr sz="1000" b="0">
+                          <a:solidFill>
+                            <a:srgbClr val="191D2E"/>
+                          </a:solidFill>
+                          <a:latin typeface="Courier New"/>
+                        </a:rPr>
+                        <a:t/>
+                      </a:r>
+                    </a:p>
+                  </a:txBody>
+                  <a:tcPr>
+                    <a:solidFill>
+                      <a:srgbClr val="F8F8FA"/>
+                    </a:solidFill>
+                  </a:tcPr>
+                </a:tc>
+                <a:tc>
+                  <a:txBody>
+                    <a:bodyPr wrap="square"/>
+                    <a:lstStyle/>
+                    <a:p>
+                      <a:r>
+                        <a:rPr sz="1000" b="0">
+                          <a:solidFill>
+                            <a:srgbClr val="191D2E"/>
+                          </a:solidFill>
+                          <a:latin typeface="Courier New"/>
+                        </a:rPr>
+                        <a:t/>
+                      </a:r>
+                    </a:p>
+                  </a:txBody>
+                  <a:tcPr>
+                    <a:solidFill>
+                      <a:srgbClr val="F8F8FA"/>
+                    </a:solidFill>
+                  </a:tcPr>
+                </a:tc>
+              </a:tr>
+              <a:tr h="381000">
+                <a:tc>
+                  <a:txBody>
+                    <a:bodyPr wrap="square"/>
+                    <a:lstStyle/>
+                    <a:p>
+                      <a:r>
+                        <a:rPr sz="1000" b="0">
+                          <a:solidFill>
+                            <a:srgbClr val="191D2E"/>
+                          </a:solidFill>
+                          <a:latin typeface="Courier New"/>
+                        </a:rPr>
+                        <a:t>UnternehmerDialog</a:t>
+                      </a:r>
+                    </a:p>
+                  </a:txBody>
+                  <a:tcPr>
+                    <a:solidFill>
+                      <a:srgbClr val="F0F0F5"/>
+                    </a:solidFill>
+                  </a:tcPr>
+                </a:tc>
+                <a:tc>
+                  <a:txBody>
+                    <a:bodyPr wrap="square"/>
+                    <a:lstStyle/>
+                    <a:p>
+                      <a:r>
+                        <a:rPr sz="1000" b="0">
+                          <a:solidFill>
+                            <a:srgbClr val="191D2E"/>
+                          </a:solidFill>
+                          <a:latin typeface="Courier New"/>
+                        </a:rPr>
+                        <a:t/>
+                      </a:r>
+                    </a:p>
+                  </a:txBody>
+                  <a:tcPr>
+                    <a:solidFill>
+                      <a:srgbClr val="F0F0F5"/>
+                    </a:solidFill>
+                  </a:tcPr>
+                </a:tc>
+                <a:tc>
+                  <a:txBody>
+                    <a:bodyPr wrap="square"/>
+                    <a:lstStyle/>
+                    <a:p>
+                      <a:r>
+                        <a:rPr sz="1000" b="0">
+                          <a:solidFill>
+                            <a:srgbClr val="191D2E"/>
+                          </a:solidFill>
+                          <a:latin typeface="Courier New"/>
+                        </a:rPr>
+                        <a:t/>
+                      </a:r>
+                    </a:p>
+                  </a:txBody>
+                  <a:tcPr>
+                    <a:solidFill>
+                      <a:srgbClr val="F0F0F5"/>
+                    </a:solidFill>
+                  </a:tcPr>
+                </a:tc>
+              </a:tr>
+              <a:tr h="381000">
+                <a:tc>
+                  <a:txBody>
+                    <a:bodyPr wrap="square"/>
+                    <a:lstStyle/>
+                    <a:p>
+                      <a:r>
+                        <a:rPr sz="1000" b="0">
+                          <a:solidFill>
+                            <a:srgbClr val="191D2E"/>
+                          </a:solidFill>
+                          <a:latin typeface="Courier New"/>
+                        </a:rPr>
+                        <a:t>Kreditbearbeitung / Prolongation</a:t>
+                      </a:r>
+                    </a:p>
+                  </a:txBody>
+                  <a:tcPr>
+                    <a:solidFill>
+                      <a:srgbClr val="F8F8FA"/>
+                    </a:solidFill>
+                  </a:tcPr>
+                </a:tc>
+                <a:tc>
+                  <a:txBody>
+                    <a:bodyPr wrap="square"/>
+                    <a:lstStyle/>
+                    <a:p>
+                      <a:r>
+                        <a:rPr sz="1000" b="0">
+                          <a:solidFill>
+                            <a:srgbClr val="191D2E"/>
+                          </a:solidFill>
+                          <a:latin typeface="Courier New"/>
+                        </a:rPr>
+                        <a:t/>
+                      </a:r>
+                    </a:p>
+                  </a:txBody>
+                  <a:tcPr>
+                    <a:solidFill>
+                      <a:srgbClr val="F8F8FA"/>
+                    </a:solidFill>
+                  </a:tcPr>
+                </a:tc>
+                <a:tc>
+                  <a:txBody>
+                    <a:bodyPr wrap="square"/>
+                    <a:lstStyle/>
+                    <a:p>
+                      <a:r>
+                        <a:rPr sz="1000" b="0">
+                          <a:solidFill>
+                            <a:srgbClr val="191D2E"/>
+                          </a:solidFill>
+                          <a:latin typeface="Courier New"/>
+                        </a:rPr>
+                        <a:t/>
+                      </a:r>
+                    </a:p>
+                  </a:txBody>
+                  <a:tcPr>
+                    <a:solidFill>
+                      <a:srgbClr val="F8F8FA"/>
+                    </a:solidFill>
+                  </a:tcPr>
+                </a:tc>
+              </a:tr>
+              <a:tr h="381000">
+                <a:tc>
+                  <a:txBody>
+                    <a:bodyPr wrap="square"/>
+                    <a:lstStyle/>
+                    <a:p>
+                      <a:r>
+                        <a:rPr sz="1000" b="0">
+                          <a:solidFill>
+                            <a:srgbClr val="191D2E"/>
+                          </a:solidFill>
+                          <a:latin typeface="Courier New"/>
+                        </a:rPr>
+                        <a:t>Controlling (NMZ, DB-Cockpit)</a:t>
+                      </a:r>
+                    </a:p>
+                  </a:txBody>
+                  <a:tcPr>
+                    <a:solidFill>
+                      <a:srgbClr val="F0F0F5"/>
+                    </a:solidFill>
+                  </a:tcPr>
+                </a:tc>
+                <a:tc>
+                  <a:txBody>
+                    <a:bodyPr wrap="square"/>
+                    <a:lstStyle/>
+                    <a:p>
+                      <a:r>
+                        <a:rPr sz="1000" b="0">
+                          <a:solidFill>
+                            <a:srgbClr val="191D2E"/>
+                          </a:solidFill>
+                          <a:latin typeface="Courier New"/>
+                        </a:rPr>
+                        <a:t/>
+                      </a:r>
+                    </a:p>
+                  </a:txBody>
+                  <a:tcPr>
+                    <a:solidFill>
+                      <a:srgbClr val="F0F0F5"/>
+                    </a:solidFill>
+                  </a:tcPr>
+                </a:tc>
+                <a:tc>
+                  <a:txBody>
+                    <a:bodyPr wrap="square"/>
+                    <a:lstStyle/>
+                    <a:p>
+                      <a:r>
+                        <a:rPr sz="1000" b="0">
+                          <a:solidFill>
+                            <a:srgbClr val="191D2E"/>
+                          </a:solidFill>
+                          <a:latin typeface="Courier New"/>
+                        </a:rPr>
+                        <a:t/>
+                      </a:r>
+                    </a:p>
+                  </a:txBody>
+                  <a:tcPr>
+                    <a:solidFill>
+                      <a:srgbClr val="F0F0F5"/>
+                    </a:solidFill>
+                  </a:tcPr>
+                </a:tc>
+              </a:tr>
+              <a:tr h="381000">
+                <a:tc>
+                  <a:txBody>
+                    <a:bodyPr wrap="square"/>
+                    <a:lstStyle/>
+                    <a:p>
+                      <a:r>
+                        <a:rPr sz="1000" b="0">
+                          <a:solidFill>
+                            <a:srgbClr val="191D2E"/>
+                          </a:solidFill>
+                          <a:latin typeface="Courier New"/>
+                        </a:rPr>
+                        <a:t>Verbundpartner-Cockpit</a:t>
+                      </a:r>
+                    </a:p>
+                  </a:txBody>
+                  <a:tcPr>
+                    <a:solidFill>
+                      <a:srgbClr val="F8F8FA"/>
+                    </a:solidFill>
+                  </a:tcPr>
+                </a:tc>
+                <a:tc>
+                  <a:txBody>
+                    <a:bodyPr wrap="square"/>
+                    <a:lstStyle/>
+                    <a:p>
+                      <a:r>
+                        <a:rPr sz="1000" b="0">
+                          <a:solidFill>
+                            <a:srgbClr val="191D2E"/>
+                          </a:solidFill>
+                          <a:latin typeface="Courier New"/>
+                        </a:rPr>
+                        <a:t/>
+                      </a:r>
+                    </a:p>
+                  </a:txBody>
+                  <a:tcPr>
+                    <a:solidFill>
+                      <a:srgbClr val="F8F8FA"/>
+                    </a:solidFill>
+                  </a:tcPr>
+                </a:tc>
+                <a:tc>
+                  <a:txBody>
+                    <a:bodyPr wrap="square"/>
+                    <a:lstStyle/>
+                    <a:p>
+                      <a:r>
+                        <a:rPr sz="1000" b="0">
+                          <a:solidFill>
+                            <a:srgbClr val="191D2E"/>
+                          </a:solidFill>
+                          <a:latin typeface="Courier New"/>
+                        </a:rPr>
+                        <a:t/>
+                      </a:r>
+                    </a:p>
+                  </a:txBody>
+                  <a:tcPr>
+                    <a:solidFill>
+                      <a:srgbClr val="F8F8FA"/>
+                    </a:solidFill>
+                  </a:tcPr>
+                </a:tc>
+              </a:tr>
+              <a:tr h="381000">
+                <a:tc>
+                  <a:txBody>
+                    <a:bodyPr wrap="square"/>
+                    <a:lstStyle/>
+                    <a:p>
+                      <a:r>
+                        <a:rPr sz="1000" b="0">
+                          <a:solidFill>
+                            <a:srgbClr val="191D2E"/>
+                          </a:solidFill>
+                          <a:latin typeface="Courier New"/>
+                        </a:rPr>
+                        <a:t>Frühwarnliste</a:t>
+                      </a:r>
+                    </a:p>
+                  </a:txBody>
+                  <a:tcPr>
+                    <a:solidFill>
+                      <a:srgbClr val="F0F0F5"/>
+                    </a:solidFill>
+                  </a:tcPr>
+                </a:tc>
+                <a:tc>
+                  <a:txBody>
+                    <a:bodyPr wrap="square"/>
+                    <a:lstStyle/>
+                    <a:p>
+                      <a:r>
+                        <a:rPr sz="1000" b="0">
+                          <a:solidFill>
+                            <a:srgbClr val="191D2E"/>
+                          </a:solidFill>
+                          <a:latin typeface="Courier New"/>
+                        </a:rPr>
+                        <a:t/>
+                      </a:r>
+                    </a:p>
+                  </a:txBody>
+                  <a:tcPr>
+                    <a:solidFill>
+                      <a:srgbClr val="F0F0F5"/>
+                    </a:solidFill>
+                  </a:tcPr>
+                </a:tc>
+                <a:tc>
+                  <a:txBody>
+                    <a:bodyPr wrap="square"/>
+                    <a:lstStyle/>
+                    <a:p>
+                      <a:r>
+                        <a:rPr sz="1000" b="0">
+                          <a:solidFill>
+                            <a:srgbClr val="191D2E"/>
+                          </a:solidFill>
+                          <a:latin typeface="Courier New"/>
+                        </a:rPr>
+                        <a:t/>
+                      </a:r>
+                    </a:p>
+                  </a:txBody>
+                  <a:tcPr>
+                    <a:solidFill>
+                      <a:srgbClr val="F0F0F5"/>
+                    </a:solidFill>
+                  </a:tcPr>
+                </a:tc>
+              </a:tr>
+              <a:tr h="381000">
+                <a:tc>
+                  <a:txBody>
+                    <a:bodyPr wrap="square"/>
+                    <a:lstStyle/>
+                    <a:p>
+                      <a:r>
+                        <a:rPr sz="1000" b="0">
+                          <a:solidFill>
+                            <a:srgbClr val="191D2E"/>
+                          </a:solidFill>
+                          <a:latin typeface="Courier New"/>
+                        </a:rPr>
+                        <a:t>Aktivitäten / Aufgabenverwaltung</a:t>
+                      </a:r>
+                    </a:p>
+                  </a:txBody>
+                  <a:tcPr>
+                    <a:solidFill>
+                      <a:srgbClr val="F8F8FA"/>
+                    </a:solidFill>
+                  </a:tcPr>
+                </a:tc>
+                <a:tc>
+                  <a:txBody>
+                    <a:bodyPr wrap="square"/>
+                    <a:lstStyle/>
+                    <a:p>
+                      <a:r>
+                        <a:rPr sz="1000" b="0">
+                          <a:solidFill>
+                            <a:srgbClr val="191D2E"/>
+                          </a:solidFill>
+                          <a:latin typeface="Courier New"/>
+                        </a:rPr>
+                        <a:t/>
+                      </a:r>
+                    </a:p>
+                  </a:txBody>
+                  <a:tcPr>
+                    <a:solidFill>
+                      <a:srgbClr val="F8F8FA"/>
+                    </a:solidFill>
+                  </a:tcPr>
+                </a:tc>
+                <a:tc>
+                  <a:txBody>
+                    <a:bodyPr wrap="square"/>
+                    <a:lstStyle/>
+                    <a:p>
+                      <a:r>
+                        <a:rPr sz="1000" b="0">
+                          <a:solidFill>
+                            <a:srgbClr val="191D2E"/>
+                          </a:solidFill>
+                          <a:latin typeface="Courier New"/>
+                        </a:rPr>
+                        <a:t/>
+                      </a:r>
+                    </a:p>
+                  </a:txBody>
+                  <a:tcPr>
+                    <a:solidFill>
+                      <a:srgbClr val="F8F8FA"/>
+                    </a:solidFill>
+                  </a:tcPr>
+                </a:tc>
+              </a:tr>
+            </a:tbl>
+          </a:graphicData>
+        </a:graphic>
+      </p:graphicFrame>
     </p:spTree>
   </p:cSld>
   <p:clrMapOvr>
@@ -6568,7 +6905,7 @@
                   </a:txBody>
                   <a:tcPr>
                     <a:solidFill>
-                      <a:srgbClr val="191D2E"/>
+                      <a:srgbClr val="1F2B56"/>
                     </a:solidFill>
                   </a:tcPr>
                 </a:tc>
@@ -6590,7 +6927,7 @@
                   </a:txBody>
                   <a:tcPr>
                     <a:solidFill>
-                      <a:srgbClr val="191D2E"/>
+                      <a:srgbClr val="1F2B56"/>
                     </a:solidFill>
                   </a:tcPr>
                 </a:tc>
@@ -6612,7 +6949,7 @@
                   </a:txBody>
                   <a:tcPr>
                     <a:solidFill>
-                      <a:srgbClr val="191D2E"/>
+                      <a:srgbClr val="1F2B56"/>
                     </a:solidFill>
                   </a:tcPr>
                 </a:tc>
@@ -6634,7 +6971,7 @@
                   </a:txBody>
                   <a:tcPr>
                     <a:solidFill>
-                      <a:srgbClr val="191D2E"/>
+                      <a:srgbClr val="1F2B56"/>
                     </a:solidFill>
                   </a:tcPr>
                 </a:tc>
@@ -6927,7 +7264,7 @@
     <p:bg>
       <p:bgPr>
         <a:solidFill>
-          <a:srgbClr val="191D2E"/>
+          <a:srgbClr val="1F2B56"/>
         </a:solidFill>
         <a:effectLst/>
       </p:bgPr>
@@ -7128,7 +7465,7 @@
     <p:bg>
       <p:bgPr>
         <a:solidFill>
-          <a:srgbClr val="191D2E"/>
+          <a:srgbClr val="1F2B56"/>
         </a:solidFill>
         <a:effectLst/>
       </p:bgPr>
@@ -7575,29 +7912,29 @@
         </p:nvSpPr>
         <p:spPr>
           <a:xfrm>
-            <a:off x="4064000" y="927100"/>
-            <a:ext cx="508000" cy="647700"/>
-          </a:xfrm>
-          <a:prstGeom prst="rect">
-            <a:avLst/>
-          </a:prstGeom>
-          <a:noFill/>
-        </p:spPr>
-        <p:txBody>
-          <a:bodyPr wrap="square">
+            <a:off x="4064000" y="939799"/>
+            <a:ext cx="762000" cy="647700"/>
+          </a:xfrm>
+          <a:prstGeom prst="rect">
+            <a:avLst/>
+          </a:prstGeom>
+          <a:noFill/>
+        </p:spPr>
+        <p:txBody>
+          <a:bodyPr wrap="none">
             <a:normAutofit/>
           </a:bodyPr>
           <a:lstStyle/>
           <a:p>
             <a:pPr algn="l"/>
             <a:r>
-              <a:rPr sz="2600" b="0" i="1">
+              <a:rPr sz="2400" b="0" i="1">
                 <a:solidFill>
                   <a:srgbClr val="1F2B56"/>
                 </a:solidFill>
                 <a:latin typeface="Georgia"/>
               </a:rPr>
-              <a:t>I.</a:t>
+              <a:t>I</a:t>
             </a:r>
           </a:p>
         </p:txBody>
@@ -7610,8 +7947,8 @@
         </p:nvSpPr>
         <p:spPr>
           <a:xfrm>
-            <a:off x="4699000" y="952500"/>
-            <a:ext cx="6858000" cy="622300"/>
+            <a:off x="4953000" y="952500"/>
+            <a:ext cx="6629400" cy="635000"/>
           </a:xfrm>
           <a:prstGeom prst="rect">
             <a:avLst/>
@@ -7645,7 +7982,7 @@
         </p:nvSpPr>
         <p:spPr>
           <a:xfrm>
-            <a:off x="4064000" y="1574800"/>
+            <a:off x="4064000" y="1587500"/>
             <a:ext cx="7518399" cy="6350"/>
           </a:xfrm>
           <a:prstGeom prst="rect">
@@ -7688,29 +8025,29 @@
         </p:nvSpPr>
         <p:spPr>
           <a:xfrm>
-            <a:off x="4064000" y="1612900"/>
-            <a:ext cx="508000" cy="647700"/>
-          </a:xfrm>
-          <a:prstGeom prst="rect">
-            <a:avLst/>
-          </a:prstGeom>
-          <a:noFill/>
-        </p:spPr>
-        <p:txBody>
-          <a:bodyPr wrap="square">
+            <a:off x="4064000" y="1638300"/>
+            <a:ext cx="762000" cy="647700"/>
+          </a:xfrm>
+          <a:prstGeom prst="rect">
+            <a:avLst/>
+          </a:prstGeom>
+          <a:noFill/>
+        </p:spPr>
+        <p:txBody>
+          <a:bodyPr wrap="none">
             <a:normAutofit/>
           </a:bodyPr>
           <a:lstStyle/>
           <a:p>
             <a:pPr algn="l"/>
             <a:r>
-              <a:rPr sz="2600" b="0" i="1">
+              <a:rPr sz="2400" b="0" i="1">
                 <a:solidFill>
                   <a:srgbClr val="1F2B56"/>
                 </a:solidFill>
                 <a:latin typeface="Georgia"/>
               </a:rPr>
-              <a:t>II.</a:t>
+              <a:t>II</a:t>
             </a:r>
           </a:p>
         </p:txBody>
@@ -7723,8 +8060,8 @@
         </p:nvSpPr>
         <p:spPr>
           <a:xfrm>
-            <a:off x="4699000" y="1638300"/>
-            <a:ext cx="6858000" cy="622300"/>
+            <a:off x="4953000" y="1651000"/>
+            <a:ext cx="6629400" cy="635000"/>
           </a:xfrm>
           <a:prstGeom prst="rect">
             <a:avLst/>
@@ -7758,7 +8095,7 @@
         </p:nvSpPr>
         <p:spPr>
           <a:xfrm>
-            <a:off x="4064000" y="2260600"/>
+            <a:off x="4064000" y="2286000"/>
             <a:ext cx="7518399" cy="6350"/>
           </a:xfrm>
           <a:prstGeom prst="rect">
@@ -7801,29 +8138,29 @@
         </p:nvSpPr>
         <p:spPr>
           <a:xfrm>
-            <a:off x="4064000" y="2298700"/>
-            <a:ext cx="508000" cy="647700"/>
-          </a:xfrm>
-          <a:prstGeom prst="rect">
-            <a:avLst/>
-          </a:prstGeom>
-          <a:noFill/>
-        </p:spPr>
-        <p:txBody>
-          <a:bodyPr wrap="square">
+            <a:off x="4064000" y="2336800"/>
+            <a:ext cx="762000" cy="647700"/>
+          </a:xfrm>
+          <a:prstGeom prst="rect">
+            <a:avLst/>
+          </a:prstGeom>
+          <a:noFill/>
+        </p:spPr>
+        <p:txBody>
+          <a:bodyPr wrap="none">
             <a:normAutofit/>
           </a:bodyPr>
           <a:lstStyle/>
           <a:p>
             <a:pPr algn="l"/>
             <a:r>
-              <a:rPr sz="2600" b="0" i="1">
+              <a:rPr sz="2400" b="0" i="1">
                 <a:solidFill>
                   <a:srgbClr val="1F2B56"/>
                 </a:solidFill>
                 <a:latin typeface="Georgia"/>
               </a:rPr>
-              <a:t>III.</a:t>
+              <a:t>III</a:t>
             </a:r>
           </a:p>
         </p:txBody>
@@ -7836,8 +8173,8 @@
         </p:nvSpPr>
         <p:spPr>
           <a:xfrm>
-            <a:off x="4699000" y="2324100"/>
-            <a:ext cx="6858000" cy="622300"/>
+            <a:off x="4953000" y="2349500"/>
+            <a:ext cx="6629400" cy="635000"/>
           </a:xfrm>
           <a:prstGeom prst="rect">
             <a:avLst/>
@@ -7871,7 +8208,7 @@
         </p:nvSpPr>
         <p:spPr>
           <a:xfrm>
-            <a:off x="4064000" y="2946400"/>
+            <a:off x="4064000" y="2984500"/>
             <a:ext cx="7518399" cy="6350"/>
           </a:xfrm>
           <a:prstGeom prst="rect">
@@ -7914,29 +8251,29 @@
         </p:nvSpPr>
         <p:spPr>
           <a:xfrm>
-            <a:off x="4064000" y="2984500"/>
-            <a:ext cx="508000" cy="647700"/>
-          </a:xfrm>
-          <a:prstGeom prst="rect">
-            <a:avLst/>
-          </a:prstGeom>
-          <a:noFill/>
-        </p:spPr>
-        <p:txBody>
-          <a:bodyPr wrap="square">
+            <a:off x="4064000" y="3035300"/>
+            <a:ext cx="762000" cy="647700"/>
+          </a:xfrm>
+          <a:prstGeom prst="rect">
+            <a:avLst/>
+          </a:prstGeom>
+          <a:noFill/>
+        </p:spPr>
+        <p:txBody>
+          <a:bodyPr wrap="none">
             <a:normAutofit/>
           </a:bodyPr>
           <a:lstStyle/>
           <a:p>
             <a:pPr algn="l"/>
             <a:r>
-              <a:rPr sz="2600" b="0" i="1">
+              <a:rPr sz="2400" b="0" i="1">
                 <a:solidFill>
                   <a:srgbClr val="1F2B56"/>
                 </a:solidFill>
                 <a:latin typeface="Georgia"/>
               </a:rPr>
-              <a:t>IV.</a:t>
+              <a:t>IV</a:t>
             </a:r>
           </a:p>
         </p:txBody>
@@ -7949,8 +8286,8 @@
         </p:nvSpPr>
         <p:spPr>
           <a:xfrm>
-            <a:off x="4699000" y="3009900"/>
-            <a:ext cx="6858000" cy="622300"/>
+            <a:off x="4953000" y="3048000"/>
+            <a:ext cx="6629400" cy="635000"/>
           </a:xfrm>
           <a:prstGeom prst="rect">
             <a:avLst/>
@@ -7984,7 +8321,7 @@
         </p:nvSpPr>
         <p:spPr>
           <a:xfrm>
-            <a:off x="4064000" y="3632200"/>
+            <a:off x="4064000" y="3683000"/>
             <a:ext cx="7518399" cy="6350"/>
           </a:xfrm>
           <a:prstGeom prst="rect">
@@ -8027,29 +8364,29 @@
         </p:nvSpPr>
         <p:spPr>
           <a:xfrm>
-            <a:off x="4064000" y="3670300"/>
-            <a:ext cx="508000" cy="647700"/>
-          </a:xfrm>
-          <a:prstGeom prst="rect">
-            <a:avLst/>
-          </a:prstGeom>
-          <a:noFill/>
-        </p:spPr>
-        <p:txBody>
-          <a:bodyPr wrap="square">
+            <a:off x="4064000" y="3733799"/>
+            <a:ext cx="762000" cy="647700"/>
+          </a:xfrm>
+          <a:prstGeom prst="rect">
+            <a:avLst/>
+          </a:prstGeom>
+          <a:noFill/>
+        </p:spPr>
+        <p:txBody>
+          <a:bodyPr wrap="none">
             <a:normAutofit/>
           </a:bodyPr>
           <a:lstStyle/>
           <a:p>
             <a:pPr algn="l"/>
             <a:r>
-              <a:rPr sz="2600" b="0" i="1">
+              <a:rPr sz="2400" b="0" i="1">
                 <a:solidFill>
                   <a:srgbClr val="1F2B56"/>
                 </a:solidFill>
                 <a:latin typeface="Georgia"/>
               </a:rPr>
-              <a:t>V.</a:t>
+              <a:t>V</a:t>
             </a:r>
           </a:p>
         </p:txBody>
@@ -8062,8 +8399,8 @@
         </p:nvSpPr>
         <p:spPr>
           <a:xfrm>
-            <a:off x="4699000" y="3695700"/>
-            <a:ext cx="6858000" cy="622300"/>
+            <a:off x="4953000" y="3746500"/>
+            <a:ext cx="6629400" cy="635000"/>
           </a:xfrm>
           <a:prstGeom prst="rect">
             <a:avLst/>
@@ -8103,7 +8440,7 @@
     <p:bg>
       <p:bgPr>
         <a:solidFill>
-          <a:srgbClr val="191D2E"/>
+          <a:srgbClr val="1F2B56"/>
         </a:solidFill>
         <a:effectLst/>
       </p:bgPr>
@@ -9408,7 +9745,7 @@
     <p:bg>
       <p:bgPr>
         <a:solidFill>
-          <a:srgbClr val="191D2E"/>
+          <a:srgbClr val="1F2B56"/>
         </a:solidFill>
         <a:effectLst/>
       </p:bgPr>
@@ -9609,7 +9946,7 @@
     <p:bg>
       <p:bgPr>
         <a:solidFill>
-          <a:srgbClr val="191D2E"/>
+          <a:srgbClr val="1F2B56"/>
         </a:solidFill>
         <a:effectLst/>
       </p:bgPr>
@@ -9810,7 +10147,7 @@
     <p:bg>
       <p:bgPr>
         <a:solidFill>
-          <a:srgbClr val="191D2E"/>
+          <a:srgbClr val="1F2B56"/>
         </a:solidFill>
         <a:effectLst/>
       </p:bgPr>
@@ -10011,7 +10348,7 @@
     <p:bg>
       <p:bgPr>
         <a:solidFill>
-          <a:srgbClr val="191D2E"/>
+          <a:srgbClr val="1F2B56"/>
         </a:solidFill>
         <a:effectLst/>
       </p:bgPr>
@@ -10562,7 +10899,7 @@
     <p:bg>
       <p:bgPr>
         <a:solidFill>
-          <a:srgbClr val="191D2E"/>
+          <a:srgbClr val="1F2B56"/>
         </a:solidFill>
         <a:effectLst/>
       </p:bgPr>
@@ -11070,7 +11407,7 @@
                   </a:txBody>
                   <a:tcPr>
                     <a:solidFill>
-                      <a:srgbClr val="191D2E"/>
+                      <a:srgbClr val="1F2B56"/>
                     </a:solidFill>
                   </a:tcPr>
                 </a:tc>
@@ -11092,7 +11429,7 @@
                   </a:txBody>
                   <a:tcPr>
                     <a:solidFill>
-                      <a:srgbClr val="191D2E"/>
+                      <a:srgbClr val="1F2B56"/>
                     </a:solidFill>
                   </a:tcPr>
                 </a:tc>
@@ -11114,7 +11451,7 @@
                   </a:txBody>
                   <a:tcPr>
                     <a:solidFill>
-                      <a:srgbClr val="191D2E"/>
+                      <a:srgbClr val="1F2B56"/>
                     </a:solidFill>
                   </a:tcPr>
                 </a:tc>
@@ -11477,7 +11814,7 @@
     <p:bg>
       <p:bgPr>
         <a:solidFill>
-          <a:srgbClr val="191D2E"/>
+          <a:srgbClr val="1F2B56"/>
         </a:solidFill>
         <a:effectLst/>
       </p:bgPr>
@@ -11985,7 +12322,7 @@
                   </a:txBody>
                   <a:tcPr>
                     <a:solidFill>
-                      <a:srgbClr val="191D2E"/>
+                      <a:srgbClr val="1F2B56"/>
                     </a:solidFill>
                   </a:tcPr>
                 </a:tc>
@@ -12007,7 +12344,7 @@
                   </a:txBody>
                   <a:tcPr>
                     <a:solidFill>
-                      <a:srgbClr val="191D2E"/>
+                      <a:srgbClr val="1F2B56"/>
                     </a:solidFill>
                   </a:tcPr>
                 </a:tc>
@@ -12029,7 +12366,7 @@
                   </a:txBody>
                   <a:tcPr>
                     <a:solidFill>
-                      <a:srgbClr val="191D2E"/>
+                      <a:srgbClr val="1F2B56"/>
                     </a:solidFill>
                   </a:tcPr>
                 </a:tc>
@@ -13391,7 +13728,7 @@
                   </a:txBody>
                   <a:tcPr>
                     <a:solidFill>
-                      <a:srgbClr val="191D2E"/>
+                      <a:srgbClr val="1F2B56"/>
                     </a:solidFill>
                   </a:tcPr>
                 </a:tc>
@@ -13413,7 +13750,7 @@
                   </a:txBody>
                   <a:tcPr>
                     <a:solidFill>
-                      <a:srgbClr val="191D2E"/>
+                      <a:srgbClr val="1F2B56"/>
                     </a:solidFill>
                   </a:tcPr>
                 </a:tc>
@@ -13435,7 +13772,7 @@
                   </a:txBody>
                   <a:tcPr>
                     <a:solidFill>
-                      <a:srgbClr val="191D2E"/>
+                      <a:srgbClr val="1F2B56"/>
                     </a:solidFill>
                   </a:tcPr>
                 </a:tc>
@@ -13798,7 +14135,7 @@
     <p:bg>
       <p:bgPr>
         <a:solidFill>
-          <a:srgbClr val="191D2E"/>
+          <a:srgbClr val="1F2B56"/>
         </a:solidFill>
         <a:effectLst/>
       </p:bgPr>

--- a/public/downloads/praesentation/M17.pptx
+++ b/public/downloads/praesentation/M17.pptx
@@ -15,8 +15,9 @@
     <p:sldId id="263" r:id="rId14"/>
     <p:sldId id="264" r:id="rId15"/>
     <p:sldId id="265" r:id="rId16"/>
+    <p:sldId id="266" r:id="rId17"/>
   </p:sldIdLst>
-  <p:sldSz cx="12191695" cy="6858000" type="screen4x3"/>
+  <p:sldSz cx="12188952" cy="6858000" type="screen4x3"/>
   <p:notesSz cx="6858000" cy="9144000"/>
   <p:defaultTextStyle>
     <a:defPPr>
@@ -3090,14 +3091,6 @@
 <file path=ppt/slides/slide1.xml><?xml version="1.0" encoding="utf-8"?>
 <p:sld xmlns:a="http://schemas.openxmlformats.org/drawingml/2006/main" xmlns:p="http://schemas.openxmlformats.org/presentationml/2006/main" xmlns:r="http://schemas.openxmlformats.org/officeDocument/2006/relationships">
   <p:cSld>
-    <p:bg>
-      <p:bgPr>
-        <a:solidFill>
-          <a:srgbClr val="F8F8FA"/>
-        </a:solidFill>
-        <a:effectLst/>
-      </p:bgPr>
-    </p:bg>
     <p:spTree>
       <p:nvGrpSpPr>
         <p:cNvPr id="1" name=""/>
@@ -3107,125 +3100,20 @@
       <p:grpSpPr/>
       <p:sp>
         <p:nvSpPr>
-          <p:cNvPr id="2" name="TextBox 1"/>
-          <p:cNvSpPr txBox="1"/>
-          <p:nvPr/>
-        </p:nvSpPr>
-        <p:spPr>
-          <a:xfrm>
-            <a:off x="609600" y="304800"/>
-            <a:ext cx="3175000" cy="279400"/>
-          </a:xfrm>
-          <a:prstGeom prst="rect">
-            <a:avLst/>
-          </a:prstGeom>
-          <a:noFill/>
-        </p:spPr>
-        <p:txBody>
-          <a:bodyPr wrap="square">
-            <a:normAutofit/>
-          </a:bodyPr>
-          <a:lstStyle/>
-          <a:p>
-            <a:pPr algn="l"/>
-            <a:r>
-              <a:rPr sz="1000" b="1" i="0">
-                <a:solidFill>
-                  <a:srgbClr val="191D2E"/>
-                </a:solidFill>
-                <a:latin typeface="Arial"/>
-              </a:rPr>
-              <a:t>FKB  Campus</a:t>
-            </a:r>
-          </a:p>
-        </p:txBody>
-      </p:sp>
-      <p:sp>
-        <p:nvSpPr>
-          <p:cNvPr id="3" name="TextBox 2"/>
-          <p:cNvSpPr txBox="1"/>
-          <p:nvPr/>
-        </p:nvSpPr>
-        <p:spPr>
-          <a:xfrm>
-            <a:off x="609600" y="304800"/>
-            <a:ext cx="10972800" cy="279400"/>
-          </a:xfrm>
-          <a:prstGeom prst="rect">
-            <a:avLst/>
-          </a:prstGeom>
-          <a:noFill/>
-        </p:spPr>
-        <p:txBody>
-          <a:bodyPr wrap="square">
-            <a:normAutofit/>
-          </a:bodyPr>
-          <a:lstStyle/>
-          <a:p>
-            <a:pPr algn="r"/>
-            <a:r>
-              <a:rPr sz="900" b="0" i="0">
-                <a:solidFill>
-                  <a:srgbClr val="7B7FA0"/>
-                </a:solidFill>
-                <a:latin typeface="Courier New"/>
-              </a:rPr>
-              <a:t>M17  ·  v0.4</a:t>
-            </a:r>
-          </a:p>
-        </p:txBody>
-      </p:sp>
-      <p:sp>
-        <p:nvSpPr>
-          <p:cNvPr id="4" name="TextBox 3"/>
-          <p:cNvSpPr txBox="1"/>
-          <p:nvPr/>
-        </p:nvSpPr>
-        <p:spPr>
-          <a:xfrm>
-            <a:off x="609600" y="2794000"/>
-            <a:ext cx="10972800" cy="2032000"/>
-          </a:xfrm>
-          <a:prstGeom prst="rect">
-            <a:avLst/>
-          </a:prstGeom>
-          <a:noFill/>
-        </p:spPr>
-        <p:txBody>
-          <a:bodyPr wrap="square">
-            <a:normAutofit/>
-          </a:bodyPr>
-          <a:lstStyle/>
-          <a:p>
-            <a:pPr algn="l"/>
-            <a:r>
-              <a:rPr sz="6000" b="0" i="0">
-                <a:solidFill>
-                  <a:srgbClr val="191D2E"/>
-                </a:solidFill>
-                <a:latin typeface="Georgia"/>
-              </a:rPr>
-              <a:t>agree &amp; Co. effizient nutzen</a:t>
-            </a:r>
-          </a:p>
-        </p:txBody>
-      </p:sp>
-      <p:sp>
-        <p:nvSpPr>
-          <p:cNvPr id="5" name="Rectangle 4"/>
+          <p:cNvPr id="2" name="Rectangle 1"/>
           <p:cNvSpPr/>
           <p:nvPr/>
         </p:nvSpPr>
         <p:spPr>
           <a:xfrm>
-            <a:off x="609600" y="4889500"/>
-            <a:ext cx="10972800" cy="6350"/>
+            <a:off x="0" y="0"/>
+            <a:ext cx="12188952" cy="6858000"/>
           </a:xfrm>
           <a:prstGeom prst="rect">
             <a:avLst/>
           </a:prstGeom>
           <a:solidFill>
-            <a:srgbClr val="191D2E"/>
+            <a:srgbClr val="1F2C56"/>
           </a:solidFill>
           <a:ln>
             <a:noFill/>
@@ -3255,14 +3143,57 @@
       </p:sp>
       <p:sp>
         <p:nvSpPr>
-          <p:cNvPr id="6" name="TextBox 5"/>
+          <p:cNvPr id="3" name="Rectangle 2"/>
+          <p:cNvSpPr/>
+          <p:nvPr/>
+        </p:nvSpPr>
+        <p:spPr>
+          <a:xfrm>
+            <a:off x="0" y="0"/>
+            <a:ext cx="12188952" cy="54864"/>
+          </a:xfrm>
+          <a:prstGeom prst="rect">
+            <a:avLst/>
+          </a:prstGeom>
+          <a:solidFill>
+            <a:srgbClr val="D9C089"/>
+          </a:solidFill>
+          <a:ln>
+            <a:noFill/>
+          </a:ln>
+        </p:spPr>
+        <p:style>
+          <a:lnRef idx="1">
+            <a:schemeClr val="accent1"/>
+          </a:lnRef>
+          <a:fillRef idx="3">
+            <a:schemeClr val="accent1"/>
+          </a:fillRef>
+          <a:effectRef idx="2">
+            <a:schemeClr val="accent1"/>
+          </a:effectRef>
+          <a:fontRef idx="minor">
+            <a:schemeClr val="lt1"/>
+          </a:fontRef>
+        </p:style>
+        <p:txBody>
+          <a:bodyPr rtlCol="0" anchor="ctr"/>
+          <a:lstStyle/>
+          <a:p>
+            <a:pPr algn="ctr"/>
+          </a:p>
+        </p:txBody>
+      </p:sp>
+      <p:sp>
+        <p:nvSpPr>
+          <p:cNvPr id="4" name="TextBox 3"/>
           <p:cNvSpPr txBox="1"/>
           <p:nvPr/>
         </p:nvSpPr>
         <p:spPr>
           <a:xfrm>
-            <a:off x="609600" y="5016500"/>
-            <a:ext cx="5207000" cy="1143000"/>
+            <a:off x="685800" y="201168"/>
+            <a:ext cx="10817352" cy="256032"/>
           </a:xfrm>
           <a:prstGeom prst="rect">
             <a:avLst/>
@@ -3270,21 +3201,99 @@
           <a:noFill/>
         </p:spPr>
         <p:txBody>
+          <a:bodyPr wrap="none">
+            <a:spAutoFit/>
+          </a:bodyPr>
+          <a:lstStyle/>
+          <a:p>
+            <a:pPr algn="l"/>
+            <a:r>
+              <a:rPr sz="800">
+                <a:solidFill>
+                  <a:srgbClr val="C8D2E6"/>
+                </a:solidFill>
+                <a:latin typeface="JetBrains Mono"/>
+              </a:rPr>
+              <a:t>FKB CAMPUS  ·  FIRMENKUNDENAKADEMIE  ·  M17</a:t>
+            </a:r>
+          </a:p>
+        </p:txBody>
+      </p:sp>
+      <p:sp>
+        <p:nvSpPr>
+          <p:cNvPr id="5" name="TextBox 4"/>
+          <p:cNvSpPr txBox="1"/>
+          <p:nvPr/>
+        </p:nvSpPr>
+        <p:spPr>
+          <a:xfrm>
+            <a:off x="685800" y="1828800"/>
+            <a:ext cx="10817352" cy="2011680"/>
+          </a:xfrm>
+          <a:prstGeom prst="rect">
+            <a:avLst/>
+          </a:prstGeom>
+          <a:noFill/>
+        </p:spPr>
+        <p:txBody>
           <a:bodyPr wrap="square">
-            <a:normAutofit/>
+            <a:spAutoFit/>
           </a:bodyPr>
           <a:lstStyle/>
           <a:p>
             <a:pPr algn="l"/>
             <a:r>
-              <a:rPr sz="1400" b="0" i="1">
-                <a:solidFill>
-                  <a:srgbClr val="4D5270"/>
-                </a:solidFill>
-                <a:latin typeface="Georgia"/>
+              <a:rPr sz="4600" b="1" i="0">
+                <a:solidFill>
+                  <a:srgbClr val="FFFFFF"/>
+                </a:solidFill>
+                <a:latin typeface="Source Serif 4"/>
               </a:rPr>
-              <a:t>Digitale Workflows im Firmenkundenalltag meistern und Zeitpotenziale durch konsequente Systemnutzung erschließen</a:t>
-            </a:r>
+              <a:t>agree &amp; Co. effizient nutzen</a:t>
+            </a:r>
+          </a:p>
+        </p:txBody>
+      </p:sp>
+      <p:sp>
+        <p:nvSpPr>
+          <p:cNvPr id="6" name="Rectangle 5"/>
+          <p:cNvSpPr/>
+          <p:nvPr/>
+        </p:nvSpPr>
+        <p:spPr>
+          <a:xfrm>
+            <a:off x="685800" y="5029200"/>
+            <a:ext cx="10817352" cy="12700"/>
+          </a:xfrm>
+          <a:prstGeom prst="rect">
+            <a:avLst/>
+          </a:prstGeom>
+          <a:solidFill>
+            <a:srgbClr val="FFFFFF"/>
+          </a:solidFill>
+          <a:ln>
+            <a:noFill/>
+          </a:ln>
+        </p:spPr>
+        <p:style>
+          <a:lnRef idx="1">
+            <a:schemeClr val="accent1"/>
+          </a:lnRef>
+          <a:fillRef idx="3">
+            <a:schemeClr val="accent1"/>
+          </a:fillRef>
+          <a:effectRef idx="2">
+            <a:schemeClr val="accent1"/>
+          </a:effectRef>
+          <a:fontRef idx="minor">
+            <a:schemeClr val="lt1"/>
+          </a:fontRef>
+        </p:style>
+        <p:txBody>
+          <a:bodyPr rtlCol="0" anchor="ctr"/>
+          <a:lstStyle/>
+          <a:p>
+            <a:pPr algn="ctr"/>
           </a:p>
         </p:txBody>
       </p:sp>
@@ -3296,8 +3305,8 @@
         </p:nvSpPr>
         <p:spPr>
           <a:xfrm>
-            <a:off x="6032500" y="5016500"/>
-            <a:ext cx="2540000" cy="177800"/>
+            <a:off x="685800" y="5193792"/>
+            <a:ext cx="5408676" cy="201168"/>
           </a:xfrm>
           <a:prstGeom prst="rect">
             <a:avLst/>
@@ -3305,20 +3314,20 @@
           <a:noFill/>
         </p:spPr>
         <p:txBody>
-          <a:bodyPr wrap="square">
-            <a:normAutofit/>
+          <a:bodyPr wrap="none">
+            <a:spAutoFit/>
           </a:bodyPr>
           <a:lstStyle/>
           <a:p>
             <a:pPr algn="l"/>
             <a:r>
-              <a:rPr sz="900" b="0" i="0">
-                <a:solidFill>
-                  <a:srgbClr val="7B7FA0"/>
-                </a:solidFill>
-                <a:latin typeface="Courier New"/>
+              <a:rPr sz="700">
+                <a:solidFill>
+                  <a:srgbClr val="A0B4D2"/>
+                </a:solidFill>
+                <a:latin typeface="JetBrains Mono"/>
               </a:rPr>
-              <a:t>ZIELSTUFE</a:t>
+              <a:t>KOMPETENZSTUFE</a:t>
             </a:r>
           </a:p>
         </p:txBody>
@@ -3331,8 +3340,8 @@
         </p:nvSpPr>
         <p:spPr>
           <a:xfrm>
-            <a:off x="6032500" y="5207000"/>
-            <a:ext cx="2540000" cy="508000"/>
+            <a:off x="685800" y="5394960"/>
+            <a:ext cx="5408676" cy="320040"/>
           </a:xfrm>
           <a:prstGeom prst="rect">
             <a:avLst/>
@@ -3341,17 +3350,17 @@
         </p:spPr>
         <p:txBody>
           <a:bodyPr wrap="square">
-            <a:normAutofit/>
+            <a:spAutoFit/>
           </a:bodyPr>
           <a:lstStyle/>
           <a:p>
             <a:pPr algn="l"/>
             <a:r>
-              <a:rPr sz="1400" b="0" i="0">
-                <a:solidFill>
-                  <a:srgbClr val="191D2E"/>
-                </a:solidFill>
-                <a:latin typeface="Georgia"/>
+              <a:rPr sz="1100" b="0" i="0">
+                <a:solidFill>
+                  <a:srgbClr val="FFFFFF"/>
+                </a:solidFill>
+                <a:latin typeface="Arial"/>
               </a:rPr>
               <a:t>Berater</a:t>
             </a:r>
@@ -3366,8 +3375,8 @@
         </p:nvSpPr>
         <p:spPr>
           <a:xfrm>
-            <a:off x="8890000" y="5016500"/>
-            <a:ext cx="2667000" cy="177800"/>
+            <a:off x="6094476" y="5193792"/>
+            <a:ext cx="5408676" cy="201168"/>
           </a:xfrm>
           <a:prstGeom prst="rect">
             <a:avLst/>
@@ -3375,20 +3384,20 @@
           <a:noFill/>
         </p:spPr>
         <p:txBody>
-          <a:bodyPr wrap="square">
-            <a:normAutofit/>
+          <a:bodyPr wrap="none">
+            <a:spAutoFit/>
           </a:bodyPr>
           <a:lstStyle/>
           <a:p>
             <a:pPr algn="l"/>
             <a:r>
-              <a:rPr sz="900" b="0" i="0">
-                <a:solidFill>
-                  <a:srgbClr val="7B7FA0"/>
-                </a:solidFill>
-                <a:latin typeface="Courier New"/>
+              <a:rPr sz="700">
+                <a:solidFill>
+                  <a:srgbClr val="A0B4D2"/>
+                </a:solidFill>
+                <a:latin typeface="JetBrains Mono"/>
               </a:rPr>
-              <a:t>DAUER</a:t>
+              <a:t>VERSION</a:t>
             </a:r>
           </a:p>
         </p:txBody>
@@ -3401,8 +3410,8 @@
         </p:nvSpPr>
         <p:spPr>
           <a:xfrm>
-            <a:off x="8890000" y="5207000"/>
-            <a:ext cx="2667000" cy="508000"/>
+            <a:off x="6094476" y="5394960"/>
+            <a:ext cx="5408676" cy="320040"/>
           </a:xfrm>
           <a:prstGeom prst="rect">
             <a:avLst/>
@@ -3411,19 +3420,132 @@
         </p:spPr>
         <p:txBody>
           <a:bodyPr wrap="square">
-            <a:normAutofit/>
+            <a:spAutoFit/>
           </a:bodyPr>
           <a:lstStyle/>
           <a:p>
             <a:pPr algn="l"/>
             <a:r>
-              <a:rPr sz="1400" b="0" i="0">
-                <a:solidFill>
-                  <a:srgbClr val="191D2E"/>
-                </a:solidFill>
-                <a:latin typeface="Georgia"/>
+              <a:rPr sz="1100" b="0" i="0">
+                <a:solidFill>
+                  <a:srgbClr val="FFFFFF"/>
+                </a:solidFill>
+                <a:latin typeface="Arial"/>
               </a:rPr>
-              <a:t>90 Min.</a:t>
+              <a:t>v0.4</a:t>
+            </a:r>
+          </a:p>
+        </p:txBody>
+      </p:sp>
+      <p:sp>
+        <p:nvSpPr>
+          <p:cNvPr id="11" name="Rectangle 10"/>
+          <p:cNvSpPr/>
+          <p:nvPr/>
+        </p:nvSpPr>
+        <p:spPr>
+          <a:xfrm>
+            <a:off x="0" y="6510528"/>
+            <a:ext cx="12188952" cy="347472"/>
+          </a:xfrm>
+          <a:prstGeom prst="rect">
+            <a:avLst/>
+          </a:prstGeom>
+          <a:solidFill>
+            <a:srgbClr val="0A1937"/>
+          </a:solidFill>
+          <a:ln>
+            <a:noFill/>
+          </a:ln>
+        </p:spPr>
+        <p:style>
+          <a:lnRef idx="1">
+            <a:schemeClr val="accent1"/>
+          </a:lnRef>
+          <a:fillRef idx="3">
+            <a:schemeClr val="accent1"/>
+          </a:fillRef>
+          <a:effectRef idx="2">
+            <a:schemeClr val="accent1"/>
+          </a:effectRef>
+          <a:fontRef idx="minor">
+            <a:schemeClr val="lt1"/>
+          </a:fontRef>
+        </p:style>
+        <p:txBody>
+          <a:bodyPr rtlCol="0" anchor="ctr"/>
+          <a:lstStyle/>
+          <a:p>
+            <a:pPr algn="ctr"/>
+          </a:p>
+        </p:txBody>
+      </p:sp>
+      <p:sp>
+        <p:nvSpPr>
+          <p:cNvPr id="12" name="TextBox 11"/>
+          <p:cNvSpPr txBox="1"/>
+          <p:nvPr/>
+        </p:nvSpPr>
+        <p:spPr>
+          <a:xfrm>
+            <a:off x="685800" y="6583680"/>
+            <a:ext cx="5408676" cy="256032"/>
+          </a:xfrm>
+          <a:prstGeom prst="rect">
+            <a:avLst/>
+          </a:prstGeom>
+          <a:noFill/>
+        </p:spPr>
+        <p:txBody>
+          <a:bodyPr wrap="none">
+            <a:spAutoFit/>
+          </a:bodyPr>
+          <a:lstStyle/>
+          <a:p>
+            <a:pPr algn="l"/>
+            <a:r>
+              <a:rPr sz="700">
+                <a:solidFill>
+                  <a:srgbClr val="96A5BE"/>
+                </a:solidFill>
+                <a:latin typeface="JetBrains Mono"/>
+              </a:rPr>
+              <a:t>Benedikt Zoller Coaching  ·  FKB Campus  ·  2026</a:t>
+            </a:r>
+          </a:p>
+        </p:txBody>
+      </p:sp>
+      <p:sp>
+        <p:nvSpPr>
+          <p:cNvPr id="13" name="TextBox 12"/>
+          <p:cNvSpPr txBox="1"/>
+          <p:nvPr/>
+        </p:nvSpPr>
+        <p:spPr>
+          <a:xfrm>
+            <a:off x="6094476" y="6583680"/>
+            <a:ext cx="5408676" cy="256032"/>
+          </a:xfrm>
+          <a:prstGeom prst="rect">
+            <a:avLst/>
+          </a:prstGeom>
+          <a:noFill/>
+        </p:spPr>
+        <p:txBody>
+          <a:bodyPr wrap="none">
+            <a:spAutoFit/>
+          </a:bodyPr>
+          <a:lstStyle/>
+          <a:p>
+            <a:pPr algn="r"/>
+            <a:r>
+              <a:rPr sz="700">
+                <a:solidFill>
+                  <a:srgbClr val="96A5BE"/>
+                </a:solidFill>
+                <a:latin typeface="JetBrains Mono"/>
+              </a:rPr>
+              <a:t>Trainer-Präsentation</a:t>
             </a:r>
           </a:p>
         </p:txBody>
@@ -3439,14 +3561,6 @@
 <file path=ppt/slides/slide10.xml><?xml version="1.0" encoding="utf-8"?>
 <p:sld xmlns:a="http://schemas.openxmlformats.org/drawingml/2006/main" xmlns:p="http://schemas.openxmlformats.org/presentationml/2006/main" xmlns:r="http://schemas.openxmlformats.org/officeDocument/2006/relationships">
   <p:cSld>
-    <p:bg>
-      <p:bgPr>
-        <a:solidFill>
-          <a:srgbClr val="F8F8FA"/>
-        </a:solidFill>
-        <a:effectLst/>
-      </p:bgPr>
-    </p:bg>
     <p:spTree>
       <p:nvGrpSpPr>
         <p:cNvPr id="1" name=""/>
@@ -3456,126 +3570,20 @@
       <p:grpSpPr/>
       <p:sp>
         <p:nvSpPr>
-          <p:cNvPr id="2" name="TextBox 1"/>
-          <p:cNvSpPr txBox="1"/>
-          <p:nvPr/>
-        </p:nvSpPr>
-        <p:spPr>
-          <a:xfrm>
-            <a:off x="609600" y="457200"/>
-            <a:ext cx="3175000" cy="279400"/>
-          </a:xfrm>
-          <a:prstGeom prst="rect">
-            <a:avLst/>
-          </a:prstGeom>
-          <a:noFill/>
-        </p:spPr>
-        <p:txBody>
-          <a:bodyPr wrap="square">
-            <a:normAutofit/>
-          </a:bodyPr>
-          <a:lstStyle/>
-          <a:p>
-            <a:pPr algn="l"/>
-            <a:r>
-              <a:rPr sz="1000" b="1" i="0">
-                <a:solidFill>
-                  <a:srgbClr val="191D2E"/>
-                </a:solidFill>
-                <a:latin typeface="Arial"/>
-              </a:rPr>
-              <a:t>FKB  Campus</a:t>
-            </a:r>
-          </a:p>
-        </p:txBody>
-      </p:sp>
-      <p:sp>
-        <p:nvSpPr>
-          <p:cNvPr id="3" name="TextBox 2"/>
-          <p:cNvSpPr txBox="1"/>
-          <p:nvPr/>
-        </p:nvSpPr>
-        <p:spPr>
-          <a:xfrm>
-            <a:off x="609600" y="457200"/>
-            <a:ext cx="10972800" cy="279400"/>
-          </a:xfrm>
-          <a:prstGeom prst="rect">
-            <a:avLst/>
-          </a:prstGeom>
-          <a:noFill/>
-        </p:spPr>
-        <p:txBody>
-          <a:bodyPr wrap="square">
-            <a:normAutofit/>
-          </a:bodyPr>
-          <a:lstStyle/>
-          <a:p>
-            <a:pPr algn="r"/>
-            <a:r>
-              <a:rPr sz="900" b="0" i="0">
-                <a:solidFill>
-                  <a:srgbClr val="7B7FA0"/>
-                </a:solidFill>
-                <a:latin typeface="Courier New"/>
-              </a:rPr>
-              <a:t>Ende · v0.4</a:t>
-            </a:r>
-          </a:p>
-        </p:txBody>
-      </p:sp>
-      <p:sp>
-        <p:nvSpPr>
-          <p:cNvPr id="4" name="TextBox 3"/>
-          <p:cNvSpPr txBox="1"/>
-          <p:nvPr/>
-        </p:nvSpPr>
-        <p:spPr>
-          <a:xfrm>
-            <a:off x="609600" y="1143000"/>
-            <a:ext cx="10972800" cy="3556000"/>
-          </a:xfrm>
-          <a:prstGeom prst="rect">
-            <a:avLst/>
-          </a:prstGeom>
-          <a:noFill/>
-        </p:spPr>
-        <p:txBody>
-          <a:bodyPr wrap="square">
-            <a:normAutofit/>
-          </a:bodyPr>
-          <a:lstStyle/>
-          <a:p>
-            <a:pPr algn="l"/>
-            <a:r>
-              <a:rPr sz="9600" b="0" i="0">
-                <a:solidFill>
-                  <a:srgbClr val="191D2E"/>
-                </a:solidFill>
-                <a:latin typeface="Georgia"/>
-              </a:rPr>
-              <a:t>Danke.
-Fragen?</a:t>
-            </a:r>
-          </a:p>
-        </p:txBody>
-      </p:sp>
-      <p:sp>
-        <p:nvSpPr>
-          <p:cNvPr id="5" name="Rectangle 4"/>
+          <p:cNvPr id="2" name="Rectangle 1"/>
           <p:cNvSpPr/>
           <p:nvPr/>
         </p:nvSpPr>
         <p:spPr>
           <a:xfrm>
-            <a:off x="609600" y="4826000"/>
-            <a:ext cx="10972800" cy="6350"/>
+            <a:off x="0" y="0"/>
+            <a:ext cx="12188952" cy="6858000"/>
           </a:xfrm>
           <a:prstGeom prst="rect">
             <a:avLst/>
           </a:prstGeom>
           <a:solidFill>
-            <a:srgbClr val="191D2E"/>
+            <a:srgbClr val="EDEDF3"/>
           </a:solidFill>
           <a:ln>
             <a:noFill/>
@@ -3605,14 +3613,57 @@
       </p:sp>
       <p:sp>
         <p:nvSpPr>
-          <p:cNvPr id="6" name="TextBox 5"/>
+          <p:cNvPr id="3" name="Rectangle 2"/>
+          <p:cNvSpPr/>
+          <p:nvPr/>
+        </p:nvSpPr>
+        <p:spPr>
+          <a:xfrm>
+            <a:off x="0" y="0"/>
+            <a:ext cx="12188952" cy="50292"/>
+          </a:xfrm>
+          <a:prstGeom prst="rect">
+            <a:avLst/>
+          </a:prstGeom>
+          <a:solidFill>
+            <a:srgbClr val="1F2C56"/>
+          </a:solidFill>
+          <a:ln>
+            <a:noFill/>
+          </a:ln>
+        </p:spPr>
+        <p:style>
+          <a:lnRef idx="1">
+            <a:schemeClr val="accent1"/>
+          </a:lnRef>
+          <a:fillRef idx="3">
+            <a:schemeClr val="accent1"/>
+          </a:fillRef>
+          <a:effectRef idx="2">
+            <a:schemeClr val="accent1"/>
+          </a:effectRef>
+          <a:fontRef idx="minor">
+            <a:schemeClr val="lt1"/>
+          </a:fontRef>
+        </p:style>
+        <p:txBody>
+          <a:bodyPr rtlCol="0" anchor="ctr"/>
+          <a:lstStyle/>
+          <a:p>
+            <a:pPr algn="ctr"/>
+          </a:p>
+        </p:txBody>
+      </p:sp>
+      <p:sp>
+        <p:nvSpPr>
+          <p:cNvPr id="4" name="TextBox 3"/>
           <p:cNvSpPr txBox="1"/>
           <p:nvPr/>
         </p:nvSpPr>
         <p:spPr>
           <a:xfrm>
-            <a:off x="609600" y="4953000"/>
-            <a:ext cx="5715000" cy="1143000"/>
+            <a:off x="685800" y="109728"/>
+            <a:ext cx="10817352" cy="228600"/>
           </a:xfrm>
           <a:prstGeom prst="rect">
             <a:avLst/>
@@ -3620,21 +3671,107 @@
           <a:noFill/>
         </p:spPr>
         <p:txBody>
-          <a:bodyPr wrap="square">
-            <a:normAutofit/>
+          <a:bodyPr wrap="none">
+            <a:spAutoFit/>
           </a:bodyPr>
           <a:lstStyle/>
           <a:p>
             <a:pPr algn="l"/>
             <a:r>
-              <a:rPr sz="1400" b="0" i="1">
-                <a:solidFill>
-                  <a:srgbClr val="191D2E"/>
-                </a:solidFill>
-                <a:latin typeface="Georgia"/>
+              <a:rPr sz="750">
+                <a:solidFill>
+                  <a:srgbClr val="78808C"/>
+                </a:solidFill>
+                <a:latin typeface="JetBrains Mono"/>
               </a:rPr>
-              <a:t>Modul «agree &amp; Co. effizient nutzen» auf FKB Campus — 5 Lernziele, Praxisfall und Quellenapparat.</a:t>
-            </a:r>
+              <a:t>M17  ·  INHALT</a:t>
+            </a:r>
+          </a:p>
+        </p:txBody>
+      </p:sp>
+      <p:sp>
+        <p:nvSpPr>
+          <p:cNvPr id="5" name="Rectangle 4"/>
+          <p:cNvSpPr/>
+          <p:nvPr/>
+        </p:nvSpPr>
+        <p:spPr>
+          <a:xfrm>
+            <a:off x="0" y="1234440"/>
+            <a:ext cx="12188952" cy="12700"/>
+          </a:xfrm>
+          <a:prstGeom prst="rect">
+            <a:avLst/>
+          </a:prstGeom>
+          <a:solidFill>
+            <a:srgbClr val="D8DFE4"/>
+          </a:solidFill>
+          <a:ln>
+            <a:noFill/>
+          </a:ln>
+        </p:spPr>
+        <p:style>
+          <a:lnRef idx="1">
+            <a:schemeClr val="accent1"/>
+          </a:lnRef>
+          <a:fillRef idx="3">
+            <a:schemeClr val="accent1"/>
+          </a:fillRef>
+          <a:effectRef idx="2">
+            <a:schemeClr val="accent1"/>
+          </a:effectRef>
+          <a:fontRef idx="minor">
+            <a:schemeClr val="lt1"/>
+          </a:fontRef>
+        </p:style>
+        <p:txBody>
+          <a:bodyPr rtlCol="0" anchor="ctr"/>
+          <a:lstStyle/>
+          <a:p>
+            <a:pPr algn="ctr"/>
+          </a:p>
+        </p:txBody>
+      </p:sp>
+      <p:sp>
+        <p:nvSpPr>
+          <p:cNvPr id="6" name="Rectangle 5"/>
+          <p:cNvSpPr/>
+          <p:nvPr/>
+        </p:nvSpPr>
+        <p:spPr>
+          <a:xfrm>
+            <a:off x="685800" y="502920"/>
+            <a:ext cx="36576" cy="658368"/>
+          </a:xfrm>
+          <a:prstGeom prst="rect">
+            <a:avLst/>
+          </a:prstGeom>
+          <a:solidFill>
+            <a:srgbClr val="D9C089"/>
+          </a:solidFill>
+          <a:ln>
+            <a:noFill/>
+          </a:ln>
+        </p:spPr>
+        <p:style>
+          <a:lnRef idx="1">
+            <a:schemeClr val="accent1"/>
+          </a:lnRef>
+          <a:fillRef idx="3">
+            <a:schemeClr val="accent1"/>
+          </a:fillRef>
+          <a:effectRef idx="2">
+            <a:schemeClr val="accent1"/>
+          </a:effectRef>
+          <a:fontRef idx="minor">
+            <a:schemeClr val="lt1"/>
+          </a:fontRef>
+        </p:style>
+        <p:txBody>
+          <a:bodyPr rtlCol="0" anchor="ctr"/>
+          <a:lstStyle/>
+          <a:p>
+            <a:pPr algn="ctr"/>
           </a:p>
         </p:txBody>
       </p:sp>
@@ -3646,8 +3783,8 @@
         </p:nvSpPr>
         <p:spPr>
           <a:xfrm>
-            <a:off x="6731000" y="4953000"/>
-            <a:ext cx="2413000" cy="177800"/>
+            <a:off x="813816" y="502920"/>
+            <a:ext cx="10634472" cy="685800"/>
           </a:xfrm>
           <a:prstGeom prst="rect">
             <a:avLst/>
@@ -3656,19 +3793,19 @@
         </p:spPr>
         <p:txBody>
           <a:bodyPr wrap="square">
-            <a:normAutofit/>
+            <a:spAutoFit/>
           </a:bodyPr>
           <a:lstStyle/>
           <a:p>
             <a:pPr algn="l"/>
             <a:r>
-              <a:rPr sz="900" b="0" i="0">
-                <a:solidFill>
-                  <a:srgbClr val="7B7FA0"/>
-                </a:solidFill>
-                <a:latin typeface="Courier New"/>
+              <a:rPr sz="2400" b="1" i="0">
+                <a:solidFill>
+                  <a:srgbClr val="1F2C56"/>
+                </a:solidFill>
+                <a:latin typeface="Source Serif 4"/>
               </a:rPr>
-              <a:t>Trainer</a:t>
+              <a:t>Arbeitsblatt A: Mein agree-Selbstcheck</a:t>
             </a:r>
           </a:p>
         </p:txBody>
@@ -3681,8 +3818,8 @@
         </p:nvSpPr>
         <p:spPr>
           <a:xfrm>
-            <a:off x="6731000" y="5156200"/>
-            <a:ext cx="2413000" cy="381000"/>
+            <a:off x="685800" y="1417320"/>
+            <a:ext cx="10817352" cy="5029200"/>
           </a:xfrm>
           <a:prstGeom prst="rect">
             <a:avLst/>
@@ -3691,55 +3828,165 @@
         </p:spPr>
         <p:txBody>
           <a:bodyPr wrap="square">
-            <a:normAutofit/>
+            <a:spAutoFit/>
           </a:bodyPr>
           <a:lstStyle/>
           <a:p>
-            <a:pPr algn="l"/>
-            <a:r>
-              <a:rPr sz="1400" b="0" i="0">
-                <a:solidFill>
-                  <a:srgbClr val="4D5270"/>
-                </a:solidFill>
-                <a:latin typeface="Georgia"/>
+            <a:pPr>
+              <a:spcBef>
+                <a:spcPts val="400"/>
+              </a:spcBef>
+              <a:spcAft>
+                <a:spcPts val="200"/>
+              </a:spcAft>
+            </a:pPr>
+            <a:r>
+              <a:rPr sz="1200">
+                <a:solidFill>
+                  <a:srgbClr val="3D5466"/>
+                </a:solidFill>
+                <a:latin typeface="Arial"/>
               </a:rPr>
-              <a:t>[Name · Kontakt]</a:t>
-            </a:r>
-          </a:p>
-        </p:txBody>
-      </p:sp>
-      <p:sp>
-        <p:nvSpPr>
-          <p:cNvPr id="9" name="TextBox 8"/>
-          <p:cNvSpPr txBox="1"/>
-          <p:nvPr/>
-        </p:nvSpPr>
-        <p:spPr>
-          <a:xfrm>
-            <a:off x="9398000" y="4953000"/>
-            <a:ext cx="2184400" cy="177800"/>
-          </a:xfrm>
-          <a:prstGeom prst="rect">
-            <a:avLst/>
-          </a:prstGeom>
-          <a:noFill/>
-        </p:spPr>
-        <p:txBody>
-          <a:bodyPr wrap="square">
-            <a:normAutofit/>
-          </a:bodyPr>
-          <a:lstStyle/>
-          <a:p>
-            <a:pPr algn="l"/>
-            <a:r>
-              <a:rPr sz="900" b="0" i="0">
-                <a:solidFill>
-                  <a:srgbClr val="7B7FA0"/>
-                </a:solidFill>
-                <a:latin typeface="Courier New"/>
+              <a:t>Bewerten Sie Ihren aktuellen Umgang mit agree ehrlich (1 = nutze ich kaum / 5 = nutze ich routiniert):</a:t>
+            </a:r>
+          </a:p>
+          <a:p>
+            <a:pPr>
+              <a:spcBef>
+                <a:spcPts val="400"/>
+              </a:spcBef>
+              <a:spcAft>
+                <a:spcPts val="200"/>
+              </a:spcAft>
+            </a:pPr>
+            <a:r>
+              <a:rPr sz="1200">
+                <a:solidFill>
+                  <a:srgbClr val="3D5466"/>
+                </a:solidFill>
+                <a:latin typeface="Arial"/>
               </a:rPr>
-              <a:t>Modul</a:t>
-            </a:r>
+              <a:t>Meine zwei größten Zeitfresser im aktuellen Workflow:</a:t>
+            </a:r>
+          </a:p>
+          <a:p>
+            <a:pPr>
+              <a:spcBef>
+                <a:spcPts val="400"/>
+              </a:spcBef>
+              <a:spcAft>
+                <a:spcPts val="200"/>
+              </a:spcAft>
+            </a:pPr>
+            <a:r>
+              <a:rPr sz="1300">
+                <a:solidFill>
+                  <a:srgbClr val="3D5466"/>
+                </a:solidFill>
+                <a:latin typeface="Arial"/>
+              </a:rPr>
+              <a:t>▸  ___________________________________________________________________________</a:t>
+            </a:r>
+          </a:p>
+          <a:p>
+            <a:pPr>
+              <a:spcBef>
+                <a:spcPts val="400"/>
+              </a:spcBef>
+              <a:spcAft>
+                <a:spcPts val="200"/>
+              </a:spcAft>
+            </a:pPr>
+            <a:r>
+              <a:rPr sz="1300">
+                <a:solidFill>
+                  <a:srgbClr val="3D5466"/>
+                </a:solidFill>
+                <a:latin typeface="Arial"/>
+              </a:rPr>
+              <a:t>▸  ___________________________________________________________________________</a:t>
+            </a:r>
+          </a:p>
+          <a:p>
+            <a:pPr>
+              <a:spcBef>
+                <a:spcPts val="400"/>
+              </a:spcBef>
+              <a:spcAft>
+                <a:spcPts val="200"/>
+              </a:spcAft>
+            </a:pPr>
+            <a:r>
+              <a:rPr sz="1200">
+                <a:solidFill>
+                  <a:srgbClr val="3D5466"/>
+                </a:solidFill>
+                <a:latin typeface="Arial"/>
+              </a:rPr>
+              <a:t>agree-Funktion, die ich morgen früh ausprobiere:</a:t>
+            </a:r>
+          </a:p>
+          <a:p>
+            <a:pPr>
+              <a:spcBef>
+                <a:spcPts val="400"/>
+              </a:spcBef>
+              <a:spcAft>
+                <a:spcPts val="200"/>
+              </a:spcAft>
+            </a:pPr>
+            <a:r>
+              <a:rPr sz="1200">
+                <a:solidFill>
+                  <a:srgbClr val="3D5466"/>
+                </a:solidFill>
+                <a:latin typeface="Arial"/>
+              </a:rPr>
+              <a:t>___________________________________________________________________________</a:t>
+            </a:r>
+          </a:p>
+        </p:txBody>
+      </p:sp>
+      <p:sp>
+        <p:nvSpPr>
+          <p:cNvPr id="9" name="Rectangle 8"/>
+          <p:cNvSpPr/>
+          <p:nvPr/>
+        </p:nvSpPr>
+        <p:spPr>
+          <a:xfrm>
+            <a:off x="0" y="6510528"/>
+            <a:ext cx="12188952" cy="347472"/>
+          </a:xfrm>
+          <a:prstGeom prst="rect">
+            <a:avLst/>
+          </a:prstGeom>
+          <a:solidFill>
+            <a:srgbClr val="0A1937"/>
+          </a:solidFill>
+          <a:ln>
+            <a:noFill/>
+          </a:ln>
+        </p:spPr>
+        <p:style>
+          <a:lnRef idx="1">
+            <a:schemeClr val="accent1"/>
+          </a:lnRef>
+          <a:fillRef idx="3">
+            <a:schemeClr val="accent1"/>
+          </a:fillRef>
+          <a:effectRef idx="2">
+            <a:schemeClr val="accent1"/>
+          </a:effectRef>
+          <a:fontRef idx="minor">
+            <a:schemeClr val="lt1"/>
+          </a:fontRef>
+        </p:style>
+        <p:txBody>
+          <a:bodyPr rtlCol="0" anchor="ctr"/>
+          <a:lstStyle/>
+          <a:p>
+            <a:pPr algn="ctr"/>
           </a:p>
         </p:txBody>
       </p:sp>
@@ -3751,8 +3998,8 @@
         </p:nvSpPr>
         <p:spPr>
           <a:xfrm>
-            <a:off x="9398000" y="5156200"/>
-            <a:ext cx="2184400" cy="381000"/>
+            <a:off x="685800" y="6583680"/>
+            <a:ext cx="6490411" cy="256032"/>
           </a:xfrm>
           <a:prstGeom prst="rect">
             <a:avLst/>
@@ -3760,20 +4007,419 @@
           <a:noFill/>
         </p:spPr>
         <p:txBody>
+          <a:bodyPr wrap="none">
+            <a:spAutoFit/>
+          </a:bodyPr>
+          <a:lstStyle/>
+          <a:p>
+            <a:pPr algn="l"/>
+            <a:r>
+              <a:rPr sz="700">
+                <a:solidFill>
+                  <a:srgbClr val="A0B4D2"/>
+                </a:solidFill>
+                <a:latin typeface="JetBrains Mono"/>
+              </a:rPr>
+              <a:t>Benedikt Zoller Coaching  ·  FKB Campus  ·  M17</a:t>
+            </a:r>
+          </a:p>
+        </p:txBody>
+      </p:sp>
+    </p:spTree>
+  </p:cSld>
+  <p:clrMapOvr>
+    <a:masterClrMapping/>
+  </p:clrMapOvr>
+</p:sld>
+</file>
+
+<file path=ppt/slides/slide11.xml><?xml version="1.0" encoding="utf-8"?>
+<p:sld xmlns:a="http://schemas.openxmlformats.org/drawingml/2006/main" xmlns:p="http://schemas.openxmlformats.org/presentationml/2006/main" xmlns:r="http://schemas.openxmlformats.org/officeDocument/2006/relationships">
+  <p:cSld>
+    <p:spTree>
+      <p:nvGrpSpPr>
+        <p:cNvPr id="1" name=""/>
+        <p:cNvGrpSpPr/>
+        <p:nvPr/>
+      </p:nvGrpSpPr>
+      <p:grpSpPr/>
+      <p:sp>
+        <p:nvSpPr>
+          <p:cNvPr id="2" name="Rectangle 1"/>
+          <p:cNvSpPr/>
+          <p:nvPr/>
+        </p:nvSpPr>
+        <p:spPr>
+          <a:xfrm>
+            <a:off x="0" y="0"/>
+            <a:ext cx="12188952" cy="6858000"/>
+          </a:xfrm>
+          <a:prstGeom prst="rect">
+            <a:avLst/>
+          </a:prstGeom>
+          <a:solidFill>
+            <a:srgbClr val="EDEDF3"/>
+          </a:solidFill>
+          <a:ln>
+            <a:noFill/>
+          </a:ln>
+        </p:spPr>
+        <p:style>
+          <a:lnRef idx="1">
+            <a:schemeClr val="accent1"/>
+          </a:lnRef>
+          <a:fillRef idx="3">
+            <a:schemeClr val="accent1"/>
+          </a:fillRef>
+          <a:effectRef idx="2">
+            <a:schemeClr val="accent1"/>
+          </a:effectRef>
+          <a:fontRef idx="minor">
+            <a:schemeClr val="lt1"/>
+          </a:fontRef>
+        </p:style>
+        <p:txBody>
+          <a:bodyPr rtlCol="0" anchor="ctr"/>
+          <a:lstStyle/>
+          <a:p>
+            <a:pPr algn="ctr"/>
+          </a:p>
+        </p:txBody>
+      </p:sp>
+      <p:sp>
+        <p:nvSpPr>
+          <p:cNvPr id="3" name="Rectangle 2"/>
+          <p:cNvSpPr/>
+          <p:nvPr/>
+        </p:nvSpPr>
+        <p:spPr>
+          <a:xfrm>
+            <a:off x="0" y="0"/>
+            <a:ext cx="12188952" cy="50292"/>
+          </a:xfrm>
+          <a:prstGeom prst="rect">
+            <a:avLst/>
+          </a:prstGeom>
+          <a:solidFill>
+            <a:srgbClr val="1F2C56"/>
+          </a:solidFill>
+          <a:ln>
+            <a:noFill/>
+          </a:ln>
+        </p:spPr>
+        <p:style>
+          <a:lnRef idx="1">
+            <a:schemeClr val="accent1"/>
+          </a:lnRef>
+          <a:fillRef idx="3">
+            <a:schemeClr val="accent1"/>
+          </a:fillRef>
+          <a:effectRef idx="2">
+            <a:schemeClr val="accent1"/>
+          </a:effectRef>
+          <a:fontRef idx="minor">
+            <a:schemeClr val="lt1"/>
+          </a:fontRef>
+        </p:style>
+        <p:txBody>
+          <a:bodyPr rtlCol="0" anchor="ctr"/>
+          <a:lstStyle/>
+          <a:p>
+            <a:pPr algn="ctr"/>
+          </a:p>
+        </p:txBody>
+      </p:sp>
+      <p:sp>
+        <p:nvSpPr>
+          <p:cNvPr id="4" name="TextBox 3"/>
+          <p:cNvSpPr txBox="1"/>
+          <p:nvPr/>
+        </p:nvSpPr>
+        <p:spPr>
+          <a:xfrm>
+            <a:off x="685800" y="109728"/>
+            <a:ext cx="10817352" cy="228600"/>
+          </a:xfrm>
+          <a:prstGeom prst="rect">
+            <a:avLst/>
+          </a:prstGeom>
+          <a:noFill/>
+        </p:spPr>
+        <p:txBody>
+          <a:bodyPr wrap="none">
+            <a:spAutoFit/>
+          </a:bodyPr>
+          <a:lstStyle/>
+          <a:p>
+            <a:pPr algn="l"/>
+            <a:r>
+              <a:rPr sz="750">
+                <a:solidFill>
+                  <a:srgbClr val="78808C"/>
+                </a:solidFill>
+                <a:latin typeface="JetBrains Mono"/>
+              </a:rPr>
+              <a:t>M17  ·  INHALT</a:t>
+            </a:r>
+          </a:p>
+        </p:txBody>
+      </p:sp>
+      <p:sp>
+        <p:nvSpPr>
+          <p:cNvPr id="5" name="Rectangle 4"/>
+          <p:cNvSpPr/>
+          <p:nvPr/>
+        </p:nvSpPr>
+        <p:spPr>
+          <a:xfrm>
+            <a:off x="0" y="1234440"/>
+            <a:ext cx="12188952" cy="12700"/>
+          </a:xfrm>
+          <a:prstGeom prst="rect">
+            <a:avLst/>
+          </a:prstGeom>
+          <a:solidFill>
+            <a:srgbClr val="D8DFE4"/>
+          </a:solidFill>
+          <a:ln>
+            <a:noFill/>
+          </a:ln>
+        </p:spPr>
+        <p:style>
+          <a:lnRef idx="1">
+            <a:schemeClr val="accent1"/>
+          </a:lnRef>
+          <a:fillRef idx="3">
+            <a:schemeClr val="accent1"/>
+          </a:fillRef>
+          <a:effectRef idx="2">
+            <a:schemeClr val="accent1"/>
+          </a:effectRef>
+          <a:fontRef idx="minor">
+            <a:schemeClr val="lt1"/>
+          </a:fontRef>
+        </p:style>
+        <p:txBody>
+          <a:bodyPr rtlCol="0" anchor="ctr"/>
+          <a:lstStyle/>
+          <a:p>
+            <a:pPr algn="ctr"/>
+          </a:p>
+        </p:txBody>
+      </p:sp>
+      <p:sp>
+        <p:nvSpPr>
+          <p:cNvPr id="6" name="Rectangle 5"/>
+          <p:cNvSpPr/>
+          <p:nvPr/>
+        </p:nvSpPr>
+        <p:spPr>
+          <a:xfrm>
+            <a:off x="685800" y="502920"/>
+            <a:ext cx="36576" cy="658368"/>
+          </a:xfrm>
+          <a:prstGeom prst="rect">
+            <a:avLst/>
+          </a:prstGeom>
+          <a:solidFill>
+            <a:srgbClr val="D9C089"/>
+          </a:solidFill>
+          <a:ln>
+            <a:noFill/>
+          </a:ln>
+        </p:spPr>
+        <p:style>
+          <a:lnRef idx="1">
+            <a:schemeClr val="accent1"/>
+          </a:lnRef>
+          <a:fillRef idx="3">
+            <a:schemeClr val="accent1"/>
+          </a:fillRef>
+          <a:effectRef idx="2">
+            <a:schemeClr val="accent1"/>
+          </a:effectRef>
+          <a:fontRef idx="minor">
+            <a:schemeClr val="lt1"/>
+          </a:fontRef>
+        </p:style>
+        <p:txBody>
+          <a:bodyPr rtlCol="0" anchor="ctr"/>
+          <a:lstStyle/>
+          <a:p>
+            <a:pPr algn="ctr"/>
+          </a:p>
+        </p:txBody>
+      </p:sp>
+      <p:sp>
+        <p:nvSpPr>
+          <p:cNvPr id="7" name="TextBox 6"/>
+          <p:cNvSpPr txBox="1"/>
+          <p:nvPr/>
+        </p:nvSpPr>
+        <p:spPr>
+          <a:xfrm>
+            <a:off x="813816" y="502920"/>
+            <a:ext cx="10634472" cy="685800"/>
+          </a:xfrm>
+          <a:prstGeom prst="rect">
+            <a:avLst/>
+          </a:prstGeom>
+          <a:noFill/>
+        </p:spPr>
+        <p:txBody>
           <a:bodyPr wrap="square">
-            <a:normAutofit/>
+            <a:spAutoFit/>
           </a:bodyPr>
           <a:lstStyle/>
           <a:p>
             <a:pPr algn="l"/>
             <a:r>
-              <a:rPr sz="1400" b="0" i="0">
-                <a:solidFill>
-                  <a:srgbClr val="191D2E"/>
-                </a:solidFill>
-                <a:latin typeface="Georgia"/>
+              <a:rPr sz="2400" b="1" i="0">
+                <a:solidFill>
+                  <a:srgbClr val="1F2C56"/>
+                </a:solidFill>
+                <a:latin typeface="Source Serif 4"/>
               </a:rPr>
-              <a:t>M17 · Berater</a:t>
+              <a:t>Arbeitsblatt B: Workflow-Optimierungsplan</a:t>
+            </a:r>
+          </a:p>
+        </p:txBody>
+      </p:sp>
+      <p:sp>
+        <p:nvSpPr>
+          <p:cNvPr id="8" name="TextBox 7"/>
+          <p:cNvSpPr txBox="1"/>
+          <p:nvPr/>
+        </p:nvSpPr>
+        <p:spPr>
+          <a:xfrm>
+            <a:off x="685800" y="1417320"/>
+            <a:ext cx="10817352" cy="5029200"/>
+          </a:xfrm>
+          <a:prstGeom prst="rect">
+            <a:avLst/>
+          </a:prstGeom>
+          <a:noFill/>
+        </p:spPr>
+        <p:txBody>
+          <a:bodyPr wrap="square">
+            <a:spAutoFit/>
+          </a:bodyPr>
+          <a:lstStyle/>
+          <a:p>
+            <a:pPr>
+              <a:spcBef>
+                <a:spcPts val="400"/>
+              </a:spcBef>
+              <a:spcAft>
+                <a:spcPts val="200"/>
+              </a:spcAft>
+            </a:pPr>
+            <a:r>
+              <a:rPr sz="1200">
+                <a:solidFill>
+                  <a:srgbClr val="3D5466"/>
+                </a:solidFill>
+                <a:latin typeface="Arial"/>
+              </a:rPr>
+              <a:t>Aktueller Zeitaufwand Jahresgespräch gesamt: ________ Minuten</a:t>
+            </a:r>
+          </a:p>
+          <a:p>
+            <a:pPr>
+              <a:spcBef>
+                <a:spcPts val="400"/>
+              </a:spcBef>
+              <a:spcAft>
+                <a:spcPts val="200"/>
+              </a:spcAft>
+            </a:pPr>
+            <a:r>
+              <a:rPr sz="1200">
+                <a:solidFill>
+                  <a:srgbClr val="3D5466"/>
+                </a:solidFill>
+                <a:latin typeface="Arial"/>
+              </a:rPr>
+              <a:t># 5. PRAXISTRANSFER</a:t>
+            </a:r>
+          </a:p>
+        </p:txBody>
+      </p:sp>
+      <p:sp>
+        <p:nvSpPr>
+          <p:cNvPr id="9" name="Rectangle 8"/>
+          <p:cNvSpPr/>
+          <p:nvPr/>
+        </p:nvSpPr>
+        <p:spPr>
+          <a:xfrm>
+            <a:off x="0" y="6510528"/>
+            <a:ext cx="12188952" cy="347472"/>
+          </a:xfrm>
+          <a:prstGeom prst="rect">
+            <a:avLst/>
+          </a:prstGeom>
+          <a:solidFill>
+            <a:srgbClr val="0A1937"/>
+          </a:solidFill>
+          <a:ln>
+            <a:noFill/>
+          </a:ln>
+        </p:spPr>
+        <p:style>
+          <a:lnRef idx="1">
+            <a:schemeClr val="accent1"/>
+          </a:lnRef>
+          <a:fillRef idx="3">
+            <a:schemeClr val="accent1"/>
+          </a:fillRef>
+          <a:effectRef idx="2">
+            <a:schemeClr val="accent1"/>
+          </a:effectRef>
+          <a:fontRef idx="minor">
+            <a:schemeClr val="lt1"/>
+          </a:fontRef>
+        </p:style>
+        <p:txBody>
+          <a:bodyPr rtlCol="0" anchor="ctr"/>
+          <a:lstStyle/>
+          <a:p>
+            <a:pPr algn="ctr"/>
+          </a:p>
+        </p:txBody>
+      </p:sp>
+      <p:sp>
+        <p:nvSpPr>
+          <p:cNvPr id="10" name="TextBox 9"/>
+          <p:cNvSpPr txBox="1"/>
+          <p:nvPr/>
+        </p:nvSpPr>
+        <p:spPr>
+          <a:xfrm>
+            <a:off x="685800" y="6583680"/>
+            <a:ext cx="6490411" cy="256032"/>
+          </a:xfrm>
+          <a:prstGeom prst="rect">
+            <a:avLst/>
+          </a:prstGeom>
+          <a:noFill/>
+        </p:spPr>
+        <p:txBody>
+          <a:bodyPr wrap="none">
+            <a:spAutoFit/>
+          </a:bodyPr>
+          <a:lstStyle/>
+          <a:p>
+            <a:pPr algn="l"/>
+            <a:r>
+              <a:rPr sz="700">
+                <a:solidFill>
+                  <a:srgbClr val="A0B4D2"/>
+                </a:solidFill>
+                <a:latin typeface="JetBrains Mono"/>
+              </a:rPr>
+              <a:t>Benedikt Zoller Coaching  ·  FKB Campus  ·  M17</a:t>
             </a:r>
           </a:p>
         </p:txBody>
@@ -3789,14 +4435,6 @@
 <file path=ppt/slides/slide2.xml><?xml version="1.0" encoding="utf-8"?>
 <p:sld xmlns:a="http://schemas.openxmlformats.org/drawingml/2006/main" xmlns:p="http://schemas.openxmlformats.org/presentationml/2006/main" xmlns:r="http://schemas.openxmlformats.org/officeDocument/2006/relationships">
   <p:cSld>
-    <p:bg>
-      <p:bgPr>
-        <a:solidFill>
-          <a:srgbClr val="F8F8FA"/>
-        </a:solidFill>
-        <a:effectLst/>
-      </p:bgPr>
-    </p:bg>
     <p:spTree>
       <p:nvGrpSpPr>
         <p:cNvPr id="1" name=""/>
@@ -3806,125 +4444,20 @@
       <p:grpSpPr/>
       <p:sp>
         <p:nvSpPr>
-          <p:cNvPr id="2" name="TextBox 1"/>
-          <p:cNvSpPr txBox="1"/>
-          <p:nvPr/>
-        </p:nvSpPr>
-        <p:spPr>
-          <a:xfrm>
-            <a:off x="609600" y="279400"/>
-            <a:ext cx="2540000" cy="279400"/>
-          </a:xfrm>
-          <a:prstGeom prst="rect">
-            <a:avLst/>
-          </a:prstGeom>
-          <a:noFill/>
-        </p:spPr>
-        <p:txBody>
-          <a:bodyPr wrap="square">
-            <a:normAutofit/>
-          </a:bodyPr>
-          <a:lstStyle/>
-          <a:p>
-            <a:pPr algn="l"/>
-            <a:r>
-              <a:rPr sz="1000" b="1" i="0">
-                <a:solidFill>
-                  <a:srgbClr val="191D2E"/>
-                </a:solidFill>
-                <a:latin typeface="Arial"/>
-              </a:rPr>
-              <a:t>FKB  Campus</a:t>
-            </a:r>
-          </a:p>
-        </p:txBody>
-      </p:sp>
-      <p:sp>
-        <p:nvSpPr>
-          <p:cNvPr id="3" name="TextBox 2"/>
-          <p:cNvSpPr txBox="1"/>
-          <p:nvPr/>
-        </p:nvSpPr>
-        <p:spPr>
-          <a:xfrm>
-            <a:off x="609600" y="279400"/>
-            <a:ext cx="10972800" cy="279400"/>
-          </a:xfrm>
-          <a:prstGeom prst="rect">
-            <a:avLst/>
-          </a:prstGeom>
-          <a:noFill/>
-        </p:spPr>
-        <p:txBody>
-          <a:bodyPr wrap="square">
-            <a:normAutofit/>
-          </a:bodyPr>
-          <a:lstStyle/>
-          <a:p>
-            <a:pPr algn="r"/>
-            <a:r>
-              <a:rPr sz="900" b="0" i="0">
-                <a:solidFill>
-                  <a:srgbClr val="7B7FA0"/>
-                </a:solidFill>
-                <a:latin typeface="Courier New"/>
-              </a:rPr>
-              <a:t>§ 00 — LERNZIELE</a:t>
-            </a:r>
-          </a:p>
-        </p:txBody>
-      </p:sp>
-      <p:sp>
-        <p:nvSpPr>
-          <p:cNvPr id="4" name="TextBox 3"/>
-          <p:cNvSpPr txBox="1"/>
-          <p:nvPr/>
-        </p:nvSpPr>
-        <p:spPr>
-          <a:xfrm>
-            <a:off x="609600" y="6426200"/>
-            <a:ext cx="10972800" cy="228600"/>
-          </a:xfrm>
-          <a:prstGeom prst="rect">
-            <a:avLst/>
-          </a:prstGeom>
-          <a:noFill/>
-        </p:spPr>
-        <p:txBody>
-          <a:bodyPr wrap="square">
-            <a:normAutofit/>
-          </a:bodyPr>
-          <a:lstStyle/>
-          <a:p>
-            <a:pPr algn="r"/>
-            <a:r>
-              <a:rPr sz="900" b="0" i="0">
-                <a:solidFill>
-                  <a:srgbClr val="7B7FA0"/>
-                </a:solidFill>
-                <a:latin typeface="Courier New"/>
-              </a:rPr>
-              <a:t>02</a:t>
-            </a:r>
-          </a:p>
-        </p:txBody>
-      </p:sp>
-      <p:sp>
-        <p:nvSpPr>
-          <p:cNvPr id="5" name="Rectangle 4"/>
+          <p:cNvPr id="2" name="Rectangle 1"/>
           <p:cNvSpPr/>
           <p:nvPr/>
         </p:nvSpPr>
         <p:spPr>
           <a:xfrm>
-            <a:off x="609600" y="825500"/>
-            <a:ext cx="10972800" cy="6350"/>
+            <a:off x="0" y="0"/>
+            <a:ext cx="12188952" cy="6858000"/>
           </a:xfrm>
           <a:prstGeom prst="rect">
             <a:avLst/>
           </a:prstGeom>
           <a:solidFill>
-            <a:srgbClr val="191D2E"/>
+            <a:srgbClr val="EDEDF3"/>
           </a:solidFill>
           <a:ln>
             <a:noFill/>
@@ -3954,55 +4487,20 @@
       </p:sp>
       <p:sp>
         <p:nvSpPr>
-          <p:cNvPr id="6" name="TextBox 5"/>
-          <p:cNvSpPr txBox="1"/>
-          <p:nvPr/>
-        </p:nvSpPr>
-        <p:spPr>
-          <a:xfrm>
-            <a:off x="609600" y="920750"/>
-            <a:ext cx="3175000" cy="1651000"/>
-          </a:xfrm>
-          <a:prstGeom prst="rect">
-            <a:avLst/>
-          </a:prstGeom>
-          <a:noFill/>
-        </p:spPr>
-        <p:txBody>
-          <a:bodyPr wrap="square">
-            <a:normAutofit/>
-          </a:bodyPr>
-          <a:lstStyle/>
-          <a:p>
-            <a:pPr algn="l"/>
-            <a:r>
-              <a:rPr sz="4800" b="0" i="1">
-                <a:solidFill>
-                  <a:srgbClr val="1F2B56"/>
-                </a:solidFill>
-                <a:latin typeface="Georgia"/>
-              </a:rPr>
-              <a:t>Inhalt.</a:t>
-            </a:r>
-          </a:p>
-        </p:txBody>
-      </p:sp>
-      <p:sp>
-        <p:nvSpPr>
-          <p:cNvPr id="7" name="Rectangle 6"/>
+          <p:cNvPr id="3" name="Rectangle 2"/>
           <p:cNvSpPr/>
           <p:nvPr/>
         </p:nvSpPr>
         <p:spPr>
           <a:xfrm>
-            <a:off x="4064000" y="889000"/>
-            <a:ext cx="7518399" cy="6350"/>
+            <a:off x="0" y="0"/>
+            <a:ext cx="12188952" cy="50292"/>
           </a:xfrm>
           <a:prstGeom prst="rect">
             <a:avLst/>
           </a:prstGeom>
           <a:solidFill>
-            <a:srgbClr val="E0E0E8"/>
+            <a:srgbClr val="1F2C56"/>
           </a:solidFill>
           <a:ln>
             <a:noFill/>
@@ -4032,14 +4530,14 @@
       </p:sp>
       <p:sp>
         <p:nvSpPr>
-          <p:cNvPr id="8" name="TextBox 7"/>
+          <p:cNvPr id="4" name="TextBox 3"/>
           <p:cNvSpPr txBox="1"/>
           <p:nvPr/>
         </p:nvSpPr>
         <p:spPr>
           <a:xfrm>
-            <a:off x="4064000" y="939799"/>
-            <a:ext cx="762000" cy="647700"/>
+            <a:off x="685800" y="109728"/>
+            <a:ext cx="10817352" cy="228600"/>
           </a:xfrm>
           <a:prstGeom prst="rect">
             <a:avLst/>
@@ -4048,74 +4546,39 @@
         </p:spPr>
         <p:txBody>
           <a:bodyPr wrap="none">
-            <a:normAutofit/>
+            <a:spAutoFit/>
           </a:bodyPr>
           <a:lstStyle/>
           <a:p>
             <a:pPr algn="l"/>
             <a:r>
-              <a:rPr sz="2400" b="0" i="1">
-                <a:solidFill>
-                  <a:srgbClr val="1F2B56"/>
-                </a:solidFill>
-                <a:latin typeface="Georgia"/>
+              <a:rPr sz="750">
+                <a:solidFill>
+                  <a:srgbClr val="78808C"/>
+                </a:solidFill>
+                <a:latin typeface="JetBrains Mono"/>
               </a:rPr>
-              <a:t>I</a:t>
-            </a:r>
-          </a:p>
-        </p:txBody>
-      </p:sp>
-      <p:sp>
-        <p:nvSpPr>
-          <p:cNvPr id="9" name="TextBox 8"/>
-          <p:cNvSpPr txBox="1"/>
-          <p:nvPr/>
-        </p:nvSpPr>
-        <p:spPr>
-          <a:xfrm>
-            <a:off x="4953000" y="952500"/>
-            <a:ext cx="6629400" cy="635000"/>
-          </a:xfrm>
-          <a:prstGeom prst="rect">
-            <a:avLst/>
-          </a:prstGeom>
-          <a:noFill/>
-        </p:spPr>
-        <p:txBody>
-          <a:bodyPr wrap="square">
-            <a:normAutofit/>
-          </a:bodyPr>
-          <a:lstStyle/>
-          <a:p>
-            <a:pPr algn="l"/>
-            <a:r>
-              <a:rPr sz="1400" b="0" i="0">
-                <a:solidFill>
-                  <a:srgbClr val="191D2E"/>
-                </a:solidFill>
-                <a:latin typeface="Georgia"/>
-              </a:rPr>
-              <a:t>Die fünf zentralen Funktionsbereiche von agree für Firmenkundenberater beschreiben und typische Aufgaben zuordnen</a:t>
-            </a:r>
-          </a:p>
-        </p:txBody>
-      </p:sp>
-      <p:sp>
-        <p:nvSpPr>
-          <p:cNvPr id="10" name="Rectangle 9"/>
+              <a:t>LERNZIELE  ·  M17</a:t>
+            </a:r>
+          </a:p>
+        </p:txBody>
+      </p:sp>
+      <p:sp>
+        <p:nvSpPr>
+          <p:cNvPr id="5" name="Rectangle 4"/>
           <p:cNvSpPr/>
           <p:nvPr/>
         </p:nvSpPr>
         <p:spPr>
           <a:xfrm>
-            <a:off x="4064000" y="1587500"/>
-            <a:ext cx="7518399" cy="6350"/>
+            <a:off x="0" y="1234440"/>
+            <a:ext cx="12188952" cy="12700"/>
           </a:xfrm>
           <a:prstGeom prst="rect">
             <a:avLst/>
           </a:prstGeom>
           <a:solidFill>
-            <a:srgbClr val="E0E0E8"/>
+            <a:srgbClr val="D8DFE4"/>
           </a:solidFill>
           <a:ln>
             <a:noFill/>
@@ -4145,14 +4608,14 @@
       </p:sp>
       <p:sp>
         <p:nvSpPr>
-          <p:cNvPr id="11" name="TextBox 10"/>
+          <p:cNvPr id="6" name="TextBox 5"/>
           <p:cNvSpPr txBox="1"/>
           <p:nvPr/>
         </p:nvSpPr>
         <p:spPr>
           <a:xfrm>
-            <a:off x="4064000" y="1638300"/>
-            <a:ext cx="762000" cy="647700"/>
+            <a:off x="685800" y="502920"/>
+            <a:ext cx="10817352" cy="658368"/>
           </a:xfrm>
           <a:prstGeom prst="rect">
             <a:avLst/>
@@ -4160,34 +4623,34 @@
           <a:noFill/>
         </p:spPr>
         <p:txBody>
-          <a:bodyPr wrap="none">
-            <a:normAutofit/>
+          <a:bodyPr wrap="square">
+            <a:spAutoFit/>
           </a:bodyPr>
           <a:lstStyle/>
           <a:p>
             <a:pPr algn="l"/>
             <a:r>
-              <a:rPr sz="2400" b="0" i="1">
-                <a:solidFill>
-                  <a:srgbClr val="1F2B56"/>
-                </a:solidFill>
-                <a:latin typeface="Georgia"/>
+              <a:rPr sz="2600" b="1" i="0">
+                <a:solidFill>
+                  <a:srgbClr val="1F2C56"/>
+                </a:solidFill>
+                <a:latin typeface="Source Serif 4"/>
               </a:rPr>
-              <a:t>II</a:t>
-            </a:r>
-          </a:p>
-        </p:txBody>
-      </p:sp>
-      <p:sp>
-        <p:nvSpPr>
-          <p:cNvPr id="12" name="TextBox 11"/>
+              <a:t>Was Sie heute mitnehmen</a:t>
+            </a:r>
+          </a:p>
+        </p:txBody>
+      </p:sp>
+      <p:sp>
+        <p:nvSpPr>
+          <p:cNvPr id="7" name="TextBox 6"/>
           <p:cNvSpPr txBox="1"/>
           <p:nvPr/>
         </p:nvSpPr>
         <p:spPr>
           <a:xfrm>
-            <a:off x="4953000" y="1651000"/>
-            <a:ext cx="6629400" cy="635000"/>
+            <a:off x="685800" y="1371600"/>
+            <a:ext cx="10817352" cy="5120640"/>
           </a:xfrm>
           <a:prstGeom prst="rect">
             <a:avLst/>
@@ -4196,39 +4659,122 @@
         </p:spPr>
         <p:txBody>
           <a:bodyPr wrap="square">
-            <a:normAutofit/>
+            <a:spAutoFit/>
           </a:bodyPr>
           <a:lstStyle/>
           <a:p>
-            <a:pPr algn="l"/>
-            <a:r>
-              <a:rPr sz="1400" b="0" i="0">
-                <a:solidFill>
-                  <a:srgbClr val="191D2E"/>
-                </a:solidFill>
-                <a:latin typeface="Georgia"/>
+            <a:pPr>
+              <a:spcBef>
+                <a:spcPts val="800"/>
+              </a:spcBef>
+              <a:spcAft>
+                <a:spcPts val="200"/>
+              </a:spcAft>
+            </a:pPr>
+            <a:r>
+              <a:rPr sz="1400">
+                <a:solidFill>
+                  <a:srgbClr val="3D5466"/>
+                </a:solidFill>
+                <a:latin typeface="Arial"/>
               </a:rPr>
-              <a:t>Die digitale Gesprächsvorbereitung für ein Jahresgespräch vollständig in agree durchführen</a:t>
-            </a:r>
-          </a:p>
-        </p:txBody>
-      </p:sp>
-      <p:sp>
-        <p:nvSpPr>
-          <p:cNvPr id="13" name="Rectangle 12"/>
+              <a:t>▸  Die fünf zentralen Funktionsbereiche von agree für Firmenkundenberater beschreiben und typische Aufgaben zuordnen</a:t>
+            </a:r>
+          </a:p>
+          <a:p>
+            <a:pPr>
+              <a:spcBef>
+                <a:spcPts val="800"/>
+              </a:spcBef>
+              <a:spcAft>
+                <a:spcPts val="200"/>
+              </a:spcAft>
+            </a:pPr>
+            <a:r>
+              <a:rPr sz="1400">
+                <a:solidFill>
+                  <a:srgbClr val="3D5466"/>
+                </a:solidFill>
+                <a:latin typeface="Arial"/>
+              </a:rPr>
+              <a:t>▸  Die digitale Gesprächsvorbereitung für ein Jahresgespräch vollständig in agree durchführen</a:t>
+            </a:r>
+          </a:p>
+          <a:p>
+            <a:pPr>
+              <a:spcBef>
+                <a:spcPts val="800"/>
+              </a:spcBef>
+              <a:spcAft>
+                <a:spcPts val="200"/>
+              </a:spcAft>
+            </a:pPr>
+            <a:r>
+              <a:rPr sz="1400">
+                <a:solidFill>
+                  <a:srgbClr val="3D5466"/>
+                </a:solidFill>
+                <a:latin typeface="Arial"/>
+              </a:rPr>
+              <a:t>▸  Den UnternehmerDialog als strukturierten Gesprächsleitfaden nutzen und Bedarfe sowie Folgeaktivitäten unmittelbar dokumentieren</a:t>
+            </a:r>
+          </a:p>
+          <a:p>
+            <a:pPr>
+              <a:spcBef>
+                <a:spcPts val="800"/>
+              </a:spcBef>
+              <a:spcAft>
+                <a:spcPts val="200"/>
+              </a:spcAft>
+            </a:pPr>
+            <a:r>
+              <a:rPr sz="1400">
+                <a:solidFill>
+                  <a:srgbClr val="3D5466"/>
+                </a:solidFill>
+                <a:latin typeface="Arial"/>
+              </a:rPr>
+              <a:t>▸  Einen NMZ-Bestandsbericht und einen Frühwarnbericht aus agree erzeugen und die wichtigsten Kennzahlen interpretieren</a:t>
+            </a:r>
+          </a:p>
+          <a:p>
+            <a:pPr>
+              <a:spcBef>
+                <a:spcPts val="800"/>
+              </a:spcBef>
+              <a:spcAft>
+                <a:spcPts val="200"/>
+              </a:spcAft>
+            </a:pPr>
+            <a:r>
+              <a:rPr sz="1400">
+                <a:solidFill>
+                  <a:srgbClr val="3D5466"/>
+                </a:solidFill>
+                <a:latin typeface="Arial"/>
+              </a:rPr>
+              <a:t>▸  Den eigenen agree-Workflow analysieren und mindestens zwei Zeitfresser mit konkreten agree-Systemfunktionen identifizieren</a:t>
+            </a:r>
+          </a:p>
+        </p:txBody>
+      </p:sp>
+      <p:sp>
+        <p:nvSpPr>
+          <p:cNvPr id="8" name="Rectangle 7"/>
           <p:cNvSpPr/>
           <p:nvPr/>
         </p:nvSpPr>
         <p:spPr>
           <a:xfrm>
-            <a:off x="4064000" y="2286000"/>
-            <a:ext cx="7518399" cy="6350"/>
+            <a:off x="0" y="6510528"/>
+            <a:ext cx="12188952" cy="347472"/>
           </a:xfrm>
           <a:prstGeom prst="rect">
             <a:avLst/>
           </a:prstGeom>
           <a:solidFill>
-            <a:srgbClr val="E0E0E8"/>
+            <a:srgbClr val="0A1937"/>
           </a:solidFill>
           <a:ln>
             <a:noFill/>
@@ -4258,14 +4804,14 @@
       </p:sp>
       <p:sp>
         <p:nvSpPr>
-          <p:cNvPr id="14" name="TextBox 13"/>
+          <p:cNvPr id="9" name="TextBox 8"/>
           <p:cNvSpPr txBox="1"/>
           <p:nvPr/>
         </p:nvSpPr>
         <p:spPr>
           <a:xfrm>
-            <a:off x="4064000" y="2336800"/>
-            <a:ext cx="762000" cy="647700"/>
+            <a:off x="685800" y="6583680"/>
+            <a:ext cx="6490411" cy="256032"/>
           </a:xfrm>
           <a:prstGeom prst="rect">
             <a:avLst/>
@@ -4274,280 +4820,19 @@
         </p:spPr>
         <p:txBody>
           <a:bodyPr wrap="none">
-            <a:normAutofit/>
+            <a:spAutoFit/>
           </a:bodyPr>
           <a:lstStyle/>
           <a:p>
             <a:pPr algn="l"/>
             <a:r>
-              <a:rPr sz="2400" b="0" i="1">
-                <a:solidFill>
-                  <a:srgbClr val="1F2B56"/>
-                </a:solidFill>
-                <a:latin typeface="Georgia"/>
+              <a:rPr sz="700">
+                <a:solidFill>
+                  <a:srgbClr val="A0B4D2"/>
+                </a:solidFill>
+                <a:latin typeface="JetBrains Mono"/>
               </a:rPr>
-              <a:t>III</a:t>
-            </a:r>
-          </a:p>
-        </p:txBody>
-      </p:sp>
-      <p:sp>
-        <p:nvSpPr>
-          <p:cNvPr id="15" name="TextBox 14"/>
-          <p:cNvSpPr txBox="1"/>
-          <p:nvPr/>
-        </p:nvSpPr>
-        <p:spPr>
-          <a:xfrm>
-            <a:off x="4953000" y="2349500"/>
-            <a:ext cx="6629400" cy="635000"/>
-          </a:xfrm>
-          <a:prstGeom prst="rect">
-            <a:avLst/>
-          </a:prstGeom>
-          <a:noFill/>
-        </p:spPr>
-        <p:txBody>
-          <a:bodyPr wrap="square">
-            <a:normAutofit/>
-          </a:bodyPr>
-          <a:lstStyle/>
-          <a:p>
-            <a:pPr algn="l"/>
-            <a:r>
-              <a:rPr sz="1400" b="0" i="0">
-                <a:solidFill>
-                  <a:srgbClr val="191D2E"/>
-                </a:solidFill>
-                <a:latin typeface="Georgia"/>
-              </a:rPr>
-              <a:t>Den UnternehmerDialog als strukturierten Gesprächsleitfaden nutzen und Bedarfe sowie Folgeaktivitäten unmittelbar dokumentieren</a:t>
-            </a:r>
-          </a:p>
-        </p:txBody>
-      </p:sp>
-      <p:sp>
-        <p:nvSpPr>
-          <p:cNvPr id="16" name="Rectangle 15"/>
-          <p:cNvSpPr/>
-          <p:nvPr/>
-        </p:nvSpPr>
-        <p:spPr>
-          <a:xfrm>
-            <a:off x="4064000" y="2984500"/>
-            <a:ext cx="7518399" cy="6350"/>
-          </a:xfrm>
-          <a:prstGeom prst="rect">
-            <a:avLst/>
-          </a:prstGeom>
-          <a:solidFill>
-            <a:srgbClr val="E0E0E8"/>
-          </a:solidFill>
-          <a:ln>
-            <a:noFill/>
-          </a:ln>
-        </p:spPr>
-        <p:style>
-          <a:lnRef idx="1">
-            <a:schemeClr val="accent1"/>
-          </a:lnRef>
-          <a:fillRef idx="3">
-            <a:schemeClr val="accent1"/>
-          </a:fillRef>
-          <a:effectRef idx="2">
-            <a:schemeClr val="accent1"/>
-          </a:effectRef>
-          <a:fontRef idx="minor">
-            <a:schemeClr val="lt1"/>
-          </a:fontRef>
-        </p:style>
-        <p:txBody>
-          <a:bodyPr rtlCol="0" anchor="ctr"/>
-          <a:lstStyle/>
-          <a:p>
-            <a:pPr algn="ctr"/>
-          </a:p>
-        </p:txBody>
-      </p:sp>
-      <p:sp>
-        <p:nvSpPr>
-          <p:cNvPr id="17" name="TextBox 16"/>
-          <p:cNvSpPr txBox="1"/>
-          <p:nvPr/>
-        </p:nvSpPr>
-        <p:spPr>
-          <a:xfrm>
-            <a:off x="4064000" y="3035300"/>
-            <a:ext cx="762000" cy="647700"/>
-          </a:xfrm>
-          <a:prstGeom prst="rect">
-            <a:avLst/>
-          </a:prstGeom>
-          <a:noFill/>
-        </p:spPr>
-        <p:txBody>
-          <a:bodyPr wrap="none">
-            <a:normAutofit/>
-          </a:bodyPr>
-          <a:lstStyle/>
-          <a:p>
-            <a:pPr algn="l"/>
-            <a:r>
-              <a:rPr sz="2400" b="0" i="1">
-                <a:solidFill>
-                  <a:srgbClr val="1F2B56"/>
-                </a:solidFill>
-                <a:latin typeface="Georgia"/>
-              </a:rPr>
-              <a:t>IV</a:t>
-            </a:r>
-          </a:p>
-        </p:txBody>
-      </p:sp>
-      <p:sp>
-        <p:nvSpPr>
-          <p:cNvPr id="18" name="TextBox 17"/>
-          <p:cNvSpPr txBox="1"/>
-          <p:nvPr/>
-        </p:nvSpPr>
-        <p:spPr>
-          <a:xfrm>
-            <a:off x="4953000" y="3048000"/>
-            <a:ext cx="6629400" cy="635000"/>
-          </a:xfrm>
-          <a:prstGeom prst="rect">
-            <a:avLst/>
-          </a:prstGeom>
-          <a:noFill/>
-        </p:spPr>
-        <p:txBody>
-          <a:bodyPr wrap="square">
-            <a:normAutofit/>
-          </a:bodyPr>
-          <a:lstStyle/>
-          <a:p>
-            <a:pPr algn="l"/>
-            <a:r>
-              <a:rPr sz="1400" b="0" i="0">
-                <a:solidFill>
-                  <a:srgbClr val="191D2E"/>
-                </a:solidFill>
-                <a:latin typeface="Georgia"/>
-              </a:rPr>
-              <a:t>Einen NMZ-Bestandsbericht und einen Frühwarnbericht aus agree erzeugen und die wichtigsten Kennzahlen interpretieren</a:t>
-            </a:r>
-          </a:p>
-        </p:txBody>
-      </p:sp>
-      <p:sp>
-        <p:nvSpPr>
-          <p:cNvPr id="19" name="Rectangle 18"/>
-          <p:cNvSpPr/>
-          <p:nvPr/>
-        </p:nvSpPr>
-        <p:spPr>
-          <a:xfrm>
-            <a:off x="4064000" y="3683000"/>
-            <a:ext cx="7518399" cy="6350"/>
-          </a:xfrm>
-          <a:prstGeom prst="rect">
-            <a:avLst/>
-          </a:prstGeom>
-          <a:solidFill>
-            <a:srgbClr val="E0E0E8"/>
-          </a:solidFill>
-          <a:ln>
-            <a:noFill/>
-          </a:ln>
-        </p:spPr>
-        <p:style>
-          <a:lnRef idx="1">
-            <a:schemeClr val="accent1"/>
-          </a:lnRef>
-          <a:fillRef idx="3">
-            <a:schemeClr val="accent1"/>
-          </a:fillRef>
-          <a:effectRef idx="2">
-            <a:schemeClr val="accent1"/>
-          </a:effectRef>
-          <a:fontRef idx="minor">
-            <a:schemeClr val="lt1"/>
-          </a:fontRef>
-        </p:style>
-        <p:txBody>
-          <a:bodyPr rtlCol="0" anchor="ctr"/>
-          <a:lstStyle/>
-          <a:p>
-            <a:pPr algn="ctr"/>
-          </a:p>
-        </p:txBody>
-      </p:sp>
-      <p:sp>
-        <p:nvSpPr>
-          <p:cNvPr id="20" name="TextBox 19"/>
-          <p:cNvSpPr txBox="1"/>
-          <p:nvPr/>
-        </p:nvSpPr>
-        <p:spPr>
-          <a:xfrm>
-            <a:off x="4064000" y="3733799"/>
-            <a:ext cx="762000" cy="647700"/>
-          </a:xfrm>
-          <a:prstGeom prst="rect">
-            <a:avLst/>
-          </a:prstGeom>
-          <a:noFill/>
-        </p:spPr>
-        <p:txBody>
-          <a:bodyPr wrap="none">
-            <a:normAutofit/>
-          </a:bodyPr>
-          <a:lstStyle/>
-          <a:p>
-            <a:pPr algn="l"/>
-            <a:r>
-              <a:rPr sz="2400" b="0" i="1">
-                <a:solidFill>
-                  <a:srgbClr val="1F2B56"/>
-                </a:solidFill>
-                <a:latin typeface="Georgia"/>
-              </a:rPr>
-              <a:t>V</a:t>
-            </a:r>
-          </a:p>
-        </p:txBody>
-      </p:sp>
-      <p:sp>
-        <p:nvSpPr>
-          <p:cNvPr id="21" name="TextBox 20"/>
-          <p:cNvSpPr txBox="1"/>
-          <p:nvPr/>
-        </p:nvSpPr>
-        <p:spPr>
-          <a:xfrm>
-            <a:off x="4953000" y="3746500"/>
-            <a:ext cx="6629400" cy="635000"/>
-          </a:xfrm>
-          <a:prstGeom prst="rect">
-            <a:avLst/>
-          </a:prstGeom>
-          <a:noFill/>
-        </p:spPr>
-        <p:txBody>
-          <a:bodyPr wrap="square">
-            <a:normAutofit/>
-          </a:bodyPr>
-          <a:lstStyle/>
-          <a:p>
-            <a:pPr algn="l"/>
-            <a:r>
-              <a:rPr sz="1400" b="0" i="0">
-                <a:solidFill>
-                  <a:srgbClr val="191D2E"/>
-                </a:solidFill>
-                <a:latin typeface="Georgia"/>
-              </a:rPr>
-              <a:t>Den eigenen agree-Workflow analysieren und mindestens zwei Zeitfresser mit konkreten agree-Systemfunktionen identifizieren</a:t>
+              <a:t>Benedikt Zoller Coaching  ·  FKB Campus  ·  M17</a:t>
             </a:r>
           </a:p>
         </p:txBody>
@@ -4563,14 +4848,6 @@
 <file path=ppt/slides/slide3.xml><?xml version="1.0" encoding="utf-8"?>
 <p:sld xmlns:a="http://schemas.openxmlformats.org/drawingml/2006/main" xmlns:p="http://schemas.openxmlformats.org/presentationml/2006/main" xmlns:r="http://schemas.openxmlformats.org/officeDocument/2006/relationships">
   <p:cSld>
-    <p:bg>
-      <p:bgPr>
-        <a:solidFill>
-          <a:srgbClr val="1F2B56"/>
-        </a:solidFill>
-        <a:effectLst/>
-      </p:bgPr>
-    </p:bg>
     <p:spTree>
       <p:nvGrpSpPr>
         <p:cNvPr id="1" name=""/>
@@ -4580,14 +4857,100 @@
       <p:grpSpPr/>
       <p:sp>
         <p:nvSpPr>
-          <p:cNvPr id="2" name="TextBox 1"/>
+          <p:cNvPr id="2" name="Rectangle 1"/>
+          <p:cNvSpPr/>
+          <p:nvPr/>
+        </p:nvSpPr>
+        <p:spPr>
+          <a:xfrm>
+            <a:off x="0" y="0"/>
+            <a:ext cx="12188952" cy="6858000"/>
+          </a:xfrm>
+          <a:prstGeom prst="rect">
+            <a:avLst/>
+          </a:prstGeom>
+          <a:solidFill>
+            <a:srgbClr val="EDEDF3"/>
+          </a:solidFill>
+          <a:ln>
+            <a:noFill/>
+          </a:ln>
+        </p:spPr>
+        <p:style>
+          <a:lnRef idx="1">
+            <a:schemeClr val="accent1"/>
+          </a:lnRef>
+          <a:fillRef idx="3">
+            <a:schemeClr val="accent1"/>
+          </a:fillRef>
+          <a:effectRef idx="2">
+            <a:schemeClr val="accent1"/>
+          </a:effectRef>
+          <a:fontRef idx="minor">
+            <a:schemeClr val="lt1"/>
+          </a:fontRef>
+        </p:style>
+        <p:txBody>
+          <a:bodyPr rtlCol="0" anchor="ctr"/>
+          <a:lstStyle/>
+          <a:p>
+            <a:pPr algn="ctr"/>
+          </a:p>
+        </p:txBody>
+      </p:sp>
+      <p:sp>
+        <p:nvSpPr>
+          <p:cNvPr id="3" name="Rectangle 2"/>
+          <p:cNvSpPr/>
+          <p:nvPr/>
+        </p:nvSpPr>
+        <p:spPr>
+          <a:xfrm>
+            <a:off x="0" y="0"/>
+            <a:ext cx="12188952" cy="50292"/>
+          </a:xfrm>
+          <a:prstGeom prst="rect">
+            <a:avLst/>
+          </a:prstGeom>
+          <a:solidFill>
+            <a:srgbClr val="1F2C56"/>
+          </a:solidFill>
+          <a:ln>
+            <a:noFill/>
+          </a:ln>
+        </p:spPr>
+        <p:style>
+          <a:lnRef idx="1">
+            <a:schemeClr val="accent1"/>
+          </a:lnRef>
+          <a:fillRef idx="3">
+            <a:schemeClr val="accent1"/>
+          </a:fillRef>
+          <a:effectRef idx="2">
+            <a:schemeClr val="accent1"/>
+          </a:effectRef>
+          <a:fontRef idx="minor">
+            <a:schemeClr val="lt1"/>
+          </a:fontRef>
+        </p:style>
+        <p:txBody>
+          <a:bodyPr rtlCol="0" anchor="ctr"/>
+          <a:lstStyle/>
+          <a:p>
+            <a:pPr algn="ctr"/>
+          </a:p>
+        </p:txBody>
+      </p:sp>
+      <p:sp>
+        <p:nvSpPr>
+          <p:cNvPr id="4" name="TextBox 3"/>
           <p:cNvSpPr txBox="1"/>
           <p:nvPr/>
         </p:nvSpPr>
         <p:spPr>
           <a:xfrm>
-            <a:off x="609600" y="279400"/>
-            <a:ext cx="2540000" cy="279400"/>
+            <a:off x="685800" y="109728"/>
+            <a:ext cx="10817352" cy="228600"/>
           </a:xfrm>
           <a:prstGeom prst="rect">
             <a:avLst/>
@@ -4595,34 +4958,259 @@
           <a:noFill/>
         </p:spPr>
         <p:txBody>
+          <a:bodyPr wrap="none">
+            <a:spAutoFit/>
+          </a:bodyPr>
+          <a:lstStyle/>
+          <a:p>
+            <a:pPr algn="l"/>
+            <a:r>
+              <a:rPr sz="750">
+                <a:solidFill>
+                  <a:srgbClr val="78808C"/>
+                </a:solidFill>
+                <a:latin typeface="JetBrains Mono"/>
+              </a:rPr>
+              <a:t>M17  ·  INHALT</a:t>
+            </a:r>
+          </a:p>
+        </p:txBody>
+      </p:sp>
+      <p:sp>
+        <p:nvSpPr>
+          <p:cNvPr id="5" name="Rectangle 4"/>
+          <p:cNvSpPr/>
+          <p:nvPr/>
+        </p:nvSpPr>
+        <p:spPr>
+          <a:xfrm>
+            <a:off x="0" y="1234440"/>
+            <a:ext cx="12188952" cy="12700"/>
+          </a:xfrm>
+          <a:prstGeom prst="rect">
+            <a:avLst/>
+          </a:prstGeom>
+          <a:solidFill>
+            <a:srgbClr val="D8DFE4"/>
+          </a:solidFill>
+          <a:ln>
+            <a:noFill/>
+          </a:ln>
+        </p:spPr>
+        <p:style>
+          <a:lnRef idx="1">
+            <a:schemeClr val="accent1"/>
+          </a:lnRef>
+          <a:fillRef idx="3">
+            <a:schemeClr val="accent1"/>
+          </a:fillRef>
+          <a:effectRef idx="2">
+            <a:schemeClr val="accent1"/>
+          </a:effectRef>
+          <a:fontRef idx="minor">
+            <a:schemeClr val="lt1"/>
+          </a:fontRef>
+        </p:style>
+        <p:txBody>
+          <a:bodyPr rtlCol="0" anchor="ctr"/>
+          <a:lstStyle/>
+          <a:p>
+            <a:pPr algn="ctr"/>
+          </a:p>
+        </p:txBody>
+      </p:sp>
+      <p:sp>
+        <p:nvSpPr>
+          <p:cNvPr id="6" name="Rectangle 5"/>
+          <p:cNvSpPr/>
+          <p:nvPr/>
+        </p:nvSpPr>
+        <p:spPr>
+          <a:xfrm>
+            <a:off x="685800" y="502920"/>
+            <a:ext cx="36576" cy="658368"/>
+          </a:xfrm>
+          <a:prstGeom prst="rect">
+            <a:avLst/>
+          </a:prstGeom>
+          <a:solidFill>
+            <a:srgbClr val="D9C089"/>
+          </a:solidFill>
+          <a:ln>
+            <a:noFill/>
+          </a:ln>
+        </p:spPr>
+        <p:style>
+          <a:lnRef idx="1">
+            <a:schemeClr val="accent1"/>
+          </a:lnRef>
+          <a:fillRef idx="3">
+            <a:schemeClr val="accent1"/>
+          </a:fillRef>
+          <a:effectRef idx="2">
+            <a:schemeClr val="accent1"/>
+          </a:effectRef>
+          <a:fontRef idx="minor">
+            <a:schemeClr val="lt1"/>
+          </a:fontRef>
+        </p:style>
+        <p:txBody>
+          <a:bodyPr rtlCol="0" anchor="ctr"/>
+          <a:lstStyle/>
+          <a:p>
+            <a:pPr algn="ctr"/>
+          </a:p>
+        </p:txBody>
+      </p:sp>
+      <p:sp>
+        <p:nvSpPr>
+          <p:cNvPr id="7" name="TextBox 6"/>
+          <p:cNvSpPr txBox="1"/>
+          <p:nvPr/>
+        </p:nvSpPr>
+        <p:spPr>
+          <a:xfrm>
+            <a:off x="813816" y="502920"/>
+            <a:ext cx="10634472" cy="685800"/>
+          </a:xfrm>
+          <a:prstGeom prst="rect">
+            <a:avLst/>
+          </a:prstGeom>
+          <a:noFill/>
+        </p:spPr>
+        <p:txBody>
           <a:bodyPr wrap="square">
-            <a:normAutofit/>
+            <a:spAutoFit/>
           </a:bodyPr>
           <a:lstStyle/>
           <a:p>
             <a:pPr algn="l"/>
             <a:r>
-              <a:rPr sz="1000" b="1" i="0">
-                <a:solidFill>
-                  <a:srgbClr val="F8F8FA"/>
+              <a:rPr sz="2400" b="1" i="0">
+                <a:solidFill>
+                  <a:srgbClr val="1F2C56"/>
+                </a:solidFill>
+                <a:latin typeface="Source Serif 4"/>
+              </a:rPr>
+              <a:t>Die häufigsten agree-Fehler im Firmenkundenalltag</a:t>
+            </a:r>
+          </a:p>
+        </p:txBody>
+      </p:sp>
+      <p:sp>
+        <p:nvSpPr>
+          <p:cNvPr id="8" name="TextBox 7"/>
+          <p:cNvSpPr txBox="1"/>
+          <p:nvPr/>
+        </p:nvSpPr>
+        <p:spPr>
+          <a:xfrm>
+            <a:off x="685800" y="1417320"/>
+            <a:ext cx="10817352" cy="5029200"/>
+          </a:xfrm>
+          <a:prstGeom prst="rect">
+            <a:avLst/>
+          </a:prstGeom>
+          <a:noFill/>
+        </p:spPr>
+        <p:txBody>
+          <a:bodyPr wrap="square">
+            <a:spAutoFit/>
+          </a:bodyPr>
+          <a:lstStyle/>
+          <a:p>
+            <a:pPr>
+              <a:spcBef>
+                <a:spcPts val="400"/>
+              </a:spcBef>
+              <a:spcAft>
+                <a:spcPts val="200"/>
+              </a:spcAft>
+            </a:pPr>
+            <a:r>
+              <a:rPr sz="1200">
+                <a:solidFill>
+                  <a:srgbClr val="3D5466"/>
                 </a:solidFill>
                 <a:latin typeface="Arial"/>
               </a:rPr>
-              <a:t>FKB  Campus</a:t>
-            </a:r>
-          </a:p>
-        </p:txBody>
-      </p:sp>
-      <p:sp>
-        <p:nvSpPr>
-          <p:cNvPr id="3" name="TextBox 2"/>
+              <a:t>## 4.2 Effizienter Gesprächsworkflow: Vor – Während – Nach</a:t>
+            </a:r>
+          </a:p>
+          <a:p>
+            <a:pPr>
+              <a:spcBef>
+                <a:spcPts val="400"/>
+              </a:spcBef>
+              <a:spcAft>
+                <a:spcPts val="200"/>
+              </a:spcAft>
+            </a:pPr>
+            <a:r>
+              <a:rPr sz="1200">
+                <a:solidFill>
+                  <a:srgbClr val="3D5466"/>
+                </a:solidFill>
+                <a:latin typeface="Arial"/>
+              </a:rPr>
+              <a:t>Der größte Effizienzgewinn entsteht nicht aus einzelnen Funktionen, sondern aus einem konsistenten Workflow, der agree konsequent in alle drei Gesprächsphasen einbindet.</a:t>
+            </a:r>
+          </a:p>
+        </p:txBody>
+      </p:sp>
+      <p:sp>
+        <p:nvSpPr>
+          <p:cNvPr id="9" name="Rectangle 8"/>
+          <p:cNvSpPr/>
+          <p:nvPr/>
+        </p:nvSpPr>
+        <p:spPr>
+          <a:xfrm>
+            <a:off x="0" y="6510528"/>
+            <a:ext cx="12188952" cy="347472"/>
+          </a:xfrm>
+          <a:prstGeom prst="rect">
+            <a:avLst/>
+          </a:prstGeom>
+          <a:solidFill>
+            <a:srgbClr val="0A1937"/>
+          </a:solidFill>
+          <a:ln>
+            <a:noFill/>
+          </a:ln>
+        </p:spPr>
+        <p:style>
+          <a:lnRef idx="1">
+            <a:schemeClr val="accent1"/>
+          </a:lnRef>
+          <a:fillRef idx="3">
+            <a:schemeClr val="accent1"/>
+          </a:fillRef>
+          <a:effectRef idx="2">
+            <a:schemeClr val="accent1"/>
+          </a:effectRef>
+          <a:fontRef idx="minor">
+            <a:schemeClr val="lt1"/>
+          </a:fontRef>
+        </p:style>
+        <p:txBody>
+          <a:bodyPr rtlCol="0" anchor="ctr"/>
+          <a:lstStyle/>
+          <a:p>
+            <a:pPr algn="ctr"/>
+          </a:p>
+        </p:txBody>
+      </p:sp>
+      <p:sp>
+        <p:nvSpPr>
+          <p:cNvPr id="10" name="TextBox 9"/>
           <p:cNvSpPr txBox="1"/>
           <p:nvPr/>
         </p:nvSpPr>
         <p:spPr>
           <a:xfrm>
-            <a:off x="609600" y="279400"/>
-            <a:ext cx="10972800" cy="279400"/>
+            <a:off x="685800" y="6583680"/>
+            <a:ext cx="6490411" cy="256032"/>
           </a:xfrm>
           <a:prstGeom prst="rect">
             <a:avLst/>
@@ -4630,160 +5218,20 @@
           <a:noFill/>
         </p:spPr>
         <p:txBody>
-          <a:bodyPr wrap="square">
-            <a:normAutofit/>
+          <a:bodyPr wrap="none">
+            <a:spAutoFit/>
           </a:bodyPr>
           <a:lstStyle/>
           <a:p>
-            <a:pPr algn="r"/>
-            <a:r>
-              <a:rPr sz="900" b="0" i="0">
-                <a:solidFill>
-                  <a:srgbClr val="7B7FA0"/>
-                </a:solidFill>
-                <a:latin typeface="Courier New"/>
+            <a:pPr algn="l"/>
+            <a:r>
+              <a:rPr sz="700">
+                <a:solidFill>
+                  <a:srgbClr val="A0B4D2"/>
+                </a:solidFill>
+                <a:latin typeface="JetBrains Mono"/>
               </a:rPr>
-              <a:t>AGREE: MEHR ALS EIN VERWALTUNGSSYSTEM</a:t>
-            </a:r>
-          </a:p>
-        </p:txBody>
-      </p:sp>
-      <p:sp>
-        <p:nvSpPr>
-          <p:cNvPr id="4" name="TextBox 3"/>
-          <p:cNvSpPr txBox="1"/>
-          <p:nvPr/>
-        </p:nvSpPr>
-        <p:spPr>
-          <a:xfrm>
-            <a:off x="609600" y="6426200"/>
-            <a:ext cx="10972800" cy="228600"/>
-          </a:xfrm>
-          <a:prstGeom prst="rect">
-            <a:avLst/>
-          </a:prstGeom>
-          <a:noFill/>
-        </p:spPr>
-        <p:txBody>
-          <a:bodyPr wrap="square">
-            <a:normAutofit/>
-          </a:bodyPr>
-          <a:lstStyle/>
-          <a:p>
-            <a:pPr algn="r"/>
-            <a:r>
-              <a:rPr sz="900" b="0" i="0">
-                <a:solidFill>
-                  <a:srgbClr val="7B7FA0"/>
-                </a:solidFill>
-                <a:latin typeface="Courier New"/>
-              </a:rPr>
-              <a:t>03</a:t>
-            </a:r>
-          </a:p>
-        </p:txBody>
-      </p:sp>
-      <p:sp>
-        <p:nvSpPr>
-          <p:cNvPr id="5" name="TextBox 4"/>
-          <p:cNvSpPr txBox="1"/>
-          <p:nvPr/>
-        </p:nvSpPr>
-        <p:spPr>
-          <a:xfrm>
-            <a:off x="609600" y="635000"/>
-            <a:ext cx="5461000" cy="5461000"/>
-          </a:xfrm>
-          <a:prstGeom prst="rect">
-            <a:avLst/>
-          </a:prstGeom>
-          <a:noFill/>
-        </p:spPr>
-        <p:txBody>
-          <a:bodyPr wrap="square">
-            <a:normAutofit/>
-          </a:bodyPr>
-          <a:lstStyle/>
-          <a:p>
-            <a:pPr algn="l"/>
-            <a:r>
-              <a:rPr sz="28000" b="0" i="1">
-                <a:solidFill>
-                  <a:srgbClr val="D9BF7A"/>
-                </a:solidFill>
-                <a:latin typeface="Georgia"/>
-              </a:rPr>
-              <a:t>I</a:t>
-            </a:r>
-          </a:p>
-        </p:txBody>
-      </p:sp>
-      <p:sp>
-        <p:nvSpPr>
-          <p:cNvPr id="6" name="TextBox 5"/>
-          <p:cNvSpPr txBox="1"/>
-          <p:nvPr/>
-        </p:nvSpPr>
-        <p:spPr>
-          <a:xfrm>
-            <a:off x="6731000" y="4064000"/>
-            <a:ext cx="4851400" cy="1778000"/>
-          </a:xfrm>
-          <a:prstGeom prst="rect">
-            <a:avLst/>
-          </a:prstGeom>
-          <a:noFill/>
-        </p:spPr>
-        <p:txBody>
-          <a:bodyPr wrap="square">
-            <a:normAutofit/>
-          </a:bodyPr>
-          <a:lstStyle/>
-          <a:p>
-            <a:pPr algn="r"/>
-            <a:r>
-              <a:rPr sz="3800" b="0" i="0">
-                <a:solidFill>
-                  <a:srgbClr val="F8F8FA"/>
-                </a:solidFill>
-                <a:latin typeface="Georgia"/>
-              </a:rPr>
-              <a:t>agree: Mehr als ein Verwaltungssystem</a:t>
-            </a:r>
-          </a:p>
-        </p:txBody>
-      </p:sp>
-      <p:sp>
-        <p:nvSpPr>
-          <p:cNvPr id="7" name="TextBox 6"/>
-          <p:cNvSpPr txBox="1"/>
-          <p:nvPr/>
-        </p:nvSpPr>
-        <p:spPr>
-          <a:xfrm>
-            <a:off x="6731000" y="5842000"/>
-            <a:ext cx="4851400" cy="635000"/>
-          </a:xfrm>
-          <a:prstGeom prst="rect">
-            <a:avLst/>
-          </a:prstGeom>
-          <a:noFill/>
-        </p:spPr>
-        <p:txBody>
-          <a:bodyPr wrap="square">
-            <a:normAutofit/>
-          </a:bodyPr>
-          <a:lstStyle/>
-          <a:p>
-            <a:pPr algn="r"/>
-            <a:r>
-              <a:rPr sz="1400" b="0" i="1">
-                <a:solidFill>
-                  <a:srgbClr val="7B7FA0"/>
-                </a:solidFill>
-                <a:latin typeface="Georgia"/>
-              </a:rPr>
-              <a:t>Wer agree gut nutzt, gewinnt Zeit für echte Beratung</a:t>
+              <a:t>Benedikt Zoller Coaching  ·  FKB Campus  ·  M17</a:t>
             </a:r>
           </a:p>
         </p:txBody>
@@ -4799,14 +5247,6 @@
 <file path=ppt/slides/slide4.xml><?xml version="1.0" encoding="utf-8"?>
 <p:sld xmlns:a="http://schemas.openxmlformats.org/drawingml/2006/main" xmlns:p="http://schemas.openxmlformats.org/presentationml/2006/main" xmlns:r="http://schemas.openxmlformats.org/officeDocument/2006/relationships">
   <p:cSld>
-    <p:bg>
-      <p:bgPr>
-        <a:solidFill>
-          <a:srgbClr val="F8F8FA"/>
-        </a:solidFill>
-        <a:effectLst/>
-      </p:bgPr>
-    </p:bg>
     <p:spTree>
       <p:nvGrpSpPr>
         <p:cNvPr id="1" name=""/>
@@ -4816,125 +5256,20 @@
       <p:grpSpPr/>
       <p:sp>
         <p:nvSpPr>
-          <p:cNvPr id="2" name="TextBox 1"/>
-          <p:cNvSpPr txBox="1"/>
-          <p:nvPr/>
-        </p:nvSpPr>
-        <p:spPr>
-          <a:xfrm>
-            <a:off x="609600" y="279400"/>
-            <a:ext cx="2540000" cy="279400"/>
-          </a:xfrm>
-          <a:prstGeom prst="rect">
-            <a:avLst/>
-          </a:prstGeom>
-          <a:noFill/>
-        </p:spPr>
-        <p:txBody>
-          <a:bodyPr wrap="square">
-            <a:normAutofit/>
-          </a:bodyPr>
-          <a:lstStyle/>
-          <a:p>
-            <a:pPr algn="l"/>
-            <a:r>
-              <a:rPr sz="1000" b="1" i="0">
-                <a:solidFill>
-                  <a:srgbClr val="191D2E"/>
-                </a:solidFill>
-                <a:latin typeface="Arial"/>
-              </a:rPr>
-              <a:t>FKB  Campus</a:t>
-            </a:r>
-          </a:p>
-        </p:txBody>
-      </p:sp>
-      <p:sp>
-        <p:nvSpPr>
-          <p:cNvPr id="3" name="TextBox 2"/>
-          <p:cNvSpPr txBox="1"/>
-          <p:nvPr/>
-        </p:nvSpPr>
-        <p:spPr>
-          <a:xfrm>
-            <a:off x="609600" y="279400"/>
-            <a:ext cx="10972800" cy="279400"/>
-          </a:xfrm>
-          <a:prstGeom prst="rect">
-            <a:avLst/>
-          </a:prstGeom>
-          <a:noFill/>
-        </p:spPr>
-        <p:txBody>
-          <a:bodyPr wrap="square">
-            <a:normAutofit/>
-          </a:bodyPr>
-          <a:lstStyle/>
-          <a:p>
-            <a:pPr algn="r"/>
-            <a:r>
-              <a:rPr sz="900" b="0" i="0">
-                <a:solidFill>
-                  <a:srgbClr val="7B7FA0"/>
-                </a:solidFill>
-                <a:latin typeface="Courier New"/>
-              </a:rPr>
-              <a:t>I · AGREE: MEHR ALS EIN VERWALTUNGSSYSTEM</a:t>
-            </a:r>
-          </a:p>
-        </p:txBody>
-      </p:sp>
-      <p:sp>
-        <p:nvSpPr>
-          <p:cNvPr id="4" name="TextBox 3"/>
-          <p:cNvSpPr txBox="1"/>
-          <p:nvPr/>
-        </p:nvSpPr>
-        <p:spPr>
-          <a:xfrm>
-            <a:off x="609600" y="6426200"/>
-            <a:ext cx="10972800" cy="228600"/>
-          </a:xfrm>
-          <a:prstGeom prst="rect">
-            <a:avLst/>
-          </a:prstGeom>
-          <a:noFill/>
-        </p:spPr>
-        <p:txBody>
-          <a:bodyPr wrap="square">
-            <a:normAutofit/>
-          </a:bodyPr>
-          <a:lstStyle/>
-          <a:p>
-            <a:pPr algn="r"/>
-            <a:r>
-              <a:rPr sz="900" b="0" i="0">
-                <a:solidFill>
-                  <a:srgbClr val="7B7FA0"/>
-                </a:solidFill>
-                <a:latin typeface="Courier New"/>
-              </a:rPr>
-              <a:t>04</a:t>
-            </a:r>
-          </a:p>
-        </p:txBody>
-      </p:sp>
-      <p:sp>
-        <p:nvSpPr>
-          <p:cNvPr id="5" name="Rectangle 4"/>
+          <p:cNvPr id="2" name="Rectangle 1"/>
           <p:cNvSpPr/>
           <p:nvPr/>
         </p:nvSpPr>
         <p:spPr>
           <a:xfrm>
-            <a:off x="609600" y="825500"/>
-            <a:ext cx="10972800" cy="6350"/>
+            <a:off x="0" y="0"/>
+            <a:ext cx="12188952" cy="6858000"/>
           </a:xfrm>
           <a:prstGeom prst="rect">
             <a:avLst/>
           </a:prstGeom>
           <a:solidFill>
-            <a:srgbClr val="191D2E"/>
+            <a:srgbClr val="FFFFFF"/>
           </a:solidFill>
           <a:ln>
             <a:noFill/>
@@ -4964,55 +5299,20 @@
       </p:sp>
       <p:sp>
         <p:nvSpPr>
-          <p:cNvPr id="6" name="TextBox 5"/>
-          <p:cNvSpPr txBox="1"/>
-          <p:nvPr/>
-        </p:nvSpPr>
-        <p:spPr>
-          <a:xfrm>
-            <a:off x="609600" y="920750"/>
-            <a:ext cx="10972800" cy="1778000"/>
-          </a:xfrm>
-          <a:prstGeom prst="rect">
-            <a:avLst/>
-          </a:prstGeom>
-          <a:noFill/>
-        </p:spPr>
-        <p:txBody>
-          <a:bodyPr wrap="square">
-            <a:normAutofit/>
-          </a:bodyPr>
-          <a:lstStyle/>
-          <a:p>
-            <a:pPr algn="l"/>
-            <a:r>
-              <a:rPr sz="3800" b="0" i="0">
-                <a:solidFill>
-                  <a:srgbClr val="191D2E"/>
-                </a:solidFill>
-                <a:latin typeface="Georgia"/>
-              </a:rPr>
-              <a:t>Fünf Funktionsbereiche — ein System</a:t>
-            </a:r>
-          </a:p>
-        </p:txBody>
-      </p:sp>
-      <p:sp>
-        <p:nvSpPr>
-          <p:cNvPr id="7" name="Rectangle 6"/>
+          <p:cNvPr id="3" name="Rectangle 2"/>
           <p:cNvSpPr/>
           <p:nvPr/>
         </p:nvSpPr>
         <p:spPr>
           <a:xfrm>
-            <a:off x="609600" y="2762250"/>
-            <a:ext cx="10972800" cy="6350"/>
+            <a:off x="0" y="0"/>
+            <a:ext cx="12188952" cy="50292"/>
           </a:xfrm>
           <a:prstGeom prst="rect">
             <a:avLst/>
           </a:prstGeom>
           <a:solidFill>
-            <a:srgbClr val="E0E0E8"/>
+            <a:srgbClr val="1F2C56"/>
           </a:solidFill>
           <a:ln>
             <a:noFill/>
@@ -5042,14 +5342,14 @@
       </p:sp>
       <p:sp>
         <p:nvSpPr>
-          <p:cNvPr id="8" name="TextBox 7"/>
+          <p:cNvPr id="4" name="TextBox 3"/>
           <p:cNvSpPr txBox="1"/>
           <p:nvPr/>
         </p:nvSpPr>
         <p:spPr>
           <a:xfrm>
-            <a:off x="609600" y="2851150"/>
-            <a:ext cx="10972800" cy="3448050"/>
+            <a:off x="685800" y="109728"/>
+            <a:ext cx="10817352" cy="228600"/>
           </a:xfrm>
           <a:prstGeom prst="rect">
             <a:avLst/>
@@ -5057,103 +5357,235 @@
           <a:noFill/>
         </p:spPr>
         <p:txBody>
+          <a:bodyPr wrap="none">
+            <a:spAutoFit/>
+          </a:bodyPr>
+          <a:lstStyle/>
+          <a:p>
+            <a:pPr algn="l"/>
+            <a:r>
+              <a:rPr sz="750">
+                <a:solidFill>
+                  <a:srgbClr val="78808C"/>
+                </a:solidFill>
+                <a:latin typeface="JetBrains Mono"/>
+              </a:rPr>
+              <a:t>M17  ·  SCHAUBILD</a:t>
+            </a:r>
+          </a:p>
+        </p:txBody>
+      </p:sp>
+      <p:sp>
+        <p:nvSpPr>
+          <p:cNvPr id="5" name="TextBox 4"/>
+          <p:cNvSpPr txBox="1"/>
+          <p:nvPr/>
+        </p:nvSpPr>
+        <p:spPr>
+          <a:xfrm>
+            <a:off x="685800" y="502920"/>
+            <a:ext cx="10817352" cy="594360"/>
+          </a:xfrm>
+          <a:prstGeom prst="rect">
+            <a:avLst/>
+          </a:prstGeom>
+          <a:noFill/>
+        </p:spPr>
+        <p:txBody>
           <a:bodyPr wrap="square">
-            <a:normAutofit/>
+            <a:spAutoFit/>
           </a:bodyPr>
           <a:lstStyle/>
           <a:p>
-            <a:pPr>
-              <a:spcBef>
-                <a:spcPts val="600"/>
-              </a:spcBef>
-              <a:spcAft>
-                <a:spcPts val="600"/>
-              </a:spcAft>
-            </a:pPr>
-            <a:r>
-              <a:rPr sz="1400">
-                <a:solidFill>
-                  <a:srgbClr val="191D2E"/>
-                </a:solidFill>
-                <a:latin typeface="Georgia"/>
+            <a:pPr algn="l"/>
+            <a:r>
+              <a:rPr sz="2000" b="1" i="0">
+                <a:solidFill>
+                  <a:srgbClr val="1F2C56"/>
+                </a:solidFill>
+                <a:latin typeface="Source Serif 4"/>
               </a:rPr>
-              <a:t>–  Kundenstamm &amp; CRM: Vollständige Beziehungshistorie auf einen Blick</a:t>
-            </a:r>
-          </a:p>
-          <a:p>
-            <a:pPr>
-              <a:spcBef>
-                <a:spcPts val="600"/>
-              </a:spcBef>
-              <a:spcAft>
-                <a:spcPts val="600"/>
-              </a:spcAft>
-            </a:pPr>
-            <a:r>
-              <a:rPr sz="1400">
-                <a:solidFill>
-                  <a:srgbClr val="191D2E"/>
-                </a:solidFill>
-                <a:latin typeface="Georgia"/>
+              <a:t>agree21 Kernbereiche für Firmenkundenberater</a:t>
+            </a:r>
+          </a:p>
+        </p:txBody>
+      </p:sp>
+      <p:sp>
+        <p:nvSpPr>
+          <p:cNvPr id="6" name="Rectangle 5"/>
+          <p:cNvSpPr/>
+          <p:nvPr/>
+        </p:nvSpPr>
+        <p:spPr>
+          <a:xfrm>
+            <a:off x="685800" y="1143000"/>
+            <a:ext cx="10817352" cy="25400"/>
+          </a:xfrm>
+          <a:prstGeom prst="rect">
+            <a:avLst/>
+          </a:prstGeom>
+          <a:solidFill>
+            <a:srgbClr val="D9C089"/>
+          </a:solidFill>
+          <a:ln>
+            <a:noFill/>
+          </a:ln>
+        </p:spPr>
+        <p:style>
+          <a:lnRef idx="1">
+            <a:schemeClr val="accent1"/>
+          </a:lnRef>
+          <a:fillRef idx="3">
+            <a:schemeClr val="accent1"/>
+          </a:fillRef>
+          <a:effectRef idx="2">
+            <a:schemeClr val="accent1"/>
+          </a:effectRef>
+          <a:fontRef idx="minor">
+            <a:schemeClr val="lt1"/>
+          </a:fontRef>
+        </p:style>
+        <p:txBody>
+          <a:bodyPr rtlCol="0" anchor="ctr"/>
+          <a:lstStyle/>
+          <a:p>
+            <a:pPr algn="ctr"/>
+          </a:p>
+        </p:txBody>
+      </p:sp>
+      <p:pic>
+        <p:nvPicPr>
+          <p:cNvPr id="7" name="Picture 6" descr="image.png"/>
+          <p:cNvPicPr>
+            <a:picLocks noChangeAspect="1"/>
+          </p:cNvPicPr>
+          <p:nvPr/>
+        </p:nvPicPr>
+        <p:blipFill>
+          <a:blip r:embed="rId2"/>
+          <a:stretch>
+            <a:fillRect/>
+          </a:stretch>
+        </p:blipFill>
+        <p:spPr>
+          <a:xfrm>
+            <a:off x="2163921" y="1325880"/>
+            <a:ext cx="7861110" cy="4937760"/>
+          </a:xfrm>
+          <a:prstGeom prst="rect">
+            <a:avLst/>
+          </a:prstGeom>
+        </p:spPr>
+      </p:pic>
+      <p:sp>
+        <p:nvSpPr>
+          <p:cNvPr id="8" name="Rectangle 7"/>
+          <p:cNvSpPr/>
+          <p:nvPr/>
+        </p:nvSpPr>
+        <p:spPr>
+          <a:xfrm>
+            <a:off x="0" y="6510528"/>
+            <a:ext cx="12188952" cy="347472"/>
+          </a:xfrm>
+          <a:prstGeom prst="rect">
+            <a:avLst/>
+          </a:prstGeom>
+          <a:solidFill>
+            <a:srgbClr val="0A1937"/>
+          </a:solidFill>
+          <a:ln>
+            <a:noFill/>
+          </a:ln>
+        </p:spPr>
+        <p:style>
+          <a:lnRef idx="1">
+            <a:schemeClr val="accent1"/>
+          </a:lnRef>
+          <a:fillRef idx="3">
+            <a:schemeClr val="accent1"/>
+          </a:fillRef>
+          <a:effectRef idx="2">
+            <a:schemeClr val="accent1"/>
+          </a:effectRef>
+          <a:fontRef idx="minor">
+            <a:schemeClr val="lt1"/>
+          </a:fontRef>
+        </p:style>
+        <p:txBody>
+          <a:bodyPr rtlCol="0" anchor="ctr"/>
+          <a:lstStyle/>
+          <a:p>
+            <a:pPr algn="ctr"/>
+          </a:p>
+        </p:txBody>
+      </p:sp>
+      <p:sp>
+        <p:nvSpPr>
+          <p:cNvPr id="9" name="TextBox 8"/>
+          <p:cNvSpPr txBox="1"/>
+          <p:nvPr/>
+        </p:nvSpPr>
+        <p:spPr>
+          <a:xfrm>
+            <a:off x="685800" y="6583680"/>
+            <a:ext cx="6490411" cy="256032"/>
+          </a:xfrm>
+          <a:prstGeom prst="rect">
+            <a:avLst/>
+          </a:prstGeom>
+          <a:noFill/>
+        </p:spPr>
+        <p:txBody>
+          <a:bodyPr wrap="none">
+            <a:spAutoFit/>
+          </a:bodyPr>
+          <a:lstStyle/>
+          <a:p>
+            <a:pPr algn="l"/>
+            <a:r>
+              <a:rPr sz="700">
+                <a:solidFill>
+                  <a:srgbClr val="A0B4D2"/>
+                </a:solidFill>
+                <a:latin typeface="JetBrains Mono"/>
               </a:rPr>
-              <a:t>–  UnternehmerDialog: Strukturierter Gesprächsleitfaden direkt im System</a:t>
-            </a:r>
-          </a:p>
-          <a:p>
-            <a:pPr>
-              <a:spcBef>
-                <a:spcPts val="600"/>
-              </a:spcBef>
-              <a:spcAft>
-                <a:spcPts val="600"/>
-              </a:spcAft>
-            </a:pPr>
-            <a:r>
-              <a:rPr sz="1400">
-                <a:solidFill>
-                  <a:srgbClr val="191D2E"/>
-                </a:solidFill>
-                <a:latin typeface="Georgia"/>
+              <a:t>Benedikt Zoller Coaching  ·  FKB Campus  ·  M17</a:t>
+            </a:r>
+          </a:p>
+        </p:txBody>
+      </p:sp>
+      <p:sp>
+        <p:nvSpPr>
+          <p:cNvPr id="10" name="TextBox 9"/>
+          <p:cNvSpPr txBox="1"/>
+          <p:nvPr/>
+        </p:nvSpPr>
+        <p:spPr>
+          <a:xfrm>
+            <a:off x="7176211" y="6583680"/>
+            <a:ext cx="4326940" cy="256032"/>
+          </a:xfrm>
+          <a:prstGeom prst="rect">
+            <a:avLst/>
+          </a:prstGeom>
+          <a:noFill/>
+        </p:spPr>
+        <p:txBody>
+          <a:bodyPr wrap="none">
+            <a:spAutoFit/>
+          </a:bodyPr>
+          <a:lstStyle/>
+          <a:p>
+            <a:pPr algn="r"/>
+            <a:r>
+              <a:rPr sz="700">
+                <a:solidFill>
+                  <a:srgbClr val="A0B4D2"/>
+                </a:solidFill>
+                <a:latin typeface="JetBrains Mono"/>
               </a:rPr>
-              <a:t>–  NMZ &amp; Berichte: Bestandsanalyse und Frühwarnberichte automatisiert</a:t>
-            </a:r>
-          </a:p>
-          <a:p>
-            <a:pPr>
-              <a:spcBef>
-                <a:spcPts val="600"/>
-              </a:spcBef>
-              <a:spcAft>
-                <a:spcPts val="600"/>
-              </a:spcAft>
-            </a:pPr>
-            <a:r>
-              <a:rPr sz="1400">
-                <a:solidFill>
-                  <a:srgbClr val="191D2E"/>
-                </a:solidFill>
-                <a:latin typeface="Georgia"/>
-              </a:rPr>
-              <a:t>–  Kreditakte: Von der Anfrage bis zur Vorlage im System</a:t>
-            </a:r>
-          </a:p>
-          <a:p>
-            <a:pPr>
-              <a:spcBef>
-                <a:spcPts val="600"/>
-              </a:spcBef>
-              <a:spcAft>
-                <a:spcPts val="600"/>
-              </a:spcAft>
-            </a:pPr>
-            <a:r>
-              <a:rPr sz="1400">
-                <a:solidFill>
-                  <a:srgbClr val="191D2E"/>
-                </a:solidFill>
-                <a:latin typeface="Georgia"/>
-              </a:rPr>
-              <a:t>–  Dokumentation § 18 KWG: Compliance-konform, lückenlos</a:t>
+              <a:t>Schaubild</a:t>
             </a:r>
           </a:p>
         </p:txBody>
@@ -5169,14 +5601,6 @@
 <file path=ppt/slides/slide5.xml><?xml version="1.0" encoding="utf-8"?>
 <p:sld xmlns:a="http://schemas.openxmlformats.org/drawingml/2006/main" xmlns:p="http://schemas.openxmlformats.org/presentationml/2006/main" xmlns:r="http://schemas.openxmlformats.org/officeDocument/2006/relationships">
   <p:cSld>
-    <p:bg>
-      <p:bgPr>
-        <a:solidFill>
-          <a:srgbClr val="1F2B56"/>
-        </a:solidFill>
-        <a:effectLst/>
-      </p:bgPr>
-    </p:bg>
     <p:spTree>
       <p:nvGrpSpPr>
         <p:cNvPr id="1" name=""/>
@@ -5186,14 +5610,100 @@
       <p:grpSpPr/>
       <p:sp>
         <p:nvSpPr>
-          <p:cNvPr id="2" name="TextBox 1"/>
+          <p:cNvPr id="2" name="Rectangle 1"/>
+          <p:cNvSpPr/>
+          <p:nvPr/>
+        </p:nvSpPr>
+        <p:spPr>
+          <a:xfrm>
+            <a:off x="0" y="0"/>
+            <a:ext cx="12188952" cy="6858000"/>
+          </a:xfrm>
+          <a:prstGeom prst="rect">
+            <a:avLst/>
+          </a:prstGeom>
+          <a:solidFill>
+            <a:srgbClr val="EDEDF3"/>
+          </a:solidFill>
+          <a:ln>
+            <a:noFill/>
+          </a:ln>
+        </p:spPr>
+        <p:style>
+          <a:lnRef idx="1">
+            <a:schemeClr val="accent1"/>
+          </a:lnRef>
+          <a:fillRef idx="3">
+            <a:schemeClr val="accent1"/>
+          </a:fillRef>
+          <a:effectRef idx="2">
+            <a:schemeClr val="accent1"/>
+          </a:effectRef>
+          <a:fontRef idx="minor">
+            <a:schemeClr val="lt1"/>
+          </a:fontRef>
+        </p:style>
+        <p:txBody>
+          <a:bodyPr rtlCol="0" anchor="ctr"/>
+          <a:lstStyle/>
+          <a:p>
+            <a:pPr algn="ctr"/>
+          </a:p>
+        </p:txBody>
+      </p:sp>
+      <p:sp>
+        <p:nvSpPr>
+          <p:cNvPr id="3" name="Rectangle 2"/>
+          <p:cNvSpPr/>
+          <p:nvPr/>
+        </p:nvSpPr>
+        <p:spPr>
+          <a:xfrm>
+            <a:off x="0" y="0"/>
+            <a:ext cx="12188952" cy="50292"/>
+          </a:xfrm>
+          <a:prstGeom prst="rect">
+            <a:avLst/>
+          </a:prstGeom>
+          <a:solidFill>
+            <a:srgbClr val="1F2C56"/>
+          </a:solidFill>
+          <a:ln>
+            <a:noFill/>
+          </a:ln>
+        </p:spPr>
+        <p:style>
+          <a:lnRef idx="1">
+            <a:schemeClr val="accent1"/>
+          </a:lnRef>
+          <a:fillRef idx="3">
+            <a:schemeClr val="accent1"/>
+          </a:fillRef>
+          <a:effectRef idx="2">
+            <a:schemeClr val="accent1"/>
+          </a:effectRef>
+          <a:fontRef idx="minor">
+            <a:schemeClr val="lt1"/>
+          </a:fontRef>
+        </p:style>
+        <p:txBody>
+          <a:bodyPr rtlCol="0" anchor="ctr"/>
+          <a:lstStyle/>
+          <a:p>
+            <a:pPr algn="ctr"/>
+          </a:p>
+        </p:txBody>
+      </p:sp>
+      <p:sp>
+        <p:nvSpPr>
+          <p:cNvPr id="4" name="TextBox 3"/>
           <p:cNvSpPr txBox="1"/>
           <p:nvPr/>
         </p:nvSpPr>
         <p:spPr>
           <a:xfrm>
-            <a:off x="609600" y="279400"/>
-            <a:ext cx="2540000" cy="279400"/>
+            <a:off x="685800" y="109728"/>
+            <a:ext cx="10817352" cy="228600"/>
           </a:xfrm>
           <a:prstGeom prst="rect">
             <a:avLst/>
@@ -5201,34 +5711,259 @@
           <a:noFill/>
         </p:spPr>
         <p:txBody>
+          <a:bodyPr wrap="none">
+            <a:spAutoFit/>
+          </a:bodyPr>
+          <a:lstStyle/>
+          <a:p>
+            <a:pPr algn="l"/>
+            <a:r>
+              <a:rPr sz="750">
+                <a:solidFill>
+                  <a:srgbClr val="78808C"/>
+                </a:solidFill>
+                <a:latin typeface="JetBrains Mono"/>
+              </a:rPr>
+              <a:t>M17  ·  INHALT</a:t>
+            </a:r>
+          </a:p>
+        </p:txBody>
+      </p:sp>
+      <p:sp>
+        <p:nvSpPr>
+          <p:cNvPr id="5" name="Rectangle 4"/>
+          <p:cNvSpPr/>
+          <p:nvPr/>
+        </p:nvSpPr>
+        <p:spPr>
+          <a:xfrm>
+            <a:off x="0" y="1234440"/>
+            <a:ext cx="12188952" cy="12700"/>
+          </a:xfrm>
+          <a:prstGeom prst="rect">
+            <a:avLst/>
+          </a:prstGeom>
+          <a:solidFill>
+            <a:srgbClr val="D8DFE4"/>
+          </a:solidFill>
+          <a:ln>
+            <a:noFill/>
+          </a:ln>
+        </p:spPr>
+        <p:style>
+          <a:lnRef idx="1">
+            <a:schemeClr val="accent1"/>
+          </a:lnRef>
+          <a:fillRef idx="3">
+            <a:schemeClr val="accent1"/>
+          </a:fillRef>
+          <a:effectRef idx="2">
+            <a:schemeClr val="accent1"/>
+          </a:effectRef>
+          <a:fontRef idx="minor">
+            <a:schemeClr val="lt1"/>
+          </a:fontRef>
+        </p:style>
+        <p:txBody>
+          <a:bodyPr rtlCol="0" anchor="ctr"/>
+          <a:lstStyle/>
+          <a:p>
+            <a:pPr algn="ctr"/>
+          </a:p>
+        </p:txBody>
+      </p:sp>
+      <p:sp>
+        <p:nvSpPr>
+          <p:cNvPr id="6" name="Rectangle 5"/>
+          <p:cNvSpPr/>
+          <p:nvPr/>
+        </p:nvSpPr>
+        <p:spPr>
+          <a:xfrm>
+            <a:off x="685800" y="502920"/>
+            <a:ext cx="36576" cy="658368"/>
+          </a:xfrm>
+          <a:prstGeom prst="rect">
+            <a:avLst/>
+          </a:prstGeom>
+          <a:solidFill>
+            <a:srgbClr val="D9C089"/>
+          </a:solidFill>
+          <a:ln>
+            <a:noFill/>
+          </a:ln>
+        </p:spPr>
+        <p:style>
+          <a:lnRef idx="1">
+            <a:schemeClr val="accent1"/>
+          </a:lnRef>
+          <a:fillRef idx="3">
+            <a:schemeClr val="accent1"/>
+          </a:fillRef>
+          <a:effectRef idx="2">
+            <a:schemeClr val="accent1"/>
+          </a:effectRef>
+          <a:fontRef idx="minor">
+            <a:schemeClr val="lt1"/>
+          </a:fontRef>
+        </p:style>
+        <p:txBody>
+          <a:bodyPr rtlCol="0" anchor="ctr"/>
+          <a:lstStyle/>
+          <a:p>
+            <a:pPr algn="ctr"/>
+          </a:p>
+        </p:txBody>
+      </p:sp>
+      <p:sp>
+        <p:nvSpPr>
+          <p:cNvPr id="7" name="TextBox 6"/>
+          <p:cNvSpPr txBox="1"/>
+          <p:nvPr/>
+        </p:nvSpPr>
+        <p:spPr>
+          <a:xfrm>
+            <a:off x="813816" y="502920"/>
+            <a:ext cx="10634472" cy="685800"/>
+          </a:xfrm>
+          <a:prstGeom prst="rect">
+            <a:avLst/>
+          </a:prstGeom>
+          <a:noFill/>
+        </p:spPr>
+        <p:txBody>
           <a:bodyPr wrap="square">
-            <a:normAutofit/>
+            <a:spAutoFit/>
           </a:bodyPr>
           <a:lstStyle/>
           <a:p>
             <a:pPr algn="l"/>
             <a:r>
-              <a:rPr sz="1000" b="1" i="0">
-                <a:solidFill>
-                  <a:srgbClr val="F8F8FA"/>
+              <a:rPr sz="2400" b="1" i="0">
+                <a:solidFill>
+                  <a:srgbClr val="1F2C56"/>
+                </a:solidFill>
+                <a:latin typeface="Source Serif 4"/>
+              </a:rPr>
+              <a:t>Phase 1: Vorbereitung (15–20 Minuten statt 45–60 Minuten)</a:t>
+            </a:r>
+          </a:p>
+        </p:txBody>
+      </p:sp>
+      <p:sp>
+        <p:nvSpPr>
+          <p:cNvPr id="8" name="TextBox 7"/>
+          <p:cNvSpPr txBox="1"/>
+          <p:nvPr/>
+        </p:nvSpPr>
+        <p:spPr>
+          <a:xfrm>
+            <a:off x="685800" y="1417320"/>
+            <a:ext cx="10817352" cy="5029200"/>
+          </a:xfrm>
+          <a:prstGeom prst="rect">
+            <a:avLst/>
+          </a:prstGeom>
+          <a:noFill/>
+        </p:spPr>
+        <p:txBody>
+          <a:bodyPr wrap="square">
+            <a:spAutoFit/>
+          </a:bodyPr>
+          <a:lstStyle/>
+          <a:p>
+            <a:pPr>
+              <a:spcBef>
+                <a:spcPts val="400"/>
+              </a:spcBef>
+              <a:spcAft>
+                <a:spcPts val="200"/>
+              </a:spcAft>
+            </a:pPr>
+            <a:r>
+              <a:rPr sz="1200">
+                <a:solidFill>
+                  <a:srgbClr val="3D5466"/>
                 </a:solidFill>
                 <a:latin typeface="Arial"/>
               </a:rPr>
-              <a:t>FKB  Campus</a:t>
-            </a:r>
-          </a:p>
-        </p:txBody>
-      </p:sp>
-      <p:sp>
-        <p:nvSpPr>
-          <p:cNvPr id="3" name="TextBox 2"/>
+              <a:t>agree-Checkliste Jahresgespräch:</a:t>
+            </a:r>
+          </a:p>
+          <a:p>
+            <a:pPr>
+              <a:spcBef>
+                <a:spcPts val="400"/>
+              </a:spcBef>
+              <a:spcAft>
+                <a:spcPts val="200"/>
+              </a:spcAft>
+            </a:pPr>
+            <a:r>
+              <a:rPr sz="1200">
+                <a:solidFill>
+                  <a:srgbClr val="3D5466"/>
+                </a:solidFill>
+                <a:latin typeface="Arial"/>
+              </a:rPr>
+              <a:t>Ergebnis: Sie gehen mit einem konkreten Bild in das Gespräch – statt im Gespräch zu blättern.</a:t>
+            </a:r>
+          </a:p>
+        </p:txBody>
+      </p:sp>
+      <p:sp>
+        <p:nvSpPr>
+          <p:cNvPr id="9" name="Rectangle 8"/>
+          <p:cNvSpPr/>
+          <p:nvPr/>
+        </p:nvSpPr>
+        <p:spPr>
+          <a:xfrm>
+            <a:off x="0" y="6510528"/>
+            <a:ext cx="12188952" cy="347472"/>
+          </a:xfrm>
+          <a:prstGeom prst="rect">
+            <a:avLst/>
+          </a:prstGeom>
+          <a:solidFill>
+            <a:srgbClr val="0A1937"/>
+          </a:solidFill>
+          <a:ln>
+            <a:noFill/>
+          </a:ln>
+        </p:spPr>
+        <p:style>
+          <a:lnRef idx="1">
+            <a:schemeClr val="accent1"/>
+          </a:lnRef>
+          <a:fillRef idx="3">
+            <a:schemeClr val="accent1"/>
+          </a:fillRef>
+          <a:effectRef idx="2">
+            <a:schemeClr val="accent1"/>
+          </a:effectRef>
+          <a:fontRef idx="minor">
+            <a:schemeClr val="lt1"/>
+          </a:fontRef>
+        </p:style>
+        <p:txBody>
+          <a:bodyPr rtlCol="0" anchor="ctr"/>
+          <a:lstStyle/>
+          <a:p>
+            <a:pPr algn="ctr"/>
+          </a:p>
+        </p:txBody>
+      </p:sp>
+      <p:sp>
+        <p:nvSpPr>
+          <p:cNvPr id="10" name="TextBox 9"/>
           <p:cNvSpPr txBox="1"/>
           <p:nvPr/>
         </p:nvSpPr>
         <p:spPr>
           <a:xfrm>
-            <a:off x="609600" y="279400"/>
-            <a:ext cx="10972800" cy="279400"/>
+            <a:off x="685800" y="6583680"/>
+            <a:ext cx="6490411" cy="256032"/>
           </a:xfrm>
           <a:prstGeom prst="rect">
             <a:avLst/>
@@ -5236,160 +5971,20 @@
           <a:noFill/>
         </p:spPr>
         <p:txBody>
-          <a:bodyPr wrap="square">
-            <a:normAutofit/>
+          <a:bodyPr wrap="none">
+            <a:spAutoFit/>
           </a:bodyPr>
           <a:lstStyle/>
           <a:p>
-            <a:pPr algn="r"/>
-            <a:r>
-              <a:rPr sz="900" b="0" i="0">
-                <a:solidFill>
-                  <a:srgbClr val="7B7FA0"/>
-                </a:solidFill>
-                <a:latin typeface="Courier New"/>
+            <a:pPr algn="l"/>
+            <a:r>
+              <a:rPr sz="700">
+                <a:solidFill>
+                  <a:srgbClr val="A0B4D2"/>
+                </a:solidFill>
+                <a:latin typeface="JetBrains Mono"/>
               </a:rPr>
-              <a:t>DIE FÜNF HÄUFIGSTEN ZEITFRESSER</a:t>
-            </a:r>
-          </a:p>
-        </p:txBody>
-      </p:sp>
-      <p:sp>
-        <p:nvSpPr>
-          <p:cNvPr id="4" name="TextBox 3"/>
-          <p:cNvSpPr txBox="1"/>
-          <p:nvPr/>
-        </p:nvSpPr>
-        <p:spPr>
-          <a:xfrm>
-            <a:off x="609600" y="6426200"/>
-            <a:ext cx="10972800" cy="228600"/>
-          </a:xfrm>
-          <a:prstGeom prst="rect">
-            <a:avLst/>
-          </a:prstGeom>
-          <a:noFill/>
-        </p:spPr>
-        <p:txBody>
-          <a:bodyPr wrap="square">
-            <a:normAutofit/>
-          </a:bodyPr>
-          <a:lstStyle/>
-          <a:p>
-            <a:pPr algn="r"/>
-            <a:r>
-              <a:rPr sz="900" b="0" i="0">
-                <a:solidFill>
-                  <a:srgbClr val="7B7FA0"/>
-                </a:solidFill>
-                <a:latin typeface="Courier New"/>
-              </a:rPr>
-              <a:t>05</a:t>
-            </a:r>
-          </a:p>
-        </p:txBody>
-      </p:sp>
-      <p:sp>
-        <p:nvSpPr>
-          <p:cNvPr id="5" name="TextBox 4"/>
-          <p:cNvSpPr txBox="1"/>
-          <p:nvPr/>
-        </p:nvSpPr>
-        <p:spPr>
-          <a:xfrm>
-            <a:off x="609600" y="635000"/>
-            <a:ext cx="5461000" cy="5461000"/>
-          </a:xfrm>
-          <a:prstGeom prst="rect">
-            <a:avLst/>
-          </a:prstGeom>
-          <a:noFill/>
-        </p:spPr>
-        <p:txBody>
-          <a:bodyPr wrap="square">
-            <a:normAutofit/>
-          </a:bodyPr>
-          <a:lstStyle/>
-          <a:p>
-            <a:pPr algn="l"/>
-            <a:r>
-              <a:rPr sz="28000" b="0" i="1">
-                <a:solidFill>
-                  <a:srgbClr val="D9BF7A"/>
-                </a:solidFill>
-                <a:latin typeface="Georgia"/>
-              </a:rPr>
-              <a:t>II</a:t>
-            </a:r>
-          </a:p>
-        </p:txBody>
-      </p:sp>
-      <p:sp>
-        <p:nvSpPr>
-          <p:cNvPr id="6" name="TextBox 5"/>
-          <p:cNvSpPr txBox="1"/>
-          <p:nvPr/>
-        </p:nvSpPr>
-        <p:spPr>
-          <a:xfrm>
-            <a:off x="6731000" y="4064000"/>
-            <a:ext cx="4851400" cy="1778000"/>
-          </a:xfrm>
-          <a:prstGeom prst="rect">
-            <a:avLst/>
-          </a:prstGeom>
-          <a:noFill/>
-        </p:spPr>
-        <p:txBody>
-          <a:bodyPr wrap="square">
-            <a:normAutofit/>
-          </a:bodyPr>
-          <a:lstStyle/>
-          <a:p>
-            <a:pPr algn="r"/>
-            <a:r>
-              <a:rPr sz="3800" b="0" i="0">
-                <a:solidFill>
-                  <a:srgbClr val="F8F8FA"/>
-                </a:solidFill>
-                <a:latin typeface="Georgia"/>
-              </a:rPr>
-              <a:t>Die fünf häufigsten Zeitfresser</a:t>
-            </a:r>
-          </a:p>
-        </p:txBody>
-      </p:sp>
-      <p:sp>
-        <p:nvSpPr>
-          <p:cNvPr id="7" name="TextBox 6"/>
-          <p:cNvSpPr txBox="1"/>
-          <p:nvPr/>
-        </p:nvSpPr>
-        <p:spPr>
-          <a:xfrm>
-            <a:off x="6731000" y="5842000"/>
-            <a:ext cx="4851400" cy="635000"/>
-          </a:xfrm>
-          <a:prstGeom prst="rect">
-            <a:avLst/>
-          </a:prstGeom>
-          <a:noFill/>
-        </p:spPr>
-        <p:txBody>
-          <a:bodyPr wrap="square">
-            <a:normAutofit/>
-          </a:bodyPr>
-          <a:lstStyle/>
-          <a:p>
-            <a:pPr algn="r"/>
-            <a:r>
-              <a:rPr sz="1400" b="0" i="1">
-                <a:solidFill>
-                  <a:srgbClr val="7B7FA0"/>
-                </a:solidFill>
-                <a:latin typeface="Georgia"/>
-              </a:rPr>
-              <a:t>Und wie agree sie löst</a:t>
+              <a:t>Benedikt Zoller Coaching  ·  FKB Campus  ·  M17</a:t>
             </a:r>
           </a:p>
         </p:txBody>
@@ -5405,14 +6000,6 @@
 <file path=ppt/slides/slide6.xml><?xml version="1.0" encoding="utf-8"?>
 <p:sld xmlns:a="http://schemas.openxmlformats.org/drawingml/2006/main" xmlns:p="http://schemas.openxmlformats.org/presentationml/2006/main" xmlns:r="http://schemas.openxmlformats.org/officeDocument/2006/relationships">
   <p:cSld>
-    <p:bg>
-      <p:bgPr>
-        <a:solidFill>
-          <a:srgbClr val="F8F8FA"/>
-        </a:solidFill>
-        <a:effectLst/>
-      </p:bgPr>
-    </p:bg>
     <p:spTree>
       <p:nvGrpSpPr>
         <p:cNvPr id="1" name=""/>
@@ -5422,125 +6009,20 @@
       <p:grpSpPr/>
       <p:sp>
         <p:nvSpPr>
-          <p:cNvPr id="2" name="TextBox 1"/>
-          <p:cNvSpPr txBox="1"/>
-          <p:nvPr/>
-        </p:nvSpPr>
-        <p:spPr>
-          <a:xfrm>
-            <a:off x="609600" y="279400"/>
-            <a:ext cx="2540000" cy="279400"/>
-          </a:xfrm>
-          <a:prstGeom prst="rect">
-            <a:avLst/>
-          </a:prstGeom>
-          <a:noFill/>
-        </p:spPr>
-        <p:txBody>
-          <a:bodyPr wrap="square">
-            <a:normAutofit/>
-          </a:bodyPr>
-          <a:lstStyle/>
-          <a:p>
-            <a:pPr algn="l"/>
-            <a:r>
-              <a:rPr sz="1000" b="1" i="0">
-                <a:solidFill>
-                  <a:srgbClr val="191D2E"/>
-                </a:solidFill>
-                <a:latin typeface="Arial"/>
-              </a:rPr>
-              <a:t>FKB  Campus</a:t>
-            </a:r>
-          </a:p>
-        </p:txBody>
-      </p:sp>
-      <p:sp>
-        <p:nvSpPr>
-          <p:cNvPr id="3" name="TextBox 2"/>
-          <p:cNvSpPr txBox="1"/>
-          <p:nvPr/>
-        </p:nvSpPr>
-        <p:spPr>
-          <a:xfrm>
-            <a:off x="609600" y="279400"/>
-            <a:ext cx="10972800" cy="279400"/>
-          </a:xfrm>
-          <a:prstGeom prst="rect">
-            <a:avLst/>
-          </a:prstGeom>
-          <a:noFill/>
-        </p:spPr>
-        <p:txBody>
-          <a:bodyPr wrap="square">
-            <a:normAutofit/>
-          </a:bodyPr>
-          <a:lstStyle/>
-          <a:p>
-            <a:pPr algn="r"/>
-            <a:r>
-              <a:rPr sz="900" b="0" i="0">
-                <a:solidFill>
-                  <a:srgbClr val="7B7FA0"/>
-                </a:solidFill>
-                <a:latin typeface="Courier New"/>
-              </a:rPr>
-              <a:t>II · DIE FÜNF HÄUFIGSTEN ZEITFRESSER</a:t>
-            </a:r>
-          </a:p>
-        </p:txBody>
-      </p:sp>
-      <p:sp>
-        <p:nvSpPr>
-          <p:cNvPr id="4" name="TextBox 3"/>
-          <p:cNvSpPr txBox="1"/>
-          <p:nvPr/>
-        </p:nvSpPr>
-        <p:spPr>
-          <a:xfrm>
-            <a:off x="609600" y="6426200"/>
-            <a:ext cx="10972800" cy="228600"/>
-          </a:xfrm>
-          <a:prstGeom prst="rect">
-            <a:avLst/>
-          </a:prstGeom>
-          <a:noFill/>
-        </p:spPr>
-        <p:txBody>
-          <a:bodyPr wrap="square">
-            <a:normAutofit/>
-          </a:bodyPr>
-          <a:lstStyle/>
-          <a:p>
-            <a:pPr algn="r"/>
-            <a:r>
-              <a:rPr sz="900" b="0" i="0">
-                <a:solidFill>
-                  <a:srgbClr val="7B7FA0"/>
-                </a:solidFill>
-                <a:latin typeface="Courier New"/>
-              </a:rPr>
-              <a:t>06</a:t>
-            </a:r>
-          </a:p>
-        </p:txBody>
-      </p:sp>
-      <p:sp>
-        <p:nvSpPr>
-          <p:cNvPr id="5" name="Rectangle 4"/>
+          <p:cNvPr id="2" name="Rectangle 1"/>
           <p:cNvSpPr/>
           <p:nvPr/>
         </p:nvSpPr>
         <p:spPr>
           <a:xfrm>
-            <a:off x="609600" y="825500"/>
-            <a:ext cx="10972800" cy="6350"/>
+            <a:off x="0" y="0"/>
+            <a:ext cx="12188952" cy="6858000"/>
           </a:xfrm>
           <a:prstGeom prst="rect">
             <a:avLst/>
           </a:prstGeom>
           <a:solidFill>
-            <a:srgbClr val="191D2E"/>
+            <a:srgbClr val="EDEDF3"/>
           </a:solidFill>
           <a:ln>
             <a:noFill/>
@@ -5570,55 +6052,20 @@
       </p:sp>
       <p:sp>
         <p:nvSpPr>
-          <p:cNvPr id="6" name="TextBox 5"/>
-          <p:cNvSpPr txBox="1"/>
-          <p:nvPr/>
-        </p:nvSpPr>
-        <p:spPr>
-          <a:xfrm>
-            <a:off x="609600" y="920750"/>
-            <a:ext cx="10972800" cy="1778000"/>
-          </a:xfrm>
-          <a:prstGeom prst="rect">
-            <a:avLst/>
-          </a:prstGeom>
-          <a:noFill/>
-        </p:spPr>
-        <p:txBody>
-          <a:bodyPr wrap="square">
-            <a:normAutofit/>
-          </a:bodyPr>
-          <a:lstStyle/>
-          <a:p>
-            <a:pPr algn="l"/>
-            <a:r>
-              <a:rPr sz="3800" b="0" i="0">
-                <a:solidFill>
-                  <a:srgbClr val="191D2E"/>
-                </a:solidFill>
-                <a:latin typeface="Georgia"/>
-              </a:rPr>
-              <a:t>Zeitfresser und ihre agree-Lösung</a:t>
-            </a:r>
-          </a:p>
-        </p:txBody>
-      </p:sp>
-      <p:sp>
-        <p:nvSpPr>
-          <p:cNvPr id="7" name="Rectangle 6"/>
+          <p:cNvPr id="3" name="Rectangle 2"/>
           <p:cNvSpPr/>
           <p:nvPr/>
         </p:nvSpPr>
         <p:spPr>
           <a:xfrm>
-            <a:off x="609600" y="2762250"/>
-            <a:ext cx="10972800" cy="6350"/>
+            <a:off x="0" y="0"/>
+            <a:ext cx="12188952" cy="50292"/>
           </a:xfrm>
           <a:prstGeom prst="rect">
             <a:avLst/>
           </a:prstGeom>
           <a:solidFill>
-            <a:srgbClr val="E0E0E8"/>
+            <a:srgbClr val="1F2C56"/>
           </a:solidFill>
           <a:ln>
             <a:noFill/>
@@ -5648,14 +6095,170 @@
       </p:sp>
       <p:sp>
         <p:nvSpPr>
+          <p:cNvPr id="4" name="TextBox 3"/>
+          <p:cNvSpPr txBox="1"/>
+          <p:nvPr/>
+        </p:nvSpPr>
+        <p:spPr>
+          <a:xfrm>
+            <a:off x="685800" y="109728"/>
+            <a:ext cx="10817352" cy="228600"/>
+          </a:xfrm>
+          <a:prstGeom prst="rect">
+            <a:avLst/>
+          </a:prstGeom>
+          <a:noFill/>
+        </p:spPr>
+        <p:txBody>
+          <a:bodyPr wrap="none">
+            <a:spAutoFit/>
+          </a:bodyPr>
+          <a:lstStyle/>
+          <a:p>
+            <a:pPr algn="l"/>
+            <a:r>
+              <a:rPr sz="750">
+                <a:solidFill>
+                  <a:srgbClr val="78808C"/>
+                </a:solidFill>
+                <a:latin typeface="JetBrains Mono"/>
+              </a:rPr>
+              <a:t>M17  ·  INHALT</a:t>
+            </a:r>
+          </a:p>
+        </p:txBody>
+      </p:sp>
+      <p:sp>
+        <p:nvSpPr>
+          <p:cNvPr id="5" name="Rectangle 4"/>
+          <p:cNvSpPr/>
+          <p:nvPr/>
+        </p:nvSpPr>
+        <p:spPr>
+          <a:xfrm>
+            <a:off x="0" y="1234440"/>
+            <a:ext cx="12188952" cy="12700"/>
+          </a:xfrm>
+          <a:prstGeom prst="rect">
+            <a:avLst/>
+          </a:prstGeom>
+          <a:solidFill>
+            <a:srgbClr val="D8DFE4"/>
+          </a:solidFill>
+          <a:ln>
+            <a:noFill/>
+          </a:ln>
+        </p:spPr>
+        <p:style>
+          <a:lnRef idx="1">
+            <a:schemeClr val="accent1"/>
+          </a:lnRef>
+          <a:fillRef idx="3">
+            <a:schemeClr val="accent1"/>
+          </a:fillRef>
+          <a:effectRef idx="2">
+            <a:schemeClr val="accent1"/>
+          </a:effectRef>
+          <a:fontRef idx="minor">
+            <a:schemeClr val="lt1"/>
+          </a:fontRef>
+        </p:style>
+        <p:txBody>
+          <a:bodyPr rtlCol="0" anchor="ctr"/>
+          <a:lstStyle/>
+          <a:p>
+            <a:pPr algn="ctr"/>
+          </a:p>
+        </p:txBody>
+      </p:sp>
+      <p:sp>
+        <p:nvSpPr>
+          <p:cNvPr id="6" name="Rectangle 5"/>
+          <p:cNvSpPr/>
+          <p:nvPr/>
+        </p:nvSpPr>
+        <p:spPr>
+          <a:xfrm>
+            <a:off x="685800" y="502920"/>
+            <a:ext cx="36576" cy="658368"/>
+          </a:xfrm>
+          <a:prstGeom prst="rect">
+            <a:avLst/>
+          </a:prstGeom>
+          <a:solidFill>
+            <a:srgbClr val="D9C089"/>
+          </a:solidFill>
+          <a:ln>
+            <a:noFill/>
+          </a:ln>
+        </p:spPr>
+        <p:style>
+          <a:lnRef idx="1">
+            <a:schemeClr val="accent1"/>
+          </a:lnRef>
+          <a:fillRef idx="3">
+            <a:schemeClr val="accent1"/>
+          </a:fillRef>
+          <a:effectRef idx="2">
+            <a:schemeClr val="accent1"/>
+          </a:effectRef>
+          <a:fontRef idx="minor">
+            <a:schemeClr val="lt1"/>
+          </a:fontRef>
+        </p:style>
+        <p:txBody>
+          <a:bodyPr rtlCol="0" anchor="ctr"/>
+          <a:lstStyle/>
+          <a:p>
+            <a:pPr algn="ctr"/>
+          </a:p>
+        </p:txBody>
+      </p:sp>
+      <p:sp>
+        <p:nvSpPr>
+          <p:cNvPr id="7" name="TextBox 6"/>
+          <p:cNvSpPr txBox="1"/>
+          <p:nvPr/>
+        </p:nvSpPr>
+        <p:spPr>
+          <a:xfrm>
+            <a:off x="813816" y="502920"/>
+            <a:ext cx="10634472" cy="685800"/>
+          </a:xfrm>
+          <a:prstGeom prst="rect">
+            <a:avLst/>
+          </a:prstGeom>
+          <a:noFill/>
+        </p:spPr>
+        <p:txBody>
+          <a:bodyPr wrap="square">
+            <a:spAutoFit/>
+          </a:bodyPr>
+          <a:lstStyle/>
+          <a:p>
+            <a:pPr algn="l"/>
+            <a:r>
+              <a:rPr sz="2400" b="1" i="0">
+                <a:solidFill>
+                  <a:srgbClr val="1F2C56"/>
+                </a:solidFill>
+                <a:latin typeface="Source Serif 4"/>
+              </a:rPr>
+              <a:t>Phase 2: Während des Gesprächs</a:t>
+            </a:r>
+          </a:p>
+        </p:txBody>
+      </p:sp>
+      <p:sp>
+        <p:nvSpPr>
           <p:cNvPr id="8" name="TextBox 7"/>
           <p:cNvSpPr txBox="1"/>
           <p:nvPr/>
         </p:nvSpPr>
         <p:spPr>
           <a:xfrm>
-            <a:off x="609600" y="2851150"/>
-            <a:ext cx="10972800" cy="3448050"/>
+            <a:off x="685800" y="1417320"/>
+            <a:ext cx="10817352" cy="5029200"/>
           </a:xfrm>
           <a:prstGeom prst="rect">
             <a:avLst/>
@@ -5664,102 +6267,142 @@
         </p:spPr>
         <p:txBody>
           <a:bodyPr wrap="square">
-            <a:normAutofit/>
+            <a:spAutoFit/>
           </a:bodyPr>
           <a:lstStyle/>
           <a:p>
             <a:pPr>
               <a:spcBef>
-                <a:spcPts val="600"/>
+                <a:spcPts val="400"/>
               </a:spcBef>
               <a:spcAft>
-                <a:spcPts val="600"/>
+                <a:spcPts val="200"/>
               </a:spcAft>
             </a:pPr>
             <a:r>
-              <a:rPr sz="1400">
-                <a:solidFill>
-                  <a:srgbClr val="191D2E"/>
-                </a:solidFill>
-                <a:latin typeface="Georgia"/>
+              <a:rPr sz="1300">
+                <a:solidFill>
+                  <a:srgbClr val="3D5466"/>
+                </a:solidFill>
+                <a:latin typeface="Arial"/>
               </a:rPr>
-              <a:t>–  Gesprächsvorbereitung dauert 45 Min: → agree-Profil + UD-Leitfaden nutzen (15 Min.)</a:t>
+              <a:t>▸  Kein separates Notizheft – direkt in agree</a:t>
             </a:r>
           </a:p>
           <a:p>
             <a:pPr>
               <a:spcBef>
-                <a:spcPts val="600"/>
+                <a:spcPts val="400"/>
               </a:spcBef>
               <a:spcAft>
-                <a:spcPts val="600"/>
+                <a:spcPts val="200"/>
               </a:spcAft>
             </a:pPr>
             <a:r>
-              <a:rPr sz="1400">
-                <a:solidFill>
-                  <a:srgbClr val="191D2E"/>
-                </a:solidFill>
-                <a:latin typeface="Georgia"/>
+              <a:rPr sz="1300">
+                <a:solidFill>
+                  <a:srgbClr val="3D5466"/>
+                </a:solidFill>
+                <a:latin typeface="Arial"/>
               </a:rPr>
-              <a:t>–  Dokumentation nach Gespräch separat: → Notizen direkt im UD eintragen</a:t>
+              <a:t>▸  Vereinbarungen sofort als Aktivität/Aufgabe anlegen (mit Datum und Verantwortlichkeit)</a:t>
             </a:r>
           </a:p>
           <a:p>
             <a:pPr>
               <a:spcBef>
-                <a:spcPts val="600"/>
+                <a:spcPts val="400"/>
               </a:spcBef>
               <a:spcAft>
-                <a:spcPts val="600"/>
+                <a:spcPts val="200"/>
               </a:spcAft>
             </a:pPr>
             <a:r>
-              <a:rPr sz="1400">
-                <a:solidFill>
-                  <a:srgbClr val="191D2E"/>
-                </a:solidFill>
-                <a:latin typeface="Georgia"/>
+              <a:rPr sz="1300">
+                <a:solidFill>
+                  <a:srgbClr val="3D5466"/>
+                </a:solidFill>
+                <a:latin typeface="Arial"/>
               </a:rPr>
-              <a:t>–  Frühwarnberichte manuell erstellen: → Standardbericht aus agree abrufen</a:t>
-            </a:r>
-          </a:p>
-          <a:p>
-            <a:pPr>
-              <a:spcBef>
-                <a:spcPts val="600"/>
-              </a:spcBef>
-              <a:spcAft>
-                <a:spcPts val="600"/>
-              </a:spcAft>
-            </a:pPr>
-            <a:r>
-              <a:rPr sz="1400">
-                <a:solidFill>
-                  <a:srgbClr val="191D2E"/>
-                </a:solidFill>
-                <a:latin typeface="Georgia"/>
+              <a:t>▸  Bedarfe in den dafür vorgesehenen Bedarfsfeldern des UnternehmerDialogs erfassen</a:t>
+            </a:r>
+          </a:p>
+        </p:txBody>
+      </p:sp>
+      <p:sp>
+        <p:nvSpPr>
+          <p:cNvPr id="9" name="Rectangle 8"/>
+          <p:cNvSpPr/>
+          <p:nvPr/>
+        </p:nvSpPr>
+        <p:spPr>
+          <a:xfrm>
+            <a:off x="0" y="6510528"/>
+            <a:ext cx="12188952" cy="347472"/>
+          </a:xfrm>
+          <a:prstGeom prst="rect">
+            <a:avLst/>
+          </a:prstGeom>
+          <a:solidFill>
+            <a:srgbClr val="0A1937"/>
+          </a:solidFill>
+          <a:ln>
+            <a:noFill/>
+          </a:ln>
+        </p:spPr>
+        <p:style>
+          <a:lnRef idx="1">
+            <a:schemeClr val="accent1"/>
+          </a:lnRef>
+          <a:fillRef idx="3">
+            <a:schemeClr val="accent1"/>
+          </a:fillRef>
+          <a:effectRef idx="2">
+            <a:schemeClr val="accent1"/>
+          </a:effectRef>
+          <a:fontRef idx="minor">
+            <a:schemeClr val="lt1"/>
+          </a:fontRef>
+        </p:style>
+        <p:txBody>
+          <a:bodyPr rtlCol="0" anchor="ctr"/>
+          <a:lstStyle/>
+          <a:p>
+            <a:pPr algn="ctr"/>
+          </a:p>
+        </p:txBody>
+      </p:sp>
+      <p:sp>
+        <p:nvSpPr>
+          <p:cNvPr id="10" name="TextBox 9"/>
+          <p:cNvSpPr txBox="1"/>
+          <p:nvPr/>
+        </p:nvSpPr>
+        <p:spPr>
+          <a:xfrm>
+            <a:off x="685800" y="6583680"/>
+            <a:ext cx="6490411" cy="256032"/>
+          </a:xfrm>
+          <a:prstGeom prst="rect">
+            <a:avLst/>
+          </a:prstGeom>
+          <a:noFill/>
+        </p:spPr>
+        <p:txBody>
+          <a:bodyPr wrap="none">
+            <a:spAutoFit/>
+          </a:bodyPr>
+          <a:lstStyle/>
+          <a:p>
+            <a:pPr algn="l"/>
+            <a:r>
+              <a:rPr sz="700">
+                <a:solidFill>
+                  <a:srgbClr val="A0B4D2"/>
+                </a:solidFill>
+                <a:latin typeface="JetBrains Mono"/>
               </a:rPr>
-              <a:t>–  NMZ unklar: → NMZ-Bestandsbericht monatlich ziehen und auswerten</a:t>
-            </a:r>
-          </a:p>
-          <a:p>
-            <a:pPr>
-              <a:spcBef>
-                <a:spcPts val="600"/>
-              </a:spcBef>
-              <a:spcAft>
-                <a:spcPts val="600"/>
-              </a:spcAft>
-            </a:pPr>
-            <a:r>
-              <a:rPr sz="1400">
-                <a:solidFill>
-                  <a:srgbClr val="191D2E"/>
-                </a:solidFill>
-                <a:latin typeface="Georgia"/>
-              </a:rPr>
-              <a:t>–  Doppelte Datenpflege: → agree als Single Source of Truth konsequent nutzen</a:t>
+              <a:t>Benedikt Zoller Coaching  ·  FKB Campus  ·  M17</a:t>
             </a:r>
           </a:p>
         </p:txBody>
@@ -5775,14 +6418,6 @@
 <file path=ppt/slides/slide7.xml><?xml version="1.0" encoding="utf-8"?>
 <p:sld xmlns:a="http://schemas.openxmlformats.org/drawingml/2006/main" xmlns:p="http://schemas.openxmlformats.org/presentationml/2006/main" xmlns:r="http://schemas.openxmlformats.org/officeDocument/2006/relationships">
   <p:cSld>
-    <p:bg>
-      <p:bgPr>
-        <a:solidFill>
-          <a:srgbClr val="1F2B56"/>
-        </a:solidFill>
-        <a:effectLst/>
-      </p:bgPr>
-    </p:bg>
     <p:spTree>
       <p:nvGrpSpPr>
         <p:cNvPr id="1" name=""/>
@@ -5792,14 +6427,100 @@
       <p:grpSpPr/>
       <p:sp>
         <p:nvSpPr>
-          <p:cNvPr id="2" name="TextBox 1"/>
+          <p:cNvPr id="2" name="Rectangle 1"/>
+          <p:cNvSpPr/>
+          <p:nvPr/>
+        </p:nvSpPr>
+        <p:spPr>
+          <a:xfrm>
+            <a:off x="0" y="0"/>
+            <a:ext cx="12188952" cy="6858000"/>
+          </a:xfrm>
+          <a:prstGeom prst="rect">
+            <a:avLst/>
+          </a:prstGeom>
+          <a:solidFill>
+            <a:srgbClr val="EDEDF3"/>
+          </a:solidFill>
+          <a:ln>
+            <a:noFill/>
+          </a:ln>
+        </p:spPr>
+        <p:style>
+          <a:lnRef idx="1">
+            <a:schemeClr val="accent1"/>
+          </a:lnRef>
+          <a:fillRef idx="3">
+            <a:schemeClr val="accent1"/>
+          </a:fillRef>
+          <a:effectRef idx="2">
+            <a:schemeClr val="accent1"/>
+          </a:effectRef>
+          <a:fontRef idx="minor">
+            <a:schemeClr val="lt1"/>
+          </a:fontRef>
+        </p:style>
+        <p:txBody>
+          <a:bodyPr rtlCol="0" anchor="ctr"/>
+          <a:lstStyle/>
+          <a:p>
+            <a:pPr algn="ctr"/>
+          </a:p>
+        </p:txBody>
+      </p:sp>
+      <p:sp>
+        <p:nvSpPr>
+          <p:cNvPr id="3" name="Rectangle 2"/>
+          <p:cNvSpPr/>
+          <p:nvPr/>
+        </p:nvSpPr>
+        <p:spPr>
+          <a:xfrm>
+            <a:off x="0" y="0"/>
+            <a:ext cx="12188952" cy="50292"/>
+          </a:xfrm>
+          <a:prstGeom prst="rect">
+            <a:avLst/>
+          </a:prstGeom>
+          <a:solidFill>
+            <a:srgbClr val="1F2C56"/>
+          </a:solidFill>
+          <a:ln>
+            <a:noFill/>
+          </a:ln>
+        </p:spPr>
+        <p:style>
+          <a:lnRef idx="1">
+            <a:schemeClr val="accent1"/>
+          </a:lnRef>
+          <a:fillRef idx="3">
+            <a:schemeClr val="accent1"/>
+          </a:fillRef>
+          <a:effectRef idx="2">
+            <a:schemeClr val="accent1"/>
+          </a:effectRef>
+          <a:fontRef idx="minor">
+            <a:schemeClr val="lt1"/>
+          </a:fontRef>
+        </p:style>
+        <p:txBody>
+          <a:bodyPr rtlCol="0" anchor="ctr"/>
+          <a:lstStyle/>
+          <a:p>
+            <a:pPr algn="ctr"/>
+          </a:p>
+        </p:txBody>
+      </p:sp>
+      <p:sp>
+        <p:nvSpPr>
+          <p:cNvPr id="4" name="TextBox 3"/>
           <p:cNvSpPr txBox="1"/>
           <p:nvPr/>
         </p:nvSpPr>
         <p:spPr>
           <a:xfrm>
-            <a:off x="609600" y="279400"/>
-            <a:ext cx="2540000" cy="279400"/>
+            <a:off x="685800" y="109728"/>
+            <a:ext cx="10817352" cy="228600"/>
           </a:xfrm>
           <a:prstGeom prst="rect">
             <a:avLst/>
@@ -5807,34 +6528,240 @@
           <a:noFill/>
         </p:spPr>
         <p:txBody>
+          <a:bodyPr wrap="none">
+            <a:spAutoFit/>
+          </a:bodyPr>
+          <a:lstStyle/>
+          <a:p>
+            <a:pPr algn="l"/>
+            <a:r>
+              <a:rPr sz="750">
+                <a:solidFill>
+                  <a:srgbClr val="78808C"/>
+                </a:solidFill>
+                <a:latin typeface="JetBrains Mono"/>
+              </a:rPr>
+              <a:t>M17  ·  INHALT</a:t>
+            </a:r>
+          </a:p>
+        </p:txBody>
+      </p:sp>
+      <p:sp>
+        <p:nvSpPr>
+          <p:cNvPr id="5" name="Rectangle 4"/>
+          <p:cNvSpPr/>
+          <p:nvPr/>
+        </p:nvSpPr>
+        <p:spPr>
+          <a:xfrm>
+            <a:off x="0" y="1234440"/>
+            <a:ext cx="12188952" cy="12700"/>
+          </a:xfrm>
+          <a:prstGeom prst="rect">
+            <a:avLst/>
+          </a:prstGeom>
+          <a:solidFill>
+            <a:srgbClr val="D8DFE4"/>
+          </a:solidFill>
+          <a:ln>
+            <a:noFill/>
+          </a:ln>
+        </p:spPr>
+        <p:style>
+          <a:lnRef idx="1">
+            <a:schemeClr val="accent1"/>
+          </a:lnRef>
+          <a:fillRef idx="3">
+            <a:schemeClr val="accent1"/>
+          </a:fillRef>
+          <a:effectRef idx="2">
+            <a:schemeClr val="accent1"/>
+          </a:effectRef>
+          <a:fontRef idx="minor">
+            <a:schemeClr val="lt1"/>
+          </a:fontRef>
+        </p:style>
+        <p:txBody>
+          <a:bodyPr rtlCol="0" anchor="ctr"/>
+          <a:lstStyle/>
+          <a:p>
+            <a:pPr algn="ctr"/>
+          </a:p>
+        </p:txBody>
+      </p:sp>
+      <p:sp>
+        <p:nvSpPr>
+          <p:cNvPr id="6" name="Rectangle 5"/>
+          <p:cNvSpPr/>
+          <p:nvPr/>
+        </p:nvSpPr>
+        <p:spPr>
+          <a:xfrm>
+            <a:off x="685800" y="502920"/>
+            <a:ext cx="36576" cy="658368"/>
+          </a:xfrm>
+          <a:prstGeom prst="rect">
+            <a:avLst/>
+          </a:prstGeom>
+          <a:solidFill>
+            <a:srgbClr val="D9C089"/>
+          </a:solidFill>
+          <a:ln>
+            <a:noFill/>
+          </a:ln>
+        </p:spPr>
+        <p:style>
+          <a:lnRef idx="1">
+            <a:schemeClr val="accent1"/>
+          </a:lnRef>
+          <a:fillRef idx="3">
+            <a:schemeClr val="accent1"/>
+          </a:fillRef>
+          <a:effectRef idx="2">
+            <a:schemeClr val="accent1"/>
+          </a:effectRef>
+          <a:fontRef idx="minor">
+            <a:schemeClr val="lt1"/>
+          </a:fontRef>
+        </p:style>
+        <p:txBody>
+          <a:bodyPr rtlCol="0" anchor="ctr"/>
+          <a:lstStyle/>
+          <a:p>
+            <a:pPr algn="ctr"/>
+          </a:p>
+        </p:txBody>
+      </p:sp>
+      <p:sp>
+        <p:nvSpPr>
+          <p:cNvPr id="7" name="TextBox 6"/>
+          <p:cNvSpPr txBox="1"/>
+          <p:nvPr/>
+        </p:nvSpPr>
+        <p:spPr>
+          <a:xfrm>
+            <a:off x="813816" y="502920"/>
+            <a:ext cx="10634472" cy="685800"/>
+          </a:xfrm>
+          <a:prstGeom prst="rect">
+            <a:avLst/>
+          </a:prstGeom>
+          <a:noFill/>
+        </p:spPr>
+        <p:txBody>
           <a:bodyPr wrap="square">
-            <a:normAutofit/>
+            <a:spAutoFit/>
           </a:bodyPr>
           <a:lstStyle/>
           <a:p>
             <a:pPr algn="l"/>
             <a:r>
-              <a:rPr sz="1000" b="1" i="0">
-                <a:solidFill>
-                  <a:srgbClr val="F8F8FA"/>
+              <a:rPr sz="2400" b="1" i="0">
+                <a:solidFill>
+                  <a:srgbClr val="1F2C56"/>
+                </a:solidFill>
+                <a:latin typeface="Source Serif 4"/>
+              </a:rPr>
+              <a:t>Phase 3: Nachbereitung (10 Minuten statt 30 Minuten)</a:t>
+            </a:r>
+          </a:p>
+        </p:txBody>
+      </p:sp>
+      <p:sp>
+        <p:nvSpPr>
+          <p:cNvPr id="8" name="TextBox 7"/>
+          <p:cNvSpPr txBox="1"/>
+          <p:nvPr/>
+        </p:nvSpPr>
+        <p:spPr>
+          <a:xfrm>
+            <a:off x="685800" y="1417320"/>
+            <a:ext cx="10817352" cy="5029200"/>
+          </a:xfrm>
+          <a:prstGeom prst="rect">
+            <a:avLst/>
+          </a:prstGeom>
+          <a:noFill/>
+        </p:spPr>
+        <p:txBody>
+          <a:bodyPr wrap="square">
+            <a:spAutoFit/>
+          </a:bodyPr>
+          <a:lstStyle/>
+          <a:p>
+            <a:pPr>
+              <a:spcBef>
+                <a:spcPts val="400"/>
+              </a:spcBef>
+              <a:spcAft>
+                <a:spcPts val="200"/>
+              </a:spcAft>
+            </a:pPr>
+            <a:r>
+              <a:rPr sz="1200">
+                <a:solidFill>
+                  <a:srgbClr val="3D5466"/>
                 </a:solidFill>
                 <a:latin typeface="Arial"/>
               </a:rPr>
-              <a:t>FKB  Campus</a:t>
-            </a:r>
-          </a:p>
-        </p:txBody>
-      </p:sp>
-      <p:sp>
-        <p:nvSpPr>
-          <p:cNvPr id="3" name="TextBox 2"/>
+              <a:t>## 4.3 UnternehmerDialog: Mehr als ein Formular</a:t>
+            </a:r>
+          </a:p>
+        </p:txBody>
+      </p:sp>
+      <p:sp>
+        <p:nvSpPr>
+          <p:cNvPr id="9" name="Rectangle 8"/>
+          <p:cNvSpPr/>
+          <p:nvPr/>
+        </p:nvSpPr>
+        <p:spPr>
+          <a:xfrm>
+            <a:off x="0" y="6510528"/>
+            <a:ext cx="12188952" cy="347472"/>
+          </a:xfrm>
+          <a:prstGeom prst="rect">
+            <a:avLst/>
+          </a:prstGeom>
+          <a:solidFill>
+            <a:srgbClr val="0A1937"/>
+          </a:solidFill>
+          <a:ln>
+            <a:noFill/>
+          </a:ln>
+        </p:spPr>
+        <p:style>
+          <a:lnRef idx="1">
+            <a:schemeClr val="accent1"/>
+          </a:lnRef>
+          <a:fillRef idx="3">
+            <a:schemeClr val="accent1"/>
+          </a:fillRef>
+          <a:effectRef idx="2">
+            <a:schemeClr val="accent1"/>
+          </a:effectRef>
+          <a:fontRef idx="minor">
+            <a:schemeClr val="lt1"/>
+          </a:fontRef>
+        </p:style>
+        <p:txBody>
+          <a:bodyPr rtlCol="0" anchor="ctr"/>
+          <a:lstStyle/>
+          <a:p>
+            <a:pPr algn="ctr"/>
+          </a:p>
+        </p:txBody>
+      </p:sp>
+      <p:sp>
+        <p:nvSpPr>
+          <p:cNvPr id="10" name="TextBox 9"/>
           <p:cNvSpPr txBox="1"/>
           <p:nvPr/>
         </p:nvSpPr>
         <p:spPr>
           <a:xfrm>
-            <a:off x="609600" y="279400"/>
-            <a:ext cx="10972800" cy="279400"/>
+            <a:off x="685800" y="6583680"/>
+            <a:ext cx="6490411" cy="256032"/>
           </a:xfrm>
           <a:prstGeom prst="rect">
             <a:avLst/>
@@ -5842,160 +6769,20 @@
           <a:noFill/>
         </p:spPr>
         <p:txBody>
-          <a:bodyPr wrap="square">
-            <a:normAutofit/>
+          <a:bodyPr wrap="none">
+            <a:spAutoFit/>
           </a:bodyPr>
           <a:lstStyle/>
           <a:p>
-            <a:pPr algn="r"/>
-            <a:r>
-              <a:rPr sz="900" b="0" i="0">
-                <a:solidFill>
-                  <a:srgbClr val="7B7FA0"/>
-                </a:solidFill>
-                <a:latin typeface="Courier New"/>
+            <a:pPr algn="l"/>
+            <a:r>
+              <a:rPr sz="700">
+                <a:solidFill>
+                  <a:srgbClr val="A0B4D2"/>
+                </a:solidFill>
+                <a:latin typeface="JetBrains Mono"/>
               </a:rPr>
-              <a:t>DER UNTERNEHMERDIALOG: BERATUNG STRUKTURIEREN</a:t>
-            </a:r>
-          </a:p>
-        </p:txBody>
-      </p:sp>
-      <p:sp>
-        <p:nvSpPr>
-          <p:cNvPr id="4" name="TextBox 3"/>
-          <p:cNvSpPr txBox="1"/>
-          <p:nvPr/>
-        </p:nvSpPr>
-        <p:spPr>
-          <a:xfrm>
-            <a:off x="609600" y="6426200"/>
-            <a:ext cx="10972800" cy="228600"/>
-          </a:xfrm>
-          <a:prstGeom prst="rect">
-            <a:avLst/>
-          </a:prstGeom>
-          <a:noFill/>
-        </p:spPr>
-        <p:txBody>
-          <a:bodyPr wrap="square">
-            <a:normAutofit/>
-          </a:bodyPr>
-          <a:lstStyle/>
-          <a:p>
-            <a:pPr algn="r"/>
-            <a:r>
-              <a:rPr sz="900" b="0" i="0">
-                <a:solidFill>
-                  <a:srgbClr val="7B7FA0"/>
-                </a:solidFill>
-                <a:latin typeface="Courier New"/>
-              </a:rPr>
-              <a:t>07</a:t>
-            </a:r>
-          </a:p>
-        </p:txBody>
-      </p:sp>
-      <p:sp>
-        <p:nvSpPr>
-          <p:cNvPr id="5" name="TextBox 4"/>
-          <p:cNvSpPr txBox="1"/>
-          <p:nvPr/>
-        </p:nvSpPr>
-        <p:spPr>
-          <a:xfrm>
-            <a:off x="609600" y="635000"/>
-            <a:ext cx="5461000" cy="5461000"/>
-          </a:xfrm>
-          <a:prstGeom prst="rect">
-            <a:avLst/>
-          </a:prstGeom>
-          <a:noFill/>
-        </p:spPr>
-        <p:txBody>
-          <a:bodyPr wrap="square">
-            <a:normAutofit/>
-          </a:bodyPr>
-          <a:lstStyle/>
-          <a:p>
-            <a:pPr algn="l"/>
-            <a:r>
-              <a:rPr sz="28000" b="0" i="1">
-                <a:solidFill>
-                  <a:srgbClr val="D9BF7A"/>
-                </a:solidFill>
-                <a:latin typeface="Georgia"/>
-              </a:rPr>
-              <a:t>III</a:t>
-            </a:r>
-          </a:p>
-        </p:txBody>
-      </p:sp>
-      <p:sp>
-        <p:nvSpPr>
-          <p:cNvPr id="6" name="TextBox 5"/>
-          <p:cNvSpPr txBox="1"/>
-          <p:nvPr/>
-        </p:nvSpPr>
-        <p:spPr>
-          <a:xfrm>
-            <a:off x="6731000" y="4064000"/>
-            <a:ext cx="4851400" cy="1778000"/>
-          </a:xfrm>
-          <a:prstGeom prst="rect">
-            <a:avLst/>
-          </a:prstGeom>
-          <a:noFill/>
-        </p:spPr>
-        <p:txBody>
-          <a:bodyPr wrap="square">
-            <a:normAutofit/>
-          </a:bodyPr>
-          <a:lstStyle/>
-          <a:p>
-            <a:pPr algn="r"/>
-            <a:r>
-              <a:rPr sz="3800" b="0" i="0">
-                <a:solidFill>
-                  <a:srgbClr val="F8F8FA"/>
-                </a:solidFill>
-                <a:latin typeface="Georgia"/>
-              </a:rPr>
-              <a:t>Der UnternehmerDialog: Beratung strukturieren</a:t>
-            </a:r>
-          </a:p>
-        </p:txBody>
-      </p:sp>
-      <p:sp>
-        <p:nvSpPr>
-          <p:cNvPr id="7" name="TextBox 6"/>
-          <p:cNvSpPr txBox="1"/>
-          <p:nvPr/>
-        </p:nvSpPr>
-        <p:spPr>
-          <a:xfrm>
-            <a:off x="6731000" y="5842000"/>
-            <a:ext cx="4851400" cy="635000"/>
-          </a:xfrm>
-          <a:prstGeom prst="rect">
-            <a:avLst/>
-          </a:prstGeom>
-          <a:noFill/>
-        </p:spPr>
-        <p:txBody>
-          <a:bodyPr wrap="square">
-            <a:normAutofit/>
-          </a:bodyPr>
-          <a:lstStyle/>
-          <a:p>
-            <a:pPr algn="r"/>
-            <a:r>
-              <a:rPr sz="1400" b="0" i="1">
-                <a:solidFill>
-                  <a:srgbClr val="7B7FA0"/>
-                </a:solidFill>
-                <a:latin typeface="Georgia"/>
-              </a:rPr>
-              <a:t>Nicht nur Protokoll — sondern Gesprächsführung</a:t>
+              <a:t>Benedikt Zoller Coaching  ·  FKB Campus  ·  M17</a:t>
             </a:r>
           </a:p>
         </p:txBody>
@@ -6011,14 +6798,6 @@
 <file path=ppt/slides/slide8.xml><?xml version="1.0" encoding="utf-8"?>
 <p:sld xmlns:a="http://schemas.openxmlformats.org/drawingml/2006/main" xmlns:p="http://schemas.openxmlformats.org/presentationml/2006/main" xmlns:r="http://schemas.openxmlformats.org/officeDocument/2006/relationships">
   <p:cSld>
-    <p:bg>
-      <p:bgPr>
-        <a:solidFill>
-          <a:srgbClr val="F8F8FA"/>
-        </a:solidFill>
-        <a:effectLst/>
-      </p:bgPr>
-    </p:bg>
     <p:spTree>
       <p:nvGrpSpPr>
         <p:cNvPr id="1" name=""/>
@@ -6028,125 +6807,20 @@
       <p:grpSpPr/>
       <p:sp>
         <p:nvSpPr>
-          <p:cNvPr id="2" name="TextBox 1"/>
-          <p:cNvSpPr txBox="1"/>
-          <p:nvPr/>
-        </p:nvSpPr>
-        <p:spPr>
-          <a:xfrm>
-            <a:off x="609600" y="279400"/>
-            <a:ext cx="2540000" cy="279400"/>
-          </a:xfrm>
-          <a:prstGeom prst="rect">
-            <a:avLst/>
-          </a:prstGeom>
-          <a:noFill/>
-        </p:spPr>
-        <p:txBody>
-          <a:bodyPr wrap="square">
-            <a:normAutofit/>
-          </a:bodyPr>
-          <a:lstStyle/>
-          <a:p>
-            <a:pPr algn="l"/>
-            <a:r>
-              <a:rPr sz="1000" b="1" i="0">
-                <a:solidFill>
-                  <a:srgbClr val="191D2E"/>
-                </a:solidFill>
-                <a:latin typeface="Arial"/>
-              </a:rPr>
-              <a:t>FKB  Campus</a:t>
-            </a:r>
-          </a:p>
-        </p:txBody>
-      </p:sp>
-      <p:sp>
-        <p:nvSpPr>
-          <p:cNvPr id="3" name="TextBox 2"/>
-          <p:cNvSpPr txBox="1"/>
-          <p:nvPr/>
-        </p:nvSpPr>
-        <p:spPr>
-          <a:xfrm>
-            <a:off x="609600" y="279400"/>
-            <a:ext cx="10972800" cy="279400"/>
-          </a:xfrm>
-          <a:prstGeom prst="rect">
-            <a:avLst/>
-          </a:prstGeom>
-          <a:noFill/>
-        </p:spPr>
-        <p:txBody>
-          <a:bodyPr wrap="square">
-            <a:normAutofit/>
-          </a:bodyPr>
-          <a:lstStyle/>
-          <a:p>
-            <a:pPr algn="r"/>
-            <a:r>
-              <a:rPr sz="900" b="0" i="0">
-                <a:solidFill>
-                  <a:srgbClr val="7B7FA0"/>
-                </a:solidFill>
-                <a:latin typeface="Courier New"/>
-              </a:rPr>
-              <a:t>III · DER UNTERNEHMERDIALOG: BERATUNG STRUKTURIEREN</a:t>
-            </a:r>
-          </a:p>
-        </p:txBody>
-      </p:sp>
-      <p:sp>
-        <p:nvSpPr>
-          <p:cNvPr id="4" name="TextBox 3"/>
-          <p:cNvSpPr txBox="1"/>
-          <p:nvPr/>
-        </p:nvSpPr>
-        <p:spPr>
-          <a:xfrm>
-            <a:off x="609600" y="6426200"/>
-            <a:ext cx="10972800" cy="228600"/>
-          </a:xfrm>
-          <a:prstGeom prst="rect">
-            <a:avLst/>
-          </a:prstGeom>
-          <a:noFill/>
-        </p:spPr>
-        <p:txBody>
-          <a:bodyPr wrap="square">
-            <a:normAutofit/>
-          </a:bodyPr>
-          <a:lstStyle/>
-          <a:p>
-            <a:pPr algn="r"/>
-            <a:r>
-              <a:rPr sz="900" b="0" i="0">
-                <a:solidFill>
-                  <a:srgbClr val="7B7FA0"/>
-                </a:solidFill>
-                <a:latin typeface="Courier New"/>
-              </a:rPr>
-              <a:t>08</a:t>
-            </a:r>
-          </a:p>
-        </p:txBody>
-      </p:sp>
-      <p:sp>
-        <p:nvSpPr>
-          <p:cNvPr id="5" name="Rectangle 4"/>
+          <p:cNvPr id="2" name="Rectangle 1"/>
           <p:cNvSpPr/>
           <p:nvPr/>
         </p:nvSpPr>
         <p:spPr>
           <a:xfrm>
-            <a:off x="609600" y="825500"/>
-            <a:ext cx="10972800" cy="6350"/>
+            <a:off x="0" y="0"/>
+            <a:ext cx="12188952" cy="6858000"/>
           </a:xfrm>
           <a:prstGeom prst="rect">
             <a:avLst/>
           </a:prstGeom>
           <a:solidFill>
-            <a:srgbClr val="191D2E"/>
+            <a:srgbClr val="EDEDF3"/>
           </a:solidFill>
           <a:ln>
             <a:noFill/>
@@ -6176,55 +6850,20 @@
       </p:sp>
       <p:sp>
         <p:nvSpPr>
-          <p:cNvPr id="6" name="TextBox 5"/>
-          <p:cNvSpPr txBox="1"/>
-          <p:nvPr/>
-        </p:nvSpPr>
-        <p:spPr>
-          <a:xfrm>
-            <a:off x="609600" y="920750"/>
-            <a:ext cx="10972800" cy="1778000"/>
-          </a:xfrm>
-          <a:prstGeom prst="rect">
-            <a:avLst/>
-          </a:prstGeom>
-          <a:noFill/>
-        </p:spPr>
-        <p:txBody>
-          <a:bodyPr wrap="square">
-            <a:normAutofit/>
-          </a:bodyPr>
-          <a:lstStyle/>
-          <a:p>
-            <a:pPr algn="l"/>
-            <a:r>
-              <a:rPr sz="3800" b="0" i="0">
-                <a:solidFill>
-                  <a:srgbClr val="191D2E"/>
-                </a:solidFill>
-                <a:latin typeface="Georgia"/>
-              </a:rPr>
-              <a:t>UnternehmerDialog in vier Schritten nutzen</a:t>
-            </a:r>
-          </a:p>
-        </p:txBody>
-      </p:sp>
-      <p:sp>
-        <p:nvSpPr>
-          <p:cNvPr id="7" name="Rectangle 6"/>
+          <p:cNvPr id="3" name="Rectangle 2"/>
           <p:cNvSpPr/>
           <p:nvPr/>
         </p:nvSpPr>
         <p:spPr>
           <a:xfrm>
-            <a:off x="609600" y="2762250"/>
-            <a:ext cx="10972800" cy="6350"/>
+            <a:off x="0" y="0"/>
+            <a:ext cx="12188952" cy="50292"/>
           </a:xfrm>
           <a:prstGeom prst="rect">
             <a:avLst/>
           </a:prstGeom>
           <a:solidFill>
-            <a:srgbClr val="E0E0E8"/>
+            <a:srgbClr val="1F2C56"/>
           </a:solidFill>
           <a:ln>
             <a:noFill/>
@@ -6254,14 +6893,170 @@
       </p:sp>
       <p:sp>
         <p:nvSpPr>
+          <p:cNvPr id="4" name="TextBox 3"/>
+          <p:cNvSpPr txBox="1"/>
+          <p:nvPr/>
+        </p:nvSpPr>
+        <p:spPr>
+          <a:xfrm>
+            <a:off x="685800" y="109728"/>
+            <a:ext cx="10817352" cy="228600"/>
+          </a:xfrm>
+          <a:prstGeom prst="rect">
+            <a:avLst/>
+          </a:prstGeom>
+          <a:noFill/>
+        </p:spPr>
+        <p:txBody>
+          <a:bodyPr wrap="none">
+            <a:spAutoFit/>
+          </a:bodyPr>
+          <a:lstStyle/>
+          <a:p>
+            <a:pPr algn="l"/>
+            <a:r>
+              <a:rPr sz="750">
+                <a:solidFill>
+                  <a:srgbClr val="78808C"/>
+                </a:solidFill>
+                <a:latin typeface="JetBrains Mono"/>
+              </a:rPr>
+              <a:t>M17  ·  INHALT</a:t>
+            </a:r>
+          </a:p>
+        </p:txBody>
+      </p:sp>
+      <p:sp>
+        <p:nvSpPr>
+          <p:cNvPr id="5" name="Rectangle 4"/>
+          <p:cNvSpPr/>
+          <p:nvPr/>
+        </p:nvSpPr>
+        <p:spPr>
+          <a:xfrm>
+            <a:off x="0" y="1234440"/>
+            <a:ext cx="12188952" cy="12700"/>
+          </a:xfrm>
+          <a:prstGeom prst="rect">
+            <a:avLst/>
+          </a:prstGeom>
+          <a:solidFill>
+            <a:srgbClr val="D8DFE4"/>
+          </a:solidFill>
+          <a:ln>
+            <a:noFill/>
+          </a:ln>
+        </p:spPr>
+        <p:style>
+          <a:lnRef idx="1">
+            <a:schemeClr val="accent1"/>
+          </a:lnRef>
+          <a:fillRef idx="3">
+            <a:schemeClr val="accent1"/>
+          </a:fillRef>
+          <a:effectRef idx="2">
+            <a:schemeClr val="accent1"/>
+          </a:effectRef>
+          <a:fontRef idx="minor">
+            <a:schemeClr val="lt1"/>
+          </a:fontRef>
+        </p:style>
+        <p:txBody>
+          <a:bodyPr rtlCol="0" anchor="ctr"/>
+          <a:lstStyle/>
+          <a:p>
+            <a:pPr algn="ctr"/>
+          </a:p>
+        </p:txBody>
+      </p:sp>
+      <p:sp>
+        <p:nvSpPr>
+          <p:cNvPr id="6" name="Rectangle 5"/>
+          <p:cNvSpPr/>
+          <p:nvPr/>
+        </p:nvSpPr>
+        <p:spPr>
+          <a:xfrm>
+            <a:off x="685800" y="502920"/>
+            <a:ext cx="36576" cy="658368"/>
+          </a:xfrm>
+          <a:prstGeom prst="rect">
+            <a:avLst/>
+          </a:prstGeom>
+          <a:solidFill>
+            <a:srgbClr val="D9C089"/>
+          </a:solidFill>
+          <a:ln>
+            <a:noFill/>
+          </a:ln>
+        </p:spPr>
+        <p:style>
+          <a:lnRef idx="1">
+            <a:schemeClr val="accent1"/>
+          </a:lnRef>
+          <a:fillRef idx="3">
+            <a:schemeClr val="accent1"/>
+          </a:fillRef>
+          <a:effectRef idx="2">
+            <a:schemeClr val="accent1"/>
+          </a:effectRef>
+          <a:fontRef idx="minor">
+            <a:schemeClr val="lt1"/>
+          </a:fontRef>
+        </p:style>
+        <p:txBody>
+          <a:bodyPr rtlCol="0" anchor="ctr"/>
+          <a:lstStyle/>
+          <a:p>
+            <a:pPr algn="ctr"/>
+          </a:p>
+        </p:txBody>
+      </p:sp>
+      <p:sp>
+        <p:nvSpPr>
+          <p:cNvPr id="7" name="TextBox 6"/>
+          <p:cNvSpPr txBox="1"/>
+          <p:nvPr/>
+        </p:nvSpPr>
+        <p:spPr>
+          <a:xfrm>
+            <a:off x="813816" y="502920"/>
+            <a:ext cx="10634472" cy="685800"/>
+          </a:xfrm>
+          <a:prstGeom prst="rect">
+            <a:avLst/>
+          </a:prstGeom>
+          <a:noFill/>
+        </p:spPr>
+        <p:txBody>
+          <a:bodyPr wrap="square">
+            <a:spAutoFit/>
+          </a:bodyPr>
+          <a:lstStyle/>
+          <a:p>
+            <a:pPr algn="l"/>
+            <a:r>
+              <a:rPr sz="2400" b="1" i="0">
+                <a:solidFill>
+                  <a:srgbClr val="1F2C56"/>
+                </a:solidFill>
+                <a:latin typeface="Source Serif 4"/>
+              </a:rPr>
+              <a:t>Die Bedarfsdimensionen im UnternehmerDialog</a:t>
+            </a:r>
+          </a:p>
+        </p:txBody>
+      </p:sp>
+      <p:sp>
+        <p:nvSpPr>
           <p:cNvPr id="8" name="TextBox 7"/>
           <p:cNvSpPr txBox="1"/>
           <p:nvPr/>
         </p:nvSpPr>
         <p:spPr>
           <a:xfrm>
-            <a:off x="609600" y="2851150"/>
-            <a:ext cx="10972800" cy="3448050"/>
+            <a:off x="685800" y="1417320"/>
+            <a:ext cx="10817352" cy="5029200"/>
           </a:xfrm>
           <a:prstGeom prst="rect">
             <a:avLst/>
@@ -6270,83 +7065,123 @@
         </p:spPr>
         <p:txBody>
           <a:bodyPr wrap="square">
-            <a:normAutofit/>
+            <a:spAutoFit/>
           </a:bodyPr>
           <a:lstStyle/>
           <a:p>
             <a:pPr>
               <a:spcBef>
-                <a:spcPts val="600"/>
+                <a:spcPts val="400"/>
               </a:spcBef>
               <a:spcAft>
-                <a:spcPts val="600"/>
+                <a:spcPts val="200"/>
               </a:spcAft>
             </a:pPr>
             <a:r>
-              <a:rPr sz="1400">
-                <a:solidFill>
-                  <a:srgbClr val="191D2E"/>
-                </a:solidFill>
-                <a:latin typeface="Georgia"/>
+              <a:rPr sz="1200">
+                <a:solidFill>
+                  <a:srgbClr val="3D5466"/>
+                </a:solidFill>
+                <a:latin typeface="Arial"/>
               </a:rPr>
-              <a:t>–  Vor dem Gespräch: Profil öffnen, letzte Notizen lesen, Lücken markieren</a:t>
+              <a:t>(Bezeichnungen entsprechen der agree-Standardstruktur; in Ihrer Bankinstallation können einzelne Felder abweichend benannt sein)</a:t>
             </a:r>
           </a:p>
           <a:p>
             <a:pPr>
               <a:spcBef>
-                <a:spcPts val="600"/>
+                <a:spcPts val="400"/>
               </a:spcBef>
               <a:spcAft>
-                <a:spcPts val="600"/>
+                <a:spcPts val="200"/>
               </a:spcAft>
             </a:pPr>
             <a:r>
-              <a:rPr sz="1400">
-                <a:solidFill>
-                  <a:srgbClr val="191D2E"/>
-                </a:solidFill>
-                <a:latin typeface="Georgia"/>
+              <a:rPr sz="1200">
+                <a:solidFill>
+                  <a:srgbClr val="3D5466"/>
+                </a:solidFill>
+                <a:latin typeface="Arial"/>
               </a:rPr>
-              <a:t>–  Im Gespräch: UD als Leitfaden — nicht als Formular abarbeiten</a:t>
-            </a:r>
-          </a:p>
-          <a:p>
-            <a:pPr>
-              <a:spcBef>
-                <a:spcPts val="600"/>
-              </a:spcBef>
-              <a:spcAft>
-                <a:spcPts val="600"/>
-              </a:spcAft>
-            </a:pPr>
-            <a:r>
-              <a:rPr sz="1400">
-                <a:solidFill>
-                  <a:srgbClr val="191D2E"/>
-                </a:solidFill>
-                <a:latin typeface="Georgia"/>
+              <a:t>Wichtig: Nicht alle Dimensionen in jedem Gespräch vollständig abarbeiten. Priorität setzen – zwei oder drei Dimensionen pro Gespräch vertiefen.</a:t>
+            </a:r>
+          </a:p>
+        </p:txBody>
+      </p:sp>
+      <p:sp>
+        <p:nvSpPr>
+          <p:cNvPr id="9" name="Rectangle 8"/>
+          <p:cNvSpPr/>
+          <p:nvPr/>
+        </p:nvSpPr>
+        <p:spPr>
+          <a:xfrm>
+            <a:off x="0" y="6510528"/>
+            <a:ext cx="12188952" cy="347472"/>
+          </a:xfrm>
+          <a:prstGeom prst="rect">
+            <a:avLst/>
+          </a:prstGeom>
+          <a:solidFill>
+            <a:srgbClr val="0A1937"/>
+          </a:solidFill>
+          <a:ln>
+            <a:noFill/>
+          </a:ln>
+        </p:spPr>
+        <p:style>
+          <a:lnRef idx="1">
+            <a:schemeClr val="accent1"/>
+          </a:lnRef>
+          <a:fillRef idx="3">
+            <a:schemeClr val="accent1"/>
+          </a:fillRef>
+          <a:effectRef idx="2">
+            <a:schemeClr val="accent1"/>
+          </a:effectRef>
+          <a:fontRef idx="minor">
+            <a:schemeClr val="lt1"/>
+          </a:fontRef>
+        </p:style>
+        <p:txBody>
+          <a:bodyPr rtlCol="0" anchor="ctr"/>
+          <a:lstStyle/>
+          <a:p>
+            <a:pPr algn="ctr"/>
+          </a:p>
+        </p:txBody>
+      </p:sp>
+      <p:sp>
+        <p:nvSpPr>
+          <p:cNvPr id="10" name="TextBox 9"/>
+          <p:cNvSpPr txBox="1"/>
+          <p:nvPr/>
+        </p:nvSpPr>
+        <p:spPr>
+          <a:xfrm>
+            <a:off x="685800" y="6583680"/>
+            <a:ext cx="6490411" cy="256032"/>
+          </a:xfrm>
+          <a:prstGeom prst="rect">
+            <a:avLst/>
+          </a:prstGeom>
+          <a:noFill/>
+        </p:spPr>
+        <p:txBody>
+          <a:bodyPr wrap="none">
+            <a:spAutoFit/>
+          </a:bodyPr>
+          <a:lstStyle/>
+          <a:p>
+            <a:pPr algn="l"/>
+            <a:r>
+              <a:rPr sz="700">
+                <a:solidFill>
+                  <a:srgbClr val="A0B4D2"/>
+                </a:solidFill>
+                <a:latin typeface="JetBrains Mono"/>
               </a:rPr>
-              <a:t>–  Nach dem Gespräch: Bedarfe, Folgeaktionen und Termine direkt eintragen</a:t>
-            </a:r>
-          </a:p>
-          <a:p>
-            <a:pPr>
-              <a:spcBef>
-                <a:spcPts val="600"/>
-              </a:spcBef>
-              <a:spcAft>
-                <a:spcPts val="600"/>
-              </a:spcAft>
-            </a:pPr>
-            <a:r>
-              <a:rPr sz="1400">
-                <a:solidFill>
-                  <a:srgbClr val="191D2E"/>
-                </a:solidFill>
-                <a:latin typeface="Georgia"/>
-              </a:rPr>
-              <a:t>–  Auswertung: Bedarfsdiagnose als Basis für Cross-Selling-Planung</a:t>
+              <a:t>Benedikt Zoller Coaching  ·  FKB Campus  ·  M17</a:t>
             </a:r>
           </a:p>
         </p:txBody>
@@ -6362,14 +7197,6 @@
 <file path=ppt/slides/slide9.xml><?xml version="1.0" encoding="utf-8"?>
 <p:sld xmlns:a="http://schemas.openxmlformats.org/drawingml/2006/main" xmlns:p="http://schemas.openxmlformats.org/presentationml/2006/main" xmlns:r="http://schemas.openxmlformats.org/officeDocument/2006/relationships">
   <p:cSld>
-    <p:bg>
-      <p:bgPr>
-        <a:solidFill>
-          <a:srgbClr val="F8F8FA"/>
-        </a:solidFill>
-        <a:effectLst/>
-      </p:bgPr>
-    </p:bg>
     <p:spTree>
       <p:nvGrpSpPr>
         <p:cNvPr id="1" name=""/>
@@ -6379,125 +7206,20 @@
       <p:grpSpPr/>
       <p:sp>
         <p:nvSpPr>
-          <p:cNvPr id="2" name="TextBox 1"/>
-          <p:cNvSpPr txBox="1"/>
-          <p:nvPr/>
-        </p:nvSpPr>
-        <p:spPr>
-          <a:xfrm>
-            <a:off x="609600" y="279400"/>
-            <a:ext cx="2540000" cy="279400"/>
-          </a:xfrm>
-          <a:prstGeom prst="rect">
-            <a:avLst/>
-          </a:prstGeom>
-          <a:noFill/>
-        </p:spPr>
-        <p:txBody>
-          <a:bodyPr wrap="square">
-            <a:normAutofit/>
-          </a:bodyPr>
-          <a:lstStyle/>
-          <a:p>
-            <a:pPr algn="l"/>
-            <a:r>
-              <a:rPr sz="1000" b="1" i="0">
-                <a:solidFill>
-                  <a:srgbClr val="191D2E"/>
-                </a:solidFill>
-                <a:latin typeface="Arial"/>
-              </a:rPr>
-              <a:t>FKB  Campus</a:t>
-            </a:r>
-          </a:p>
-        </p:txBody>
-      </p:sp>
-      <p:sp>
-        <p:nvSpPr>
-          <p:cNvPr id="3" name="TextBox 2"/>
-          <p:cNvSpPr txBox="1"/>
-          <p:nvPr/>
-        </p:nvSpPr>
-        <p:spPr>
-          <a:xfrm>
-            <a:off x="609600" y="279400"/>
-            <a:ext cx="10972800" cy="279400"/>
-          </a:xfrm>
-          <a:prstGeom prst="rect">
-            <a:avLst/>
-          </a:prstGeom>
-          <a:noFill/>
-        </p:spPr>
-        <p:txBody>
-          <a:bodyPr wrap="square">
-            <a:normAutofit/>
-          </a:bodyPr>
-          <a:lstStyle/>
-          <a:p>
-            <a:pPr algn="r"/>
-            <a:r>
-              <a:rPr sz="900" b="0" i="0">
-                <a:solidFill>
-                  <a:srgbClr val="7B7FA0"/>
-                </a:solidFill>
-                <a:latin typeface="Courier New"/>
-              </a:rPr>
-              <a:t>III · DER UNTERNEHMERDIALOG</a:t>
-            </a:r>
-          </a:p>
-        </p:txBody>
-      </p:sp>
-      <p:sp>
-        <p:nvSpPr>
-          <p:cNvPr id="4" name="TextBox 3"/>
-          <p:cNvSpPr txBox="1"/>
-          <p:nvPr/>
-        </p:nvSpPr>
-        <p:spPr>
-          <a:xfrm>
-            <a:off x="609600" y="6426200"/>
-            <a:ext cx="10972800" cy="228600"/>
-          </a:xfrm>
-          <a:prstGeom prst="rect">
-            <a:avLst/>
-          </a:prstGeom>
-          <a:noFill/>
-        </p:spPr>
-        <p:txBody>
-          <a:bodyPr wrap="square">
-            <a:normAutofit/>
-          </a:bodyPr>
-          <a:lstStyle/>
-          <a:p>
-            <a:pPr algn="r"/>
-            <a:r>
-              <a:rPr sz="900" b="0" i="0">
-                <a:solidFill>
-                  <a:srgbClr val="7B7FA0"/>
-                </a:solidFill>
-                <a:latin typeface="Courier New"/>
-              </a:rPr>
-              <a:t>09</a:t>
-            </a:r>
-          </a:p>
-        </p:txBody>
-      </p:sp>
-      <p:sp>
-        <p:nvSpPr>
-          <p:cNvPr id="5" name="Rectangle 4"/>
+          <p:cNvPr id="2" name="Rectangle 1"/>
           <p:cNvSpPr/>
           <p:nvPr/>
         </p:nvSpPr>
         <p:spPr>
           <a:xfrm>
-            <a:off x="609600" y="825500"/>
-            <a:ext cx="10972800" cy="6350"/>
+            <a:off x="0" y="0"/>
+            <a:ext cx="12188952" cy="6858000"/>
           </a:xfrm>
           <a:prstGeom prst="rect">
             <a:avLst/>
           </a:prstGeom>
           <a:solidFill>
-            <a:srgbClr val="191D2E"/>
+            <a:srgbClr val="EDEDF3"/>
           </a:solidFill>
           <a:ln>
             <a:noFill/>
@@ -6527,55 +7249,20 @@
       </p:sp>
       <p:sp>
         <p:nvSpPr>
-          <p:cNvPr id="6" name="TextBox 5"/>
-          <p:cNvSpPr txBox="1"/>
-          <p:nvPr/>
-        </p:nvSpPr>
-        <p:spPr>
-          <a:xfrm>
-            <a:off x="609600" y="920750"/>
-            <a:ext cx="10972800" cy="1778000"/>
-          </a:xfrm>
-          <a:prstGeom prst="rect">
-            <a:avLst/>
-          </a:prstGeom>
-          <a:noFill/>
-        </p:spPr>
-        <p:txBody>
-          <a:bodyPr wrap="square">
-            <a:normAutofit/>
-          </a:bodyPr>
-          <a:lstStyle/>
-          <a:p>
-            <a:pPr algn="l"/>
-            <a:r>
-              <a:rPr sz="3800" b="0" i="0">
-                <a:solidFill>
-                  <a:srgbClr val="191D2E"/>
-                </a:solidFill>
-                <a:latin typeface="Georgia"/>
-              </a:rPr>
-              <a:t>Ihr Auftrag: agree-Workflow analysieren</a:t>
-            </a:r>
-          </a:p>
-        </p:txBody>
-      </p:sp>
-      <p:sp>
-        <p:nvSpPr>
-          <p:cNvPr id="7" name="Rectangle 6"/>
+          <p:cNvPr id="3" name="Rectangle 2"/>
           <p:cNvSpPr/>
           <p:nvPr/>
         </p:nvSpPr>
         <p:spPr>
           <a:xfrm>
-            <a:off x="609600" y="2762250"/>
-            <a:ext cx="10972800" cy="6350"/>
+            <a:off x="0" y="0"/>
+            <a:ext cx="12188952" cy="50292"/>
           </a:xfrm>
           <a:prstGeom prst="rect">
             <a:avLst/>
           </a:prstGeom>
           <a:solidFill>
-            <a:srgbClr val="E0E0E8"/>
+            <a:srgbClr val="1F2C56"/>
           </a:solidFill>
           <a:ln>
             <a:noFill/>
@@ -6605,14 +7292,170 @@
       </p:sp>
       <p:sp>
         <p:nvSpPr>
+          <p:cNvPr id="4" name="TextBox 3"/>
+          <p:cNvSpPr txBox="1"/>
+          <p:nvPr/>
+        </p:nvSpPr>
+        <p:spPr>
+          <a:xfrm>
+            <a:off x="685800" y="109728"/>
+            <a:ext cx="10817352" cy="228600"/>
+          </a:xfrm>
+          <a:prstGeom prst="rect">
+            <a:avLst/>
+          </a:prstGeom>
+          <a:noFill/>
+        </p:spPr>
+        <p:txBody>
+          <a:bodyPr wrap="none">
+            <a:spAutoFit/>
+          </a:bodyPr>
+          <a:lstStyle/>
+          <a:p>
+            <a:pPr algn="l"/>
+            <a:r>
+              <a:rPr sz="750">
+                <a:solidFill>
+                  <a:srgbClr val="78808C"/>
+                </a:solidFill>
+                <a:latin typeface="JetBrains Mono"/>
+              </a:rPr>
+              <a:t>M17  ·  INHALT</a:t>
+            </a:r>
+          </a:p>
+        </p:txBody>
+      </p:sp>
+      <p:sp>
+        <p:nvSpPr>
+          <p:cNvPr id="5" name="Rectangle 4"/>
+          <p:cNvSpPr/>
+          <p:nvPr/>
+        </p:nvSpPr>
+        <p:spPr>
+          <a:xfrm>
+            <a:off x="0" y="1234440"/>
+            <a:ext cx="12188952" cy="12700"/>
+          </a:xfrm>
+          <a:prstGeom prst="rect">
+            <a:avLst/>
+          </a:prstGeom>
+          <a:solidFill>
+            <a:srgbClr val="D8DFE4"/>
+          </a:solidFill>
+          <a:ln>
+            <a:noFill/>
+          </a:ln>
+        </p:spPr>
+        <p:style>
+          <a:lnRef idx="1">
+            <a:schemeClr val="accent1"/>
+          </a:lnRef>
+          <a:fillRef idx="3">
+            <a:schemeClr val="accent1"/>
+          </a:fillRef>
+          <a:effectRef idx="2">
+            <a:schemeClr val="accent1"/>
+          </a:effectRef>
+          <a:fontRef idx="minor">
+            <a:schemeClr val="lt1"/>
+          </a:fontRef>
+        </p:style>
+        <p:txBody>
+          <a:bodyPr rtlCol="0" anchor="ctr"/>
+          <a:lstStyle/>
+          <a:p>
+            <a:pPr algn="ctr"/>
+          </a:p>
+        </p:txBody>
+      </p:sp>
+      <p:sp>
+        <p:nvSpPr>
+          <p:cNvPr id="6" name="Rectangle 5"/>
+          <p:cNvSpPr/>
+          <p:nvPr/>
+        </p:nvSpPr>
+        <p:spPr>
+          <a:xfrm>
+            <a:off x="685800" y="502920"/>
+            <a:ext cx="36576" cy="658368"/>
+          </a:xfrm>
+          <a:prstGeom prst="rect">
+            <a:avLst/>
+          </a:prstGeom>
+          <a:solidFill>
+            <a:srgbClr val="D9C089"/>
+          </a:solidFill>
+          <a:ln>
+            <a:noFill/>
+          </a:ln>
+        </p:spPr>
+        <p:style>
+          <a:lnRef idx="1">
+            <a:schemeClr val="accent1"/>
+          </a:lnRef>
+          <a:fillRef idx="3">
+            <a:schemeClr val="accent1"/>
+          </a:fillRef>
+          <a:effectRef idx="2">
+            <a:schemeClr val="accent1"/>
+          </a:effectRef>
+          <a:fontRef idx="minor">
+            <a:schemeClr val="lt1"/>
+          </a:fontRef>
+        </p:style>
+        <p:txBody>
+          <a:bodyPr rtlCol="0" anchor="ctr"/>
+          <a:lstStyle/>
+          <a:p>
+            <a:pPr algn="ctr"/>
+          </a:p>
+        </p:txBody>
+      </p:sp>
+      <p:sp>
+        <p:nvSpPr>
+          <p:cNvPr id="7" name="TextBox 6"/>
+          <p:cNvSpPr txBox="1"/>
+          <p:nvPr/>
+        </p:nvSpPr>
+        <p:spPr>
+          <a:xfrm>
+            <a:off x="813816" y="502920"/>
+            <a:ext cx="10634472" cy="685800"/>
+          </a:xfrm>
+          <a:prstGeom prst="rect">
+            <a:avLst/>
+          </a:prstGeom>
+          <a:noFill/>
+        </p:spPr>
+        <p:txBody>
+          <a:bodyPr wrap="square">
+            <a:spAutoFit/>
+          </a:bodyPr>
+          <a:lstStyle/>
+          <a:p>
+            <a:pPr algn="l"/>
+            <a:r>
+              <a:rPr sz="2400" b="1" i="0">
+                <a:solidFill>
+                  <a:srgbClr val="1F2C56"/>
+                </a:solidFill>
+                <a:latin typeface="Source Serif 4"/>
+              </a:rPr>
+              <a:t>Dokumentationsstandards</a:t>
+            </a:r>
+          </a:p>
+        </p:txBody>
+      </p:sp>
+      <p:sp>
+        <p:nvSpPr>
           <p:cNvPr id="8" name="TextBox 7"/>
           <p:cNvSpPr txBox="1"/>
           <p:nvPr/>
         </p:nvSpPr>
         <p:spPr>
           <a:xfrm>
-            <a:off x="609600" y="2851150"/>
-            <a:ext cx="10972800" cy="3448050"/>
+            <a:off x="685800" y="1417320"/>
+            <a:ext cx="10817352" cy="5029200"/>
           </a:xfrm>
           <a:prstGeom prst="rect">
             <a:avLst/>
@@ -6621,83 +7464,313 @@
         </p:spPr>
         <p:txBody>
           <a:bodyPr wrap="square">
-            <a:normAutofit/>
+            <a:spAutoFit/>
           </a:bodyPr>
           <a:lstStyle/>
           <a:p>
             <a:pPr>
               <a:spcBef>
-                <a:spcPts val="600"/>
+                <a:spcPts val="400"/>
               </a:spcBef>
               <a:spcAft>
-                <a:spcPts val="600"/>
+                <a:spcPts val="200"/>
               </a:spcAft>
             </a:pPr>
             <a:r>
-              <a:rPr sz="1400">
-                <a:solidFill>
-                  <a:srgbClr val="191D2E"/>
-                </a:solidFill>
-                <a:latin typeface="Georgia"/>
+              <a:rPr sz="1300">
+                <a:solidFill>
+                  <a:srgbClr val="3D5466"/>
+                </a:solidFill>
+                <a:latin typeface="Arial"/>
               </a:rPr>
-              <a:t>–  Eigene Nutzung ehrlich einschätzen: Welche Funktionen kennen Sie nicht?</a:t>
+              <a:t>▸  Datum, Teilnehmer, Gesprächsanlass</a:t>
             </a:r>
           </a:p>
           <a:p>
             <a:pPr>
               <a:spcBef>
-                <a:spcPts val="600"/>
+                <a:spcPts val="400"/>
               </a:spcBef>
               <a:spcAft>
-                <a:spcPts val="600"/>
+                <a:spcPts val="200"/>
               </a:spcAft>
             </a:pPr>
             <a:r>
-              <a:rPr sz="1400">
-                <a:solidFill>
-                  <a:srgbClr val="191D2E"/>
-                </a:solidFill>
-                <a:latin typeface="Georgia"/>
+              <a:rPr sz="1300">
+                <a:solidFill>
+                  <a:srgbClr val="3D5466"/>
+                </a:solidFill>
+                <a:latin typeface="Arial"/>
               </a:rPr>
-              <a:t>–  Zwei Zeitfresser aus Ihrem Alltag identifizieren</a:t>
+              <a:t>▸  Besprochene Bedarfsdimensionen mit Ergebnis (Bedarf vorhanden / kein Bedarf / offen)</a:t>
             </a:r>
           </a:p>
           <a:p>
             <a:pPr>
               <a:spcBef>
-                <a:spcPts val="600"/>
+                <a:spcPts val="400"/>
               </a:spcBef>
               <a:spcAft>
-                <a:spcPts val="600"/>
+                <a:spcPts val="200"/>
               </a:spcAft>
             </a:pPr>
             <a:r>
-              <a:rPr sz="1400">
-                <a:solidFill>
-                  <a:srgbClr val="191D2E"/>
-                </a:solidFill>
-                <a:latin typeface="Georgia"/>
+              <a:rPr sz="1300">
+                <a:solidFill>
+                  <a:srgbClr val="3D5466"/>
+                </a:solidFill>
+                <a:latin typeface="Arial"/>
               </a:rPr>
-              <a:t>–  Agree-Funktion zuordnen und in der nächsten Woche anwenden</a:t>
+              <a:t>▸  Vereinbarte Maßnahmen mit Termin</a:t>
             </a:r>
           </a:p>
           <a:p>
             <a:pPr>
               <a:spcBef>
-                <a:spcPts val="600"/>
+                <a:spcPts val="400"/>
               </a:spcBef>
               <a:spcAft>
-                <a:spcPts val="600"/>
+                <a:spcPts val="200"/>
               </a:spcAft>
             </a:pPr>
             <a:r>
-              <a:rPr sz="1400">
-                <a:solidFill>
-                  <a:srgbClr val="191D2E"/>
-                </a:solidFill>
-                <a:latin typeface="Georgia"/>
+              <a:rPr sz="1300">
+                <a:solidFill>
+                  <a:srgbClr val="3D5466"/>
+                </a:solidFill>
+                <a:latin typeface="Arial"/>
               </a:rPr>
-              <a:t>–  Ergebnis im Team teilen</a:t>
+              <a:t>▸  Folgeaktivitäten angelegt</a:t>
+            </a:r>
+          </a:p>
+          <a:p>
+            <a:pPr>
+              <a:spcBef>
+                <a:spcPts val="400"/>
+              </a:spcBef>
+              <a:spcAft>
+                <a:spcPts val="200"/>
+              </a:spcAft>
+            </a:pPr>
+            <a:r>
+              <a:rPr sz="1200">
+                <a:solidFill>
+                  <a:srgbClr val="3D5466"/>
+                </a:solidFill>
+                <a:latin typeface="Arial"/>
+              </a:rPr>
+              <a:t>## 4.4 Reporting-Cockpits: Was wann wozu?</a:t>
+            </a:r>
+          </a:p>
+          <a:p>
+            <a:pPr>
+              <a:spcBef>
+                <a:spcPts val="400"/>
+              </a:spcBef>
+              <a:spcAft>
+                <a:spcPts val="200"/>
+              </a:spcAft>
+            </a:pPr>
+            <a:r>
+              <a:rPr sz="1200">
+                <a:solidFill>
+                  <a:srgbClr val="3D5466"/>
+                </a:solidFill>
+                <a:latin typeface="Arial"/>
+              </a:rPr>
+              <a:t>Empfehlung – Die 15-Minuten-Morgenroutine:</a:t>
+            </a:r>
+          </a:p>
+          <a:p>
+            <a:pPr>
+              <a:spcBef>
+                <a:spcPts val="400"/>
+              </a:spcBef>
+              <a:spcAft>
+                <a:spcPts val="200"/>
+              </a:spcAft>
+            </a:pPr>
+            <a:r>
+              <a:rPr sz="1300">
+                <a:solidFill>
+                  <a:srgbClr val="3D5466"/>
+                </a:solidFill>
+                <a:latin typeface="Arial"/>
+              </a:rPr>
+              <a:t>▸  Aktivitätenübersicht: Welche Aufgaben sind heute fällig? (3 Min.)</a:t>
+            </a:r>
+          </a:p>
+          <a:p>
+            <a:pPr>
+              <a:spcBef>
+                <a:spcPts val="400"/>
+              </a:spcBef>
+              <a:spcAft>
+                <a:spcPts val="200"/>
+              </a:spcAft>
+            </a:pPr>
+            <a:r>
+              <a:rPr sz="1300">
+                <a:solidFill>
+                  <a:srgbClr val="3D5466"/>
+                </a:solidFill>
+                <a:latin typeface="Arial"/>
+              </a:rPr>
+              <a:t>▸  Frühwarnliste: Neue Hinweise? (5 Min.)</a:t>
+            </a:r>
+          </a:p>
+          <a:p>
+            <a:pPr>
+              <a:spcBef>
+                <a:spcPts val="400"/>
+              </a:spcBef>
+              <a:spcAft>
+                <a:spcPts val="200"/>
+              </a:spcAft>
+            </a:pPr>
+            <a:r>
+              <a:rPr sz="1300">
+                <a:solidFill>
+                  <a:srgbClr val="3D5466"/>
+                </a:solidFill>
+                <a:latin typeface="Arial"/>
+              </a:rPr>
+              <a:t>▸  Prolongationsübersicht: Fälligkeiten in den nächsten 30 Tagen? (3 Min.)</a:t>
+            </a:r>
+          </a:p>
+          <a:p>
+            <a:pPr>
+              <a:spcBef>
+                <a:spcPts val="400"/>
+              </a:spcBef>
+              <a:spcAft>
+                <a:spcPts val="200"/>
+              </a:spcAft>
+            </a:pPr>
+            <a:r>
+              <a:rPr sz="1300">
+                <a:solidFill>
+                  <a:srgbClr val="3D5466"/>
+                </a:solidFill>
+                <a:latin typeface="Arial"/>
+              </a:rPr>
+              <a:t>▸  E-Mail an Verbundpartner zu offenen Übergaben? (4 Min.)</a:t>
+            </a:r>
+          </a:p>
+          <a:p>
+            <a:pPr>
+              <a:spcBef>
+                <a:spcPts val="400"/>
+              </a:spcBef>
+              <a:spcAft>
+                <a:spcPts val="200"/>
+              </a:spcAft>
+            </a:pPr>
+            <a:r>
+              <a:rPr sz="1200">
+                <a:solidFill>
+                  <a:srgbClr val="3D5466"/>
+                </a:solidFill>
+                <a:latin typeface="Arial"/>
+              </a:rPr>
+              <a:t>Diese Routine hält den Bestand im Griff – ohne aufwendige Recherche.</a:t>
+            </a:r>
+          </a:p>
+          <a:p>
+            <a:pPr>
+              <a:spcBef>
+                <a:spcPts val="400"/>
+              </a:spcBef>
+              <a:spcAft>
+                <a:spcPts val="200"/>
+              </a:spcAft>
+            </a:pPr>
+            <a:r>
+              <a:rPr sz="1200">
+                <a:solidFill>
+                  <a:srgbClr val="3D5466"/>
+                </a:solidFill>
+                <a:latin typeface="Arial"/>
+              </a:rPr>
+              <a:t>## 4.5 VR-NetWorld und Verbundpartner-Systeme</a:t>
+            </a:r>
+          </a:p>
+        </p:txBody>
+      </p:sp>
+      <p:sp>
+        <p:nvSpPr>
+          <p:cNvPr id="9" name="Rectangle 8"/>
+          <p:cNvSpPr/>
+          <p:nvPr/>
+        </p:nvSpPr>
+        <p:spPr>
+          <a:xfrm>
+            <a:off x="0" y="6510528"/>
+            <a:ext cx="12188952" cy="347472"/>
+          </a:xfrm>
+          <a:prstGeom prst="rect">
+            <a:avLst/>
+          </a:prstGeom>
+          <a:solidFill>
+            <a:srgbClr val="0A1937"/>
+          </a:solidFill>
+          <a:ln>
+            <a:noFill/>
+          </a:ln>
+        </p:spPr>
+        <p:style>
+          <a:lnRef idx="1">
+            <a:schemeClr val="accent1"/>
+          </a:lnRef>
+          <a:fillRef idx="3">
+            <a:schemeClr val="accent1"/>
+          </a:fillRef>
+          <a:effectRef idx="2">
+            <a:schemeClr val="accent1"/>
+          </a:effectRef>
+          <a:fontRef idx="minor">
+            <a:schemeClr val="lt1"/>
+          </a:fontRef>
+        </p:style>
+        <p:txBody>
+          <a:bodyPr rtlCol="0" anchor="ctr"/>
+          <a:lstStyle/>
+          <a:p>
+            <a:pPr algn="ctr"/>
+          </a:p>
+        </p:txBody>
+      </p:sp>
+      <p:sp>
+        <p:nvSpPr>
+          <p:cNvPr id="10" name="TextBox 9"/>
+          <p:cNvSpPr txBox="1"/>
+          <p:nvPr/>
+        </p:nvSpPr>
+        <p:spPr>
+          <a:xfrm>
+            <a:off x="685800" y="6583680"/>
+            <a:ext cx="6490411" cy="256032"/>
+          </a:xfrm>
+          <a:prstGeom prst="rect">
+            <a:avLst/>
+          </a:prstGeom>
+          <a:noFill/>
+        </p:spPr>
+        <p:txBody>
+          <a:bodyPr wrap="none">
+            <a:spAutoFit/>
+          </a:bodyPr>
+          <a:lstStyle/>
+          <a:p>
+            <a:pPr algn="l"/>
+            <a:r>
+              <a:rPr sz="700">
+                <a:solidFill>
+                  <a:srgbClr val="A0B4D2"/>
+                </a:solidFill>
+                <a:latin typeface="JetBrains Mono"/>
+              </a:rPr>
+              <a:t>Benedikt Zoller Coaching  ·  FKB Campus  ·  M17</a:t>
             </a:r>
           </a:p>
         </p:txBody>

--- a/public/downloads/praesentation/M17.pptx
+++ b/public/downloads/praesentation/M17.pptx
@@ -3256,7 +3256,42 @@
       </p:sp>
       <p:sp>
         <p:nvSpPr>
-          <p:cNvPr id="6" name="Rectangle 5"/>
+          <p:cNvPr id="6" name="TextBox 5"/>
+          <p:cNvSpPr txBox="1"/>
+          <p:nvPr/>
+        </p:nvSpPr>
+        <p:spPr>
+          <a:xfrm>
+            <a:off x="685800" y="3977639"/>
+            <a:ext cx="10817352" cy="731520"/>
+          </a:xfrm>
+          <a:prstGeom prst="rect">
+            <a:avLst/>
+          </a:prstGeom>
+          <a:noFill/>
+        </p:spPr>
+        <p:txBody>
+          <a:bodyPr wrap="square">
+            <a:spAutoFit/>
+          </a:bodyPr>
+          <a:lstStyle/>
+          <a:p>
+            <a:pPr algn="l"/>
+            <a:r>
+              <a:rPr sz="1900" b="0" i="1">
+                <a:solidFill>
+                  <a:srgbClr val="BECDE6"/>
+                </a:solidFill>
+                <a:latin typeface="Source Serif 4"/>
+              </a:rPr>
+              <a:t>Digitale Workflows im Firmenkundenalltag meistern und Zeitpotenziale durch konsequente Systemnutzung erschließen</a:t>
+            </a:r>
+          </a:p>
+        </p:txBody>
+      </p:sp>
+      <p:sp>
+        <p:nvSpPr>
+          <p:cNvPr id="7" name="Rectangle 6"/>
           <p:cNvSpPr/>
           <p:nvPr/>
         </p:nvSpPr>
@@ -3299,14 +3334,14 @@
       </p:sp>
       <p:sp>
         <p:nvSpPr>
-          <p:cNvPr id="7" name="TextBox 6"/>
+          <p:cNvPr id="8" name="TextBox 7"/>
           <p:cNvSpPr txBox="1"/>
           <p:nvPr/>
         </p:nvSpPr>
         <p:spPr>
           <a:xfrm>
             <a:off x="685800" y="5193792"/>
-            <a:ext cx="5408676" cy="201168"/>
+            <a:ext cx="3605784" cy="201168"/>
           </a:xfrm>
           <a:prstGeom prst="rect">
             <a:avLst/>
@@ -3327,21 +3362,21 @@
                 </a:solidFill>
                 <a:latin typeface="JetBrains Mono"/>
               </a:rPr>
-              <a:t>KOMPETENZSTUFE</a:t>
-            </a:r>
-          </a:p>
-        </p:txBody>
-      </p:sp>
-      <p:sp>
-        <p:nvSpPr>
-          <p:cNvPr id="8" name="TextBox 7"/>
+              <a:t>KOMPETENZFELD</a:t>
+            </a:r>
+          </a:p>
+        </p:txBody>
+      </p:sp>
+      <p:sp>
+        <p:nvSpPr>
+          <p:cNvPr id="9" name="TextBox 8"/>
           <p:cNvSpPr txBox="1"/>
           <p:nvPr/>
         </p:nvSpPr>
         <p:spPr>
           <a:xfrm>
             <a:off x="685800" y="5394960"/>
-            <a:ext cx="5408676" cy="320040"/>
+            <a:ext cx="3605784" cy="320040"/>
           </a:xfrm>
           <a:prstGeom prst="rect">
             <a:avLst/>
@@ -3362,21 +3397,21 @@
                 </a:solidFill>
                 <a:latin typeface="Arial"/>
               </a:rPr>
-              <a:t>Berater</a:t>
-            </a:r>
-          </a:p>
-        </p:txBody>
-      </p:sp>
-      <p:sp>
-        <p:nvSpPr>
-          <p:cNvPr id="9" name="TextBox 8"/>
+              <a:t>K-05 Digital &amp; Technologie</a:t>
+            </a:r>
+          </a:p>
+        </p:txBody>
+      </p:sp>
+      <p:sp>
+        <p:nvSpPr>
+          <p:cNvPr id="10" name="TextBox 9"/>
           <p:cNvSpPr txBox="1"/>
           <p:nvPr/>
         </p:nvSpPr>
         <p:spPr>
           <a:xfrm>
-            <a:off x="6094476" y="5193792"/>
-            <a:ext cx="5408676" cy="201168"/>
+            <a:off x="4291584" y="5193792"/>
+            <a:ext cx="3605784" cy="201168"/>
           </a:xfrm>
           <a:prstGeom prst="rect">
             <a:avLst/>
@@ -3397,21 +3432,21 @@
                 </a:solidFill>
                 <a:latin typeface="JetBrains Mono"/>
               </a:rPr>
-              <a:t>VERSION</a:t>
-            </a:r>
-          </a:p>
-        </p:txBody>
-      </p:sp>
-      <p:sp>
-        <p:nvSpPr>
-          <p:cNvPr id="10" name="TextBox 9"/>
+              <a:t>KOMPETENZSTUFE</a:t>
+            </a:r>
+          </a:p>
+        </p:txBody>
+      </p:sp>
+      <p:sp>
+        <p:nvSpPr>
+          <p:cNvPr id="11" name="TextBox 10"/>
           <p:cNvSpPr txBox="1"/>
           <p:nvPr/>
         </p:nvSpPr>
         <p:spPr>
           <a:xfrm>
-            <a:off x="6094476" y="5394960"/>
-            <a:ext cx="5408676" cy="320040"/>
+            <a:off x="4291584" y="5394960"/>
+            <a:ext cx="3605784" cy="320040"/>
           </a:xfrm>
           <a:prstGeom prst="rect">
             <a:avLst/>
@@ -3432,6 +3467,76 @@
                 </a:solidFill>
                 <a:latin typeface="Arial"/>
               </a:rPr>
+              <a:t>Berater</a:t>
+            </a:r>
+          </a:p>
+        </p:txBody>
+      </p:sp>
+      <p:sp>
+        <p:nvSpPr>
+          <p:cNvPr id="12" name="TextBox 11"/>
+          <p:cNvSpPr txBox="1"/>
+          <p:nvPr/>
+        </p:nvSpPr>
+        <p:spPr>
+          <a:xfrm>
+            <a:off x="7897368" y="5193792"/>
+            <a:ext cx="3605784" cy="201168"/>
+          </a:xfrm>
+          <a:prstGeom prst="rect">
+            <a:avLst/>
+          </a:prstGeom>
+          <a:noFill/>
+        </p:spPr>
+        <p:txBody>
+          <a:bodyPr wrap="none">
+            <a:spAutoFit/>
+          </a:bodyPr>
+          <a:lstStyle/>
+          <a:p>
+            <a:pPr algn="l"/>
+            <a:r>
+              <a:rPr sz="700">
+                <a:solidFill>
+                  <a:srgbClr val="A0B4D2"/>
+                </a:solidFill>
+                <a:latin typeface="JetBrains Mono"/>
+              </a:rPr>
+              <a:t>VERSION</a:t>
+            </a:r>
+          </a:p>
+        </p:txBody>
+      </p:sp>
+      <p:sp>
+        <p:nvSpPr>
+          <p:cNvPr id="13" name="TextBox 12"/>
+          <p:cNvSpPr txBox="1"/>
+          <p:nvPr/>
+        </p:nvSpPr>
+        <p:spPr>
+          <a:xfrm>
+            <a:off x="7897368" y="5394960"/>
+            <a:ext cx="3605784" cy="320040"/>
+          </a:xfrm>
+          <a:prstGeom prst="rect">
+            <a:avLst/>
+          </a:prstGeom>
+          <a:noFill/>
+        </p:spPr>
+        <p:txBody>
+          <a:bodyPr wrap="square">
+            <a:spAutoFit/>
+          </a:bodyPr>
+          <a:lstStyle/>
+          <a:p>
+            <a:pPr algn="l"/>
+            <a:r>
+              <a:rPr sz="1100" b="0" i="0">
+                <a:solidFill>
+                  <a:srgbClr val="FFFFFF"/>
+                </a:solidFill>
+                <a:latin typeface="Arial"/>
+              </a:rPr>
               <a:t>v0.4</a:t>
             </a:r>
           </a:p>
@@ -3439,7 +3544,7 @@
       </p:sp>
       <p:sp>
         <p:nvSpPr>
-          <p:cNvPr id="11" name="Rectangle 10"/>
+          <p:cNvPr id="14" name="Rectangle 13"/>
           <p:cNvSpPr/>
           <p:nvPr/>
         </p:nvSpPr>
@@ -3482,7 +3587,7 @@
       </p:sp>
       <p:sp>
         <p:nvSpPr>
-          <p:cNvPr id="12" name="TextBox 11"/>
+          <p:cNvPr id="15" name="TextBox 14"/>
           <p:cNvSpPr txBox="1"/>
           <p:nvPr/>
         </p:nvSpPr>
@@ -3517,7 +3622,7 @@
       </p:sp>
       <p:sp>
         <p:nvSpPr>
-          <p:cNvPr id="13" name="TextBox 12"/>
+          <p:cNvPr id="16" name="TextBox 15"/>
           <p:cNvSpPr txBox="1"/>
           <p:nvPr/>
         </p:nvSpPr>
